--- a/output/wordlabs-employ-3day.pptx
+++ b/output/wordlabs-employ-3day.pptx
@@ -6071,7 +6071,7 @@
                 <a:ea typeface="Calibri" pitchFamily="34" charset="-122"/>
                 <a:cs typeface="Calibri" pitchFamily="34" charset="-120"/>
               </a:rPr>
-              <a:t> was happy to offer </a:t>
+              <a:t> was pleased to welcome a new </a:t>
             </a:r>
             <a:pPr algn="l" indent="0" marL="0">
               <a:buNone/>
@@ -6088,7 +6088,7 @@
                 <a:ea typeface="Calibri" pitchFamily="34" charset="-122"/>
                 <a:cs typeface="Calibri" pitchFamily="34" charset="-120"/>
               </a:rPr>
-              <a:t>employment</a:t>
+              <a:t>employee</a:t>
             </a:r>
             <a:pPr algn="l" indent="0" marL="0">
               <a:buNone/>
@@ -6102,7 +6102,7 @@
                 <a:ea typeface="Calibri" pitchFamily="34" charset="-122"/>
                 <a:cs typeface="Calibri" pitchFamily="34" charset="-120"/>
               </a:rPr>
-              <a:t> to two enthusiastic young people from our town.</a:t>
+              <a:t> to the team.</a:t>
             </a:r>
             <a:endParaRPr lang="en-US" sz="1800" dirty="0"/>
           </a:p>
@@ -6385,7 +6385,7 @@
                 <a:ea typeface="Trebuchet MS" pitchFamily="34" charset="-122"/>
                 <a:cs typeface="Trebuchet MS" pitchFamily="34" charset="-120"/>
               </a:rPr>
-              <a:t>employment</a:t>
+              <a:t>employee</a:t>
             </a:r>
             <a:endParaRPr lang="en-US" sz="1400" dirty="0"/>
           </a:p>
@@ -7860,7 +7860,7 @@
                 <a:ea typeface="Calibri" pitchFamily="34" charset="-122"/>
                 <a:cs typeface="Calibri" pitchFamily="34" charset="-120"/>
               </a:rPr>
-              <a:t>to give work to</a:t>
+              <a:t>to give work or use</a:t>
             </a:r>
             <a:endParaRPr lang="en-US" sz="850" dirty="0"/>
           </a:p>
@@ -8845,7 +8845,7 @@
                 <a:ea typeface="Calibri" pitchFamily="34" charset="-122"/>
                 <a:cs typeface="Calibri" pitchFamily="34" charset="-120"/>
               </a:rPr>
-              <a:t>to give work to</a:t>
+              <a:t>to give work or use</a:t>
             </a:r>
             <a:endParaRPr lang="en-US" sz="850" dirty="0"/>
           </a:p>
@@ -10067,7 +10067,7 @@
                 <a:ea typeface="Calibri" pitchFamily="34" charset="-122"/>
                 <a:cs typeface="Calibri" pitchFamily="34" charset="-120"/>
               </a:rPr>
-              <a:t>to give work to</a:t>
+              <a:t>to give work or use</a:t>
             </a:r>
             <a:endParaRPr lang="en-US" sz="850" dirty="0"/>
           </a:p>
@@ -11402,7 +11402,7 @@
                 <a:ea typeface="Trebuchet MS" pitchFamily="34" charset="-122"/>
                 <a:cs typeface="Trebuchet MS" pitchFamily="34" charset="-120"/>
               </a:rPr>
-              <a:t>employment</a:t>
+              <a:t>employee</a:t>
             </a:r>
             <a:endParaRPr lang="en-US" sz="2800" dirty="0"/>
           </a:p>
@@ -12229,7 +12229,7 @@
                 <a:ea typeface="Trebuchet MS" pitchFamily="34" charset="-122"/>
                 <a:cs typeface="Trebuchet MS" pitchFamily="34" charset="-120"/>
               </a:rPr>
-              <a:t>employment</a:t>
+              <a:t>employee</a:t>
             </a:r>
             <a:endParaRPr lang="en-US" sz="2800" dirty="0"/>
           </a:p>
@@ -12407,7 +12407,7 @@
                 <a:ea typeface="Calibri" pitchFamily="34" charset="-122"/>
                 <a:cs typeface="Calibri" pitchFamily="34" charset="-120"/>
               </a:rPr>
-              <a:t>to give work to</a:t>
+              <a:t>to give work or use</a:t>
             </a:r>
             <a:endParaRPr lang="en-US" sz="850" dirty="0"/>
           </a:p>
@@ -12480,7 +12480,7 @@
                 <a:ea typeface="Trebuchet MS" pitchFamily="34" charset="-122"/>
                 <a:cs typeface="Trebuchet MS" pitchFamily="34" charset="-120"/>
               </a:rPr>
-              <a:t>ment</a:t>
+              <a:t>ee</a:t>
             </a:r>
             <a:endParaRPr lang="en-US" sz="1300" dirty="0"/>
           </a:p>
@@ -12519,7 +12519,7 @@
                 <a:ea typeface="Calibri" pitchFamily="34" charset="-122"/>
                 <a:cs typeface="Calibri" pitchFamily="34" charset="-120"/>
               </a:rPr>
-              <a:t>state or result of</a:t>
+              <a:t>one who receives the action</a:t>
             </a:r>
             <a:endParaRPr lang="en-US" sz="850" dirty="0"/>
           </a:p>
@@ -13214,7 +13214,7 @@
                 <a:ea typeface="Trebuchet MS" pitchFamily="34" charset="-122"/>
                 <a:cs typeface="Trebuchet MS" pitchFamily="34" charset="-120"/>
               </a:rPr>
-              <a:t>employment</a:t>
+              <a:t>employee</a:t>
             </a:r>
             <a:endParaRPr lang="en-US" sz="2800" dirty="0"/>
           </a:p>
@@ -13392,7 +13392,7 @@
                 <a:ea typeface="Calibri" pitchFamily="34" charset="-122"/>
                 <a:cs typeface="Calibri" pitchFamily="34" charset="-120"/>
               </a:rPr>
-              <a:t>to give work to</a:t>
+              <a:t>to give work or use</a:t>
             </a:r>
             <a:endParaRPr lang="en-US" sz="850" dirty="0"/>
           </a:p>
@@ -13465,7 +13465,7 @@
                 <a:ea typeface="Trebuchet MS" pitchFamily="34" charset="-122"/>
                 <a:cs typeface="Trebuchet MS" pitchFamily="34" charset="-120"/>
               </a:rPr>
-              <a:t>ment</a:t>
+              <a:t>ee</a:t>
             </a:r>
             <a:endParaRPr lang="en-US" sz="1300" dirty="0"/>
           </a:p>
@@ -13504,7 +13504,7 @@
                 <a:ea typeface="Calibri" pitchFamily="34" charset="-122"/>
                 <a:cs typeface="Calibri" pitchFamily="34" charset="-120"/>
               </a:rPr>
-              <a:t>state or result of</a:t>
+              <a:t>one who receives the action</a:t>
             </a:r>
             <a:endParaRPr lang="en-US" sz="850" dirty="0"/>
           </a:p>
@@ -13873,7 +13873,7 @@
                 <a:ea typeface="Trebuchet MS" pitchFamily="34" charset="-122"/>
                 <a:cs typeface="Trebuchet MS" pitchFamily="34" charset="-120"/>
               </a:rPr>
-              <a:t>ment</a:t>
+              <a:t>ee</a:t>
             </a:r>
             <a:endParaRPr lang="en-US" sz="1400" dirty="0"/>
           </a:p>
@@ -14701,7 +14701,7 @@
                 <a:ea typeface="Trebuchet MS" pitchFamily="34" charset="-122"/>
                 <a:cs typeface="Trebuchet MS" pitchFamily="34" charset="-120"/>
               </a:rPr>
-              <a:t>employment</a:t>
+              <a:t>employee</a:t>
             </a:r>
             <a:endParaRPr lang="en-US" sz="2800" dirty="0"/>
           </a:p>
@@ -14879,7 +14879,7 @@
                 <a:ea typeface="Calibri" pitchFamily="34" charset="-122"/>
                 <a:cs typeface="Calibri" pitchFamily="34" charset="-120"/>
               </a:rPr>
-              <a:t>to give work to</a:t>
+              <a:t>to give work or use</a:t>
             </a:r>
             <a:endParaRPr lang="en-US" sz="850" dirty="0"/>
           </a:p>
@@ -14952,7 +14952,7 @@
                 <a:ea typeface="Trebuchet MS" pitchFamily="34" charset="-122"/>
                 <a:cs typeface="Trebuchet MS" pitchFamily="34" charset="-120"/>
               </a:rPr>
-              <a:t>ment</a:t>
+              <a:t>ee</a:t>
             </a:r>
             <a:endParaRPr lang="en-US" sz="1300" dirty="0"/>
           </a:p>
@@ -14991,7 +14991,7 @@
                 <a:ea typeface="Calibri" pitchFamily="34" charset="-122"/>
                 <a:cs typeface="Calibri" pitchFamily="34" charset="-120"/>
               </a:rPr>
-              <a:t>state or result of</a:t>
+              <a:t>one who receives the action</a:t>
             </a:r>
             <a:endParaRPr lang="en-US" sz="850" dirty="0"/>
           </a:p>
@@ -15360,7 +15360,7 @@
                 <a:ea typeface="Trebuchet MS" pitchFamily="34" charset="-122"/>
                 <a:cs typeface="Trebuchet MS" pitchFamily="34" charset="-120"/>
               </a:rPr>
-              <a:t>ment</a:t>
+              <a:t>ee</a:t>
             </a:r>
             <a:endParaRPr lang="en-US" sz="1400" dirty="0"/>
           </a:p>
@@ -15467,7 +15467,7 @@
         </p:nvSpPr>
         <p:spPr>
           <a:xfrm>
-            <a:off x="2023872" y="4169664"/>
+            <a:off x="2427732" y="4169664"/>
             <a:ext cx="685800" cy="475488"/>
           </a:xfrm>
           <a:prstGeom prst="rect">
@@ -15494,7 +15494,7 @@
         </p:nvSpPr>
         <p:spPr>
           <a:xfrm>
-            <a:off x="2023872" y="4169664"/>
+            <a:off x="2427732" y="4169664"/>
             <a:ext cx="685800" cy="475488"/>
           </a:xfrm>
           <a:prstGeom prst="rect">
@@ -15533,7 +15533,7 @@
         </p:nvSpPr>
         <p:spPr>
           <a:xfrm>
-            <a:off x="2831592" y="4169664"/>
+            <a:off x="3639312" y="4169664"/>
             <a:ext cx="685800" cy="475488"/>
           </a:xfrm>
           <a:prstGeom prst="rect">
@@ -15560,7 +15560,7 @@
         </p:nvSpPr>
         <p:spPr>
           <a:xfrm>
-            <a:off x="2831592" y="4169664"/>
+            <a:off x="3639312" y="4169664"/>
             <a:ext cx="685800" cy="475488"/>
           </a:xfrm>
           <a:prstGeom prst="rect">
@@ -15599,7 +15599,7 @@
         </p:nvSpPr>
         <p:spPr>
           <a:xfrm>
-            <a:off x="3639312" y="4169664"/>
+            <a:off x="4850892" y="4169664"/>
             <a:ext cx="685800" cy="475488"/>
           </a:xfrm>
           <a:prstGeom prst="rect">
@@ -15626,7 +15626,7 @@
         </p:nvSpPr>
         <p:spPr>
           <a:xfrm>
-            <a:off x="3639312" y="4169664"/>
+            <a:off x="4850892" y="4169664"/>
             <a:ext cx="685800" cy="475488"/>
           </a:xfrm>
           <a:prstGeom prst="rect">
@@ -15665,7 +15665,7 @@
         </p:nvSpPr>
         <p:spPr>
           <a:xfrm>
-            <a:off x="4447032" y="4169664"/>
+            <a:off x="6062472" y="4169664"/>
             <a:ext cx="685800" cy="475488"/>
           </a:xfrm>
           <a:prstGeom prst="rect">
@@ -15692,7 +15692,7 @@
         </p:nvSpPr>
         <p:spPr>
           <a:xfrm>
-            <a:off x="4447032" y="4169664"/>
+            <a:off x="6062472" y="4169664"/>
             <a:ext cx="685800" cy="475488"/>
           </a:xfrm>
           <a:prstGeom prst="rect">
@@ -15731,7 +15731,7 @@
         </p:nvSpPr>
         <p:spPr>
           <a:xfrm>
-            <a:off x="5254752" y="4169664"/>
+            <a:off x="7274052" y="4169664"/>
             <a:ext cx="685800" cy="475488"/>
           </a:xfrm>
           <a:prstGeom prst="rect">
@@ -15758,7 +15758,7 @@
         </p:nvSpPr>
         <p:spPr>
           <a:xfrm>
-            <a:off x="5254752" y="4169664"/>
+            <a:off x="7274052" y="4169664"/>
             <a:ext cx="685800" cy="475488"/>
           </a:xfrm>
           <a:prstGeom prst="rect">
@@ -15783,205 +15783,7 @@
                 <a:ea typeface="Trebuchet MS" pitchFamily="34" charset="-122"/>
                 <a:cs typeface="Trebuchet MS" pitchFamily="34" charset="-120"/>
               </a:rPr>
-              <a:t>m</a:t>
-            </a:r>
-            <a:endParaRPr lang="en-US" sz="900" dirty="0"/>
-          </a:p>
-        </p:txBody>
-      </p:sp>
-      <p:sp>
-        <p:nvSpPr>
-          <p:cNvPr id="46" name="Shape 44"/>
-          <p:cNvSpPr/>
-          <p:nvPr/>
-        </p:nvSpPr>
-        <p:spPr>
-          <a:xfrm>
-            <a:off x="6062472" y="4169664"/>
-            <a:ext cx="685800" cy="475488"/>
-          </a:xfrm>
-          <a:prstGeom prst="rect">
-            <a:avLst>
-              <a:gd name="adj" fmla="val 7692"/>
-            </a:avLst>
-          </a:prstGeom>
-          <a:solidFill>
-            <a:srgbClr val="FFFFFF"/>
-          </a:solidFill>
-          <a:ln w="12700">
-            <a:solidFill>
-              <a:srgbClr val="DB2777"/>
-            </a:solidFill>
-            <a:prstDash val="solid"/>
-          </a:ln>
-        </p:spPr>
-      </p:sp>
-      <p:sp>
-        <p:nvSpPr>
-          <p:cNvPr id="47" name="Text 45"/>
-          <p:cNvSpPr/>
-          <p:nvPr/>
-        </p:nvSpPr>
-        <p:spPr>
-          <a:xfrm>
-            <a:off x="6062472" y="4169664"/>
-            <a:ext cx="685800" cy="475488"/>
-          </a:xfrm>
-          <a:prstGeom prst="rect">
-            <a:avLst/>
-          </a:prstGeom>
-          <a:noFill/>
-          <a:ln/>
-        </p:spPr>
-        <p:txBody>
-          <a:bodyPr wrap="square" lIns="0" tIns="0" rIns="0" bIns="0" rtlCol="0" anchor="ctr"/>
-          <a:lstStyle/>
-          <a:p>
-            <a:pPr algn="ctr" indent="0" marL="0">
-              <a:buNone/>
-            </a:pPr>
-            <a:r>
-              <a:rPr lang="en-US" sz="900" b="1" dirty="0">
-                <a:solidFill>
-                  <a:srgbClr val="9D174D"/>
-                </a:solidFill>
-                <a:latin typeface="Trebuchet MS" pitchFamily="34" charset="0"/>
-                <a:ea typeface="Trebuchet MS" pitchFamily="34" charset="-122"/>
-                <a:cs typeface="Trebuchet MS" pitchFamily="34" charset="-120"/>
-              </a:rPr>
-              <a:t>e</a:t>
-            </a:r>
-            <a:endParaRPr lang="en-US" sz="900" dirty="0"/>
-          </a:p>
-        </p:txBody>
-      </p:sp>
-      <p:sp>
-        <p:nvSpPr>
-          <p:cNvPr id="48" name="Shape 46"/>
-          <p:cNvSpPr/>
-          <p:nvPr/>
-        </p:nvSpPr>
-        <p:spPr>
-          <a:xfrm>
-            <a:off x="6870192" y="4169664"/>
-            <a:ext cx="685800" cy="475488"/>
-          </a:xfrm>
-          <a:prstGeom prst="rect">
-            <a:avLst>
-              <a:gd name="adj" fmla="val 7692"/>
-            </a:avLst>
-          </a:prstGeom>
-          <a:solidFill>
-            <a:srgbClr val="FFFFFF"/>
-          </a:solidFill>
-          <a:ln w="12700">
-            <a:solidFill>
-              <a:srgbClr val="DB2777"/>
-            </a:solidFill>
-            <a:prstDash val="solid"/>
-          </a:ln>
-        </p:spPr>
-      </p:sp>
-      <p:sp>
-        <p:nvSpPr>
-          <p:cNvPr id="49" name="Text 47"/>
-          <p:cNvSpPr/>
-          <p:nvPr/>
-        </p:nvSpPr>
-        <p:spPr>
-          <a:xfrm>
-            <a:off x="6870192" y="4169664"/>
-            <a:ext cx="685800" cy="475488"/>
-          </a:xfrm>
-          <a:prstGeom prst="rect">
-            <a:avLst/>
-          </a:prstGeom>
-          <a:noFill/>
-          <a:ln/>
-        </p:spPr>
-        <p:txBody>
-          <a:bodyPr wrap="square" lIns="0" tIns="0" rIns="0" bIns="0" rtlCol="0" anchor="ctr"/>
-          <a:lstStyle/>
-          <a:p>
-            <a:pPr algn="ctr" indent="0" marL="0">
-              <a:buNone/>
-            </a:pPr>
-            <a:r>
-              <a:rPr lang="en-US" sz="900" b="1" dirty="0">
-                <a:solidFill>
-                  <a:srgbClr val="9D174D"/>
-                </a:solidFill>
-                <a:latin typeface="Trebuchet MS" pitchFamily="34" charset="0"/>
-                <a:ea typeface="Trebuchet MS" pitchFamily="34" charset="-122"/>
-                <a:cs typeface="Trebuchet MS" pitchFamily="34" charset="-120"/>
-              </a:rPr>
-              <a:t>n</a:t>
-            </a:r>
-            <a:endParaRPr lang="en-US" sz="900" dirty="0"/>
-          </a:p>
-        </p:txBody>
-      </p:sp>
-      <p:sp>
-        <p:nvSpPr>
-          <p:cNvPr id="50" name="Shape 48"/>
-          <p:cNvSpPr/>
-          <p:nvPr/>
-        </p:nvSpPr>
-        <p:spPr>
-          <a:xfrm>
-            <a:off x="7677912" y="4169664"/>
-            <a:ext cx="685800" cy="475488"/>
-          </a:xfrm>
-          <a:prstGeom prst="rect">
-            <a:avLst>
-              <a:gd name="adj" fmla="val 7692"/>
-            </a:avLst>
-          </a:prstGeom>
-          <a:solidFill>
-            <a:srgbClr val="FFFFFF"/>
-          </a:solidFill>
-          <a:ln w="12700">
-            <a:solidFill>
-              <a:srgbClr val="DB2777"/>
-            </a:solidFill>
-            <a:prstDash val="solid"/>
-          </a:ln>
-        </p:spPr>
-      </p:sp>
-      <p:sp>
-        <p:nvSpPr>
-          <p:cNvPr id="51" name="Text 49"/>
-          <p:cNvSpPr/>
-          <p:nvPr/>
-        </p:nvSpPr>
-        <p:spPr>
-          <a:xfrm>
-            <a:off x="7677912" y="4169664"/>
-            <a:ext cx="685800" cy="475488"/>
-          </a:xfrm>
-          <a:prstGeom prst="rect">
-            <a:avLst/>
-          </a:prstGeom>
-          <a:noFill/>
-          <a:ln/>
-        </p:spPr>
-        <p:txBody>
-          <a:bodyPr wrap="square" lIns="0" tIns="0" rIns="0" bIns="0" rtlCol="0" anchor="ctr"/>
-          <a:lstStyle/>
-          <a:p>
-            <a:pPr algn="ctr" indent="0" marL="0">
-              <a:buNone/>
-            </a:pPr>
-            <a:r>
-              <a:rPr lang="en-US" sz="900" b="1" dirty="0">
-                <a:solidFill>
-                  <a:srgbClr val="9D174D"/>
-                </a:solidFill>
-                <a:latin typeface="Trebuchet MS" pitchFamily="34" charset="0"/>
-                <a:ea typeface="Trebuchet MS" pitchFamily="34" charset="-122"/>
-                <a:cs typeface="Trebuchet MS" pitchFamily="34" charset="-120"/>
-              </a:rPr>
-              <a:t>t</a:t>
+              <a:t>ee</a:t>
             </a:r>
             <a:endParaRPr lang="en-US" sz="900" dirty="0"/>
           </a:p>
@@ -16889,7 +16691,7 @@
                 <a:ea typeface="Trebuchet MS" pitchFamily="34" charset="-122"/>
                 <a:cs typeface="Trebuchet MS" pitchFamily="34" charset="-120"/>
               </a:rPr>
-              <a:t>1</a:t>
+              <a:t>2</a:t>
             </a:r>
             <a:pPr algn="ctr" indent="0" marL="0">
               <a:buNone/>
@@ -16903,7 +16705,7 @@
                 <a:ea typeface="Trebuchet MS" pitchFamily="34" charset="-122"/>
                 <a:cs typeface="Trebuchet MS" pitchFamily="34" charset="-120"/>
               </a:rPr>
-              <a:t>  punctuation mark</a:t>
+              <a:t>  punctuation marks</a:t>
             </a:r>
             <a:endParaRPr lang="en-US" sz="2800" dirty="0"/>
           </a:p>
@@ -17307,7 +17109,7 @@
                 <a:ea typeface="Calibri" pitchFamily="34" charset="-122"/>
                 <a:cs typeface="Calibri" pitchFamily="34" charset="-120"/>
               </a:rPr>
-              <a:t>The </a:t>
+              <a:t>Due to rising </a:t>
             </a:r>
             <a:pPr algn="l" indent="0" marL="0">
               <a:buNone/>
@@ -17324,7 +17126,7 @@
                 <a:ea typeface="Calibri" pitchFamily="34" charset="-122"/>
                 <a:cs typeface="Calibri" pitchFamily="34" charset="-120"/>
               </a:rPr>
-              <a:t>unemployed</a:t>
+              <a:t>unemployment</a:t>
             </a:r>
             <a:pPr algn="l" indent="0" marL="0">
               <a:buNone/>
@@ -17338,7 +17140,7 @@
                 <a:ea typeface="Calibri" pitchFamily="34" charset="-122"/>
                 <a:cs typeface="Calibri" pitchFamily="34" charset="-120"/>
               </a:rPr>
-              <a:t> teacher hoped to find new </a:t>
+              <a:t>, the government introduced new </a:t>
             </a:r>
             <a:pPr algn="l" indent="0" marL="0">
               <a:buNone/>
@@ -17369,7 +17171,7 @@
                 <a:ea typeface="Calibri" pitchFamily="34" charset="-122"/>
                 <a:cs typeface="Calibri" pitchFamily="34" charset="-120"/>
               </a:rPr>
-              <a:t>, but first she needed to </a:t>
+              <a:t> schemes; many people hoped to be </a:t>
             </a:r>
             <a:pPr algn="l" indent="0" marL="0">
               <a:buNone/>
@@ -17386,7 +17188,7 @@
                 <a:ea typeface="Calibri" pitchFamily="34" charset="-122"/>
                 <a:cs typeface="Calibri" pitchFamily="34" charset="-120"/>
               </a:rPr>
-              <a:t>reemploy</a:t>
+              <a:t>reemployed</a:t>
             </a:r>
             <a:pPr algn="l" indent="0" marL="0">
               <a:buNone/>
@@ -17400,7 +17202,7 @@
                 <a:ea typeface="Calibri" pitchFamily="34" charset="-122"/>
                 <a:cs typeface="Calibri" pitchFamily="34" charset="-120"/>
               </a:rPr>
-              <a:t> her confidence.</a:t>
+              <a:t> quickly.</a:t>
             </a:r>
             <a:endParaRPr lang="en-US" sz="1800" dirty="0"/>
           </a:p>
@@ -17555,7 +17357,7 @@
                 <a:ea typeface="Trebuchet MS" pitchFamily="34" charset="-122"/>
                 <a:cs typeface="Trebuchet MS" pitchFamily="34" charset="-120"/>
               </a:rPr>
-              <a:t>unemployed</a:t>
+              <a:t>unemployment</a:t>
             </a:r>
             <a:endParaRPr lang="en-US" sz="1400" dirty="0"/>
           </a:p>
@@ -17811,7 +17613,7 @@
                 <a:ea typeface="Trebuchet MS" pitchFamily="34" charset="-122"/>
                 <a:cs typeface="Trebuchet MS" pitchFamily="34" charset="-120"/>
               </a:rPr>
-              <a:t>reemploy</a:t>
+              <a:t>reemployed</a:t>
             </a:r>
             <a:endParaRPr lang="en-US" sz="1400" dirty="0"/>
           </a:p>
@@ -18281,7 +18083,7 @@
                 <a:ea typeface="Trebuchet MS" pitchFamily="34" charset="-122"/>
                 <a:cs typeface="Trebuchet MS" pitchFamily="34" charset="-120"/>
               </a:rPr>
-              <a:t>unemployed</a:t>
+              <a:t>unemployment</a:t>
             </a:r>
             <a:endParaRPr lang="en-US" sz="2800" dirty="0"/>
           </a:p>
@@ -19108,7 +18910,7 @@
                 <a:ea typeface="Trebuchet MS" pitchFamily="34" charset="-122"/>
                 <a:cs typeface="Trebuchet MS" pitchFamily="34" charset="-120"/>
               </a:rPr>
-              <a:t>unemployed</a:t>
+              <a:t>unemployment</a:t>
             </a:r>
             <a:endParaRPr lang="en-US" sz="2800" dirty="0"/>
           </a:p>
@@ -19398,7 +19200,7 @@
                 <a:ea typeface="Calibri" pitchFamily="34" charset="-122"/>
                 <a:cs typeface="Calibri" pitchFamily="34" charset="-120"/>
               </a:rPr>
-              <a:t>to give work to</a:t>
+              <a:t>to give work or use</a:t>
             </a:r>
             <a:endParaRPr lang="en-US" sz="850" dirty="0"/>
           </a:p>
@@ -19471,7 +19273,7 @@
                 <a:ea typeface="Trebuchet MS" pitchFamily="34" charset="-122"/>
                 <a:cs typeface="Trebuchet MS" pitchFamily="34" charset="-120"/>
               </a:rPr>
-              <a:t>ed</a:t>
+              <a:t>ment</a:t>
             </a:r>
             <a:endParaRPr lang="en-US" sz="1300" dirty="0"/>
           </a:p>
@@ -19510,7 +19312,7 @@
                 <a:ea typeface="Calibri" pitchFamily="34" charset="-122"/>
                 <a:cs typeface="Calibri" pitchFamily="34" charset="-120"/>
               </a:rPr>
-              <a:t>in a state of</a:t>
+              <a:t>state or condition of</a:t>
             </a:r>
             <a:endParaRPr lang="en-US" sz="850" dirty="0"/>
           </a:p>
@@ -20205,7 +20007,7 @@
                 <a:ea typeface="Trebuchet MS" pitchFamily="34" charset="-122"/>
                 <a:cs typeface="Trebuchet MS" pitchFamily="34" charset="-120"/>
               </a:rPr>
-              <a:t>unemployed</a:t>
+              <a:t>unemployment</a:t>
             </a:r>
             <a:endParaRPr lang="en-US" sz="2800" dirty="0"/>
           </a:p>
@@ -20495,7 +20297,7 @@
                 <a:ea typeface="Calibri" pitchFamily="34" charset="-122"/>
                 <a:cs typeface="Calibri" pitchFamily="34" charset="-120"/>
               </a:rPr>
-              <a:t>to give work to</a:t>
+              <a:t>to give work or use</a:t>
             </a:r>
             <a:endParaRPr lang="en-US" sz="850" dirty="0"/>
           </a:p>
@@ -20568,7 +20370,7 @@
                 <a:ea typeface="Trebuchet MS" pitchFamily="34" charset="-122"/>
                 <a:cs typeface="Trebuchet MS" pitchFamily="34" charset="-120"/>
               </a:rPr>
-              <a:t>ed</a:t>
+              <a:t>ment</a:t>
             </a:r>
             <a:endParaRPr lang="en-US" sz="1300" dirty="0"/>
           </a:p>
@@ -20607,7 +20409,7 @@
                 <a:ea typeface="Calibri" pitchFamily="34" charset="-122"/>
                 <a:cs typeface="Calibri" pitchFamily="34" charset="-120"/>
               </a:rPr>
-              <a:t>in a state of</a:t>
+              <a:t>state or condition of</a:t>
             </a:r>
             <a:endParaRPr lang="en-US" sz="850" dirty="0"/>
           </a:p>
@@ -20714,8 +20516,8 @@
         </p:nvSpPr>
         <p:spPr>
           <a:xfrm>
-            <a:off x="2313432" y="3364992"/>
-            <a:ext cx="1645920" cy="475488"/>
+            <a:off x="1975104" y="3364992"/>
+            <a:ext cx="1554480" cy="475488"/>
           </a:xfrm>
           <a:prstGeom prst="rect">
             <a:avLst>
@@ -20741,8 +20543,8 @@
         </p:nvSpPr>
         <p:spPr>
           <a:xfrm>
-            <a:off x="2313432" y="3364992"/>
-            <a:ext cx="1645920" cy="475488"/>
+            <a:off x="1975104" y="3364992"/>
+            <a:ext cx="1554480" cy="475488"/>
           </a:xfrm>
           <a:prstGeom prst="rect">
             <a:avLst/>
@@ -20780,8 +20582,8 @@
         </p:nvSpPr>
         <p:spPr>
           <a:xfrm>
-            <a:off x="3959352" y="3364992"/>
-            <a:ext cx="411480" cy="475488"/>
+            <a:off x="3529584" y="3364992"/>
+            <a:ext cx="73152" cy="475488"/>
           </a:xfrm>
           <a:prstGeom prst="rect">
             <a:avLst/>
@@ -20819,8 +20621,8 @@
         </p:nvSpPr>
         <p:spPr>
           <a:xfrm>
-            <a:off x="4370832" y="3364992"/>
-            <a:ext cx="1645920" cy="475488"/>
+            <a:off x="3602736" y="3364992"/>
+            <a:ext cx="1554480" cy="475488"/>
           </a:xfrm>
           <a:prstGeom prst="rect">
             <a:avLst>
@@ -20846,8 +20648,8 @@
         </p:nvSpPr>
         <p:spPr>
           <a:xfrm>
-            <a:off x="4370832" y="3364992"/>
-            <a:ext cx="1645920" cy="475488"/>
+            <a:off x="3602736" y="3364992"/>
+            <a:ext cx="1554480" cy="475488"/>
           </a:xfrm>
           <a:prstGeom prst="rect">
             <a:avLst/>
@@ -20885,8 +20687,8 @@
         </p:nvSpPr>
         <p:spPr>
           <a:xfrm>
-            <a:off x="6016752" y="3364992"/>
-            <a:ext cx="411480" cy="475488"/>
+            <a:off x="5157216" y="3364992"/>
+            <a:ext cx="73152" cy="475488"/>
           </a:xfrm>
           <a:prstGeom prst="rect">
             <a:avLst/>
@@ -20924,8 +20726,8 @@
         </p:nvSpPr>
         <p:spPr>
           <a:xfrm>
-            <a:off x="6428232" y="3364992"/>
-            <a:ext cx="1645920" cy="475488"/>
+            <a:off x="5230368" y="3364992"/>
+            <a:ext cx="1554480" cy="475488"/>
           </a:xfrm>
           <a:prstGeom prst="rect">
             <a:avLst>
@@ -20951,8 +20753,8 @@
         </p:nvSpPr>
         <p:spPr>
           <a:xfrm>
-            <a:off x="6428232" y="3364992"/>
-            <a:ext cx="1645920" cy="475488"/>
+            <a:off x="5230368" y="3364992"/>
+            <a:ext cx="1554480" cy="475488"/>
           </a:xfrm>
           <a:prstGeom prst="rect">
             <a:avLst/>
@@ -20976,7 +20778,7 @@
                 <a:ea typeface="Trebuchet MS" pitchFamily="34" charset="-122"/>
                 <a:cs typeface="Trebuchet MS" pitchFamily="34" charset="-120"/>
               </a:rPr>
-              <a:t>ployed</a:t>
+              <a:t>ploy</a:t>
             </a:r>
             <a:endParaRPr lang="en-US" sz="1400" dirty="0"/>
           </a:p>
@@ -20984,7 +20786,112 @@
       </p:sp>
       <p:sp>
         <p:nvSpPr>
-          <p:cNvPr id="36" name="Shape 34"/>
+          <p:cNvPr id="36" name="Text 34"/>
+          <p:cNvSpPr/>
+          <p:nvPr/>
+        </p:nvSpPr>
+        <p:spPr>
+          <a:xfrm>
+            <a:off x="6784848" y="3364992"/>
+            <a:ext cx="73152" cy="475488"/>
+          </a:xfrm>
+          <a:prstGeom prst="rect">
+            <a:avLst/>
+          </a:prstGeom>
+          <a:noFill/>
+          <a:ln/>
+        </p:spPr>
+        <p:txBody>
+          <a:bodyPr wrap="square" lIns="0" tIns="0" rIns="0" bIns="0" rtlCol="0" anchor="ctr"/>
+          <a:lstStyle/>
+          <a:p>
+            <a:pPr algn="ctr" indent="0" marL="0">
+              <a:buNone/>
+            </a:pPr>
+            <a:r>
+              <a:rPr lang="en-US" sz="1600" b="1" dirty="0">
+                <a:solidFill>
+                  <a:srgbClr val="0D9488"/>
+                </a:solidFill>
+                <a:latin typeface="Trebuchet MS" pitchFamily="34" charset="0"/>
+                <a:ea typeface="Trebuchet MS" pitchFamily="34" charset="-122"/>
+                <a:cs typeface="Trebuchet MS" pitchFamily="34" charset="-120"/>
+              </a:rPr>
+              <a:t>·</a:t>
+            </a:r>
+            <a:endParaRPr lang="en-US" sz="1600" dirty="0"/>
+          </a:p>
+        </p:txBody>
+      </p:sp>
+      <p:sp>
+        <p:nvSpPr>
+          <p:cNvPr id="37" name="Shape 35"/>
+          <p:cNvSpPr/>
+          <p:nvPr/>
+        </p:nvSpPr>
+        <p:spPr>
+          <a:xfrm>
+            <a:off x="6858000" y="3364992"/>
+            <a:ext cx="1554480" cy="475488"/>
+          </a:xfrm>
+          <a:prstGeom prst="rect">
+            <a:avLst>
+              <a:gd name="adj" fmla="val 9615"/>
+            </a:avLst>
+          </a:prstGeom>
+          <a:solidFill>
+            <a:srgbClr val="FFFFFF"/>
+          </a:solidFill>
+          <a:ln w="12700">
+            <a:solidFill>
+              <a:srgbClr val="0D9488"/>
+            </a:solidFill>
+            <a:prstDash val="solid"/>
+          </a:ln>
+        </p:spPr>
+      </p:sp>
+      <p:sp>
+        <p:nvSpPr>
+          <p:cNvPr id="38" name="Text 36"/>
+          <p:cNvSpPr/>
+          <p:nvPr/>
+        </p:nvSpPr>
+        <p:spPr>
+          <a:xfrm>
+            <a:off x="6858000" y="3364992"/>
+            <a:ext cx="1554480" cy="475488"/>
+          </a:xfrm>
+          <a:prstGeom prst="rect">
+            <a:avLst/>
+          </a:prstGeom>
+          <a:noFill/>
+          <a:ln/>
+        </p:spPr>
+        <p:txBody>
+          <a:bodyPr wrap="square" lIns="0" tIns="0" rIns="0" bIns="0" rtlCol="0" anchor="ctr"/>
+          <a:lstStyle/>
+          <a:p>
+            <a:pPr algn="ctr" indent="0" marL="0">
+              <a:buNone/>
+            </a:pPr>
+            <a:r>
+              <a:rPr lang="en-US" sz="1400" b="1" dirty="0">
+                <a:solidFill>
+                  <a:srgbClr val="0D9488"/>
+                </a:solidFill>
+                <a:latin typeface="Trebuchet MS" pitchFamily="34" charset="0"/>
+                <a:ea typeface="Trebuchet MS" pitchFamily="34" charset="-122"/>
+                <a:cs typeface="Trebuchet MS" pitchFamily="34" charset="-120"/>
+              </a:rPr>
+              <a:t>ment</a:t>
+            </a:r>
+            <a:endParaRPr lang="en-US" sz="1400" dirty="0"/>
+          </a:p>
+        </p:txBody>
+      </p:sp>
+      <p:sp>
+        <p:nvSpPr>
+          <p:cNvPr id="39" name="Shape 37"/>
           <p:cNvSpPr/>
           <p:nvPr/>
         </p:nvSpPr>
@@ -21011,7 +20918,7 @@
       </p:sp>
       <p:sp>
         <p:nvSpPr>
-          <p:cNvPr id="37" name="Text 35"/>
+          <p:cNvPr id="40" name="Text 38"/>
           <p:cNvSpPr/>
           <p:nvPr/>
         </p:nvSpPr>
@@ -21050,7 +20957,7 @@
       </p:sp>
       <p:sp>
         <p:nvSpPr>
-          <p:cNvPr id="38" name="Shape 36"/>
+          <p:cNvPr id="41" name="Shape 39"/>
           <p:cNvSpPr/>
           <p:nvPr/>
         </p:nvSpPr>
@@ -21077,7 +20984,7 @@
       </p:sp>
       <p:sp>
         <p:nvSpPr>
-          <p:cNvPr id="39" name="Text 37"/>
+          <p:cNvPr id="42" name="Text 40"/>
           <p:cNvSpPr/>
           <p:nvPr/>
         </p:nvSpPr>
@@ -21539,7 +21446,7 @@
                 <a:ea typeface="Trebuchet MS" pitchFamily="34" charset="-122"/>
                 <a:cs typeface="Trebuchet MS" pitchFamily="34" charset="-120"/>
               </a:rPr>
-              <a:t>unemployed</a:t>
+              <a:t>unemployment</a:t>
             </a:r>
             <a:endParaRPr lang="en-US" sz="2800" dirty="0"/>
           </a:p>
@@ -21829,7 +21736,7 @@
                 <a:ea typeface="Calibri" pitchFamily="34" charset="-122"/>
                 <a:cs typeface="Calibri" pitchFamily="34" charset="-120"/>
               </a:rPr>
-              <a:t>to give work to</a:t>
+              <a:t>to give work or use</a:t>
             </a:r>
             <a:endParaRPr lang="en-US" sz="850" dirty="0"/>
           </a:p>
@@ -21902,7 +21809,7 @@
                 <a:ea typeface="Trebuchet MS" pitchFamily="34" charset="-122"/>
                 <a:cs typeface="Trebuchet MS" pitchFamily="34" charset="-120"/>
               </a:rPr>
-              <a:t>ed</a:t>
+              <a:t>ment</a:t>
             </a:r>
             <a:endParaRPr lang="en-US" sz="1300" dirty="0"/>
           </a:p>
@@ -21941,7 +21848,7 @@
                 <a:ea typeface="Calibri" pitchFamily="34" charset="-122"/>
                 <a:cs typeface="Calibri" pitchFamily="34" charset="-120"/>
               </a:rPr>
-              <a:t>in a state of</a:t>
+              <a:t>state or condition of</a:t>
             </a:r>
             <a:endParaRPr lang="en-US" sz="850" dirty="0"/>
           </a:p>
@@ -22048,8 +21955,8 @@
         </p:nvSpPr>
         <p:spPr>
           <a:xfrm>
-            <a:off x="2313432" y="3364992"/>
-            <a:ext cx="1645920" cy="475488"/>
+            <a:off x="1975104" y="3364992"/>
+            <a:ext cx="1554480" cy="475488"/>
           </a:xfrm>
           <a:prstGeom prst="rect">
             <a:avLst>
@@ -22075,8 +21982,8 @@
         </p:nvSpPr>
         <p:spPr>
           <a:xfrm>
-            <a:off x="2313432" y="3364992"/>
-            <a:ext cx="1645920" cy="475488"/>
+            <a:off x="1975104" y="3364992"/>
+            <a:ext cx="1554480" cy="475488"/>
           </a:xfrm>
           <a:prstGeom prst="rect">
             <a:avLst/>
@@ -22114,8 +22021,8 @@
         </p:nvSpPr>
         <p:spPr>
           <a:xfrm>
-            <a:off x="3959352" y="3364992"/>
-            <a:ext cx="411480" cy="475488"/>
+            <a:off x="3529584" y="3364992"/>
+            <a:ext cx="73152" cy="475488"/>
           </a:xfrm>
           <a:prstGeom prst="rect">
             <a:avLst/>
@@ -22153,8 +22060,8 @@
         </p:nvSpPr>
         <p:spPr>
           <a:xfrm>
-            <a:off x="4370832" y="3364992"/>
-            <a:ext cx="1645920" cy="475488"/>
+            <a:off x="3602736" y="3364992"/>
+            <a:ext cx="1554480" cy="475488"/>
           </a:xfrm>
           <a:prstGeom prst="rect">
             <a:avLst>
@@ -22180,8 +22087,8 @@
         </p:nvSpPr>
         <p:spPr>
           <a:xfrm>
-            <a:off x="4370832" y="3364992"/>
-            <a:ext cx="1645920" cy="475488"/>
+            <a:off x="3602736" y="3364992"/>
+            <a:ext cx="1554480" cy="475488"/>
           </a:xfrm>
           <a:prstGeom prst="rect">
             <a:avLst/>
@@ -22219,8 +22126,8 @@
         </p:nvSpPr>
         <p:spPr>
           <a:xfrm>
-            <a:off x="6016752" y="3364992"/>
-            <a:ext cx="411480" cy="475488"/>
+            <a:off x="5157216" y="3364992"/>
+            <a:ext cx="73152" cy="475488"/>
           </a:xfrm>
           <a:prstGeom prst="rect">
             <a:avLst/>
@@ -22258,8 +22165,8 @@
         </p:nvSpPr>
         <p:spPr>
           <a:xfrm>
-            <a:off x="6428232" y="3364992"/>
-            <a:ext cx="1645920" cy="475488"/>
+            <a:off x="5230368" y="3364992"/>
+            <a:ext cx="1554480" cy="475488"/>
           </a:xfrm>
           <a:prstGeom prst="rect">
             <a:avLst>
@@ -22285,8 +22192,8 @@
         </p:nvSpPr>
         <p:spPr>
           <a:xfrm>
-            <a:off x="6428232" y="3364992"/>
-            <a:ext cx="1645920" cy="475488"/>
+            <a:off x="5230368" y="3364992"/>
+            <a:ext cx="1554480" cy="475488"/>
           </a:xfrm>
           <a:prstGeom prst="rect">
             <a:avLst/>
@@ -22310,7 +22217,7 @@
                 <a:ea typeface="Trebuchet MS" pitchFamily="34" charset="-122"/>
                 <a:cs typeface="Trebuchet MS" pitchFamily="34" charset="-120"/>
               </a:rPr>
-              <a:t>ployed</a:t>
+              <a:t>ploy</a:t>
             </a:r>
             <a:endParaRPr lang="en-US" sz="1400" dirty="0"/>
           </a:p>
@@ -22318,7 +22225,112 @@
       </p:sp>
       <p:sp>
         <p:nvSpPr>
-          <p:cNvPr id="36" name="Shape 34"/>
+          <p:cNvPr id="36" name="Text 34"/>
+          <p:cNvSpPr/>
+          <p:nvPr/>
+        </p:nvSpPr>
+        <p:spPr>
+          <a:xfrm>
+            <a:off x="6784848" y="3364992"/>
+            <a:ext cx="73152" cy="475488"/>
+          </a:xfrm>
+          <a:prstGeom prst="rect">
+            <a:avLst/>
+          </a:prstGeom>
+          <a:noFill/>
+          <a:ln/>
+        </p:spPr>
+        <p:txBody>
+          <a:bodyPr wrap="square" lIns="0" tIns="0" rIns="0" bIns="0" rtlCol="0" anchor="ctr"/>
+          <a:lstStyle/>
+          <a:p>
+            <a:pPr algn="ctr" indent="0" marL="0">
+              <a:buNone/>
+            </a:pPr>
+            <a:r>
+              <a:rPr lang="en-US" sz="1600" b="1" dirty="0">
+                <a:solidFill>
+                  <a:srgbClr val="0D9488"/>
+                </a:solidFill>
+                <a:latin typeface="Trebuchet MS" pitchFamily="34" charset="0"/>
+                <a:ea typeface="Trebuchet MS" pitchFamily="34" charset="-122"/>
+                <a:cs typeface="Trebuchet MS" pitchFamily="34" charset="-120"/>
+              </a:rPr>
+              <a:t>·</a:t>
+            </a:r>
+            <a:endParaRPr lang="en-US" sz="1600" dirty="0"/>
+          </a:p>
+        </p:txBody>
+      </p:sp>
+      <p:sp>
+        <p:nvSpPr>
+          <p:cNvPr id="37" name="Shape 35"/>
+          <p:cNvSpPr/>
+          <p:nvPr/>
+        </p:nvSpPr>
+        <p:spPr>
+          <a:xfrm>
+            <a:off x="6858000" y="3364992"/>
+            <a:ext cx="1554480" cy="475488"/>
+          </a:xfrm>
+          <a:prstGeom prst="rect">
+            <a:avLst>
+              <a:gd name="adj" fmla="val 9615"/>
+            </a:avLst>
+          </a:prstGeom>
+          <a:solidFill>
+            <a:srgbClr val="FFFFFF"/>
+          </a:solidFill>
+          <a:ln w="12700">
+            <a:solidFill>
+              <a:srgbClr val="0D9488"/>
+            </a:solidFill>
+            <a:prstDash val="solid"/>
+          </a:ln>
+        </p:spPr>
+      </p:sp>
+      <p:sp>
+        <p:nvSpPr>
+          <p:cNvPr id="38" name="Text 36"/>
+          <p:cNvSpPr/>
+          <p:nvPr/>
+        </p:nvSpPr>
+        <p:spPr>
+          <a:xfrm>
+            <a:off x="6858000" y="3364992"/>
+            <a:ext cx="1554480" cy="475488"/>
+          </a:xfrm>
+          <a:prstGeom prst="rect">
+            <a:avLst/>
+          </a:prstGeom>
+          <a:noFill/>
+          <a:ln/>
+        </p:spPr>
+        <p:txBody>
+          <a:bodyPr wrap="square" lIns="0" tIns="0" rIns="0" bIns="0" rtlCol="0" anchor="ctr"/>
+          <a:lstStyle/>
+          <a:p>
+            <a:pPr algn="ctr" indent="0" marL="0">
+              <a:buNone/>
+            </a:pPr>
+            <a:r>
+              <a:rPr lang="en-US" sz="1400" b="1" dirty="0">
+                <a:solidFill>
+                  <a:srgbClr val="0D9488"/>
+                </a:solidFill>
+                <a:latin typeface="Trebuchet MS" pitchFamily="34" charset="0"/>
+                <a:ea typeface="Trebuchet MS" pitchFamily="34" charset="-122"/>
+                <a:cs typeface="Trebuchet MS" pitchFamily="34" charset="-120"/>
+              </a:rPr>
+              <a:t>ment</a:t>
+            </a:r>
+            <a:endParaRPr lang="en-US" sz="1400" dirty="0"/>
+          </a:p>
+        </p:txBody>
+      </p:sp>
+      <p:sp>
+        <p:nvSpPr>
+          <p:cNvPr id="39" name="Shape 37"/>
           <p:cNvSpPr/>
           <p:nvPr/>
         </p:nvSpPr>
@@ -22345,7 +22357,7 @@
       </p:sp>
       <p:sp>
         <p:nvSpPr>
-          <p:cNvPr id="37" name="Text 35"/>
+          <p:cNvPr id="40" name="Text 38"/>
           <p:cNvSpPr/>
           <p:nvPr/>
         </p:nvSpPr>
@@ -22384,18 +22396,18 @@
       </p:sp>
       <p:sp>
         <p:nvSpPr>
-          <p:cNvPr id="38" name="Shape 36"/>
+          <p:cNvPr id="41" name="Shape 39"/>
           <p:cNvSpPr/>
           <p:nvPr/>
         </p:nvSpPr>
         <p:spPr>
           <a:xfrm>
             <a:off x="1874520" y="4096512"/>
-            <a:ext cx="6903720" cy="804672"/>
+            <a:ext cx="6903720" cy="658368"/>
           </a:xfrm>
           <a:prstGeom prst="rect">
             <a:avLst>
-              <a:gd name="adj" fmla="val 6818"/>
+              <a:gd name="adj" fmla="val 8333"/>
             </a:avLst>
           </a:prstGeom>
           <a:solidFill>
@@ -22411,18 +22423,18 @@
       </p:sp>
       <p:sp>
         <p:nvSpPr>
-          <p:cNvPr id="39" name="Shape 37"/>
-          <p:cNvSpPr/>
-          <p:nvPr/>
-        </p:nvSpPr>
-        <p:spPr>
-          <a:xfrm>
-            <a:off x="2124837" y="4169664"/>
-            <a:ext cx="685800" cy="384048"/>
+          <p:cNvPr id="42" name="Shape 40"/>
+          <p:cNvSpPr/>
+          <p:nvPr/>
+        </p:nvSpPr>
+        <p:spPr>
+          <a:xfrm>
+            <a:off x="1951828" y="4169664"/>
+            <a:ext cx="603504" cy="475488"/>
           </a:xfrm>
           <a:prstGeom prst="rect">
             <a:avLst>
-              <a:gd name="adj" fmla="val 9524"/>
+              <a:gd name="adj" fmla="val 7692"/>
             </a:avLst>
           </a:prstGeom>
           <a:solidFill>
@@ -22438,14 +22450,14 @@
       </p:sp>
       <p:sp>
         <p:nvSpPr>
-          <p:cNvPr id="40" name="Text 38"/>
-          <p:cNvSpPr/>
-          <p:nvPr/>
-        </p:nvSpPr>
-        <p:spPr>
-          <a:xfrm>
-            <a:off x="2124837" y="4169664"/>
-            <a:ext cx="685800" cy="384048"/>
+          <p:cNvPr id="43" name="Text 41"/>
+          <p:cNvSpPr/>
+          <p:nvPr/>
+        </p:nvSpPr>
+        <p:spPr>
+          <a:xfrm>
+            <a:off x="1951828" y="4169664"/>
+            <a:ext cx="603504" cy="475488"/>
           </a:xfrm>
           <a:prstGeom prst="rect">
             <a:avLst/>
@@ -22477,18 +22489,18 @@
       </p:sp>
       <p:sp>
         <p:nvSpPr>
-          <p:cNvPr id="41" name="Shape 39"/>
-          <p:cNvSpPr/>
-          <p:nvPr/>
-        </p:nvSpPr>
-        <p:spPr>
-          <a:xfrm>
-            <a:off x="3033522" y="4169664"/>
-            <a:ext cx="685800" cy="384048"/>
+          <p:cNvPr id="44" name="Shape 42"/>
+          <p:cNvSpPr/>
+          <p:nvPr/>
+        </p:nvSpPr>
+        <p:spPr>
+          <a:xfrm>
+            <a:off x="2605209" y="4169664"/>
+            <a:ext cx="603504" cy="475488"/>
           </a:xfrm>
           <a:prstGeom prst="rect">
             <a:avLst>
-              <a:gd name="adj" fmla="val 9524"/>
+              <a:gd name="adj" fmla="val 7692"/>
             </a:avLst>
           </a:prstGeom>
           <a:solidFill>
@@ -22504,14 +22516,14 @@
       </p:sp>
       <p:sp>
         <p:nvSpPr>
-          <p:cNvPr id="42" name="Text 40"/>
-          <p:cNvSpPr/>
-          <p:nvPr/>
-        </p:nvSpPr>
-        <p:spPr>
-          <a:xfrm>
-            <a:off x="3033522" y="4169664"/>
-            <a:ext cx="685800" cy="384048"/>
+          <p:cNvPr id="45" name="Text 43"/>
+          <p:cNvSpPr/>
+          <p:nvPr/>
+        </p:nvSpPr>
+        <p:spPr>
+          <a:xfrm>
+            <a:off x="2605209" y="4169664"/>
+            <a:ext cx="603504" cy="475488"/>
           </a:xfrm>
           <a:prstGeom prst="rect">
             <a:avLst/>
@@ -22543,18 +22555,18 @@
       </p:sp>
       <p:sp>
         <p:nvSpPr>
-          <p:cNvPr id="43" name="Shape 41"/>
-          <p:cNvSpPr/>
-          <p:nvPr/>
-        </p:nvSpPr>
-        <p:spPr>
-          <a:xfrm>
-            <a:off x="3942207" y="4169664"/>
-            <a:ext cx="685800" cy="384048"/>
+          <p:cNvPr id="46" name="Shape 44"/>
+          <p:cNvSpPr/>
+          <p:nvPr/>
+        </p:nvSpPr>
+        <p:spPr>
+          <a:xfrm>
+            <a:off x="3258589" y="4169664"/>
+            <a:ext cx="603504" cy="475488"/>
           </a:xfrm>
           <a:prstGeom prst="rect">
             <a:avLst>
-              <a:gd name="adj" fmla="val 9524"/>
+              <a:gd name="adj" fmla="val 7692"/>
             </a:avLst>
           </a:prstGeom>
           <a:solidFill>
@@ -22570,14 +22582,14 @@
       </p:sp>
       <p:sp>
         <p:nvSpPr>
-          <p:cNvPr id="44" name="Text 42"/>
-          <p:cNvSpPr/>
-          <p:nvPr/>
-        </p:nvSpPr>
-        <p:spPr>
-          <a:xfrm>
-            <a:off x="3942207" y="4169664"/>
-            <a:ext cx="685800" cy="384048"/>
+          <p:cNvPr id="47" name="Text 45"/>
+          <p:cNvSpPr/>
+          <p:nvPr/>
+        </p:nvSpPr>
+        <p:spPr>
+          <a:xfrm>
+            <a:off x="3258589" y="4169664"/>
+            <a:ext cx="603504" cy="475488"/>
           </a:xfrm>
           <a:prstGeom prst="rect">
             <a:avLst/>
@@ -22609,18 +22621,18 @@
       </p:sp>
       <p:sp>
         <p:nvSpPr>
-          <p:cNvPr id="45" name="Shape 43"/>
-          <p:cNvSpPr/>
-          <p:nvPr/>
-        </p:nvSpPr>
-        <p:spPr>
-          <a:xfrm>
-            <a:off x="4850892" y="4169664"/>
-            <a:ext cx="685800" cy="384048"/>
+          <p:cNvPr id="48" name="Shape 46"/>
+          <p:cNvSpPr/>
+          <p:nvPr/>
+        </p:nvSpPr>
+        <p:spPr>
+          <a:xfrm>
+            <a:off x="3911969" y="4169664"/>
+            <a:ext cx="603504" cy="475488"/>
           </a:xfrm>
           <a:prstGeom prst="rect">
             <a:avLst>
-              <a:gd name="adj" fmla="val 9524"/>
+              <a:gd name="adj" fmla="val 7692"/>
             </a:avLst>
           </a:prstGeom>
           <a:solidFill>
@@ -22636,14 +22648,14 @@
       </p:sp>
       <p:sp>
         <p:nvSpPr>
-          <p:cNvPr id="46" name="Text 44"/>
-          <p:cNvSpPr/>
-          <p:nvPr/>
-        </p:nvSpPr>
-        <p:spPr>
-          <a:xfrm>
-            <a:off x="4850892" y="4169664"/>
-            <a:ext cx="685800" cy="384048"/>
+          <p:cNvPr id="49" name="Text 47"/>
+          <p:cNvSpPr/>
+          <p:nvPr/>
+        </p:nvSpPr>
+        <p:spPr>
+          <a:xfrm>
+            <a:off x="3911969" y="4169664"/>
+            <a:ext cx="603504" cy="475488"/>
           </a:xfrm>
           <a:prstGeom prst="rect">
             <a:avLst/>
@@ -22675,18 +22687,18 @@
       </p:sp>
       <p:sp>
         <p:nvSpPr>
-          <p:cNvPr id="47" name="Shape 45"/>
-          <p:cNvSpPr/>
-          <p:nvPr/>
-        </p:nvSpPr>
-        <p:spPr>
-          <a:xfrm>
-            <a:off x="5759577" y="4169664"/>
-            <a:ext cx="685800" cy="384048"/>
+          <p:cNvPr id="50" name="Shape 48"/>
+          <p:cNvSpPr/>
+          <p:nvPr/>
+        </p:nvSpPr>
+        <p:spPr>
+          <a:xfrm>
+            <a:off x="4565350" y="4169664"/>
+            <a:ext cx="603504" cy="475488"/>
           </a:xfrm>
           <a:prstGeom prst="rect">
             <a:avLst>
-              <a:gd name="adj" fmla="val 9524"/>
+              <a:gd name="adj" fmla="val 7692"/>
             </a:avLst>
           </a:prstGeom>
           <a:solidFill>
@@ -22702,14 +22714,14 @@
       </p:sp>
       <p:sp>
         <p:nvSpPr>
-          <p:cNvPr id="48" name="Text 46"/>
-          <p:cNvSpPr/>
-          <p:nvPr/>
-        </p:nvSpPr>
-        <p:spPr>
-          <a:xfrm>
-            <a:off x="5759577" y="4169664"/>
-            <a:ext cx="685800" cy="384048"/>
+          <p:cNvPr id="51" name="Text 49"/>
+          <p:cNvSpPr/>
+          <p:nvPr/>
+        </p:nvSpPr>
+        <p:spPr>
+          <a:xfrm>
+            <a:off x="4565350" y="4169664"/>
+            <a:ext cx="603504" cy="475488"/>
           </a:xfrm>
           <a:prstGeom prst="rect">
             <a:avLst/>
@@ -22741,18 +22753,18 @@
       </p:sp>
       <p:sp>
         <p:nvSpPr>
-          <p:cNvPr id="49" name="Shape 47"/>
-          <p:cNvSpPr/>
-          <p:nvPr/>
-        </p:nvSpPr>
-        <p:spPr>
-          <a:xfrm>
-            <a:off x="6668262" y="4169664"/>
-            <a:ext cx="685800" cy="384048"/>
+          <p:cNvPr id="52" name="Shape 50"/>
+          <p:cNvSpPr/>
+          <p:nvPr/>
+        </p:nvSpPr>
+        <p:spPr>
+          <a:xfrm>
+            <a:off x="5218730" y="4169664"/>
+            <a:ext cx="603504" cy="475488"/>
           </a:xfrm>
           <a:prstGeom prst="rect">
             <a:avLst>
-              <a:gd name="adj" fmla="val 9524"/>
+              <a:gd name="adj" fmla="val 7692"/>
             </a:avLst>
           </a:prstGeom>
           <a:solidFill>
@@ -22768,14 +22780,14 @@
       </p:sp>
       <p:sp>
         <p:nvSpPr>
-          <p:cNvPr id="50" name="Text 48"/>
-          <p:cNvSpPr/>
-          <p:nvPr/>
-        </p:nvSpPr>
-        <p:spPr>
-          <a:xfrm>
-            <a:off x="6668262" y="4169664"/>
-            <a:ext cx="685800" cy="384048"/>
+          <p:cNvPr id="53" name="Text 51"/>
+          <p:cNvSpPr/>
+          <p:nvPr/>
+        </p:nvSpPr>
+        <p:spPr>
+          <a:xfrm>
+            <a:off x="5218730" y="4169664"/>
+            <a:ext cx="603504" cy="475488"/>
           </a:xfrm>
           <a:prstGeom prst="rect">
             <a:avLst/>
@@ -22807,18 +22819,18 @@
       </p:sp>
       <p:sp>
         <p:nvSpPr>
-          <p:cNvPr id="51" name="Shape 49"/>
-          <p:cNvSpPr/>
-          <p:nvPr/>
-        </p:nvSpPr>
-        <p:spPr>
-          <a:xfrm>
-            <a:off x="7576947" y="4169664"/>
-            <a:ext cx="685800" cy="384048"/>
+          <p:cNvPr id="54" name="Shape 52"/>
+          <p:cNvSpPr/>
+          <p:nvPr/>
+        </p:nvSpPr>
+        <p:spPr>
+          <a:xfrm>
+            <a:off x="5872111" y="4169664"/>
+            <a:ext cx="603504" cy="475488"/>
           </a:xfrm>
           <a:prstGeom prst="rect">
             <a:avLst>
-              <a:gd name="adj" fmla="val 9524"/>
+              <a:gd name="adj" fmla="val 7692"/>
             </a:avLst>
           </a:prstGeom>
           <a:solidFill>
@@ -22834,14 +22846,14 @@
       </p:sp>
       <p:sp>
         <p:nvSpPr>
-          <p:cNvPr id="52" name="Text 50"/>
-          <p:cNvSpPr/>
-          <p:nvPr/>
-        </p:nvSpPr>
-        <p:spPr>
-          <a:xfrm>
-            <a:off x="7576947" y="4169664"/>
-            <a:ext cx="685800" cy="384048"/>
+          <p:cNvPr id="55" name="Text 53"/>
+          <p:cNvSpPr/>
+          <p:nvPr/>
+        </p:nvSpPr>
+        <p:spPr>
+          <a:xfrm>
+            <a:off x="5872111" y="4169664"/>
+            <a:ext cx="603504" cy="475488"/>
           </a:xfrm>
           <a:prstGeom prst="rect">
             <a:avLst/>
@@ -22865,7 +22877,7 @@
                 <a:ea typeface="Trebuchet MS" pitchFamily="34" charset="-122"/>
                 <a:cs typeface="Trebuchet MS" pitchFamily="34" charset="-120"/>
               </a:rPr>
-              <a:t>ed</a:t>
+              <a:t>m</a:t>
             </a:r>
             <a:endParaRPr lang="en-US" sz="900" dirty="0"/>
           </a:p>
@@ -22873,40 +22885,199 @@
       </p:sp>
       <p:sp>
         <p:nvSpPr>
-          <p:cNvPr id="53" name="Text 51"/>
-          <p:cNvSpPr/>
-          <p:nvPr/>
-        </p:nvSpPr>
-        <p:spPr>
-          <a:xfrm>
-            <a:off x="7576947" y="4572000"/>
-            <a:ext cx="685800" cy="219456"/>
-          </a:xfrm>
-          <a:prstGeom prst="rect">
-            <a:avLst/>
-          </a:prstGeom>
-          <a:noFill/>
-          <a:ln/>
-        </p:spPr>
-        <p:txBody>
-          <a:bodyPr wrap="square" lIns="0" tIns="0" rIns="0" bIns="0" rtlCol="0" anchor="t"/>
-          <a:lstStyle/>
-          <a:p>
-            <a:pPr algn="ctr" indent="0" marL="0">
-              <a:buNone/>
-            </a:pPr>
-            <a:r>
-              <a:rPr lang="en-US" sz="750" i="1" dirty="0">
-                <a:solidFill>
-                  <a:srgbClr val="94A3B8"/>
-                </a:solidFill>
-                <a:latin typeface="Calibri" pitchFamily="34" charset="0"/>
-                <a:ea typeface="Calibri" pitchFamily="34" charset="-122"/>
-                <a:cs typeface="Calibri" pitchFamily="34" charset="-120"/>
-              </a:rPr>
-              <a:t>/d/</a:t>
-            </a:r>
-            <a:endParaRPr lang="en-US" sz="750" dirty="0"/>
+          <p:cNvPr id="56" name="Shape 54"/>
+          <p:cNvSpPr/>
+          <p:nvPr/>
+        </p:nvSpPr>
+        <p:spPr>
+          <a:xfrm>
+            <a:off x="6525491" y="4169664"/>
+            <a:ext cx="603504" cy="475488"/>
+          </a:xfrm>
+          <a:prstGeom prst="rect">
+            <a:avLst>
+              <a:gd name="adj" fmla="val 7692"/>
+            </a:avLst>
+          </a:prstGeom>
+          <a:solidFill>
+            <a:srgbClr val="FFFFFF"/>
+          </a:solidFill>
+          <a:ln w="12700">
+            <a:solidFill>
+              <a:srgbClr val="DB2777"/>
+            </a:solidFill>
+            <a:prstDash val="solid"/>
+          </a:ln>
+        </p:spPr>
+      </p:sp>
+      <p:sp>
+        <p:nvSpPr>
+          <p:cNvPr id="57" name="Text 55"/>
+          <p:cNvSpPr/>
+          <p:nvPr/>
+        </p:nvSpPr>
+        <p:spPr>
+          <a:xfrm>
+            <a:off x="6525491" y="4169664"/>
+            <a:ext cx="603504" cy="475488"/>
+          </a:xfrm>
+          <a:prstGeom prst="rect">
+            <a:avLst/>
+          </a:prstGeom>
+          <a:noFill/>
+          <a:ln/>
+        </p:spPr>
+        <p:txBody>
+          <a:bodyPr wrap="square" lIns="0" tIns="0" rIns="0" bIns="0" rtlCol="0" anchor="ctr"/>
+          <a:lstStyle/>
+          <a:p>
+            <a:pPr algn="ctr" indent="0" marL="0">
+              <a:buNone/>
+            </a:pPr>
+            <a:r>
+              <a:rPr lang="en-US" sz="900" b="1" dirty="0">
+                <a:solidFill>
+                  <a:srgbClr val="9D174D"/>
+                </a:solidFill>
+                <a:latin typeface="Trebuchet MS" pitchFamily="34" charset="0"/>
+                <a:ea typeface="Trebuchet MS" pitchFamily="34" charset="-122"/>
+                <a:cs typeface="Trebuchet MS" pitchFamily="34" charset="-120"/>
+              </a:rPr>
+              <a:t>e</a:t>
+            </a:r>
+            <a:endParaRPr lang="en-US" sz="900" dirty="0"/>
+          </a:p>
+        </p:txBody>
+      </p:sp>
+      <p:sp>
+        <p:nvSpPr>
+          <p:cNvPr id="58" name="Shape 56"/>
+          <p:cNvSpPr/>
+          <p:nvPr/>
+        </p:nvSpPr>
+        <p:spPr>
+          <a:xfrm>
+            <a:off x="7178871" y="4169664"/>
+            <a:ext cx="603504" cy="475488"/>
+          </a:xfrm>
+          <a:prstGeom prst="rect">
+            <a:avLst>
+              <a:gd name="adj" fmla="val 7692"/>
+            </a:avLst>
+          </a:prstGeom>
+          <a:solidFill>
+            <a:srgbClr val="FFFFFF"/>
+          </a:solidFill>
+          <a:ln w="12700">
+            <a:solidFill>
+              <a:srgbClr val="DB2777"/>
+            </a:solidFill>
+            <a:prstDash val="solid"/>
+          </a:ln>
+        </p:spPr>
+      </p:sp>
+      <p:sp>
+        <p:nvSpPr>
+          <p:cNvPr id="59" name="Text 57"/>
+          <p:cNvSpPr/>
+          <p:nvPr/>
+        </p:nvSpPr>
+        <p:spPr>
+          <a:xfrm>
+            <a:off x="7178871" y="4169664"/>
+            <a:ext cx="603504" cy="475488"/>
+          </a:xfrm>
+          <a:prstGeom prst="rect">
+            <a:avLst/>
+          </a:prstGeom>
+          <a:noFill/>
+          <a:ln/>
+        </p:spPr>
+        <p:txBody>
+          <a:bodyPr wrap="square" lIns="0" tIns="0" rIns="0" bIns="0" rtlCol="0" anchor="ctr"/>
+          <a:lstStyle/>
+          <a:p>
+            <a:pPr algn="ctr" indent="0" marL="0">
+              <a:buNone/>
+            </a:pPr>
+            <a:r>
+              <a:rPr lang="en-US" sz="900" b="1" dirty="0">
+                <a:solidFill>
+                  <a:srgbClr val="9D174D"/>
+                </a:solidFill>
+                <a:latin typeface="Trebuchet MS" pitchFamily="34" charset="0"/>
+                <a:ea typeface="Trebuchet MS" pitchFamily="34" charset="-122"/>
+                <a:cs typeface="Trebuchet MS" pitchFamily="34" charset="-120"/>
+              </a:rPr>
+              <a:t>n</a:t>
+            </a:r>
+            <a:endParaRPr lang="en-US" sz="900" dirty="0"/>
+          </a:p>
+        </p:txBody>
+      </p:sp>
+      <p:sp>
+        <p:nvSpPr>
+          <p:cNvPr id="60" name="Shape 58"/>
+          <p:cNvSpPr/>
+          <p:nvPr/>
+        </p:nvSpPr>
+        <p:spPr>
+          <a:xfrm>
+            <a:off x="7832252" y="4169664"/>
+            <a:ext cx="603504" cy="475488"/>
+          </a:xfrm>
+          <a:prstGeom prst="rect">
+            <a:avLst>
+              <a:gd name="adj" fmla="val 7692"/>
+            </a:avLst>
+          </a:prstGeom>
+          <a:solidFill>
+            <a:srgbClr val="FFFFFF"/>
+          </a:solidFill>
+          <a:ln w="12700">
+            <a:solidFill>
+              <a:srgbClr val="DB2777"/>
+            </a:solidFill>
+            <a:prstDash val="solid"/>
+          </a:ln>
+        </p:spPr>
+      </p:sp>
+      <p:sp>
+        <p:nvSpPr>
+          <p:cNvPr id="61" name="Text 59"/>
+          <p:cNvSpPr/>
+          <p:nvPr/>
+        </p:nvSpPr>
+        <p:spPr>
+          <a:xfrm>
+            <a:off x="7832252" y="4169664"/>
+            <a:ext cx="603504" cy="475488"/>
+          </a:xfrm>
+          <a:prstGeom prst="rect">
+            <a:avLst/>
+          </a:prstGeom>
+          <a:noFill/>
+          <a:ln/>
+        </p:spPr>
+        <p:txBody>
+          <a:bodyPr wrap="square" lIns="0" tIns="0" rIns="0" bIns="0" rtlCol="0" anchor="ctr"/>
+          <a:lstStyle/>
+          <a:p>
+            <a:pPr algn="ctr" indent="0" marL="0">
+              <a:buNone/>
+            </a:pPr>
+            <a:r>
+              <a:rPr lang="en-US" sz="900" b="1" dirty="0">
+                <a:solidFill>
+                  <a:srgbClr val="9D174D"/>
+                </a:solidFill>
+                <a:latin typeface="Trebuchet MS" pitchFamily="34" charset="0"/>
+                <a:ea typeface="Trebuchet MS" pitchFamily="34" charset="-122"/>
+                <a:cs typeface="Trebuchet MS" pitchFamily="34" charset="-120"/>
+              </a:rPr>
+              <a:t>t</a:t>
+            </a:r>
+            <a:endParaRPr lang="en-US" sz="900" dirty="0"/>
           </a:p>
         </p:txBody>
       </p:sp>
@@ -24340,7 +24511,7 @@
                 <a:ea typeface="Calibri" pitchFamily="34" charset="-122"/>
                 <a:cs typeface="Calibri" pitchFamily="34" charset="-120"/>
               </a:rPr>
-              <a:t>to give work to</a:t>
+              <a:t>to give work or use</a:t>
             </a:r>
             <a:endParaRPr lang="en-US" sz="850" dirty="0"/>
           </a:p>
@@ -24452,7 +24623,7 @@
                 <a:ea typeface="Calibri" pitchFamily="34" charset="-122"/>
                 <a:cs typeface="Calibri" pitchFamily="34" charset="-120"/>
               </a:rPr>
-              <a:t>state or result of</a:t>
+              <a:t>state or condition of</a:t>
             </a:r>
             <a:endParaRPr lang="en-US" sz="850" dirty="0"/>
           </a:p>
@@ -26044,7 +26215,7 @@
                 <a:ea typeface="Calibri" pitchFamily="34" charset="-122"/>
                 <a:cs typeface="Calibri" pitchFamily="34" charset="-120"/>
               </a:rPr>
-              <a:t>to give work to</a:t>
+              <a:t>to give work or use</a:t>
             </a:r>
             <a:endParaRPr lang="en-US" sz="850" dirty="0"/>
           </a:p>
@@ -26156,7 +26327,7 @@
                 <a:ea typeface="Calibri" pitchFamily="34" charset="-122"/>
                 <a:cs typeface="Calibri" pitchFamily="34" charset="-120"/>
               </a:rPr>
-              <a:t>state or result of</a:t>
+              <a:t>state or condition of</a:t>
             </a:r>
             <a:endParaRPr lang="en-US" sz="850" dirty="0"/>
           </a:p>
@@ -27266,7 +27437,7 @@
                 <a:ea typeface="Calibri" pitchFamily="34" charset="-122"/>
                 <a:cs typeface="Calibri" pitchFamily="34" charset="-120"/>
               </a:rPr>
-              <a:t>to give work to</a:t>
+              <a:t>to give work or use</a:t>
             </a:r>
             <a:endParaRPr lang="en-US" sz="850" dirty="0"/>
           </a:p>
@@ -27378,7 +27549,7 @@
                 <a:ea typeface="Calibri" pitchFamily="34" charset="-122"/>
                 <a:cs typeface="Calibri" pitchFamily="34" charset="-120"/>
               </a:rPr>
-              <a:t>state or result of</a:t>
+              <a:t>state or condition of</a:t>
             </a:r>
             <a:endParaRPr lang="en-US" sz="850" dirty="0"/>
           </a:p>
@@ -28799,7 +28970,7 @@
                 <a:ea typeface="Trebuchet MS" pitchFamily="34" charset="-122"/>
                 <a:cs typeface="Trebuchet MS" pitchFamily="34" charset="-120"/>
               </a:rPr>
-              <a:t>reemploy</a:t>
+              <a:t>reemployed</a:t>
             </a:r>
             <a:endParaRPr lang="en-US" sz="2800" dirty="0"/>
           </a:p>
@@ -29626,7 +29797,7 @@
                 <a:ea typeface="Trebuchet MS" pitchFamily="34" charset="-122"/>
                 <a:cs typeface="Trebuchet MS" pitchFamily="34" charset="-120"/>
               </a:rPr>
-              <a:t>reemploy</a:t>
+              <a:t>reemployed</a:t>
             </a:r>
             <a:endParaRPr lang="en-US" sz="2800" dirty="0"/>
           </a:p>
@@ -29706,7 +29877,7 @@
         </p:nvSpPr>
         <p:spPr>
           <a:xfrm>
-            <a:off x="2938272" y="2258568"/>
+            <a:off x="2221992" y="2258568"/>
             <a:ext cx="1828800" cy="292608"/>
           </a:xfrm>
           <a:prstGeom prst="rect">
@@ -29740,7 +29911,7 @@
         </p:nvSpPr>
         <p:spPr>
           <a:xfrm>
-            <a:off x="2938272" y="2258568"/>
+            <a:off x="2221992" y="2258568"/>
             <a:ext cx="1828800" cy="292608"/>
           </a:xfrm>
           <a:prstGeom prst="rect">
@@ -29779,7 +29950,7 @@
         </p:nvSpPr>
         <p:spPr>
           <a:xfrm>
-            <a:off x="2938272" y="2569464"/>
+            <a:off x="2221992" y="2569464"/>
             <a:ext cx="1828800" cy="201168"/>
           </a:xfrm>
           <a:prstGeom prst="rect">
@@ -29818,7 +29989,7 @@
         </p:nvSpPr>
         <p:spPr>
           <a:xfrm>
-            <a:off x="5803392" y="2258568"/>
+            <a:off x="4370832" y="2258568"/>
             <a:ext cx="1828800" cy="292608"/>
           </a:xfrm>
           <a:prstGeom prst="rect">
@@ -29852,7 +30023,7 @@
         </p:nvSpPr>
         <p:spPr>
           <a:xfrm>
-            <a:off x="5803392" y="2258568"/>
+            <a:off x="4370832" y="2258568"/>
             <a:ext cx="1828800" cy="292608"/>
           </a:xfrm>
           <a:prstGeom prst="rect">
@@ -29891,7 +30062,7 @@
         </p:nvSpPr>
         <p:spPr>
           <a:xfrm>
-            <a:off x="5803392" y="2569464"/>
+            <a:off x="4370832" y="2569464"/>
             <a:ext cx="1828800" cy="201168"/>
           </a:xfrm>
           <a:prstGeom prst="rect">
@@ -29916,7 +30087,7 @@
                 <a:ea typeface="Calibri" pitchFamily="34" charset="-122"/>
                 <a:cs typeface="Calibri" pitchFamily="34" charset="-120"/>
               </a:rPr>
-              <a:t>to give work to</a:t>
+              <a:t>to give work or use</a:t>
             </a:r>
             <a:endParaRPr lang="en-US" sz="850" dirty="0"/>
           </a:p>
@@ -29925,6 +30096,118 @@
       <p:sp>
         <p:nvSpPr>
           <p:cNvPr id="22" name="Shape 20"/>
+          <p:cNvSpPr/>
+          <p:nvPr/>
+        </p:nvSpPr>
+        <p:spPr>
+          <a:xfrm>
+            <a:off x="6519672" y="2258568"/>
+            <a:ext cx="1828800" cy="292608"/>
+          </a:xfrm>
+          <a:prstGeom prst="rect">
+            <a:avLst>
+              <a:gd name="adj" fmla="val 25000"/>
+            </a:avLst>
+          </a:prstGeom>
+          <a:solidFill>
+            <a:srgbClr val="FCE7F3"/>
+          </a:solidFill>
+          <a:ln w="19050">
+            <a:solidFill>
+              <a:srgbClr val="DB2777"/>
+            </a:solidFill>
+            <a:prstDash val="solid"/>
+          </a:ln>
+          <a:effectLst>
+            <a:outerShdw sx="100000" sy="100000" kx="0" ky="0" algn="bl" rotWithShape="0" blurRad="101600" dist="38100" dir="8100000">
+              <a:srgbClr val="000000">
+                <a:alpha val="12000"/>
+              </a:srgbClr>
+            </a:outerShdw>
+          </a:effectLst>
+        </p:spPr>
+      </p:sp>
+      <p:sp>
+        <p:nvSpPr>
+          <p:cNvPr id="23" name="Text 21"/>
+          <p:cNvSpPr/>
+          <p:nvPr/>
+        </p:nvSpPr>
+        <p:spPr>
+          <a:xfrm>
+            <a:off x="6519672" y="2258568"/>
+            <a:ext cx="1828800" cy="292608"/>
+          </a:xfrm>
+          <a:prstGeom prst="rect">
+            <a:avLst/>
+          </a:prstGeom>
+          <a:noFill/>
+          <a:ln/>
+        </p:spPr>
+        <p:txBody>
+          <a:bodyPr wrap="square" lIns="0" tIns="0" rIns="0" bIns="0" rtlCol="0" anchor="ctr"/>
+          <a:lstStyle/>
+          <a:p>
+            <a:pPr algn="ctr" indent="0" marL="0">
+              <a:buNone/>
+            </a:pPr>
+            <a:r>
+              <a:rPr lang="en-US" sz="1300" b="1" dirty="0">
+                <a:solidFill>
+                  <a:srgbClr val="9D174D"/>
+                </a:solidFill>
+                <a:latin typeface="Trebuchet MS" pitchFamily="34" charset="0"/>
+                <a:ea typeface="Trebuchet MS" pitchFamily="34" charset="-122"/>
+                <a:cs typeface="Trebuchet MS" pitchFamily="34" charset="-120"/>
+              </a:rPr>
+              <a:t>ed</a:t>
+            </a:r>
+            <a:endParaRPr lang="en-US" sz="1300" dirty="0"/>
+          </a:p>
+        </p:txBody>
+      </p:sp>
+      <p:sp>
+        <p:nvSpPr>
+          <p:cNvPr id="24" name="Text 22"/>
+          <p:cNvSpPr/>
+          <p:nvPr/>
+        </p:nvSpPr>
+        <p:spPr>
+          <a:xfrm>
+            <a:off x="6519672" y="2569464"/>
+            <a:ext cx="1828800" cy="201168"/>
+          </a:xfrm>
+          <a:prstGeom prst="rect">
+            <a:avLst/>
+          </a:prstGeom>
+          <a:noFill/>
+          <a:ln/>
+        </p:spPr>
+        <p:txBody>
+          <a:bodyPr wrap="square" lIns="0" tIns="0" rIns="0" bIns="0" rtlCol="0" anchor="t"/>
+          <a:lstStyle/>
+          <a:p>
+            <a:pPr algn="ctr" indent="0" marL="0">
+              <a:buNone/>
+            </a:pPr>
+            <a:r>
+              <a:rPr lang="en-US" sz="850" dirty="0">
+                <a:solidFill>
+                  <a:srgbClr val="475569"/>
+                </a:solidFill>
+                <a:latin typeface="Calibri" pitchFamily="34" charset="0"/>
+                <a:ea typeface="Calibri" pitchFamily="34" charset="-122"/>
+                <a:cs typeface="Calibri" pitchFamily="34" charset="-120"/>
+              </a:rPr>
+              <a:t>past tense</a:t>
+            </a:r>
+            <a:endParaRPr lang="en-US" sz="850" dirty="0"/>
+          </a:p>
+        </p:txBody>
+      </p:sp>
+      <p:sp>
+        <p:nvSpPr>
+          <p:cNvPr id="25" name="Shape 23"/>
           <p:cNvSpPr/>
           <p:nvPr/>
         </p:nvSpPr>
@@ -29951,7 +30234,7 @@
       </p:sp>
       <p:sp>
         <p:nvSpPr>
-          <p:cNvPr id="23" name="Text 21"/>
+          <p:cNvPr id="26" name="Text 24"/>
           <p:cNvSpPr/>
           <p:nvPr/>
         </p:nvSpPr>
@@ -29990,7 +30273,7 @@
       </p:sp>
       <p:sp>
         <p:nvSpPr>
-          <p:cNvPr id="24" name="Shape 22"/>
+          <p:cNvPr id="27" name="Shape 25"/>
           <p:cNvSpPr/>
           <p:nvPr/>
         </p:nvSpPr>
@@ -30017,7 +30300,7 @@
       </p:sp>
       <p:sp>
         <p:nvSpPr>
-          <p:cNvPr id="25" name="Text 23"/>
+          <p:cNvPr id="28" name="Text 26"/>
           <p:cNvSpPr/>
           <p:nvPr/>
         </p:nvSpPr>
@@ -30056,7 +30339,7 @@
       </p:sp>
       <p:sp>
         <p:nvSpPr>
-          <p:cNvPr id="26" name="Shape 24"/>
+          <p:cNvPr id="29" name="Shape 27"/>
           <p:cNvSpPr/>
           <p:nvPr/>
         </p:nvSpPr>
@@ -30083,7 +30366,7 @@
       </p:sp>
       <p:sp>
         <p:nvSpPr>
-          <p:cNvPr id="27" name="Text 25"/>
+          <p:cNvPr id="30" name="Text 28"/>
           <p:cNvSpPr/>
           <p:nvPr/>
         </p:nvSpPr>
@@ -30122,7 +30405,7 @@
       </p:sp>
       <p:sp>
         <p:nvSpPr>
-          <p:cNvPr id="28" name="Shape 26"/>
+          <p:cNvPr id="31" name="Shape 29"/>
           <p:cNvSpPr/>
           <p:nvPr/>
         </p:nvSpPr>
@@ -30149,7 +30432,7 @@
       </p:sp>
       <p:sp>
         <p:nvSpPr>
-          <p:cNvPr id="29" name="Text 27"/>
+          <p:cNvPr id="32" name="Text 30"/>
           <p:cNvSpPr/>
           <p:nvPr/>
         </p:nvSpPr>
@@ -30611,7 +30894,7 @@
                 <a:ea typeface="Trebuchet MS" pitchFamily="34" charset="-122"/>
                 <a:cs typeface="Trebuchet MS" pitchFamily="34" charset="-120"/>
               </a:rPr>
-              <a:t>reemploy</a:t>
+              <a:t>reemployed</a:t>
             </a:r>
             <a:endParaRPr lang="en-US" sz="2800" dirty="0"/>
           </a:p>
@@ -30691,7 +30974,7 @@
         </p:nvSpPr>
         <p:spPr>
           <a:xfrm>
-            <a:off x="2938272" y="2258568"/>
+            <a:off x="2221992" y="2258568"/>
             <a:ext cx="1828800" cy="292608"/>
           </a:xfrm>
           <a:prstGeom prst="rect">
@@ -30725,7 +31008,7 @@
         </p:nvSpPr>
         <p:spPr>
           <a:xfrm>
-            <a:off x="2938272" y="2258568"/>
+            <a:off x="2221992" y="2258568"/>
             <a:ext cx="1828800" cy="292608"/>
           </a:xfrm>
           <a:prstGeom prst="rect">
@@ -30764,7 +31047,7 @@
         </p:nvSpPr>
         <p:spPr>
           <a:xfrm>
-            <a:off x="2938272" y="2569464"/>
+            <a:off x="2221992" y="2569464"/>
             <a:ext cx="1828800" cy="201168"/>
           </a:xfrm>
           <a:prstGeom prst="rect">
@@ -30803,7 +31086,7 @@
         </p:nvSpPr>
         <p:spPr>
           <a:xfrm>
-            <a:off x="5803392" y="2258568"/>
+            <a:off x="4370832" y="2258568"/>
             <a:ext cx="1828800" cy="292608"/>
           </a:xfrm>
           <a:prstGeom prst="rect">
@@ -30837,7 +31120,7 @@
         </p:nvSpPr>
         <p:spPr>
           <a:xfrm>
-            <a:off x="5803392" y="2258568"/>
+            <a:off x="4370832" y="2258568"/>
             <a:ext cx="1828800" cy="292608"/>
           </a:xfrm>
           <a:prstGeom prst="rect">
@@ -30876,7 +31159,7 @@
         </p:nvSpPr>
         <p:spPr>
           <a:xfrm>
-            <a:off x="5803392" y="2569464"/>
+            <a:off x="4370832" y="2569464"/>
             <a:ext cx="1828800" cy="201168"/>
           </a:xfrm>
           <a:prstGeom prst="rect">
@@ -30901,7 +31184,7 @@
                 <a:ea typeface="Calibri" pitchFamily="34" charset="-122"/>
                 <a:cs typeface="Calibri" pitchFamily="34" charset="-120"/>
               </a:rPr>
-              <a:t>to give work to</a:t>
+              <a:t>to give work or use</a:t>
             </a:r>
             <a:endParaRPr lang="en-US" sz="850" dirty="0"/>
           </a:p>
@@ -30910,6 +31193,118 @@
       <p:sp>
         <p:nvSpPr>
           <p:cNvPr id="22" name="Shape 20"/>
+          <p:cNvSpPr/>
+          <p:nvPr/>
+        </p:nvSpPr>
+        <p:spPr>
+          <a:xfrm>
+            <a:off x="6519672" y="2258568"/>
+            <a:ext cx="1828800" cy="292608"/>
+          </a:xfrm>
+          <a:prstGeom prst="rect">
+            <a:avLst>
+              <a:gd name="adj" fmla="val 25000"/>
+            </a:avLst>
+          </a:prstGeom>
+          <a:solidFill>
+            <a:srgbClr val="FCE7F3"/>
+          </a:solidFill>
+          <a:ln w="19050">
+            <a:solidFill>
+              <a:srgbClr val="DB2777"/>
+            </a:solidFill>
+            <a:prstDash val="solid"/>
+          </a:ln>
+          <a:effectLst>
+            <a:outerShdw sx="100000" sy="100000" kx="0" ky="0" algn="bl" rotWithShape="0" blurRad="101600" dist="38100" dir="8100000">
+              <a:srgbClr val="000000">
+                <a:alpha val="12000"/>
+              </a:srgbClr>
+            </a:outerShdw>
+          </a:effectLst>
+        </p:spPr>
+      </p:sp>
+      <p:sp>
+        <p:nvSpPr>
+          <p:cNvPr id="23" name="Text 21"/>
+          <p:cNvSpPr/>
+          <p:nvPr/>
+        </p:nvSpPr>
+        <p:spPr>
+          <a:xfrm>
+            <a:off x="6519672" y="2258568"/>
+            <a:ext cx="1828800" cy="292608"/>
+          </a:xfrm>
+          <a:prstGeom prst="rect">
+            <a:avLst/>
+          </a:prstGeom>
+          <a:noFill/>
+          <a:ln/>
+        </p:spPr>
+        <p:txBody>
+          <a:bodyPr wrap="square" lIns="0" tIns="0" rIns="0" bIns="0" rtlCol="0" anchor="ctr"/>
+          <a:lstStyle/>
+          <a:p>
+            <a:pPr algn="ctr" indent="0" marL="0">
+              <a:buNone/>
+            </a:pPr>
+            <a:r>
+              <a:rPr lang="en-US" sz="1300" b="1" dirty="0">
+                <a:solidFill>
+                  <a:srgbClr val="9D174D"/>
+                </a:solidFill>
+                <a:latin typeface="Trebuchet MS" pitchFamily="34" charset="0"/>
+                <a:ea typeface="Trebuchet MS" pitchFamily="34" charset="-122"/>
+                <a:cs typeface="Trebuchet MS" pitchFamily="34" charset="-120"/>
+              </a:rPr>
+              <a:t>ed</a:t>
+            </a:r>
+            <a:endParaRPr lang="en-US" sz="1300" dirty="0"/>
+          </a:p>
+        </p:txBody>
+      </p:sp>
+      <p:sp>
+        <p:nvSpPr>
+          <p:cNvPr id="24" name="Text 22"/>
+          <p:cNvSpPr/>
+          <p:nvPr/>
+        </p:nvSpPr>
+        <p:spPr>
+          <a:xfrm>
+            <a:off x="6519672" y="2569464"/>
+            <a:ext cx="1828800" cy="201168"/>
+          </a:xfrm>
+          <a:prstGeom prst="rect">
+            <a:avLst/>
+          </a:prstGeom>
+          <a:noFill/>
+          <a:ln/>
+        </p:spPr>
+        <p:txBody>
+          <a:bodyPr wrap="square" lIns="0" tIns="0" rIns="0" bIns="0" rtlCol="0" anchor="t"/>
+          <a:lstStyle/>
+          <a:p>
+            <a:pPr algn="ctr" indent="0" marL="0">
+              <a:buNone/>
+            </a:pPr>
+            <a:r>
+              <a:rPr lang="en-US" sz="850" dirty="0">
+                <a:solidFill>
+                  <a:srgbClr val="475569"/>
+                </a:solidFill>
+                <a:latin typeface="Calibri" pitchFamily="34" charset="0"/>
+                <a:ea typeface="Calibri" pitchFamily="34" charset="-122"/>
+                <a:cs typeface="Calibri" pitchFamily="34" charset="-120"/>
+              </a:rPr>
+              <a:t>past tense</a:t>
+            </a:r>
+            <a:endParaRPr lang="en-US" sz="850" dirty="0"/>
+          </a:p>
+        </p:txBody>
+      </p:sp>
+      <p:sp>
+        <p:nvSpPr>
+          <p:cNvPr id="25" name="Shape 23"/>
           <p:cNvSpPr/>
           <p:nvPr/>
         </p:nvSpPr>
@@ -30936,7 +31331,7 @@
       </p:sp>
       <p:sp>
         <p:nvSpPr>
-          <p:cNvPr id="23" name="Text 21"/>
+          <p:cNvPr id="26" name="Text 24"/>
           <p:cNvSpPr/>
           <p:nvPr/>
         </p:nvSpPr>
@@ -30975,7 +31370,7 @@
       </p:sp>
       <p:sp>
         <p:nvSpPr>
-          <p:cNvPr id="24" name="Shape 22"/>
+          <p:cNvPr id="27" name="Shape 25"/>
           <p:cNvSpPr/>
           <p:nvPr/>
         </p:nvSpPr>
@@ -31002,7 +31397,7 @@
       </p:sp>
       <p:sp>
         <p:nvSpPr>
-          <p:cNvPr id="25" name="Shape 23"/>
+          <p:cNvPr id="28" name="Shape 26"/>
           <p:cNvSpPr/>
           <p:nvPr/>
         </p:nvSpPr>
@@ -31029,7 +31424,7 @@
       </p:sp>
       <p:sp>
         <p:nvSpPr>
-          <p:cNvPr id="26" name="Text 24"/>
+          <p:cNvPr id="29" name="Text 27"/>
           <p:cNvSpPr/>
           <p:nvPr/>
         </p:nvSpPr>
@@ -31068,7 +31463,7 @@
       </p:sp>
       <p:sp>
         <p:nvSpPr>
-          <p:cNvPr id="27" name="Text 25"/>
+          <p:cNvPr id="30" name="Text 28"/>
           <p:cNvSpPr/>
           <p:nvPr/>
         </p:nvSpPr>
@@ -31107,7 +31502,7 @@
       </p:sp>
       <p:sp>
         <p:nvSpPr>
-          <p:cNvPr id="28" name="Shape 26"/>
+          <p:cNvPr id="31" name="Shape 29"/>
           <p:cNvSpPr/>
           <p:nvPr/>
         </p:nvSpPr>
@@ -31134,7 +31529,7 @@
       </p:sp>
       <p:sp>
         <p:nvSpPr>
-          <p:cNvPr id="29" name="Text 27"/>
+          <p:cNvPr id="32" name="Text 30"/>
           <p:cNvSpPr/>
           <p:nvPr/>
         </p:nvSpPr>
@@ -31173,7 +31568,7 @@
       </p:sp>
       <p:sp>
         <p:nvSpPr>
-          <p:cNvPr id="30" name="Text 28"/>
+          <p:cNvPr id="33" name="Text 31"/>
           <p:cNvSpPr/>
           <p:nvPr/>
         </p:nvSpPr>
@@ -31212,7 +31607,7 @@
       </p:sp>
       <p:sp>
         <p:nvSpPr>
-          <p:cNvPr id="31" name="Shape 29"/>
+          <p:cNvPr id="34" name="Shape 32"/>
           <p:cNvSpPr/>
           <p:nvPr/>
         </p:nvSpPr>
@@ -31239,7 +31634,7 @@
       </p:sp>
       <p:sp>
         <p:nvSpPr>
-          <p:cNvPr id="32" name="Text 30"/>
+          <p:cNvPr id="35" name="Text 33"/>
           <p:cNvSpPr/>
           <p:nvPr/>
         </p:nvSpPr>
@@ -31270,7 +31665,7 @@
                 <a:ea typeface="Trebuchet MS" pitchFamily="34" charset="-122"/>
                 <a:cs typeface="Trebuchet MS" pitchFamily="34" charset="-120"/>
               </a:rPr>
-              <a:t>ploy</a:t>
+              <a:t>ployed</a:t>
             </a:r>
             <a:endParaRPr lang="en-US" sz="1400" dirty="0"/>
           </a:p>
@@ -31278,7 +31673,7 @@
       </p:sp>
       <p:sp>
         <p:nvSpPr>
-          <p:cNvPr id="33" name="Shape 31"/>
+          <p:cNvPr id="36" name="Shape 34"/>
           <p:cNvSpPr/>
           <p:nvPr/>
         </p:nvSpPr>
@@ -31305,7 +31700,7 @@
       </p:sp>
       <p:sp>
         <p:nvSpPr>
-          <p:cNvPr id="34" name="Text 32"/>
+          <p:cNvPr id="37" name="Text 35"/>
           <p:cNvSpPr/>
           <p:nvPr/>
         </p:nvSpPr>
@@ -31344,7 +31739,7 @@
       </p:sp>
       <p:sp>
         <p:nvSpPr>
-          <p:cNvPr id="35" name="Shape 33"/>
+          <p:cNvPr id="38" name="Shape 36"/>
           <p:cNvSpPr/>
           <p:nvPr/>
         </p:nvSpPr>
@@ -31371,7 +31766,7 @@
       </p:sp>
       <p:sp>
         <p:nvSpPr>
-          <p:cNvPr id="36" name="Text 34"/>
+          <p:cNvPr id="39" name="Text 37"/>
           <p:cNvSpPr/>
           <p:nvPr/>
         </p:nvSpPr>
@@ -31833,7 +32228,7 @@
                 <a:ea typeface="Trebuchet MS" pitchFamily="34" charset="-122"/>
                 <a:cs typeface="Trebuchet MS" pitchFamily="34" charset="-120"/>
               </a:rPr>
-              <a:t>reemploy</a:t>
+              <a:t>reemployed</a:t>
             </a:r>
             <a:endParaRPr lang="en-US" sz="2800" dirty="0"/>
           </a:p>
@@ -31913,7 +32308,7 @@
         </p:nvSpPr>
         <p:spPr>
           <a:xfrm>
-            <a:off x="2938272" y="2258568"/>
+            <a:off x="2221992" y="2258568"/>
             <a:ext cx="1828800" cy="292608"/>
           </a:xfrm>
           <a:prstGeom prst="rect">
@@ -31947,7 +32342,7 @@
         </p:nvSpPr>
         <p:spPr>
           <a:xfrm>
-            <a:off x="2938272" y="2258568"/>
+            <a:off x="2221992" y="2258568"/>
             <a:ext cx="1828800" cy="292608"/>
           </a:xfrm>
           <a:prstGeom prst="rect">
@@ -31986,7 +32381,7 @@
         </p:nvSpPr>
         <p:spPr>
           <a:xfrm>
-            <a:off x="2938272" y="2569464"/>
+            <a:off x="2221992" y="2569464"/>
             <a:ext cx="1828800" cy="201168"/>
           </a:xfrm>
           <a:prstGeom prst="rect">
@@ -32025,7 +32420,7 @@
         </p:nvSpPr>
         <p:spPr>
           <a:xfrm>
-            <a:off x="5803392" y="2258568"/>
+            <a:off x="4370832" y="2258568"/>
             <a:ext cx="1828800" cy="292608"/>
           </a:xfrm>
           <a:prstGeom prst="rect">
@@ -32059,7 +32454,7 @@
         </p:nvSpPr>
         <p:spPr>
           <a:xfrm>
-            <a:off x="5803392" y="2258568"/>
+            <a:off x="4370832" y="2258568"/>
             <a:ext cx="1828800" cy="292608"/>
           </a:xfrm>
           <a:prstGeom prst="rect">
@@ -32098,7 +32493,7 @@
         </p:nvSpPr>
         <p:spPr>
           <a:xfrm>
-            <a:off x="5803392" y="2569464"/>
+            <a:off x="4370832" y="2569464"/>
             <a:ext cx="1828800" cy="201168"/>
           </a:xfrm>
           <a:prstGeom prst="rect">
@@ -32123,7 +32518,7 @@
                 <a:ea typeface="Calibri" pitchFamily="34" charset="-122"/>
                 <a:cs typeface="Calibri" pitchFamily="34" charset="-120"/>
               </a:rPr>
-              <a:t>to give work to</a:t>
+              <a:t>to give work or use</a:t>
             </a:r>
             <a:endParaRPr lang="en-US" sz="850" dirty="0"/>
           </a:p>
@@ -32132,6 +32527,118 @@
       <p:sp>
         <p:nvSpPr>
           <p:cNvPr id="22" name="Shape 20"/>
+          <p:cNvSpPr/>
+          <p:nvPr/>
+        </p:nvSpPr>
+        <p:spPr>
+          <a:xfrm>
+            <a:off x="6519672" y="2258568"/>
+            <a:ext cx="1828800" cy="292608"/>
+          </a:xfrm>
+          <a:prstGeom prst="rect">
+            <a:avLst>
+              <a:gd name="adj" fmla="val 25000"/>
+            </a:avLst>
+          </a:prstGeom>
+          <a:solidFill>
+            <a:srgbClr val="FCE7F3"/>
+          </a:solidFill>
+          <a:ln w="19050">
+            <a:solidFill>
+              <a:srgbClr val="DB2777"/>
+            </a:solidFill>
+            <a:prstDash val="solid"/>
+          </a:ln>
+          <a:effectLst>
+            <a:outerShdw sx="100000" sy="100000" kx="0" ky="0" algn="bl" rotWithShape="0" blurRad="101600" dist="38100" dir="8100000">
+              <a:srgbClr val="000000">
+                <a:alpha val="12000"/>
+              </a:srgbClr>
+            </a:outerShdw>
+          </a:effectLst>
+        </p:spPr>
+      </p:sp>
+      <p:sp>
+        <p:nvSpPr>
+          <p:cNvPr id="23" name="Text 21"/>
+          <p:cNvSpPr/>
+          <p:nvPr/>
+        </p:nvSpPr>
+        <p:spPr>
+          <a:xfrm>
+            <a:off x="6519672" y="2258568"/>
+            <a:ext cx="1828800" cy="292608"/>
+          </a:xfrm>
+          <a:prstGeom prst="rect">
+            <a:avLst/>
+          </a:prstGeom>
+          <a:noFill/>
+          <a:ln/>
+        </p:spPr>
+        <p:txBody>
+          <a:bodyPr wrap="square" lIns="0" tIns="0" rIns="0" bIns="0" rtlCol="0" anchor="ctr"/>
+          <a:lstStyle/>
+          <a:p>
+            <a:pPr algn="ctr" indent="0" marL="0">
+              <a:buNone/>
+            </a:pPr>
+            <a:r>
+              <a:rPr lang="en-US" sz="1300" b="1" dirty="0">
+                <a:solidFill>
+                  <a:srgbClr val="9D174D"/>
+                </a:solidFill>
+                <a:latin typeface="Trebuchet MS" pitchFamily="34" charset="0"/>
+                <a:ea typeface="Trebuchet MS" pitchFamily="34" charset="-122"/>
+                <a:cs typeface="Trebuchet MS" pitchFamily="34" charset="-120"/>
+              </a:rPr>
+              <a:t>ed</a:t>
+            </a:r>
+            <a:endParaRPr lang="en-US" sz="1300" dirty="0"/>
+          </a:p>
+        </p:txBody>
+      </p:sp>
+      <p:sp>
+        <p:nvSpPr>
+          <p:cNvPr id="24" name="Text 22"/>
+          <p:cNvSpPr/>
+          <p:nvPr/>
+        </p:nvSpPr>
+        <p:spPr>
+          <a:xfrm>
+            <a:off x="6519672" y="2569464"/>
+            <a:ext cx="1828800" cy="201168"/>
+          </a:xfrm>
+          <a:prstGeom prst="rect">
+            <a:avLst/>
+          </a:prstGeom>
+          <a:noFill/>
+          <a:ln/>
+        </p:spPr>
+        <p:txBody>
+          <a:bodyPr wrap="square" lIns="0" tIns="0" rIns="0" bIns="0" rtlCol="0" anchor="t"/>
+          <a:lstStyle/>
+          <a:p>
+            <a:pPr algn="ctr" indent="0" marL="0">
+              <a:buNone/>
+            </a:pPr>
+            <a:r>
+              <a:rPr lang="en-US" sz="850" dirty="0">
+                <a:solidFill>
+                  <a:srgbClr val="475569"/>
+                </a:solidFill>
+                <a:latin typeface="Calibri" pitchFamily="34" charset="0"/>
+                <a:ea typeface="Calibri" pitchFamily="34" charset="-122"/>
+                <a:cs typeface="Calibri" pitchFamily="34" charset="-120"/>
+              </a:rPr>
+              <a:t>past tense</a:t>
+            </a:r>
+            <a:endParaRPr lang="en-US" sz="850" dirty="0"/>
+          </a:p>
+        </p:txBody>
+      </p:sp>
+      <p:sp>
+        <p:nvSpPr>
+          <p:cNvPr id="25" name="Shape 23"/>
           <p:cNvSpPr/>
           <p:nvPr/>
         </p:nvSpPr>
@@ -32158,7 +32665,7 @@
       </p:sp>
       <p:sp>
         <p:nvSpPr>
-          <p:cNvPr id="23" name="Text 21"/>
+          <p:cNvPr id="26" name="Text 24"/>
           <p:cNvSpPr/>
           <p:nvPr/>
         </p:nvSpPr>
@@ -32197,7 +32704,7 @@
       </p:sp>
       <p:sp>
         <p:nvSpPr>
-          <p:cNvPr id="24" name="Shape 22"/>
+          <p:cNvPr id="27" name="Shape 25"/>
           <p:cNvSpPr/>
           <p:nvPr/>
         </p:nvSpPr>
@@ -32224,7 +32731,7 @@
       </p:sp>
       <p:sp>
         <p:nvSpPr>
-          <p:cNvPr id="25" name="Shape 23"/>
+          <p:cNvPr id="28" name="Shape 26"/>
           <p:cNvSpPr/>
           <p:nvPr/>
         </p:nvSpPr>
@@ -32251,7 +32758,7 @@
       </p:sp>
       <p:sp>
         <p:nvSpPr>
-          <p:cNvPr id="26" name="Text 24"/>
+          <p:cNvPr id="29" name="Text 27"/>
           <p:cNvSpPr/>
           <p:nvPr/>
         </p:nvSpPr>
@@ -32290,7 +32797,7 @@
       </p:sp>
       <p:sp>
         <p:nvSpPr>
-          <p:cNvPr id="27" name="Text 25"/>
+          <p:cNvPr id="30" name="Text 28"/>
           <p:cNvSpPr/>
           <p:nvPr/>
         </p:nvSpPr>
@@ -32329,7 +32836,7 @@
       </p:sp>
       <p:sp>
         <p:nvSpPr>
-          <p:cNvPr id="28" name="Shape 26"/>
+          <p:cNvPr id="31" name="Shape 29"/>
           <p:cNvSpPr/>
           <p:nvPr/>
         </p:nvSpPr>
@@ -32356,7 +32863,7 @@
       </p:sp>
       <p:sp>
         <p:nvSpPr>
-          <p:cNvPr id="29" name="Text 27"/>
+          <p:cNvPr id="32" name="Text 30"/>
           <p:cNvSpPr/>
           <p:nvPr/>
         </p:nvSpPr>
@@ -32395,7 +32902,7 @@
       </p:sp>
       <p:sp>
         <p:nvSpPr>
-          <p:cNvPr id="30" name="Text 28"/>
+          <p:cNvPr id="33" name="Text 31"/>
           <p:cNvSpPr/>
           <p:nvPr/>
         </p:nvSpPr>
@@ -32434,7 +32941,7 @@
       </p:sp>
       <p:sp>
         <p:nvSpPr>
-          <p:cNvPr id="31" name="Shape 29"/>
+          <p:cNvPr id="34" name="Shape 32"/>
           <p:cNvSpPr/>
           <p:nvPr/>
         </p:nvSpPr>
@@ -32461,7 +32968,7 @@
       </p:sp>
       <p:sp>
         <p:nvSpPr>
-          <p:cNvPr id="32" name="Text 30"/>
+          <p:cNvPr id="35" name="Text 33"/>
           <p:cNvSpPr/>
           <p:nvPr/>
         </p:nvSpPr>
@@ -32492,7 +32999,7 @@
                 <a:ea typeface="Trebuchet MS" pitchFamily="34" charset="-122"/>
                 <a:cs typeface="Trebuchet MS" pitchFamily="34" charset="-120"/>
               </a:rPr>
-              <a:t>ploy</a:t>
+              <a:t>ployed</a:t>
             </a:r>
             <a:endParaRPr lang="en-US" sz="1400" dirty="0"/>
           </a:p>
@@ -32500,7 +33007,7 @@
       </p:sp>
       <p:sp>
         <p:nvSpPr>
-          <p:cNvPr id="33" name="Shape 31"/>
+          <p:cNvPr id="36" name="Shape 34"/>
           <p:cNvSpPr/>
           <p:nvPr/>
         </p:nvSpPr>
@@ -32527,7 +33034,7 @@
       </p:sp>
       <p:sp>
         <p:nvSpPr>
-          <p:cNvPr id="34" name="Text 32"/>
+          <p:cNvPr id="37" name="Text 35"/>
           <p:cNvSpPr/>
           <p:nvPr/>
         </p:nvSpPr>
@@ -32566,7 +33073,7 @@
       </p:sp>
       <p:sp>
         <p:nvSpPr>
-          <p:cNvPr id="35" name="Shape 33"/>
+          <p:cNvPr id="38" name="Shape 36"/>
           <p:cNvSpPr/>
           <p:nvPr/>
         </p:nvSpPr>
@@ -32593,13 +33100,13 @@
       </p:sp>
       <p:sp>
         <p:nvSpPr>
-          <p:cNvPr id="36" name="Shape 34"/>
-          <p:cNvSpPr/>
-          <p:nvPr/>
-        </p:nvSpPr>
-        <p:spPr>
-          <a:xfrm>
-            <a:off x="2254649" y="4169664"/>
+          <p:cNvPr id="39" name="Shape 37"/>
+          <p:cNvSpPr/>
+          <p:nvPr/>
+        </p:nvSpPr>
+        <p:spPr>
+          <a:xfrm>
+            <a:off x="2124837" y="4169664"/>
             <a:ext cx="685800" cy="475488"/>
           </a:xfrm>
           <a:prstGeom prst="rect">
@@ -32620,13 +33127,13 @@
       </p:sp>
       <p:sp>
         <p:nvSpPr>
-          <p:cNvPr id="37" name="Text 35"/>
-          <p:cNvSpPr/>
-          <p:nvPr/>
-        </p:nvSpPr>
-        <p:spPr>
-          <a:xfrm>
-            <a:off x="2254649" y="4169664"/>
+          <p:cNvPr id="40" name="Text 38"/>
+          <p:cNvSpPr/>
+          <p:nvPr/>
+        </p:nvSpPr>
+        <p:spPr>
+          <a:xfrm>
+            <a:off x="2124837" y="4169664"/>
             <a:ext cx="685800" cy="475488"/>
           </a:xfrm>
           <a:prstGeom prst="rect">
@@ -32659,13 +33166,13 @@
       </p:sp>
       <p:sp>
         <p:nvSpPr>
-          <p:cNvPr id="38" name="Shape 36"/>
-          <p:cNvSpPr/>
-          <p:nvPr/>
-        </p:nvSpPr>
-        <p:spPr>
-          <a:xfrm>
-            <a:off x="3293146" y="4169664"/>
+          <p:cNvPr id="41" name="Shape 39"/>
+          <p:cNvSpPr/>
+          <p:nvPr/>
+        </p:nvSpPr>
+        <p:spPr>
+          <a:xfrm>
+            <a:off x="3033522" y="4169664"/>
             <a:ext cx="685800" cy="475488"/>
           </a:xfrm>
           <a:prstGeom prst="rect">
@@ -32686,13 +33193,13 @@
       </p:sp>
       <p:sp>
         <p:nvSpPr>
-          <p:cNvPr id="39" name="Text 37"/>
-          <p:cNvSpPr/>
-          <p:nvPr/>
-        </p:nvSpPr>
-        <p:spPr>
-          <a:xfrm>
-            <a:off x="3293146" y="4169664"/>
+          <p:cNvPr id="42" name="Text 40"/>
+          <p:cNvSpPr/>
+          <p:nvPr/>
+        </p:nvSpPr>
+        <p:spPr>
+          <a:xfrm>
+            <a:off x="3033522" y="4169664"/>
             <a:ext cx="685800" cy="475488"/>
           </a:xfrm>
           <a:prstGeom prst="rect">
@@ -32725,13 +33232,13 @@
       </p:sp>
       <p:sp>
         <p:nvSpPr>
-          <p:cNvPr id="40" name="Shape 38"/>
-          <p:cNvSpPr/>
-          <p:nvPr/>
-        </p:nvSpPr>
-        <p:spPr>
-          <a:xfrm>
-            <a:off x="4331643" y="4169664"/>
+          <p:cNvPr id="43" name="Shape 41"/>
+          <p:cNvSpPr/>
+          <p:nvPr/>
+        </p:nvSpPr>
+        <p:spPr>
+          <a:xfrm>
+            <a:off x="3942207" y="4169664"/>
             <a:ext cx="685800" cy="475488"/>
           </a:xfrm>
           <a:prstGeom prst="rect">
@@ -32752,13 +33259,13 @@
       </p:sp>
       <p:sp>
         <p:nvSpPr>
-          <p:cNvPr id="41" name="Text 39"/>
-          <p:cNvSpPr/>
-          <p:nvPr/>
-        </p:nvSpPr>
-        <p:spPr>
-          <a:xfrm>
-            <a:off x="4331643" y="4169664"/>
+          <p:cNvPr id="44" name="Text 42"/>
+          <p:cNvSpPr/>
+          <p:nvPr/>
+        </p:nvSpPr>
+        <p:spPr>
+          <a:xfrm>
+            <a:off x="3942207" y="4169664"/>
             <a:ext cx="685800" cy="475488"/>
           </a:xfrm>
           <a:prstGeom prst="rect">
@@ -32791,13 +33298,13 @@
       </p:sp>
       <p:sp>
         <p:nvSpPr>
-          <p:cNvPr id="42" name="Shape 40"/>
-          <p:cNvSpPr/>
-          <p:nvPr/>
-        </p:nvSpPr>
-        <p:spPr>
-          <a:xfrm>
-            <a:off x="5370141" y="4169664"/>
+          <p:cNvPr id="45" name="Shape 43"/>
+          <p:cNvSpPr/>
+          <p:nvPr/>
+        </p:nvSpPr>
+        <p:spPr>
+          <a:xfrm>
+            <a:off x="4850892" y="4169664"/>
             <a:ext cx="685800" cy="475488"/>
           </a:xfrm>
           <a:prstGeom prst="rect">
@@ -32818,13 +33325,13 @@
       </p:sp>
       <p:sp>
         <p:nvSpPr>
-          <p:cNvPr id="43" name="Text 41"/>
-          <p:cNvSpPr/>
-          <p:nvPr/>
-        </p:nvSpPr>
-        <p:spPr>
-          <a:xfrm>
-            <a:off x="5370141" y="4169664"/>
+          <p:cNvPr id="46" name="Text 44"/>
+          <p:cNvSpPr/>
+          <p:nvPr/>
+        </p:nvSpPr>
+        <p:spPr>
+          <a:xfrm>
+            <a:off x="4850892" y="4169664"/>
             <a:ext cx="685800" cy="475488"/>
           </a:xfrm>
           <a:prstGeom prst="rect">
@@ -32857,13 +33364,13 @@
       </p:sp>
       <p:sp>
         <p:nvSpPr>
-          <p:cNvPr id="44" name="Shape 42"/>
-          <p:cNvSpPr/>
-          <p:nvPr/>
-        </p:nvSpPr>
-        <p:spPr>
-          <a:xfrm>
-            <a:off x="6408638" y="4169664"/>
+          <p:cNvPr id="47" name="Shape 45"/>
+          <p:cNvSpPr/>
+          <p:nvPr/>
+        </p:nvSpPr>
+        <p:spPr>
+          <a:xfrm>
+            <a:off x="5759577" y="4169664"/>
             <a:ext cx="685800" cy="475488"/>
           </a:xfrm>
           <a:prstGeom prst="rect">
@@ -32884,13 +33391,13 @@
       </p:sp>
       <p:sp>
         <p:nvSpPr>
-          <p:cNvPr id="45" name="Text 43"/>
-          <p:cNvSpPr/>
-          <p:nvPr/>
-        </p:nvSpPr>
-        <p:spPr>
-          <a:xfrm>
-            <a:off x="6408638" y="4169664"/>
+          <p:cNvPr id="48" name="Text 46"/>
+          <p:cNvSpPr/>
+          <p:nvPr/>
+        </p:nvSpPr>
+        <p:spPr>
+          <a:xfrm>
+            <a:off x="5759577" y="4169664"/>
             <a:ext cx="685800" cy="475488"/>
           </a:xfrm>
           <a:prstGeom prst="rect">
@@ -32923,13 +33430,13 @@
       </p:sp>
       <p:sp>
         <p:nvSpPr>
-          <p:cNvPr id="46" name="Shape 44"/>
-          <p:cNvSpPr/>
-          <p:nvPr/>
-        </p:nvSpPr>
-        <p:spPr>
-          <a:xfrm>
-            <a:off x="7447135" y="4169664"/>
+          <p:cNvPr id="49" name="Shape 47"/>
+          <p:cNvSpPr/>
+          <p:nvPr/>
+        </p:nvSpPr>
+        <p:spPr>
+          <a:xfrm>
+            <a:off x="6668262" y="4169664"/>
             <a:ext cx="685800" cy="475488"/>
           </a:xfrm>
           <a:prstGeom prst="rect">
@@ -32950,13 +33457,13 @@
       </p:sp>
       <p:sp>
         <p:nvSpPr>
-          <p:cNvPr id="47" name="Text 45"/>
-          <p:cNvSpPr/>
-          <p:nvPr/>
-        </p:nvSpPr>
-        <p:spPr>
-          <a:xfrm>
-            <a:off x="7447135" y="4169664"/>
+          <p:cNvPr id="50" name="Text 48"/>
+          <p:cNvSpPr/>
+          <p:nvPr/>
+        </p:nvSpPr>
+        <p:spPr>
+          <a:xfrm>
+            <a:off x="6668262" y="4169664"/>
             <a:ext cx="685800" cy="475488"/>
           </a:xfrm>
           <a:prstGeom prst="rect">
@@ -32982,6 +33489,72 @@
                 <a:cs typeface="Trebuchet MS" pitchFamily="34" charset="-120"/>
               </a:rPr>
               <a:t>oy</a:t>
+            </a:r>
+            <a:endParaRPr lang="en-US" sz="900" dirty="0"/>
+          </a:p>
+        </p:txBody>
+      </p:sp>
+      <p:sp>
+        <p:nvSpPr>
+          <p:cNvPr id="51" name="Shape 49"/>
+          <p:cNvSpPr/>
+          <p:nvPr/>
+        </p:nvSpPr>
+        <p:spPr>
+          <a:xfrm>
+            <a:off x="7576947" y="4169664"/>
+            <a:ext cx="685800" cy="475488"/>
+          </a:xfrm>
+          <a:prstGeom prst="rect">
+            <a:avLst>
+              <a:gd name="adj" fmla="val 7692"/>
+            </a:avLst>
+          </a:prstGeom>
+          <a:solidFill>
+            <a:srgbClr val="FFFFFF"/>
+          </a:solidFill>
+          <a:ln w="12700">
+            <a:solidFill>
+              <a:srgbClr val="DB2777"/>
+            </a:solidFill>
+            <a:prstDash val="solid"/>
+          </a:ln>
+        </p:spPr>
+      </p:sp>
+      <p:sp>
+        <p:nvSpPr>
+          <p:cNvPr id="52" name="Text 50"/>
+          <p:cNvSpPr/>
+          <p:nvPr/>
+        </p:nvSpPr>
+        <p:spPr>
+          <a:xfrm>
+            <a:off x="7576947" y="4169664"/>
+            <a:ext cx="685800" cy="475488"/>
+          </a:xfrm>
+          <a:prstGeom prst="rect">
+            <a:avLst/>
+          </a:prstGeom>
+          <a:noFill/>
+          <a:ln/>
+        </p:spPr>
+        <p:txBody>
+          <a:bodyPr wrap="square" lIns="0" tIns="0" rIns="0" bIns="0" rtlCol="0" anchor="ctr"/>
+          <a:lstStyle/>
+          <a:p>
+            <a:pPr algn="ctr" indent="0" marL="0">
+              <a:buNone/>
+            </a:pPr>
+            <a:r>
+              <a:rPr lang="en-US" sz="900" b="1" dirty="0">
+                <a:solidFill>
+                  <a:srgbClr val="9D174D"/>
+                </a:solidFill>
+                <a:latin typeface="Trebuchet MS" pitchFamily="34" charset="0"/>
+                <a:ea typeface="Trebuchet MS" pitchFamily="34" charset="-122"/>
+                <a:cs typeface="Trebuchet MS" pitchFamily="34" charset="-120"/>
+              </a:rPr>
+              <a:t>ed</a:t>
             </a:r>
             <a:endParaRPr lang="en-US" sz="900" dirty="0"/>
           </a:p>
@@ -36050,7 +36623,7 @@
                 <a:ea typeface="Trebuchet MS" pitchFamily="34" charset="-122"/>
                 <a:cs typeface="Trebuchet MS" pitchFamily="34" charset="-120"/>
               </a:rPr>
-              <a:t>self-employed</a:t>
+              <a:t>reemployed</a:t>
             </a:r>
             <a:endParaRPr lang="en-US" sz="1200" dirty="0"/>
           </a:p>
@@ -37238,7 +37811,7 @@
                 <a:ea typeface="Calibri" pitchFamily="34" charset="-122"/>
                 <a:cs typeface="Calibri" pitchFamily="34" charset="-120"/>
               </a:rPr>
-              <a:t>1.  An employer is the person who pays workers to do a job.</a:t>
+              <a:t>1.  An employer is someone who gives other people jobs.</a:t>
             </a:r>
             <a:endParaRPr lang="en-US" sz="1300" dirty="0"/>
           </a:p>
@@ -37377,7 +37950,7 @@
                 <a:ea typeface="Calibri" pitchFamily="34" charset="-122"/>
                 <a:cs typeface="Calibri" pitchFamily="34" charset="-120"/>
               </a:rPr>
-              <a:t>2.  The word 'unemployment' means having too many jobs to choose from.</a:t>
+              <a:t>2.  'Employment' means having or providing paid work.</a:t>
             </a:r>
             <a:endParaRPr lang="en-US" sz="1300" dirty="0"/>
           </a:p>
@@ -37400,11 +37973,11 @@
             </a:avLst>
           </a:prstGeom>
           <a:solidFill>
-            <a:srgbClr val="FEE2E2"/>
-          </a:solidFill>
-          <a:ln w="12700">
-            <a:solidFill>
-              <a:srgbClr val="DC2626"/>
+            <a:srgbClr val="DCFCE7"/>
+          </a:solidFill>
+          <a:ln w="12700">
+            <a:solidFill>
+              <a:srgbClr val="16A34A"/>
             </a:solidFill>
             <a:prstDash val="solid"/>
           </a:ln>
@@ -37437,13 +38010,13 @@
             <a:r>
               <a:rPr lang="en-US" sz="1100" b="1" dirty="0">
                 <a:solidFill>
-                  <a:srgbClr val="DC2626"/>
+                  <a:srgbClr val="16A34A"/>
                 </a:solidFill>
                 <a:latin typeface="Trebuchet MS" pitchFamily="34" charset="0"/>
                 <a:ea typeface="Trebuchet MS" pitchFamily="34" charset="-122"/>
                 <a:cs typeface="Trebuchet MS" pitchFamily="34" charset="-120"/>
               </a:rPr>
-              <a:t>FALSE</a:t>
+              <a:t>TRUE</a:t>
             </a:r>
             <a:endParaRPr lang="en-US" sz="1100" dirty="0"/>
           </a:p>
@@ -37516,7 +38089,7 @@
                 <a:ea typeface="Calibri" pitchFamily="34" charset="-122"/>
                 <a:cs typeface="Calibri" pitchFamily="34" charset="-120"/>
               </a:rPr>
-              <a:t>3.  The root 'employ' relates to using or giving work to someone.</a:t>
+              <a:t>3.  The prefix 'un' in 'unemployed' means 'again'.</a:t>
             </a:r>
             <a:endParaRPr lang="en-US" sz="1300" dirty="0"/>
           </a:p>
@@ -37539,11 +38112,11 @@
             </a:avLst>
           </a:prstGeom>
           <a:solidFill>
-            <a:srgbClr val="DCFCE7"/>
-          </a:solidFill>
-          <a:ln w="12700">
-            <a:solidFill>
-              <a:srgbClr val="16A34A"/>
+            <a:srgbClr val="FEE2E2"/>
+          </a:solidFill>
+          <a:ln w="12700">
+            <a:solidFill>
+              <a:srgbClr val="DC2626"/>
             </a:solidFill>
             <a:prstDash val="solid"/>
           </a:ln>
@@ -37576,13 +38149,13 @@
             <a:r>
               <a:rPr lang="en-US" sz="1100" b="1" dirty="0">
                 <a:solidFill>
-                  <a:srgbClr val="16A34A"/>
+                  <a:srgbClr val="DC2626"/>
                 </a:solidFill>
                 <a:latin typeface="Trebuchet MS" pitchFamily="34" charset="0"/>
                 <a:ea typeface="Trebuchet MS" pitchFamily="34" charset="-122"/>
                 <a:cs typeface="Trebuchet MS" pitchFamily="34" charset="-120"/>
               </a:rPr>
-              <a:t>TRUE</a:t>
+              <a:t>FALSE</a:t>
             </a:r>
             <a:endParaRPr lang="en-US" sz="1100" dirty="0"/>
           </a:p>
@@ -37655,7 +38228,7 @@
                 <a:ea typeface="Calibri" pitchFamily="34" charset="-122"/>
                 <a:cs typeface="Calibri" pitchFamily="34" charset="-120"/>
               </a:rPr>
-              <a:t>4.  An employee is a person who works for an employer and receives pay.</a:t>
+              <a:t>4.  The word 'employee' contains the root 'employ'.</a:t>
             </a:r>
             <a:endParaRPr lang="en-US" sz="1300" dirty="0"/>
           </a:p>
@@ -37794,7 +38367,7 @@
                 <a:ea typeface="Calibri" pitchFamily="34" charset="-122"/>
                 <a:cs typeface="Calibri" pitchFamily="34" charset="-120"/>
               </a:rPr>
-              <a:t>5.  The prefix 're' in 'reemploy' means 'before'.</a:t>
+              <a:t>5.  The root 'employ' comes from ancient Greek.</a:t>
             </a:r>
             <a:endParaRPr lang="en-US" sz="1300" dirty="0"/>
           </a:p>
@@ -41073,7 +41646,7 @@
                 <a:ea typeface="Calibri" pitchFamily="34" charset="-122"/>
                 <a:cs typeface="Calibri" pitchFamily="34" charset="-120"/>
               </a:rPr>
-              <a:t>A person who is paid to work for someone else.</a:t>
+              <a:t>A person who works for someone else and gets paid.</a:t>
             </a:r>
             <a:endParaRPr lang="en-US" sz="1200" dirty="0"/>
           </a:p>
@@ -41351,7 +41924,7 @@
                 <a:ea typeface="Calibri" pitchFamily="34" charset="-122"/>
                 <a:cs typeface="Calibri" pitchFamily="34" charset="-120"/>
               </a:rPr>
-              <a:t>The situation when many people do not have jobs.</a:t>
+              <a:t>The situation of people not having jobs.</a:t>
             </a:r>
             <a:endParaRPr lang="en-US" sz="1200" dirty="0"/>
           </a:p>
@@ -41490,7 +42063,7 @@
                 <a:ea typeface="Calibri" pitchFamily="34" charset="-122"/>
                 <a:cs typeface="Calibri" pitchFamily="34" charset="-120"/>
               </a:rPr>
-              <a:t>A person or company that pays others to do work.</a:t>
+              <a:t>A person or company that gives other people jobs.</a:t>
             </a:r>
             <a:endParaRPr lang="en-US" sz="1200" dirty="0"/>
           </a:p>
@@ -41768,7 +42341,7 @@
                 <a:ea typeface="Calibri" pitchFamily="34" charset="-122"/>
                 <a:cs typeface="Calibri" pitchFamily="34" charset="-120"/>
               </a:rPr>
-              <a:t>The state of having a paid job or the act of giving someone work.</a:t>
+              <a:t>The state of having a job or paid work.</a:t>
             </a:r>
             <a:endParaRPr lang="en-US" sz="1200" dirty="0"/>
           </a:p>
@@ -42402,7 +42975,7 @@
                 <a:ea typeface="Calibri" pitchFamily="34" charset="-122"/>
                 <a:cs typeface="Calibri" pitchFamily="34" charset="-120"/>
               </a:rPr>
-              <a:t>The local bakery decided to employ three new workers before the busy holiday season.</a:t>
+              <a:t>The factory decided to employ twenty new workers before the busy season began.</a:t>
             </a:r>
             <a:endParaRPr lang="en-US" sz="1500" dirty="0"/>
           </a:p>
@@ -42566,7 +43139,7 @@
                 <a:ea typeface="Calibri" pitchFamily="34" charset="-122"/>
                 <a:cs typeface="Calibri" pitchFamily="34" charset="-120"/>
               </a:rPr>
-              <a:t>After finishing university, she was thrilled to find employment at a science research centre.</a:t>
+              <a:t>After months of searching, she was thrilled to finally find employment at the local bakery.</a:t>
             </a:r>
             <a:endParaRPr lang="en-US" sz="1500" dirty="0"/>
           </a:p>
@@ -42730,7 +43303,7 @@
                 <a:ea typeface="Calibri" pitchFamily="34" charset="-122"/>
                 <a:cs typeface="Calibri" pitchFamily="34" charset="-120"/>
               </a:rPr>
-              <a:t>The unemployed man visited the job centre every week, hoping to find work soon.</a:t>
+              <a:t>The number of unemployed people in the town dropped when the new shopping centre opened.</a:t>
             </a:r>
             <a:endParaRPr lang="en-US" sz="1500" dirty="0"/>
           </a:p>

--- a/output/wordlabs-employ-3day.pptx
+++ b/output/wordlabs-employ-3day.pptx
@@ -4240,7 +4240,7 @@
                 <a:ea typeface="Calibri" pitchFamily="34" charset="-122"/>
                 <a:cs typeface="Calibri" pitchFamily="34" charset="-120"/>
               </a:rPr>
-              <a:t>"to use or give work"</a:t>
+              <a:t>"give work to; use"</a:t>
             </a:r>
             <a:endParaRPr lang="en-US" sz="2200" dirty="0"/>
           </a:p>
@@ -4279,7 +4279,7 @@
                 <a:ea typeface="Calibri" pitchFamily="34" charset="-122"/>
                 <a:cs typeface="Calibri" pitchFamily="34" charset="-120"/>
               </a:rPr>
-              <a:t>Origin: Latin: implicare</a:t>
+              <a:t>Origin: Core English root</a:t>
             </a:r>
             <a:endParaRPr lang="en-US" sz="1300" dirty="0"/>
           </a:p>
@@ -5288,7 +5288,7 @@
                 <a:ea typeface="Calibri" pitchFamily="34" charset="-122"/>
                 <a:cs typeface="Calibri" pitchFamily="34" charset="-120"/>
               </a:rPr>
-              <a:t>Word Labs  •  wordlabs.app  •  Root: 'employ' = to use or give work</a:t>
+              <a:t>Word Labs  •  wordlabs.app  •  Root: 'employ' = give work to; use</a:t>
             </a:r>
             <a:endParaRPr lang="en-US" sz="800" dirty="0"/>
           </a:p>
@@ -5622,7 +5622,7 @@
                 <a:ea typeface="Trebuchet MS" pitchFamily="34" charset="-122"/>
                 <a:cs typeface="Trebuchet MS" pitchFamily="34" charset="-120"/>
               </a:rPr>
-              <a:t>0</a:t>
+              <a:t>1</a:t>
             </a:r>
             <a:pPr algn="ctr" indent="0" marL="0">
               <a:buNone/>
@@ -5928,7 +5928,7 @@
                 <a:ea typeface="Calibri" pitchFamily="34" charset="-122"/>
                 <a:cs typeface="Calibri" pitchFamily="34" charset="-120"/>
               </a:rPr>
-              <a:t>Word Labs  •  wordlabs.app  •  Root: 'employ' = to use or give work</a:t>
+              <a:t>Word Labs  •  wordlabs.app  •  Root: 'employ' = give work to; use</a:t>
             </a:r>
             <a:endParaRPr lang="en-US" sz="800" dirty="0"/>
           </a:p>
@@ -6040,7 +6040,7 @@
                 <a:ea typeface="Calibri" pitchFamily="34" charset="-122"/>
                 <a:cs typeface="Calibri" pitchFamily="34" charset="-120"/>
               </a:rPr>
-              <a:t>The </a:t>
+              <a:t>My uncle has been </a:t>
             </a:r>
             <a:pPr algn="l" indent="0" marL="0">
               <a:buNone/>
@@ -6057,7 +6057,7 @@
                 <a:ea typeface="Calibri" pitchFamily="34" charset="-122"/>
                 <a:cs typeface="Calibri" pitchFamily="34" charset="-120"/>
               </a:rPr>
-              <a:t>employer</a:t>
+              <a:t>unemployed</a:t>
             </a:r>
             <a:pPr algn="l" indent="0" marL="0">
               <a:buNone/>
@@ -6071,7 +6071,7 @@
                 <a:ea typeface="Calibri" pitchFamily="34" charset="-122"/>
                 <a:cs typeface="Calibri" pitchFamily="34" charset="-120"/>
               </a:rPr>
-              <a:t> was pleased to welcome a new </a:t>
+              <a:t> since the factory closed down. Without any qualifications, he worried he might be </a:t>
             </a:r>
             <a:pPr algn="l" indent="0" marL="0">
               <a:buNone/>
@@ -6088,7 +6088,7 @@
                 <a:ea typeface="Calibri" pitchFamily="34" charset="-122"/>
                 <a:cs typeface="Calibri" pitchFamily="34" charset="-120"/>
               </a:rPr>
-              <a:t>employee</a:t>
+              <a:t>unemployable</a:t>
             </a:r>
             <a:pPr algn="l" indent="0" marL="0">
               <a:buNone/>
@@ -6102,7 +6102,7 @@
                 <a:ea typeface="Calibri" pitchFamily="34" charset="-122"/>
                 <a:cs typeface="Calibri" pitchFamily="34" charset="-120"/>
               </a:rPr>
-              <a:t> to the team.</a:t>
+              <a:t>.</a:t>
             </a:r>
             <a:endParaRPr lang="en-US" sz="1800" dirty="0"/>
           </a:p>
@@ -6257,7 +6257,7 @@
                 <a:ea typeface="Trebuchet MS" pitchFamily="34" charset="-122"/>
                 <a:cs typeface="Trebuchet MS" pitchFamily="34" charset="-120"/>
               </a:rPr>
-              <a:t>employer</a:t>
+              <a:t>unemployed</a:t>
             </a:r>
             <a:endParaRPr lang="en-US" sz="1400" dirty="0"/>
           </a:p>
@@ -6385,7 +6385,7 @@
                 <a:ea typeface="Trebuchet MS" pitchFamily="34" charset="-122"/>
                 <a:cs typeface="Trebuchet MS" pitchFamily="34" charset="-120"/>
               </a:rPr>
-              <a:t>employee</a:t>
+              <a:t>unemployable</a:t>
             </a:r>
             <a:endParaRPr lang="en-US" sz="1400" dirty="0"/>
           </a:p>
@@ -6716,7 +6716,7 @@
                 <a:ea typeface="Calibri" pitchFamily="34" charset="-122"/>
                 <a:cs typeface="Calibri" pitchFamily="34" charset="-120"/>
               </a:rPr>
-              <a:t>Word Labs  •  wordlabs.app  •  Root: 'employ' = to use or give work</a:t>
+              <a:t>Word Labs  •  wordlabs.app  •  Root: 'employ' = give work to; use</a:t>
             </a:r>
             <a:endParaRPr lang="en-US" sz="800" dirty="0"/>
           </a:p>
@@ -6855,7 +6855,7 @@
                 <a:ea typeface="Trebuchet MS" pitchFamily="34" charset="-122"/>
                 <a:cs typeface="Trebuchet MS" pitchFamily="34" charset="-120"/>
               </a:rPr>
-              <a:t>employer</a:t>
+              <a:t>unemployed</a:t>
             </a:r>
             <a:endParaRPr lang="en-US" sz="2800" dirty="0"/>
           </a:p>
@@ -7543,7 +7543,7 @@
                 <a:ea typeface="Calibri" pitchFamily="34" charset="-122"/>
                 <a:cs typeface="Calibri" pitchFamily="34" charset="-120"/>
               </a:rPr>
-              <a:t>Word Labs  •  wordlabs.app  •  Root: 'employ' = to use or give work</a:t>
+              <a:t>Word Labs  •  wordlabs.app  •  Root: 'employ' = give work to; use</a:t>
             </a:r>
             <a:endParaRPr lang="en-US" sz="800" dirty="0"/>
           </a:p>
@@ -7682,7 +7682,7 @@
                 <a:ea typeface="Trebuchet MS" pitchFamily="34" charset="-122"/>
                 <a:cs typeface="Trebuchet MS" pitchFamily="34" charset="-120"/>
               </a:rPr>
-              <a:t>employer</a:t>
+              <a:t>unemployed</a:t>
             </a:r>
             <a:endParaRPr lang="en-US" sz="2800" dirty="0"/>
           </a:p>
@@ -7762,7 +7762,7 @@
         </p:nvSpPr>
         <p:spPr>
           <a:xfrm>
-            <a:off x="2938272" y="2258568"/>
+            <a:off x="2221992" y="2258568"/>
             <a:ext cx="1828800" cy="292608"/>
           </a:xfrm>
           <a:prstGeom prst="rect">
@@ -7771,11 +7771,11 @@
             </a:avLst>
           </a:prstGeom>
           <a:solidFill>
-            <a:srgbClr val="CCFBF1"/>
+            <a:srgbClr val="DDD6FE"/>
           </a:solidFill>
           <a:ln w="19050">
             <a:solidFill>
-              <a:srgbClr val="0D9488"/>
+              <a:srgbClr val="7C3AED"/>
             </a:solidFill>
             <a:prstDash val="solid"/>
           </a:ln>
@@ -7796,7 +7796,7 @@
         </p:nvSpPr>
         <p:spPr>
           <a:xfrm>
-            <a:off x="2938272" y="2258568"/>
+            <a:off x="2221992" y="2258568"/>
             <a:ext cx="1828800" cy="292608"/>
           </a:xfrm>
           <a:prstGeom prst="rect">
@@ -7815,13 +7815,13 @@
             <a:r>
               <a:rPr lang="en-US" sz="1300" b="1" dirty="0">
                 <a:solidFill>
-                  <a:srgbClr val="0F766E"/>
+                  <a:srgbClr val="4C1D95"/>
                 </a:solidFill>
                 <a:latin typeface="Trebuchet MS" pitchFamily="34" charset="0"/>
                 <a:ea typeface="Trebuchet MS" pitchFamily="34" charset="-122"/>
                 <a:cs typeface="Trebuchet MS" pitchFamily="34" charset="-120"/>
               </a:rPr>
-              <a:t>employ</a:t>
+              <a:t>un</a:t>
             </a:r>
             <a:endParaRPr lang="en-US" sz="1300" dirty="0"/>
           </a:p>
@@ -7835,7 +7835,7 @@
         </p:nvSpPr>
         <p:spPr>
           <a:xfrm>
-            <a:off x="2938272" y="2569464"/>
+            <a:off x="2221992" y="2569464"/>
             <a:ext cx="1828800" cy="201168"/>
           </a:xfrm>
           <a:prstGeom prst="rect">
@@ -7860,7 +7860,7 @@
                 <a:ea typeface="Calibri" pitchFamily="34" charset="-122"/>
                 <a:cs typeface="Calibri" pitchFamily="34" charset="-120"/>
               </a:rPr>
-              <a:t>to give work or use</a:t>
+              <a:t>not</a:t>
             </a:r>
             <a:endParaRPr lang="en-US" sz="850" dirty="0"/>
           </a:p>
@@ -7874,7 +7874,7 @@
         </p:nvSpPr>
         <p:spPr>
           <a:xfrm>
-            <a:off x="5803392" y="2258568"/>
+            <a:off x="4370832" y="2258568"/>
             <a:ext cx="1828800" cy="292608"/>
           </a:xfrm>
           <a:prstGeom prst="rect">
@@ -7883,11 +7883,11 @@
             </a:avLst>
           </a:prstGeom>
           <a:solidFill>
-            <a:srgbClr val="FCE7F3"/>
+            <a:srgbClr val="CCFBF1"/>
           </a:solidFill>
           <a:ln w="19050">
             <a:solidFill>
-              <a:srgbClr val="DB2777"/>
+              <a:srgbClr val="0D9488"/>
             </a:solidFill>
             <a:prstDash val="solid"/>
           </a:ln>
@@ -7908,7 +7908,7 @@
         </p:nvSpPr>
         <p:spPr>
           <a:xfrm>
-            <a:off x="5803392" y="2258568"/>
+            <a:off x="4370832" y="2258568"/>
             <a:ext cx="1828800" cy="292608"/>
           </a:xfrm>
           <a:prstGeom prst="rect">
@@ -7927,13 +7927,13 @@
             <a:r>
               <a:rPr lang="en-US" sz="1300" b="1" dirty="0">
                 <a:solidFill>
-                  <a:srgbClr val="9D174D"/>
+                  <a:srgbClr val="0F766E"/>
                 </a:solidFill>
                 <a:latin typeface="Trebuchet MS" pitchFamily="34" charset="0"/>
                 <a:ea typeface="Trebuchet MS" pitchFamily="34" charset="-122"/>
                 <a:cs typeface="Trebuchet MS" pitchFamily="34" charset="-120"/>
               </a:rPr>
-              <a:t>er</a:t>
+              <a:t>employ</a:t>
             </a:r>
             <a:endParaRPr lang="en-US" sz="1300" dirty="0"/>
           </a:p>
@@ -7947,7 +7947,7 @@
         </p:nvSpPr>
         <p:spPr>
           <a:xfrm>
-            <a:off x="5803392" y="2569464"/>
+            <a:off x="4370832" y="2569464"/>
             <a:ext cx="1828800" cy="201168"/>
           </a:xfrm>
           <a:prstGeom prst="rect">
@@ -7972,7 +7972,7 @@
                 <a:ea typeface="Calibri" pitchFamily="34" charset="-122"/>
                 <a:cs typeface="Calibri" pitchFamily="34" charset="-120"/>
               </a:rPr>
-              <a:t>one who does</a:t>
+              <a:t>give work to; use</a:t>
             </a:r>
             <a:endParaRPr lang="en-US" sz="850" dirty="0"/>
           </a:p>
@@ -7981,6 +7981,118 @@
       <p:sp>
         <p:nvSpPr>
           <p:cNvPr id="22" name="Shape 20"/>
+          <p:cNvSpPr/>
+          <p:nvPr/>
+        </p:nvSpPr>
+        <p:spPr>
+          <a:xfrm>
+            <a:off x="6519672" y="2258568"/>
+            <a:ext cx="1828800" cy="292608"/>
+          </a:xfrm>
+          <a:prstGeom prst="rect">
+            <a:avLst>
+              <a:gd name="adj" fmla="val 25000"/>
+            </a:avLst>
+          </a:prstGeom>
+          <a:solidFill>
+            <a:srgbClr val="FCE7F3"/>
+          </a:solidFill>
+          <a:ln w="19050">
+            <a:solidFill>
+              <a:srgbClr val="DB2777"/>
+            </a:solidFill>
+            <a:prstDash val="solid"/>
+          </a:ln>
+          <a:effectLst>
+            <a:outerShdw sx="100000" sy="100000" kx="0" ky="0" algn="bl" rotWithShape="0" blurRad="101600" dist="38100" dir="8100000">
+              <a:srgbClr val="000000">
+                <a:alpha val="12000"/>
+              </a:srgbClr>
+            </a:outerShdw>
+          </a:effectLst>
+        </p:spPr>
+      </p:sp>
+      <p:sp>
+        <p:nvSpPr>
+          <p:cNvPr id="23" name="Text 21"/>
+          <p:cNvSpPr/>
+          <p:nvPr/>
+        </p:nvSpPr>
+        <p:spPr>
+          <a:xfrm>
+            <a:off x="6519672" y="2258568"/>
+            <a:ext cx="1828800" cy="292608"/>
+          </a:xfrm>
+          <a:prstGeom prst="rect">
+            <a:avLst/>
+          </a:prstGeom>
+          <a:noFill/>
+          <a:ln/>
+        </p:spPr>
+        <p:txBody>
+          <a:bodyPr wrap="square" lIns="0" tIns="0" rIns="0" bIns="0" rtlCol="0" anchor="ctr"/>
+          <a:lstStyle/>
+          <a:p>
+            <a:pPr algn="ctr" indent="0" marL="0">
+              <a:buNone/>
+            </a:pPr>
+            <a:r>
+              <a:rPr lang="en-US" sz="1300" b="1" dirty="0">
+                <a:solidFill>
+                  <a:srgbClr val="9D174D"/>
+                </a:solidFill>
+                <a:latin typeface="Trebuchet MS" pitchFamily="34" charset="0"/>
+                <a:ea typeface="Trebuchet MS" pitchFamily="34" charset="-122"/>
+                <a:cs typeface="Trebuchet MS" pitchFamily="34" charset="-120"/>
+              </a:rPr>
+              <a:t>ed</a:t>
+            </a:r>
+            <a:endParaRPr lang="en-US" sz="1300" dirty="0"/>
+          </a:p>
+        </p:txBody>
+      </p:sp>
+      <p:sp>
+        <p:nvSpPr>
+          <p:cNvPr id="24" name="Text 22"/>
+          <p:cNvSpPr/>
+          <p:nvPr/>
+        </p:nvSpPr>
+        <p:spPr>
+          <a:xfrm>
+            <a:off x="6519672" y="2569464"/>
+            <a:ext cx="1828800" cy="201168"/>
+          </a:xfrm>
+          <a:prstGeom prst="rect">
+            <a:avLst/>
+          </a:prstGeom>
+          <a:noFill/>
+          <a:ln/>
+        </p:spPr>
+        <p:txBody>
+          <a:bodyPr wrap="square" lIns="0" tIns="0" rIns="0" bIns="0" rtlCol="0" anchor="t"/>
+          <a:lstStyle/>
+          <a:p>
+            <a:pPr algn="ctr" indent="0" marL="0">
+              <a:buNone/>
+            </a:pPr>
+            <a:r>
+              <a:rPr lang="en-US" sz="850" dirty="0">
+                <a:solidFill>
+                  <a:srgbClr val="475569"/>
+                </a:solidFill>
+                <a:latin typeface="Calibri" pitchFamily="34" charset="0"/>
+                <a:ea typeface="Calibri" pitchFamily="34" charset="-122"/>
+                <a:cs typeface="Calibri" pitchFamily="34" charset="-120"/>
+              </a:rPr>
+              <a:t>past tense</a:t>
+            </a:r>
+            <a:endParaRPr lang="en-US" sz="850" dirty="0"/>
+          </a:p>
+        </p:txBody>
+      </p:sp>
+      <p:sp>
+        <p:nvSpPr>
+          <p:cNvPr id="25" name="Shape 23"/>
           <p:cNvSpPr/>
           <p:nvPr/>
         </p:nvSpPr>
@@ -8007,7 +8119,7 @@
       </p:sp>
       <p:sp>
         <p:nvSpPr>
-          <p:cNvPr id="23" name="Text 21"/>
+          <p:cNvPr id="26" name="Text 24"/>
           <p:cNvSpPr/>
           <p:nvPr/>
         </p:nvSpPr>
@@ -8046,7 +8158,7 @@
       </p:sp>
       <p:sp>
         <p:nvSpPr>
-          <p:cNvPr id="24" name="Shape 22"/>
+          <p:cNvPr id="27" name="Shape 25"/>
           <p:cNvSpPr/>
           <p:nvPr/>
         </p:nvSpPr>
@@ -8073,7 +8185,7 @@
       </p:sp>
       <p:sp>
         <p:nvSpPr>
-          <p:cNvPr id="25" name="Text 23"/>
+          <p:cNvPr id="28" name="Text 26"/>
           <p:cNvSpPr/>
           <p:nvPr/>
         </p:nvSpPr>
@@ -8112,7 +8224,7 @@
       </p:sp>
       <p:sp>
         <p:nvSpPr>
-          <p:cNvPr id="26" name="Shape 24"/>
+          <p:cNvPr id="29" name="Shape 27"/>
           <p:cNvSpPr/>
           <p:nvPr/>
         </p:nvSpPr>
@@ -8139,7 +8251,7 @@
       </p:sp>
       <p:sp>
         <p:nvSpPr>
-          <p:cNvPr id="27" name="Text 25"/>
+          <p:cNvPr id="30" name="Text 28"/>
           <p:cNvSpPr/>
           <p:nvPr/>
         </p:nvSpPr>
@@ -8178,7 +8290,7 @@
       </p:sp>
       <p:sp>
         <p:nvSpPr>
-          <p:cNvPr id="28" name="Shape 26"/>
+          <p:cNvPr id="31" name="Shape 29"/>
           <p:cNvSpPr/>
           <p:nvPr/>
         </p:nvSpPr>
@@ -8205,7 +8317,7 @@
       </p:sp>
       <p:sp>
         <p:nvSpPr>
-          <p:cNvPr id="29" name="Text 27"/>
+          <p:cNvPr id="32" name="Text 30"/>
           <p:cNvSpPr/>
           <p:nvPr/>
         </p:nvSpPr>
@@ -8528,7 +8640,7 @@
                 <a:ea typeface="Calibri" pitchFamily="34" charset="-122"/>
                 <a:cs typeface="Calibri" pitchFamily="34" charset="-120"/>
               </a:rPr>
-              <a:t>Word Labs  •  wordlabs.app  •  Root: 'employ' = to use or give work</a:t>
+              <a:t>Word Labs  •  wordlabs.app  •  Root: 'employ' = give work to; use</a:t>
             </a:r>
             <a:endParaRPr lang="en-US" sz="800" dirty="0"/>
           </a:p>
@@ -8667,7 +8779,7 @@
                 <a:ea typeface="Trebuchet MS" pitchFamily="34" charset="-122"/>
                 <a:cs typeface="Trebuchet MS" pitchFamily="34" charset="-120"/>
               </a:rPr>
-              <a:t>employer</a:t>
+              <a:t>unemployed</a:t>
             </a:r>
             <a:endParaRPr lang="en-US" sz="2800" dirty="0"/>
           </a:p>
@@ -8747,7 +8859,7 @@
         </p:nvSpPr>
         <p:spPr>
           <a:xfrm>
-            <a:off x="2938272" y="2258568"/>
+            <a:off x="2221992" y="2258568"/>
             <a:ext cx="1828800" cy="292608"/>
           </a:xfrm>
           <a:prstGeom prst="rect">
@@ -8756,11 +8868,11 @@
             </a:avLst>
           </a:prstGeom>
           <a:solidFill>
-            <a:srgbClr val="CCFBF1"/>
+            <a:srgbClr val="DDD6FE"/>
           </a:solidFill>
           <a:ln w="19050">
             <a:solidFill>
-              <a:srgbClr val="0D9488"/>
+              <a:srgbClr val="7C3AED"/>
             </a:solidFill>
             <a:prstDash val="solid"/>
           </a:ln>
@@ -8781,7 +8893,7 @@
         </p:nvSpPr>
         <p:spPr>
           <a:xfrm>
-            <a:off x="2938272" y="2258568"/>
+            <a:off x="2221992" y="2258568"/>
             <a:ext cx="1828800" cy="292608"/>
           </a:xfrm>
           <a:prstGeom prst="rect">
@@ -8800,13 +8912,13 @@
             <a:r>
               <a:rPr lang="en-US" sz="1300" b="1" dirty="0">
                 <a:solidFill>
-                  <a:srgbClr val="0F766E"/>
+                  <a:srgbClr val="4C1D95"/>
                 </a:solidFill>
                 <a:latin typeface="Trebuchet MS" pitchFamily="34" charset="0"/>
                 <a:ea typeface="Trebuchet MS" pitchFamily="34" charset="-122"/>
                 <a:cs typeface="Trebuchet MS" pitchFamily="34" charset="-120"/>
               </a:rPr>
-              <a:t>employ</a:t>
+              <a:t>un</a:t>
             </a:r>
             <a:endParaRPr lang="en-US" sz="1300" dirty="0"/>
           </a:p>
@@ -8820,7 +8932,7 @@
         </p:nvSpPr>
         <p:spPr>
           <a:xfrm>
-            <a:off x="2938272" y="2569464"/>
+            <a:off x="2221992" y="2569464"/>
             <a:ext cx="1828800" cy="201168"/>
           </a:xfrm>
           <a:prstGeom prst="rect">
@@ -8845,7 +8957,7 @@
                 <a:ea typeface="Calibri" pitchFamily="34" charset="-122"/>
                 <a:cs typeface="Calibri" pitchFamily="34" charset="-120"/>
               </a:rPr>
-              <a:t>to give work or use</a:t>
+              <a:t>not</a:t>
             </a:r>
             <a:endParaRPr lang="en-US" sz="850" dirty="0"/>
           </a:p>
@@ -8859,7 +8971,7 @@
         </p:nvSpPr>
         <p:spPr>
           <a:xfrm>
-            <a:off x="5803392" y="2258568"/>
+            <a:off x="4370832" y="2258568"/>
             <a:ext cx="1828800" cy="292608"/>
           </a:xfrm>
           <a:prstGeom prst="rect">
@@ -8868,11 +8980,11 @@
             </a:avLst>
           </a:prstGeom>
           <a:solidFill>
-            <a:srgbClr val="FCE7F3"/>
+            <a:srgbClr val="CCFBF1"/>
           </a:solidFill>
           <a:ln w="19050">
             <a:solidFill>
-              <a:srgbClr val="DB2777"/>
+              <a:srgbClr val="0D9488"/>
             </a:solidFill>
             <a:prstDash val="solid"/>
           </a:ln>
@@ -8893,7 +9005,7 @@
         </p:nvSpPr>
         <p:spPr>
           <a:xfrm>
-            <a:off x="5803392" y="2258568"/>
+            <a:off x="4370832" y="2258568"/>
             <a:ext cx="1828800" cy="292608"/>
           </a:xfrm>
           <a:prstGeom prst="rect">
@@ -8912,13 +9024,13 @@
             <a:r>
               <a:rPr lang="en-US" sz="1300" b="1" dirty="0">
                 <a:solidFill>
-                  <a:srgbClr val="9D174D"/>
+                  <a:srgbClr val="0F766E"/>
                 </a:solidFill>
                 <a:latin typeface="Trebuchet MS" pitchFamily="34" charset="0"/>
                 <a:ea typeface="Trebuchet MS" pitchFamily="34" charset="-122"/>
                 <a:cs typeface="Trebuchet MS" pitchFamily="34" charset="-120"/>
               </a:rPr>
-              <a:t>er</a:t>
+              <a:t>employ</a:t>
             </a:r>
             <a:endParaRPr lang="en-US" sz="1300" dirty="0"/>
           </a:p>
@@ -8932,7 +9044,7 @@
         </p:nvSpPr>
         <p:spPr>
           <a:xfrm>
-            <a:off x="5803392" y="2569464"/>
+            <a:off x="4370832" y="2569464"/>
             <a:ext cx="1828800" cy="201168"/>
           </a:xfrm>
           <a:prstGeom prst="rect">
@@ -8957,7 +9069,7 @@
                 <a:ea typeface="Calibri" pitchFamily="34" charset="-122"/>
                 <a:cs typeface="Calibri" pitchFamily="34" charset="-120"/>
               </a:rPr>
-              <a:t>one who does</a:t>
+              <a:t>give work to; use</a:t>
             </a:r>
             <a:endParaRPr lang="en-US" sz="850" dirty="0"/>
           </a:p>
@@ -8966,6 +9078,118 @@
       <p:sp>
         <p:nvSpPr>
           <p:cNvPr id="22" name="Shape 20"/>
+          <p:cNvSpPr/>
+          <p:nvPr/>
+        </p:nvSpPr>
+        <p:spPr>
+          <a:xfrm>
+            <a:off x="6519672" y="2258568"/>
+            <a:ext cx="1828800" cy="292608"/>
+          </a:xfrm>
+          <a:prstGeom prst="rect">
+            <a:avLst>
+              <a:gd name="adj" fmla="val 25000"/>
+            </a:avLst>
+          </a:prstGeom>
+          <a:solidFill>
+            <a:srgbClr val="FCE7F3"/>
+          </a:solidFill>
+          <a:ln w="19050">
+            <a:solidFill>
+              <a:srgbClr val="DB2777"/>
+            </a:solidFill>
+            <a:prstDash val="solid"/>
+          </a:ln>
+          <a:effectLst>
+            <a:outerShdw sx="100000" sy="100000" kx="0" ky="0" algn="bl" rotWithShape="0" blurRad="101600" dist="38100" dir="8100000">
+              <a:srgbClr val="000000">
+                <a:alpha val="12000"/>
+              </a:srgbClr>
+            </a:outerShdw>
+          </a:effectLst>
+        </p:spPr>
+      </p:sp>
+      <p:sp>
+        <p:nvSpPr>
+          <p:cNvPr id="23" name="Text 21"/>
+          <p:cNvSpPr/>
+          <p:nvPr/>
+        </p:nvSpPr>
+        <p:spPr>
+          <a:xfrm>
+            <a:off x="6519672" y="2258568"/>
+            <a:ext cx="1828800" cy="292608"/>
+          </a:xfrm>
+          <a:prstGeom prst="rect">
+            <a:avLst/>
+          </a:prstGeom>
+          <a:noFill/>
+          <a:ln/>
+        </p:spPr>
+        <p:txBody>
+          <a:bodyPr wrap="square" lIns="0" tIns="0" rIns="0" bIns="0" rtlCol="0" anchor="ctr"/>
+          <a:lstStyle/>
+          <a:p>
+            <a:pPr algn="ctr" indent="0" marL="0">
+              <a:buNone/>
+            </a:pPr>
+            <a:r>
+              <a:rPr lang="en-US" sz="1300" b="1" dirty="0">
+                <a:solidFill>
+                  <a:srgbClr val="9D174D"/>
+                </a:solidFill>
+                <a:latin typeface="Trebuchet MS" pitchFamily="34" charset="0"/>
+                <a:ea typeface="Trebuchet MS" pitchFamily="34" charset="-122"/>
+                <a:cs typeface="Trebuchet MS" pitchFamily="34" charset="-120"/>
+              </a:rPr>
+              <a:t>ed</a:t>
+            </a:r>
+            <a:endParaRPr lang="en-US" sz="1300" dirty="0"/>
+          </a:p>
+        </p:txBody>
+      </p:sp>
+      <p:sp>
+        <p:nvSpPr>
+          <p:cNvPr id="24" name="Text 22"/>
+          <p:cNvSpPr/>
+          <p:nvPr/>
+        </p:nvSpPr>
+        <p:spPr>
+          <a:xfrm>
+            <a:off x="6519672" y="2569464"/>
+            <a:ext cx="1828800" cy="201168"/>
+          </a:xfrm>
+          <a:prstGeom prst="rect">
+            <a:avLst/>
+          </a:prstGeom>
+          <a:noFill/>
+          <a:ln/>
+        </p:spPr>
+        <p:txBody>
+          <a:bodyPr wrap="square" lIns="0" tIns="0" rIns="0" bIns="0" rtlCol="0" anchor="t"/>
+          <a:lstStyle/>
+          <a:p>
+            <a:pPr algn="ctr" indent="0" marL="0">
+              <a:buNone/>
+            </a:pPr>
+            <a:r>
+              <a:rPr lang="en-US" sz="850" dirty="0">
+                <a:solidFill>
+                  <a:srgbClr val="475569"/>
+                </a:solidFill>
+                <a:latin typeface="Calibri" pitchFamily="34" charset="0"/>
+                <a:ea typeface="Calibri" pitchFamily="34" charset="-122"/>
+                <a:cs typeface="Calibri" pitchFamily="34" charset="-120"/>
+              </a:rPr>
+              <a:t>past tense</a:t>
+            </a:r>
+            <a:endParaRPr lang="en-US" sz="850" dirty="0"/>
+          </a:p>
+        </p:txBody>
+      </p:sp>
+      <p:sp>
+        <p:nvSpPr>
+          <p:cNvPr id="25" name="Shape 23"/>
           <p:cNvSpPr/>
           <p:nvPr/>
         </p:nvSpPr>
@@ -8992,7 +9216,7 @@
       </p:sp>
       <p:sp>
         <p:nvSpPr>
-          <p:cNvPr id="23" name="Text 21"/>
+          <p:cNvPr id="26" name="Text 24"/>
           <p:cNvSpPr/>
           <p:nvPr/>
         </p:nvSpPr>
@@ -9031,7 +9255,7 @@
       </p:sp>
       <p:sp>
         <p:nvSpPr>
-          <p:cNvPr id="24" name="Shape 22"/>
+          <p:cNvPr id="27" name="Shape 25"/>
           <p:cNvSpPr/>
           <p:nvPr/>
         </p:nvSpPr>
@@ -9058,7 +9282,7 @@
       </p:sp>
       <p:sp>
         <p:nvSpPr>
-          <p:cNvPr id="25" name="Shape 23"/>
+          <p:cNvPr id="28" name="Shape 26"/>
           <p:cNvSpPr/>
           <p:nvPr/>
         </p:nvSpPr>
@@ -9085,7 +9309,7 @@
       </p:sp>
       <p:sp>
         <p:nvSpPr>
-          <p:cNvPr id="26" name="Text 24"/>
+          <p:cNvPr id="29" name="Text 27"/>
           <p:cNvSpPr/>
           <p:nvPr/>
         </p:nvSpPr>
@@ -9116,7 +9340,7 @@
                 <a:ea typeface="Trebuchet MS" pitchFamily="34" charset="-122"/>
                 <a:cs typeface="Trebuchet MS" pitchFamily="34" charset="-120"/>
               </a:rPr>
-              <a:t>em</a:t>
+              <a:t>un</a:t>
             </a:r>
             <a:endParaRPr lang="en-US" sz="1400" dirty="0"/>
           </a:p>
@@ -9124,7 +9348,7 @@
       </p:sp>
       <p:sp>
         <p:nvSpPr>
-          <p:cNvPr id="27" name="Text 25"/>
+          <p:cNvPr id="30" name="Text 28"/>
           <p:cNvSpPr/>
           <p:nvPr/>
         </p:nvSpPr>
@@ -9163,7 +9387,7 @@
       </p:sp>
       <p:sp>
         <p:nvSpPr>
-          <p:cNvPr id="28" name="Shape 26"/>
+          <p:cNvPr id="31" name="Shape 29"/>
           <p:cNvSpPr/>
           <p:nvPr/>
         </p:nvSpPr>
@@ -9190,7 +9414,7 @@
       </p:sp>
       <p:sp>
         <p:nvSpPr>
-          <p:cNvPr id="29" name="Text 27"/>
+          <p:cNvPr id="32" name="Text 30"/>
           <p:cNvSpPr/>
           <p:nvPr/>
         </p:nvSpPr>
@@ -9221,7 +9445,7 @@
                 <a:ea typeface="Trebuchet MS" pitchFamily="34" charset="-122"/>
                 <a:cs typeface="Trebuchet MS" pitchFamily="34" charset="-120"/>
               </a:rPr>
-              <a:t>ploy</a:t>
+              <a:t>em</a:t>
             </a:r>
             <a:endParaRPr lang="en-US" sz="1400" dirty="0"/>
           </a:p>
@@ -9229,7 +9453,7 @@
       </p:sp>
       <p:sp>
         <p:nvSpPr>
-          <p:cNvPr id="30" name="Text 28"/>
+          <p:cNvPr id="33" name="Text 31"/>
           <p:cNvSpPr/>
           <p:nvPr/>
         </p:nvSpPr>
@@ -9268,7 +9492,7 @@
       </p:sp>
       <p:sp>
         <p:nvSpPr>
-          <p:cNvPr id="31" name="Shape 29"/>
+          <p:cNvPr id="34" name="Shape 32"/>
           <p:cNvSpPr/>
           <p:nvPr/>
         </p:nvSpPr>
@@ -9295,7 +9519,7 @@
       </p:sp>
       <p:sp>
         <p:nvSpPr>
-          <p:cNvPr id="32" name="Text 30"/>
+          <p:cNvPr id="35" name="Text 33"/>
           <p:cNvSpPr/>
           <p:nvPr/>
         </p:nvSpPr>
@@ -9326,7 +9550,7 @@
                 <a:ea typeface="Trebuchet MS" pitchFamily="34" charset="-122"/>
                 <a:cs typeface="Trebuchet MS" pitchFamily="34" charset="-120"/>
               </a:rPr>
-              <a:t>er</a:t>
+              <a:t>ployed</a:t>
             </a:r>
             <a:endParaRPr lang="en-US" sz="1400" dirty="0"/>
           </a:p>
@@ -9334,7 +9558,7 @@
       </p:sp>
       <p:sp>
         <p:nvSpPr>
-          <p:cNvPr id="33" name="Shape 31"/>
+          <p:cNvPr id="36" name="Shape 34"/>
           <p:cNvSpPr/>
           <p:nvPr/>
         </p:nvSpPr>
@@ -9361,7 +9585,7 @@
       </p:sp>
       <p:sp>
         <p:nvSpPr>
-          <p:cNvPr id="34" name="Text 32"/>
+          <p:cNvPr id="37" name="Text 35"/>
           <p:cNvSpPr/>
           <p:nvPr/>
         </p:nvSpPr>
@@ -9400,7 +9624,7 @@
       </p:sp>
       <p:sp>
         <p:nvSpPr>
-          <p:cNvPr id="35" name="Shape 33"/>
+          <p:cNvPr id="38" name="Shape 36"/>
           <p:cNvSpPr/>
           <p:nvPr/>
         </p:nvSpPr>
@@ -9427,7 +9651,7 @@
       </p:sp>
       <p:sp>
         <p:nvSpPr>
-          <p:cNvPr id="36" name="Text 34"/>
+          <p:cNvPr id="39" name="Text 37"/>
           <p:cNvSpPr/>
           <p:nvPr/>
         </p:nvSpPr>
@@ -9750,7 +9974,7 @@
                 <a:ea typeface="Calibri" pitchFamily="34" charset="-122"/>
                 <a:cs typeface="Calibri" pitchFamily="34" charset="-120"/>
               </a:rPr>
-              <a:t>Word Labs  •  wordlabs.app  •  Root: 'employ' = to use or give work</a:t>
+              <a:t>Word Labs  •  wordlabs.app  •  Root: 'employ' = give work to; use</a:t>
             </a:r>
             <a:endParaRPr lang="en-US" sz="800" dirty="0"/>
           </a:p>
@@ -9889,7 +10113,7 @@
                 <a:ea typeface="Trebuchet MS" pitchFamily="34" charset="-122"/>
                 <a:cs typeface="Trebuchet MS" pitchFamily="34" charset="-120"/>
               </a:rPr>
-              <a:t>employer</a:t>
+              <a:t>unemployed</a:t>
             </a:r>
             <a:endParaRPr lang="en-US" sz="2800" dirty="0"/>
           </a:p>
@@ -9969,7 +10193,7 @@
         </p:nvSpPr>
         <p:spPr>
           <a:xfrm>
-            <a:off x="2938272" y="2258568"/>
+            <a:off x="2221992" y="2258568"/>
             <a:ext cx="1828800" cy="292608"/>
           </a:xfrm>
           <a:prstGeom prst="rect">
@@ -9978,11 +10202,11 @@
             </a:avLst>
           </a:prstGeom>
           <a:solidFill>
-            <a:srgbClr val="CCFBF1"/>
+            <a:srgbClr val="DDD6FE"/>
           </a:solidFill>
           <a:ln w="19050">
             <a:solidFill>
-              <a:srgbClr val="0D9488"/>
+              <a:srgbClr val="7C3AED"/>
             </a:solidFill>
             <a:prstDash val="solid"/>
           </a:ln>
@@ -10003,7 +10227,7 @@
         </p:nvSpPr>
         <p:spPr>
           <a:xfrm>
-            <a:off x="2938272" y="2258568"/>
+            <a:off x="2221992" y="2258568"/>
             <a:ext cx="1828800" cy="292608"/>
           </a:xfrm>
           <a:prstGeom prst="rect">
@@ -10022,13 +10246,13 @@
             <a:r>
               <a:rPr lang="en-US" sz="1300" b="1" dirty="0">
                 <a:solidFill>
-                  <a:srgbClr val="0F766E"/>
+                  <a:srgbClr val="4C1D95"/>
                 </a:solidFill>
                 <a:latin typeface="Trebuchet MS" pitchFamily="34" charset="0"/>
                 <a:ea typeface="Trebuchet MS" pitchFamily="34" charset="-122"/>
                 <a:cs typeface="Trebuchet MS" pitchFamily="34" charset="-120"/>
               </a:rPr>
-              <a:t>employ</a:t>
+              <a:t>un</a:t>
             </a:r>
             <a:endParaRPr lang="en-US" sz="1300" dirty="0"/>
           </a:p>
@@ -10042,7 +10266,7 @@
         </p:nvSpPr>
         <p:spPr>
           <a:xfrm>
-            <a:off x="2938272" y="2569464"/>
+            <a:off x="2221992" y="2569464"/>
             <a:ext cx="1828800" cy="201168"/>
           </a:xfrm>
           <a:prstGeom prst="rect">
@@ -10067,7 +10291,7 @@
                 <a:ea typeface="Calibri" pitchFamily="34" charset="-122"/>
                 <a:cs typeface="Calibri" pitchFamily="34" charset="-120"/>
               </a:rPr>
-              <a:t>to give work or use</a:t>
+              <a:t>not</a:t>
             </a:r>
             <a:endParaRPr lang="en-US" sz="850" dirty="0"/>
           </a:p>
@@ -10081,7 +10305,7 @@
         </p:nvSpPr>
         <p:spPr>
           <a:xfrm>
-            <a:off x="5803392" y="2258568"/>
+            <a:off x="4370832" y="2258568"/>
             <a:ext cx="1828800" cy="292608"/>
           </a:xfrm>
           <a:prstGeom prst="rect">
@@ -10090,11 +10314,11 @@
             </a:avLst>
           </a:prstGeom>
           <a:solidFill>
-            <a:srgbClr val="FCE7F3"/>
+            <a:srgbClr val="CCFBF1"/>
           </a:solidFill>
           <a:ln w="19050">
             <a:solidFill>
-              <a:srgbClr val="DB2777"/>
+              <a:srgbClr val="0D9488"/>
             </a:solidFill>
             <a:prstDash val="solid"/>
           </a:ln>
@@ -10115,7 +10339,7 @@
         </p:nvSpPr>
         <p:spPr>
           <a:xfrm>
-            <a:off x="5803392" y="2258568"/>
+            <a:off x="4370832" y="2258568"/>
             <a:ext cx="1828800" cy="292608"/>
           </a:xfrm>
           <a:prstGeom prst="rect">
@@ -10134,13 +10358,13 @@
             <a:r>
               <a:rPr lang="en-US" sz="1300" b="1" dirty="0">
                 <a:solidFill>
-                  <a:srgbClr val="9D174D"/>
+                  <a:srgbClr val="0F766E"/>
                 </a:solidFill>
                 <a:latin typeface="Trebuchet MS" pitchFamily="34" charset="0"/>
                 <a:ea typeface="Trebuchet MS" pitchFamily="34" charset="-122"/>
                 <a:cs typeface="Trebuchet MS" pitchFamily="34" charset="-120"/>
               </a:rPr>
-              <a:t>er</a:t>
+              <a:t>employ</a:t>
             </a:r>
             <a:endParaRPr lang="en-US" sz="1300" dirty="0"/>
           </a:p>
@@ -10154,7 +10378,7 @@
         </p:nvSpPr>
         <p:spPr>
           <a:xfrm>
-            <a:off x="5803392" y="2569464"/>
+            <a:off x="4370832" y="2569464"/>
             <a:ext cx="1828800" cy="201168"/>
           </a:xfrm>
           <a:prstGeom prst="rect">
@@ -10179,7 +10403,7 @@
                 <a:ea typeface="Calibri" pitchFamily="34" charset="-122"/>
                 <a:cs typeface="Calibri" pitchFamily="34" charset="-120"/>
               </a:rPr>
-              <a:t>one who does</a:t>
+              <a:t>give work to; use</a:t>
             </a:r>
             <a:endParaRPr lang="en-US" sz="850" dirty="0"/>
           </a:p>
@@ -10188,6 +10412,118 @@
       <p:sp>
         <p:nvSpPr>
           <p:cNvPr id="22" name="Shape 20"/>
+          <p:cNvSpPr/>
+          <p:nvPr/>
+        </p:nvSpPr>
+        <p:spPr>
+          <a:xfrm>
+            <a:off x="6519672" y="2258568"/>
+            <a:ext cx="1828800" cy="292608"/>
+          </a:xfrm>
+          <a:prstGeom prst="rect">
+            <a:avLst>
+              <a:gd name="adj" fmla="val 25000"/>
+            </a:avLst>
+          </a:prstGeom>
+          <a:solidFill>
+            <a:srgbClr val="FCE7F3"/>
+          </a:solidFill>
+          <a:ln w="19050">
+            <a:solidFill>
+              <a:srgbClr val="DB2777"/>
+            </a:solidFill>
+            <a:prstDash val="solid"/>
+          </a:ln>
+          <a:effectLst>
+            <a:outerShdw sx="100000" sy="100000" kx="0" ky="0" algn="bl" rotWithShape="0" blurRad="101600" dist="38100" dir="8100000">
+              <a:srgbClr val="000000">
+                <a:alpha val="12000"/>
+              </a:srgbClr>
+            </a:outerShdw>
+          </a:effectLst>
+        </p:spPr>
+      </p:sp>
+      <p:sp>
+        <p:nvSpPr>
+          <p:cNvPr id="23" name="Text 21"/>
+          <p:cNvSpPr/>
+          <p:nvPr/>
+        </p:nvSpPr>
+        <p:spPr>
+          <a:xfrm>
+            <a:off x="6519672" y="2258568"/>
+            <a:ext cx="1828800" cy="292608"/>
+          </a:xfrm>
+          <a:prstGeom prst="rect">
+            <a:avLst/>
+          </a:prstGeom>
+          <a:noFill/>
+          <a:ln/>
+        </p:spPr>
+        <p:txBody>
+          <a:bodyPr wrap="square" lIns="0" tIns="0" rIns="0" bIns="0" rtlCol="0" anchor="ctr"/>
+          <a:lstStyle/>
+          <a:p>
+            <a:pPr algn="ctr" indent="0" marL="0">
+              <a:buNone/>
+            </a:pPr>
+            <a:r>
+              <a:rPr lang="en-US" sz="1300" b="1" dirty="0">
+                <a:solidFill>
+                  <a:srgbClr val="9D174D"/>
+                </a:solidFill>
+                <a:latin typeface="Trebuchet MS" pitchFamily="34" charset="0"/>
+                <a:ea typeface="Trebuchet MS" pitchFamily="34" charset="-122"/>
+                <a:cs typeface="Trebuchet MS" pitchFamily="34" charset="-120"/>
+              </a:rPr>
+              <a:t>ed</a:t>
+            </a:r>
+            <a:endParaRPr lang="en-US" sz="1300" dirty="0"/>
+          </a:p>
+        </p:txBody>
+      </p:sp>
+      <p:sp>
+        <p:nvSpPr>
+          <p:cNvPr id="24" name="Text 22"/>
+          <p:cNvSpPr/>
+          <p:nvPr/>
+        </p:nvSpPr>
+        <p:spPr>
+          <a:xfrm>
+            <a:off x="6519672" y="2569464"/>
+            <a:ext cx="1828800" cy="201168"/>
+          </a:xfrm>
+          <a:prstGeom prst="rect">
+            <a:avLst/>
+          </a:prstGeom>
+          <a:noFill/>
+          <a:ln/>
+        </p:spPr>
+        <p:txBody>
+          <a:bodyPr wrap="square" lIns="0" tIns="0" rIns="0" bIns="0" rtlCol="0" anchor="t"/>
+          <a:lstStyle/>
+          <a:p>
+            <a:pPr algn="ctr" indent="0" marL="0">
+              <a:buNone/>
+            </a:pPr>
+            <a:r>
+              <a:rPr lang="en-US" sz="850" dirty="0">
+                <a:solidFill>
+                  <a:srgbClr val="475569"/>
+                </a:solidFill>
+                <a:latin typeface="Calibri" pitchFamily="34" charset="0"/>
+                <a:ea typeface="Calibri" pitchFamily="34" charset="-122"/>
+                <a:cs typeface="Calibri" pitchFamily="34" charset="-120"/>
+              </a:rPr>
+              <a:t>past tense</a:t>
+            </a:r>
+            <a:endParaRPr lang="en-US" sz="850" dirty="0"/>
+          </a:p>
+        </p:txBody>
+      </p:sp>
+      <p:sp>
+        <p:nvSpPr>
+          <p:cNvPr id="25" name="Shape 23"/>
           <p:cNvSpPr/>
           <p:nvPr/>
         </p:nvSpPr>
@@ -10214,7 +10550,7 @@
       </p:sp>
       <p:sp>
         <p:nvSpPr>
-          <p:cNvPr id="23" name="Text 21"/>
+          <p:cNvPr id="26" name="Text 24"/>
           <p:cNvSpPr/>
           <p:nvPr/>
         </p:nvSpPr>
@@ -10253,7 +10589,7 @@
       </p:sp>
       <p:sp>
         <p:nvSpPr>
-          <p:cNvPr id="24" name="Shape 22"/>
+          <p:cNvPr id="27" name="Shape 25"/>
           <p:cNvSpPr/>
           <p:nvPr/>
         </p:nvSpPr>
@@ -10280,7 +10616,7 @@
       </p:sp>
       <p:sp>
         <p:nvSpPr>
-          <p:cNvPr id="25" name="Shape 23"/>
+          <p:cNvPr id="28" name="Shape 26"/>
           <p:cNvSpPr/>
           <p:nvPr/>
         </p:nvSpPr>
@@ -10307,7 +10643,7 @@
       </p:sp>
       <p:sp>
         <p:nvSpPr>
-          <p:cNvPr id="26" name="Text 24"/>
+          <p:cNvPr id="29" name="Text 27"/>
           <p:cNvSpPr/>
           <p:nvPr/>
         </p:nvSpPr>
@@ -10338,7 +10674,7 @@
                 <a:ea typeface="Trebuchet MS" pitchFamily="34" charset="-122"/>
                 <a:cs typeface="Trebuchet MS" pitchFamily="34" charset="-120"/>
               </a:rPr>
-              <a:t>em</a:t>
+              <a:t>un</a:t>
             </a:r>
             <a:endParaRPr lang="en-US" sz="1400" dirty="0"/>
           </a:p>
@@ -10346,7 +10682,7 @@
       </p:sp>
       <p:sp>
         <p:nvSpPr>
-          <p:cNvPr id="27" name="Text 25"/>
+          <p:cNvPr id="30" name="Text 28"/>
           <p:cNvSpPr/>
           <p:nvPr/>
         </p:nvSpPr>
@@ -10385,7 +10721,7 @@
       </p:sp>
       <p:sp>
         <p:nvSpPr>
-          <p:cNvPr id="28" name="Shape 26"/>
+          <p:cNvPr id="31" name="Shape 29"/>
           <p:cNvSpPr/>
           <p:nvPr/>
         </p:nvSpPr>
@@ -10412,7 +10748,7 @@
       </p:sp>
       <p:sp>
         <p:nvSpPr>
-          <p:cNvPr id="29" name="Text 27"/>
+          <p:cNvPr id="32" name="Text 30"/>
           <p:cNvSpPr/>
           <p:nvPr/>
         </p:nvSpPr>
@@ -10443,7 +10779,7 @@
                 <a:ea typeface="Trebuchet MS" pitchFamily="34" charset="-122"/>
                 <a:cs typeface="Trebuchet MS" pitchFamily="34" charset="-120"/>
               </a:rPr>
-              <a:t>ploy</a:t>
+              <a:t>em</a:t>
             </a:r>
             <a:endParaRPr lang="en-US" sz="1400" dirty="0"/>
           </a:p>
@@ -10451,7 +10787,7 @@
       </p:sp>
       <p:sp>
         <p:nvSpPr>
-          <p:cNvPr id="30" name="Text 28"/>
+          <p:cNvPr id="33" name="Text 31"/>
           <p:cNvSpPr/>
           <p:nvPr/>
         </p:nvSpPr>
@@ -10490,7 +10826,7 @@
       </p:sp>
       <p:sp>
         <p:nvSpPr>
-          <p:cNvPr id="31" name="Shape 29"/>
+          <p:cNvPr id="34" name="Shape 32"/>
           <p:cNvSpPr/>
           <p:nvPr/>
         </p:nvSpPr>
@@ -10517,7 +10853,7 @@
       </p:sp>
       <p:sp>
         <p:nvSpPr>
-          <p:cNvPr id="32" name="Text 30"/>
+          <p:cNvPr id="35" name="Text 33"/>
           <p:cNvSpPr/>
           <p:nvPr/>
         </p:nvSpPr>
@@ -10548,7 +10884,7 @@
                 <a:ea typeface="Trebuchet MS" pitchFamily="34" charset="-122"/>
                 <a:cs typeface="Trebuchet MS" pitchFamily="34" charset="-120"/>
               </a:rPr>
-              <a:t>er</a:t>
+              <a:t>ployed</a:t>
             </a:r>
             <a:endParaRPr lang="en-US" sz="1400" dirty="0"/>
           </a:p>
@@ -10556,7 +10892,7 @@
       </p:sp>
       <p:sp>
         <p:nvSpPr>
-          <p:cNvPr id="33" name="Shape 31"/>
+          <p:cNvPr id="36" name="Shape 34"/>
           <p:cNvSpPr/>
           <p:nvPr/>
         </p:nvSpPr>
@@ -10583,7 +10919,7 @@
       </p:sp>
       <p:sp>
         <p:nvSpPr>
-          <p:cNvPr id="34" name="Text 32"/>
+          <p:cNvPr id="37" name="Text 35"/>
           <p:cNvSpPr/>
           <p:nvPr/>
         </p:nvSpPr>
@@ -10622,7 +10958,7 @@
       </p:sp>
       <p:sp>
         <p:nvSpPr>
-          <p:cNvPr id="35" name="Shape 33"/>
+          <p:cNvPr id="38" name="Shape 36"/>
           <p:cNvSpPr/>
           <p:nvPr/>
         </p:nvSpPr>
@@ -10649,14 +10985,14 @@
       </p:sp>
       <p:sp>
         <p:nvSpPr>
-          <p:cNvPr id="36" name="Shape 34"/>
-          <p:cNvSpPr/>
-          <p:nvPr/>
-        </p:nvSpPr>
-        <p:spPr>
-          <a:xfrm>
-            <a:off x="2427732" y="4169664"/>
-            <a:ext cx="685800" cy="475488"/>
+          <p:cNvPr id="39" name="Shape 37"/>
+          <p:cNvSpPr/>
+          <p:nvPr/>
+        </p:nvSpPr>
+        <p:spPr>
+          <a:xfrm>
+            <a:off x="1951330" y="4169664"/>
+            <a:ext cx="676656" cy="475488"/>
           </a:xfrm>
           <a:prstGeom prst="rect">
             <a:avLst>
@@ -10676,14 +11012,14 @@
       </p:sp>
       <p:sp>
         <p:nvSpPr>
-          <p:cNvPr id="37" name="Text 35"/>
-          <p:cNvSpPr/>
-          <p:nvPr/>
-        </p:nvSpPr>
-        <p:spPr>
-          <a:xfrm>
-            <a:off x="2427732" y="4169664"/>
-            <a:ext cx="685800" cy="475488"/>
+          <p:cNvPr id="40" name="Text 38"/>
+          <p:cNvSpPr/>
+          <p:nvPr/>
+        </p:nvSpPr>
+        <p:spPr>
+          <a:xfrm>
+            <a:off x="1951330" y="4169664"/>
+            <a:ext cx="676656" cy="475488"/>
           </a:xfrm>
           <a:prstGeom prst="rect">
             <a:avLst/>
@@ -10707,7 +11043,7 @@
                 <a:ea typeface="Trebuchet MS" pitchFamily="34" charset="-122"/>
                 <a:cs typeface="Trebuchet MS" pitchFamily="34" charset="-120"/>
               </a:rPr>
-              <a:t>e</a:t>
+              <a:t>u</a:t>
             </a:r>
             <a:endParaRPr lang="en-US" sz="900" dirty="0"/>
           </a:p>
@@ -10715,14 +11051,14 @@
       </p:sp>
       <p:sp>
         <p:nvSpPr>
-          <p:cNvPr id="38" name="Shape 36"/>
-          <p:cNvSpPr/>
-          <p:nvPr/>
-        </p:nvSpPr>
-        <p:spPr>
-          <a:xfrm>
-            <a:off x="3639312" y="4169664"/>
-            <a:ext cx="685800" cy="475488"/>
+          <p:cNvPr id="41" name="Shape 39"/>
+          <p:cNvSpPr/>
+          <p:nvPr/>
+        </p:nvSpPr>
+        <p:spPr>
+          <a:xfrm>
+            <a:off x="2677363" y="4169664"/>
+            <a:ext cx="676656" cy="475488"/>
           </a:xfrm>
           <a:prstGeom prst="rect">
             <a:avLst>
@@ -10742,14 +11078,14 @@
       </p:sp>
       <p:sp>
         <p:nvSpPr>
-          <p:cNvPr id="39" name="Text 37"/>
-          <p:cNvSpPr/>
-          <p:nvPr/>
-        </p:nvSpPr>
-        <p:spPr>
-          <a:xfrm>
-            <a:off x="3639312" y="4169664"/>
-            <a:ext cx="685800" cy="475488"/>
+          <p:cNvPr id="42" name="Text 40"/>
+          <p:cNvSpPr/>
+          <p:nvPr/>
+        </p:nvSpPr>
+        <p:spPr>
+          <a:xfrm>
+            <a:off x="2677363" y="4169664"/>
+            <a:ext cx="676656" cy="475488"/>
           </a:xfrm>
           <a:prstGeom prst="rect">
             <a:avLst/>
@@ -10773,7 +11109,7 @@
                 <a:ea typeface="Trebuchet MS" pitchFamily="34" charset="-122"/>
                 <a:cs typeface="Trebuchet MS" pitchFamily="34" charset="-120"/>
               </a:rPr>
-              <a:t>m</a:t>
+              <a:t>n</a:t>
             </a:r>
             <a:endParaRPr lang="en-US" sz="900" dirty="0"/>
           </a:p>
@@ -10781,14 +11117,14 @@
       </p:sp>
       <p:sp>
         <p:nvSpPr>
-          <p:cNvPr id="40" name="Shape 38"/>
-          <p:cNvSpPr/>
-          <p:nvPr/>
-        </p:nvSpPr>
-        <p:spPr>
-          <a:xfrm>
-            <a:off x="4850892" y="4169664"/>
-            <a:ext cx="685800" cy="475488"/>
+          <p:cNvPr id="43" name="Shape 41"/>
+          <p:cNvSpPr/>
+          <p:nvPr/>
+        </p:nvSpPr>
+        <p:spPr>
+          <a:xfrm>
+            <a:off x="3403397" y="4169664"/>
+            <a:ext cx="676656" cy="475488"/>
           </a:xfrm>
           <a:prstGeom prst="rect">
             <a:avLst>
@@ -10808,14 +11144,14 @@
       </p:sp>
       <p:sp>
         <p:nvSpPr>
-          <p:cNvPr id="41" name="Text 39"/>
-          <p:cNvSpPr/>
-          <p:nvPr/>
-        </p:nvSpPr>
-        <p:spPr>
-          <a:xfrm>
-            <a:off x="4850892" y="4169664"/>
-            <a:ext cx="685800" cy="475488"/>
+          <p:cNvPr id="44" name="Text 42"/>
+          <p:cNvSpPr/>
+          <p:nvPr/>
+        </p:nvSpPr>
+        <p:spPr>
+          <a:xfrm>
+            <a:off x="3403397" y="4169664"/>
+            <a:ext cx="676656" cy="475488"/>
           </a:xfrm>
           <a:prstGeom prst="rect">
             <a:avLst/>
@@ -10839,7 +11175,7 @@
                 <a:ea typeface="Trebuchet MS" pitchFamily="34" charset="-122"/>
                 <a:cs typeface="Trebuchet MS" pitchFamily="34" charset="-120"/>
               </a:rPr>
-              <a:t>pl</a:t>
+              <a:t>e</a:t>
             </a:r>
             <a:endParaRPr lang="en-US" sz="900" dirty="0"/>
           </a:p>
@@ -10847,14 +11183,14 @@
       </p:sp>
       <p:sp>
         <p:nvSpPr>
-          <p:cNvPr id="42" name="Shape 40"/>
-          <p:cNvSpPr/>
-          <p:nvPr/>
-        </p:nvSpPr>
-        <p:spPr>
-          <a:xfrm>
-            <a:off x="6062472" y="4169664"/>
-            <a:ext cx="685800" cy="475488"/>
+          <p:cNvPr id="45" name="Shape 43"/>
+          <p:cNvSpPr/>
+          <p:nvPr/>
+        </p:nvSpPr>
+        <p:spPr>
+          <a:xfrm>
+            <a:off x="4129430" y="4169664"/>
+            <a:ext cx="676656" cy="475488"/>
           </a:xfrm>
           <a:prstGeom prst="rect">
             <a:avLst>
@@ -10874,14 +11210,14 @@
       </p:sp>
       <p:sp>
         <p:nvSpPr>
-          <p:cNvPr id="43" name="Text 41"/>
-          <p:cNvSpPr/>
-          <p:nvPr/>
-        </p:nvSpPr>
-        <p:spPr>
-          <a:xfrm>
-            <a:off x="6062472" y="4169664"/>
-            <a:ext cx="685800" cy="475488"/>
+          <p:cNvPr id="46" name="Text 44"/>
+          <p:cNvSpPr/>
+          <p:nvPr/>
+        </p:nvSpPr>
+        <p:spPr>
+          <a:xfrm>
+            <a:off x="4129430" y="4169664"/>
+            <a:ext cx="676656" cy="475488"/>
           </a:xfrm>
           <a:prstGeom prst="rect">
             <a:avLst/>
@@ -10905,7 +11241,7 @@
                 <a:ea typeface="Trebuchet MS" pitchFamily="34" charset="-122"/>
                 <a:cs typeface="Trebuchet MS" pitchFamily="34" charset="-120"/>
               </a:rPr>
-              <a:t>oy</a:t>
+              <a:t>m</a:t>
             </a:r>
             <a:endParaRPr lang="en-US" sz="900" dirty="0"/>
           </a:p>
@@ -10913,14 +11249,14 @@
       </p:sp>
       <p:sp>
         <p:nvSpPr>
-          <p:cNvPr id="44" name="Shape 42"/>
-          <p:cNvSpPr/>
-          <p:nvPr/>
-        </p:nvSpPr>
-        <p:spPr>
-          <a:xfrm>
-            <a:off x="7274052" y="4169664"/>
-            <a:ext cx="685800" cy="475488"/>
+          <p:cNvPr id="47" name="Shape 45"/>
+          <p:cNvSpPr/>
+          <p:nvPr/>
+        </p:nvSpPr>
+        <p:spPr>
+          <a:xfrm>
+            <a:off x="4855464" y="4169664"/>
+            <a:ext cx="676656" cy="475488"/>
           </a:xfrm>
           <a:prstGeom prst="rect">
             <a:avLst>
@@ -10940,14 +11276,14 @@
       </p:sp>
       <p:sp>
         <p:nvSpPr>
-          <p:cNvPr id="45" name="Text 43"/>
-          <p:cNvSpPr/>
-          <p:nvPr/>
-        </p:nvSpPr>
-        <p:spPr>
-          <a:xfrm>
-            <a:off x="7274052" y="4169664"/>
-            <a:ext cx="685800" cy="475488"/>
+          <p:cNvPr id="48" name="Text 46"/>
+          <p:cNvSpPr/>
+          <p:nvPr/>
+        </p:nvSpPr>
+        <p:spPr>
+          <a:xfrm>
+            <a:off x="4855464" y="4169664"/>
+            <a:ext cx="676656" cy="475488"/>
           </a:xfrm>
           <a:prstGeom prst="rect">
             <a:avLst/>
@@ -10971,7 +11307,271 @@
                 <a:ea typeface="Trebuchet MS" pitchFamily="34" charset="-122"/>
                 <a:cs typeface="Trebuchet MS" pitchFamily="34" charset="-120"/>
               </a:rPr>
-              <a:t>er</a:t>
+              <a:t>p</a:t>
+            </a:r>
+            <a:endParaRPr lang="en-US" sz="900" dirty="0"/>
+          </a:p>
+        </p:txBody>
+      </p:sp>
+      <p:sp>
+        <p:nvSpPr>
+          <p:cNvPr id="49" name="Shape 47"/>
+          <p:cNvSpPr/>
+          <p:nvPr/>
+        </p:nvSpPr>
+        <p:spPr>
+          <a:xfrm>
+            <a:off x="5581498" y="4169664"/>
+            <a:ext cx="676656" cy="475488"/>
+          </a:xfrm>
+          <a:prstGeom prst="rect">
+            <a:avLst>
+              <a:gd name="adj" fmla="val 7692"/>
+            </a:avLst>
+          </a:prstGeom>
+          <a:solidFill>
+            <a:srgbClr val="FFFFFF"/>
+          </a:solidFill>
+          <a:ln w="12700">
+            <a:solidFill>
+              <a:srgbClr val="DB2777"/>
+            </a:solidFill>
+            <a:prstDash val="solid"/>
+          </a:ln>
+        </p:spPr>
+      </p:sp>
+      <p:sp>
+        <p:nvSpPr>
+          <p:cNvPr id="50" name="Text 48"/>
+          <p:cNvSpPr/>
+          <p:nvPr/>
+        </p:nvSpPr>
+        <p:spPr>
+          <a:xfrm>
+            <a:off x="5581498" y="4169664"/>
+            <a:ext cx="676656" cy="475488"/>
+          </a:xfrm>
+          <a:prstGeom prst="rect">
+            <a:avLst/>
+          </a:prstGeom>
+          <a:noFill/>
+          <a:ln/>
+        </p:spPr>
+        <p:txBody>
+          <a:bodyPr wrap="square" lIns="0" tIns="0" rIns="0" bIns="0" rtlCol="0" anchor="ctr"/>
+          <a:lstStyle/>
+          <a:p>
+            <a:pPr algn="ctr" indent="0" marL="0">
+              <a:buNone/>
+            </a:pPr>
+            <a:r>
+              <a:rPr lang="en-US" sz="900" b="1" dirty="0">
+                <a:solidFill>
+                  <a:srgbClr val="9D174D"/>
+                </a:solidFill>
+                <a:latin typeface="Trebuchet MS" pitchFamily="34" charset="0"/>
+                <a:ea typeface="Trebuchet MS" pitchFamily="34" charset="-122"/>
+                <a:cs typeface="Trebuchet MS" pitchFamily="34" charset="-120"/>
+              </a:rPr>
+              <a:t>l</a:t>
+            </a:r>
+            <a:endParaRPr lang="en-US" sz="900" dirty="0"/>
+          </a:p>
+        </p:txBody>
+      </p:sp>
+      <p:sp>
+        <p:nvSpPr>
+          <p:cNvPr id="51" name="Shape 49"/>
+          <p:cNvSpPr/>
+          <p:nvPr/>
+        </p:nvSpPr>
+        <p:spPr>
+          <a:xfrm>
+            <a:off x="6307531" y="4169664"/>
+            <a:ext cx="676656" cy="475488"/>
+          </a:xfrm>
+          <a:prstGeom prst="rect">
+            <a:avLst>
+              <a:gd name="adj" fmla="val 7692"/>
+            </a:avLst>
+          </a:prstGeom>
+          <a:solidFill>
+            <a:srgbClr val="FFFFFF"/>
+          </a:solidFill>
+          <a:ln w="12700">
+            <a:solidFill>
+              <a:srgbClr val="DB2777"/>
+            </a:solidFill>
+            <a:prstDash val="solid"/>
+          </a:ln>
+        </p:spPr>
+      </p:sp>
+      <p:sp>
+        <p:nvSpPr>
+          <p:cNvPr id="52" name="Text 50"/>
+          <p:cNvSpPr/>
+          <p:nvPr/>
+        </p:nvSpPr>
+        <p:spPr>
+          <a:xfrm>
+            <a:off x="6307531" y="4169664"/>
+            <a:ext cx="676656" cy="475488"/>
+          </a:xfrm>
+          <a:prstGeom prst="rect">
+            <a:avLst/>
+          </a:prstGeom>
+          <a:noFill/>
+          <a:ln/>
+        </p:spPr>
+        <p:txBody>
+          <a:bodyPr wrap="square" lIns="0" tIns="0" rIns="0" bIns="0" rtlCol="0" anchor="ctr"/>
+          <a:lstStyle/>
+          <a:p>
+            <a:pPr algn="ctr" indent="0" marL="0">
+              <a:buNone/>
+            </a:pPr>
+            <a:r>
+              <a:rPr lang="en-US" sz="900" b="1" dirty="0">
+                <a:solidFill>
+                  <a:srgbClr val="9D174D"/>
+                </a:solidFill>
+                <a:latin typeface="Trebuchet MS" pitchFamily="34" charset="0"/>
+                <a:ea typeface="Trebuchet MS" pitchFamily="34" charset="-122"/>
+                <a:cs typeface="Trebuchet MS" pitchFamily="34" charset="-120"/>
+              </a:rPr>
+              <a:t>oy</a:t>
+            </a:r>
+            <a:endParaRPr lang="en-US" sz="900" dirty="0"/>
+          </a:p>
+        </p:txBody>
+      </p:sp>
+      <p:sp>
+        <p:nvSpPr>
+          <p:cNvPr id="53" name="Shape 51"/>
+          <p:cNvSpPr/>
+          <p:nvPr/>
+        </p:nvSpPr>
+        <p:spPr>
+          <a:xfrm>
+            <a:off x="7033565" y="4169664"/>
+            <a:ext cx="676656" cy="475488"/>
+          </a:xfrm>
+          <a:prstGeom prst="rect">
+            <a:avLst>
+              <a:gd name="adj" fmla="val 7692"/>
+            </a:avLst>
+          </a:prstGeom>
+          <a:solidFill>
+            <a:srgbClr val="FFFFFF"/>
+          </a:solidFill>
+          <a:ln w="12700">
+            <a:solidFill>
+              <a:srgbClr val="DB2777"/>
+            </a:solidFill>
+            <a:prstDash val="solid"/>
+          </a:ln>
+        </p:spPr>
+      </p:sp>
+      <p:sp>
+        <p:nvSpPr>
+          <p:cNvPr id="54" name="Text 52"/>
+          <p:cNvSpPr/>
+          <p:nvPr/>
+        </p:nvSpPr>
+        <p:spPr>
+          <a:xfrm>
+            <a:off x="7033565" y="4169664"/>
+            <a:ext cx="676656" cy="475488"/>
+          </a:xfrm>
+          <a:prstGeom prst="rect">
+            <a:avLst/>
+          </a:prstGeom>
+          <a:noFill/>
+          <a:ln/>
+        </p:spPr>
+        <p:txBody>
+          <a:bodyPr wrap="square" lIns="0" tIns="0" rIns="0" bIns="0" rtlCol="0" anchor="ctr"/>
+          <a:lstStyle/>
+          <a:p>
+            <a:pPr algn="ctr" indent="0" marL="0">
+              <a:buNone/>
+            </a:pPr>
+            <a:r>
+              <a:rPr lang="en-US" sz="900" b="1" dirty="0">
+                <a:solidFill>
+                  <a:srgbClr val="9D174D"/>
+                </a:solidFill>
+                <a:latin typeface="Trebuchet MS" pitchFamily="34" charset="0"/>
+                <a:ea typeface="Trebuchet MS" pitchFamily="34" charset="-122"/>
+                <a:cs typeface="Trebuchet MS" pitchFamily="34" charset="-120"/>
+              </a:rPr>
+              <a:t>e</a:t>
+            </a:r>
+            <a:endParaRPr lang="en-US" sz="900" dirty="0"/>
+          </a:p>
+        </p:txBody>
+      </p:sp>
+      <p:sp>
+        <p:nvSpPr>
+          <p:cNvPr id="55" name="Shape 53"/>
+          <p:cNvSpPr/>
+          <p:nvPr/>
+        </p:nvSpPr>
+        <p:spPr>
+          <a:xfrm>
+            <a:off x="7759598" y="4169664"/>
+            <a:ext cx="676656" cy="475488"/>
+          </a:xfrm>
+          <a:prstGeom prst="rect">
+            <a:avLst>
+              <a:gd name="adj" fmla="val 7692"/>
+            </a:avLst>
+          </a:prstGeom>
+          <a:solidFill>
+            <a:srgbClr val="FFFFFF"/>
+          </a:solidFill>
+          <a:ln w="12700">
+            <a:solidFill>
+              <a:srgbClr val="DB2777"/>
+            </a:solidFill>
+            <a:prstDash val="solid"/>
+          </a:ln>
+        </p:spPr>
+      </p:sp>
+      <p:sp>
+        <p:nvSpPr>
+          <p:cNvPr id="56" name="Text 54"/>
+          <p:cNvSpPr/>
+          <p:nvPr/>
+        </p:nvSpPr>
+        <p:spPr>
+          <a:xfrm>
+            <a:off x="7759598" y="4169664"/>
+            <a:ext cx="676656" cy="475488"/>
+          </a:xfrm>
+          <a:prstGeom prst="rect">
+            <a:avLst/>
+          </a:prstGeom>
+          <a:noFill/>
+          <a:ln/>
+        </p:spPr>
+        <p:txBody>
+          <a:bodyPr wrap="square" lIns="0" tIns="0" rIns="0" bIns="0" rtlCol="0" anchor="ctr"/>
+          <a:lstStyle/>
+          <a:p>
+            <a:pPr algn="ctr" indent="0" marL="0">
+              <a:buNone/>
+            </a:pPr>
+            <a:r>
+              <a:rPr lang="en-US" sz="900" b="1" dirty="0">
+                <a:solidFill>
+                  <a:srgbClr val="9D174D"/>
+                </a:solidFill>
+                <a:latin typeface="Trebuchet MS" pitchFamily="34" charset="0"/>
+                <a:ea typeface="Trebuchet MS" pitchFamily="34" charset="-122"/>
+                <a:cs typeface="Trebuchet MS" pitchFamily="34" charset="-120"/>
+              </a:rPr>
+              <a:t>d</a:t>
             </a:r>
             <a:endParaRPr lang="en-US" sz="900" dirty="0"/>
           </a:p>
@@ -11263,7 +11863,7 @@
                 <a:ea typeface="Calibri" pitchFamily="34" charset="-122"/>
                 <a:cs typeface="Calibri" pitchFamily="34" charset="-120"/>
               </a:rPr>
-              <a:t>Word Labs  •  wordlabs.app  •  Root: 'employ' = to use or give work</a:t>
+              <a:t>Word Labs  •  wordlabs.app  •  Root: 'employ' = give work to; use</a:t>
             </a:r>
             <a:endParaRPr lang="en-US" sz="800" dirty="0"/>
           </a:p>
@@ -11402,7 +12002,7 @@
                 <a:ea typeface="Trebuchet MS" pitchFamily="34" charset="-122"/>
                 <a:cs typeface="Trebuchet MS" pitchFamily="34" charset="-120"/>
               </a:rPr>
-              <a:t>employee</a:t>
+              <a:t>unemployable</a:t>
             </a:r>
             <a:endParaRPr lang="en-US" sz="2800" dirty="0"/>
           </a:p>
@@ -12090,7 +12690,7 @@
                 <a:ea typeface="Calibri" pitchFamily="34" charset="-122"/>
                 <a:cs typeface="Calibri" pitchFamily="34" charset="-120"/>
               </a:rPr>
-              <a:t>Word Labs  •  wordlabs.app  •  Root: 'employ' = to use or give work</a:t>
+              <a:t>Word Labs  •  wordlabs.app  •  Root: 'employ' = give work to; use</a:t>
             </a:r>
             <a:endParaRPr lang="en-US" sz="800" dirty="0"/>
           </a:p>
@@ -12229,7 +12829,7 @@
                 <a:ea typeface="Trebuchet MS" pitchFamily="34" charset="-122"/>
                 <a:cs typeface="Trebuchet MS" pitchFamily="34" charset="-120"/>
               </a:rPr>
-              <a:t>employee</a:t>
+              <a:t>unemployable</a:t>
             </a:r>
             <a:endParaRPr lang="en-US" sz="2800" dirty="0"/>
           </a:p>
@@ -12309,7 +12909,7 @@
         </p:nvSpPr>
         <p:spPr>
           <a:xfrm>
-            <a:off x="2938272" y="2258568"/>
+            <a:off x="2221992" y="2258568"/>
             <a:ext cx="1828800" cy="292608"/>
           </a:xfrm>
           <a:prstGeom prst="rect">
@@ -12318,11 +12918,11 @@
             </a:avLst>
           </a:prstGeom>
           <a:solidFill>
-            <a:srgbClr val="CCFBF1"/>
+            <a:srgbClr val="DDD6FE"/>
           </a:solidFill>
           <a:ln w="19050">
             <a:solidFill>
-              <a:srgbClr val="0D9488"/>
+              <a:srgbClr val="7C3AED"/>
             </a:solidFill>
             <a:prstDash val="solid"/>
           </a:ln>
@@ -12343,7 +12943,7 @@
         </p:nvSpPr>
         <p:spPr>
           <a:xfrm>
-            <a:off x="2938272" y="2258568"/>
+            <a:off x="2221992" y="2258568"/>
             <a:ext cx="1828800" cy="292608"/>
           </a:xfrm>
           <a:prstGeom prst="rect">
@@ -12362,13 +12962,13 @@
             <a:r>
               <a:rPr lang="en-US" sz="1300" b="1" dirty="0">
                 <a:solidFill>
-                  <a:srgbClr val="0F766E"/>
+                  <a:srgbClr val="4C1D95"/>
                 </a:solidFill>
                 <a:latin typeface="Trebuchet MS" pitchFamily="34" charset="0"/>
                 <a:ea typeface="Trebuchet MS" pitchFamily="34" charset="-122"/>
                 <a:cs typeface="Trebuchet MS" pitchFamily="34" charset="-120"/>
               </a:rPr>
-              <a:t>employ</a:t>
+              <a:t>un</a:t>
             </a:r>
             <a:endParaRPr lang="en-US" sz="1300" dirty="0"/>
           </a:p>
@@ -12382,7 +12982,7 @@
         </p:nvSpPr>
         <p:spPr>
           <a:xfrm>
-            <a:off x="2938272" y="2569464"/>
+            <a:off x="2221992" y="2569464"/>
             <a:ext cx="1828800" cy="201168"/>
           </a:xfrm>
           <a:prstGeom prst="rect">
@@ -12407,7 +13007,7 @@
                 <a:ea typeface="Calibri" pitchFamily="34" charset="-122"/>
                 <a:cs typeface="Calibri" pitchFamily="34" charset="-120"/>
               </a:rPr>
-              <a:t>to give work or use</a:t>
+              <a:t>not</a:t>
             </a:r>
             <a:endParaRPr lang="en-US" sz="850" dirty="0"/>
           </a:p>
@@ -12421,7 +13021,7 @@
         </p:nvSpPr>
         <p:spPr>
           <a:xfrm>
-            <a:off x="5803392" y="2258568"/>
+            <a:off x="4370832" y="2258568"/>
             <a:ext cx="1828800" cy="292608"/>
           </a:xfrm>
           <a:prstGeom prst="rect">
@@ -12430,11 +13030,11 @@
             </a:avLst>
           </a:prstGeom>
           <a:solidFill>
-            <a:srgbClr val="FCE7F3"/>
+            <a:srgbClr val="CCFBF1"/>
           </a:solidFill>
           <a:ln w="19050">
             <a:solidFill>
-              <a:srgbClr val="DB2777"/>
+              <a:srgbClr val="0D9488"/>
             </a:solidFill>
             <a:prstDash val="solid"/>
           </a:ln>
@@ -12455,7 +13055,7 @@
         </p:nvSpPr>
         <p:spPr>
           <a:xfrm>
-            <a:off x="5803392" y="2258568"/>
+            <a:off x="4370832" y="2258568"/>
             <a:ext cx="1828800" cy="292608"/>
           </a:xfrm>
           <a:prstGeom prst="rect">
@@ -12474,13 +13074,13 @@
             <a:r>
               <a:rPr lang="en-US" sz="1300" b="1" dirty="0">
                 <a:solidFill>
-                  <a:srgbClr val="9D174D"/>
+                  <a:srgbClr val="0F766E"/>
                 </a:solidFill>
                 <a:latin typeface="Trebuchet MS" pitchFamily="34" charset="0"/>
                 <a:ea typeface="Trebuchet MS" pitchFamily="34" charset="-122"/>
                 <a:cs typeface="Trebuchet MS" pitchFamily="34" charset="-120"/>
               </a:rPr>
-              <a:t>ee</a:t>
+              <a:t>employ</a:t>
             </a:r>
             <a:endParaRPr lang="en-US" sz="1300" dirty="0"/>
           </a:p>
@@ -12494,7 +13094,7 @@
         </p:nvSpPr>
         <p:spPr>
           <a:xfrm>
-            <a:off x="5803392" y="2569464"/>
+            <a:off x="4370832" y="2569464"/>
             <a:ext cx="1828800" cy="201168"/>
           </a:xfrm>
           <a:prstGeom prst="rect">
@@ -12519,7 +13119,7 @@
                 <a:ea typeface="Calibri" pitchFamily="34" charset="-122"/>
                 <a:cs typeface="Calibri" pitchFamily="34" charset="-120"/>
               </a:rPr>
-              <a:t>one who receives the action</a:t>
+              <a:t>give work to; use</a:t>
             </a:r>
             <a:endParaRPr lang="en-US" sz="850" dirty="0"/>
           </a:p>
@@ -12528,6 +13128,118 @@
       <p:sp>
         <p:nvSpPr>
           <p:cNvPr id="22" name="Shape 20"/>
+          <p:cNvSpPr/>
+          <p:nvPr/>
+        </p:nvSpPr>
+        <p:spPr>
+          <a:xfrm>
+            <a:off x="6519672" y="2258568"/>
+            <a:ext cx="1828800" cy="292608"/>
+          </a:xfrm>
+          <a:prstGeom prst="rect">
+            <a:avLst>
+              <a:gd name="adj" fmla="val 25000"/>
+            </a:avLst>
+          </a:prstGeom>
+          <a:solidFill>
+            <a:srgbClr val="FCE7F3"/>
+          </a:solidFill>
+          <a:ln w="19050">
+            <a:solidFill>
+              <a:srgbClr val="DB2777"/>
+            </a:solidFill>
+            <a:prstDash val="solid"/>
+          </a:ln>
+          <a:effectLst>
+            <a:outerShdw sx="100000" sy="100000" kx="0" ky="0" algn="bl" rotWithShape="0" blurRad="101600" dist="38100" dir="8100000">
+              <a:srgbClr val="000000">
+                <a:alpha val="12000"/>
+              </a:srgbClr>
+            </a:outerShdw>
+          </a:effectLst>
+        </p:spPr>
+      </p:sp>
+      <p:sp>
+        <p:nvSpPr>
+          <p:cNvPr id="23" name="Text 21"/>
+          <p:cNvSpPr/>
+          <p:nvPr/>
+        </p:nvSpPr>
+        <p:spPr>
+          <a:xfrm>
+            <a:off x="6519672" y="2258568"/>
+            <a:ext cx="1828800" cy="292608"/>
+          </a:xfrm>
+          <a:prstGeom prst="rect">
+            <a:avLst/>
+          </a:prstGeom>
+          <a:noFill/>
+          <a:ln/>
+        </p:spPr>
+        <p:txBody>
+          <a:bodyPr wrap="square" lIns="0" tIns="0" rIns="0" bIns="0" rtlCol="0" anchor="ctr"/>
+          <a:lstStyle/>
+          <a:p>
+            <a:pPr algn="ctr" indent="0" marL="0">
+              <a:buNone/>
+            </a:pPr>
+            <a:r>
+              <a:rPr lang="en-US" sz="1300" b="1" dirty="0">
+                <a:solidFill>
+                  <a:srgbClr val="9D174D"/>
+                </a:solidFill>
+                <a:latin typeface="Trebuchet MS" pitchFamily="34" charset="0"/>
+                <a:ea typeface="Trebuchet MS" pitchFamily="34" charset="-122"/>
+                <a:cs typeface="Trebuchet MS" pitchFamily="34" charset="-120"/>
+              </a:rPr>
+              <a:t>able</a:t>
+            </a:r>
+            <a:endParaRPr lang="en-US" sz="1300" dirty="0"/>
+          </a:p>
+        </p:txBody>
+      </p:sp>
+      <p:sp>
+        <p:nvSpPr>
+          <p:cNvPr id="24" name="Text 22"/>
+          <p:cNvSpPr/>
+          <p:nvPr/>
+        </p:nvSpPr>
+        <p:spPr>
+          <a:xfrm>
+            <a:off x="6519672" y="2569464"/>
+            <a:ext cx="1828800" cy="201168"/>
+          </a:xfrm>
+          <a:prstGeom prst="rect">
+            <a:avLst/>
+          </a:prstGeom>
+          <a:noFill/>
+          <a:ln/>
+        </p:spPr>
+        <p:txBody>
+          <a:bodyPr wrap="square" lIns="0" tIns="0" rIns="0" bIns="0" rtlCol="0" anchor="t"/>
+          <a:lstStyle/>
+          <a:p>
+            <a:pPr algn="ctr" indent="0" marL="0">
+              <a:buNone/>
+            </a:pPr>
+            <a:r>
+              <a:rPr lang="en-US" sz="850" dirty="0">
+                <a:solidFill>
+                  <a:srgbClr val="475569"/>
+                </a:solidFill>
+                <a:latin typeface="Calibri" pitchFamily="34" charset="0"/>
+                <a:ea typeface="Calibri" pitchFamily="34" charset="-122"/>
+                <a:cs typeface="Calibri" pitchFamily="34" charset="-120"/>
+              </a:rPr>
+              <a:t>able to</a:t>
+            </a:r>
+            <a:endParaRPr lang="en-US" sz="850" dirty="0"/>
+          </a:p>
+        </p:txBody>
+      </p:sp>
+      <p:sp>
+        <p:nvSpPr>
+          <p:cNvPr id="25" name="Shape 23"/>
           <p:cNvSpPr/>
           <p:nvPr/>
         </p:nvSpPr>
@@ -12554,7 +13266,7 @@
       </p:sp>
       <p:sp>
         <p:nvSpPr>
-          <p:cNvPr id="23" name="Text 21"/>
+          <p:cNvPr id="26" name="Text 24"/>
           <p:cNvSpPr/>
           <p:nvPr/>
         </p:nvSpPr>
@@ -12593,7 +13305,7 @@
       </p:sp>
       <p:sp>
         <p:nvSpPr>
-          <p:cNvPr id="24" name="Shape 22"/>
+          <p:cNvPr id="27" name="Shape 25"/>
           <p:cNvSpPr/>
           <p:nvPr/>
         </p:nvSpPr>
@@ -12620,7 +13332,7 @@
       </p:sp>
       <p:sp>
         <p:nvSpPr>
-          <p:cNvPr id="25" name="Text 23"/>
+          <p:cNvPr id="28" name="Text 26"/>
           <p:cNvSpPr/>
           <p:nvPr/>
         </p:nvSpPr>
@@ -12659,7 +13371,7 @@
       </p:sp>
       <p:sp>
         <p:nvSpPr>
-          <p:cNvPr id="26" name="Shape 24"/>
+          <p:cNvPr id="29" name="Shape 27"/>
           <p:cNvSpPr/>
           <p:nvPr/>
         </p:nvSpPr>
@@ -12686,7 +13398,7 @@
       </p:sp>
       <p:sp>
         <p:nvSpPr>
-          <p:cNvPr id="27" name="Text 25"/>
+          <p:cNvPr id="30" name="Text 28"/>
           <p:cNvSpPr/>
           <p:nvPr/>
         </p:nvSpPr>
@@ -12725,7 +13437,7 @@
       </p:sp>
       <p:sp>
         <p:nvSpPr>
-          <p:cNvPr id="28" name="Shape 26"/>
+          <p:cNvPr id="31" name="Shape 29"/>
           <p:cNvSpPr/>
           <p:nvPr/>
         </p:nvSpPr>
@@ -12752,7 +13464,7 @@
       </p:sp>
       <p:sp>
         <p:nvSpPr>
-          <p:cNvPr id="29" name="Text 27"/>
+          <p:cNvPr id="32" name="Text 30"/>
           <p:cNvSpPr/>
           <p:nvPr/>
         </p:nvSpPr>
@@ -13075,7 +13787,7 @@
                 <a:ea typeface="Calibri" pitchFamily="34" charset="-122"/>
                 <a:cs typeface="Calibri" pitchFamily="34" charset="-120"/>
               </a:rPr>
-              <a:t>Word Labs  •  wordlabs.app  •  Root: 'employ' = to use or give work</a:t>
+              <a:t>Word Labs  •  wordlabs.app  •  Root: 'employ' = give work to; use</a:t>
             </a:r>
             <a:endParaRPr lang="en-US" sz="800" dirty="0"/>
           </a:p>
@@ -13214,7 +13926,7 @@
                 <a:ea typeface="Trebuchet MS" pitchFamily="34" charset="-122"/>
                 <a:cs typeface="Trebuchet MS" pitchFamily="34" charset="-120"/>
               </a:rPr>
-              <a:t>employee</a:t>
+              <a:t>unemployable</a:t>
             </a:r>
             <a:endParaRPr lang="en-US" sz="2800" dirty="0"/>
           </a:p>
@@ -13294,7 +14006,7 @@
         </p:nvSpPr>
         <p:spPr>
           <a:xfrm>
-            <a:off x="2938272" y="2258568"/>
+            <a:off x="2221992" y="2258568"/>
             <a:ext cx="1828800" cy="292608"/>
           </a:xfrm>
           <a:prstGeom prst="rect">
@@ -13303,11 +14015,11 @@
             </a:avLst>
           </a:prstGeom>
           <a:solidFill>
-            <a:srgbClr val="CCFBF1"/>
+            <a:srgbClr val="DDD6FE"/>
           </a:solidFill>
           <a:ln w="19050">
             <a:solidFill>
-              <a:srgbClr val="0D9488"/>
+              <a:srgbClr val="7C3AED"/>
             </a:solidFill>
             <a:prstDash val="solid"/>
           </a:ln>
@@ -13328,7 +14040,7 @@
         </p:nvSpPr>
         <p:spPr>
           <a:xfrm>
-            <a:off x="2938272" y="2258568"/>
+            <a:off x="2221992" y="2258568"/>
             <a:ext cx="1828800" cy="292608"/>
           </a:xfrm>
           <a:prstGeom prst="rect">
@@ -13347,13 +14059,13 @@
             <a:r>
               <a:rPr lang="en-US" sz="1300" b="1" dirty="0">
                 <a:solidFill>
-                  <a:srgbClr val="0F766E"/>
+                  <a:srgbClr val="4C1D95"/>
                 </a:solidFill>
                 <a:latin typeface="Trebuchet MS" pitchFamily="34" charset="0"/>
                 <a:ea typeface="Trebuchet MS" pitchFamily="34" charset="-122"/>
                 <a:cs typeface="Trebuchet MS" pitchFamily="34" charset="-120"/>
               </a:rPr>
-              <a:t>employ</a:t>
+              <a:t>un</a:t>
             </a:r>
             <a:endParaRPr lang="en-US" sz="1300" dirty="0"/>
           </a:p>
@@ -13367,7 +14079,7 @@
         </p:nvSpPr>
         <p:spPr>
           <a:xfrm>
-            <a:off x="2938272" y="2569464"/>
+            <a:off x="2221992" y="2569464"/>
             <a:ext cx="1828800" cy="201168"/>
           </a:xfrm>
           <a:prstGeom prst="rect">
@@ -13392,7 +14104,7 @@
                 <a:ea typeface="Calibri" pitchFamily="34" charset="-122"/>
                 <a:cs typeface="Calibri" pitchFamily="34" charset="-120"/>
               </a:rPr>
-              <a:t>to give work or use</a:t>
+              <a:t>not</a:t>
             </a:r>
             <a:endParaRPr lang="en-US" sz="850" dirty="0"/>
           </a:p>
@@ -13406,7 +14118,7 @@
         </p:nvSpPr>
         <p:spPr>
           <a:xfrm>
-            <a:off x="5803392" y="2258568"/>
+            <a:off x="4370832" y="2258568"/>
             <a:ext cx="1828800" cy="292608"/>
           </a:xfrm>
           <a:prstGeom prst="rect">
@@ -13415,11 +14127,11 @@
             </a:avLst>
           </a:prstGeom>
           <a:solidFill>
-            <a:srgbClr val="FCE7F3"/>
+            <a:srgbClr val="CCFBF1"/>
           </a:solidFill>
           <a:ln w="19050">
             <a:solidFill>
-              <a:srgbClr val="DB2777"/>
+              <a:srgbClr val="0D9488"/>
             </a:solidFill>
             <a:prstDash val="solid"/>
           </a:ln>
@@ -13440,7 +14152,7 @@
         </p:nvSpPr>
         <p:spPr>
           <a:xfrm>
-            <a:off x="5803392" y="2258568"/>
+            <a:off x="4370832" y="2258568"/>
             <a:ext cx="1828800" cy="292608"/>
           </a:xfrm>
           <a:prstGeom prst="rect">
@@ -13459,13 +14171,13 @@
             <a:r>
               <a:rPr lang="en-US" sz="1300" b="1" dirty="0">
                 <a:solidFill>
-                  <a:srgbClr val="9D174D"/>
+                  <a:srgbClr val="0F766E"/>
                 </a:solidFill>
                 <a:latin typeface="Trebuchet MS" pitchFamily="34" charset="0"/>
                 <a:ea typeface="Trebuchet MS" pitchFamily="34" charset="-122"/>
                 <a:cs typeface="Trebuchet MS" pitchFamily="34" charset="-120"/>
               </a:rPr>
-              <a:t>ee</a:t>
+              <a:t>employ</a:t>
             </a:r>
             <a:endParaRPr lang="en-US" sz="1300" dirty="0"/>
           </a:p>
@@ -13479,7 +14191,7 @@
         </p:nvSpPr>
         <p:spPr>
           <a:xfrm>
-            <a:off x="5803392" y="2569464"/>
+            <a:off x="4370832" y="2569464"/>
             <a:ext cx="1828800" cy="201168"/>
           </a:xfrm>
           <a:prstGeom prst="rect">
@@ -13504,7 +14216,7 @@
                 <a:ea typeface="Calibri" pitchFamily="34" charset="-122"/>
                 <a:cs typeface="Calibri" pitchFamily="34" charset="-120"/>
               </a:rPr>
-              <a:t>one who receives the action</a:t>
+              <a:t>give work to; use</a:t>
             </a:r>
             <a:endParaRPr lang="en-US" sz="850" dirty="0"/>
           </a:p>
@@ -13513,6 +14225,118 @@
       <p:sp>
         <p:nvSpPr>
           <p:cNvPr id="22" name="Shape 20"/>
+          <p:cNvSpPr/>
+          <p:nvPr/>
+        </p:nvSpPr>
+        <p:spPr>
+          <a:xfrm>
+            <a:off x="6519672" y="2258568"/>
+            <a:ext cx="1828800" cy="292608"/>
+          </a:xfrm>
+          <a:prstGeom prst="rect">
+            <a:avLst>
+              <a:gd name="adj" fmla="val 25000"/>
+            </a:avLst>
+          </a:prstGeom>
+          <a:solidFill>
+            <a:srgbClr val="FCE7F3"/>
+          </a:solidFill>
+          <a:ln w="19050">
+            <a:solidFill>
+              <a:srgbClr val="DB2777"/>
+            </a:solidFill>
+            <a:prstDash val="solid"/>
+          </a:ln>
+          <a:effectLst>
+            <a:outerShdw sx="100000" sy="100000" kx="0" ky="0" algn="bl" rotWithShape="0" blurRad="101600" dist="38100" dir="8100000">
+              <a:srgbClr val="000000">
+                <a:alpha val="12000"/>
+              </a:srgbClr>
+            </a:outerShdw>
+          </a:effectLst>
+        </p:spPr>
+      </p:sp>
+      <p:sp>
+        <p:nvSpPr>
+          <p:cNvPr id="23" name="Text 21"/>
+          <p:cNvSpPr/>
+          <p:nvPr/>
+        </p:nvSpPr>
+        <p:spPr>
+          <a:xfrm>
+            <a:off x="6519672" y="2258568"/>
+            <a:ext cx="1828800" cy="292608"/>
+          </a:xfrm>
+          <a:prstGeom prst="rect">
+            <a:avLst/>
+          </a:prstGeom>
+          <a:noFill/>
+          <a:ln/>
+        </p:spPr>
+        <p:txBody>
+          <a:bodyPr wrap="square" lIns="0" tIns="0" rIns="0" bIns="0" rtlCol="0" anchor="ctr"/>
+          <a:lstStyle/>
+          <a:p>
+            <a:pPr algn="ctr" indent="0" marL="0">
+              <a:buNone/>
+            </a:pPr>
+            <a:r>
+              <a:rPr lang="en-US" sz="1300" b="1" dirty="0">
+                <a:solidFill>
+                  <a:srgbClr val="9D174D"/>
+                </a:solidFill>
+                <a:latin typeface="Trebuchet MS" pitchFamily="34" charset="0"/>
+                <a:ea typeface="Trebuchet MS" pitchFamily="34" charset="-122"/>
+                <a:cs typeface="Trebuchet MS" pitchFamily="34" charset="-120"/>
+              </a:rPr>
+              <a:t>able</a:t>
+            </a:r>
+            <a:endParaRPr lang="en-US" sz="1300" dirty="0"/>
+          </a:p>
+        </p:txBody>
+      </p:sp>
+      <p:sp>
+        <p:nvSpPr>
+          <p:cNvPr id="24" name="Text 22"/>
+          <p:cNvSpPr/>
+          <p:nvPr/>
+        </p:nvSpPr>
+        <p:spPr>
+          <a:xfrm>
+            <a:off x="6519672" y="2569464"/>
+            <a:ext cx="1828800" cy="201168"/>
+          </a:xfrm>
+          <a:prstGeom prst="rect">
+            <a:avLst/>
+          </a:prstGeom>
+          <a:noFill/>
+          <a:ln/>
+        </p:spPr>
+        <p:txBody>
+          <a:bodyPr wrap="square" lIns="0" tIns="0" rIns="0" bIns="0" rtlCol="0" anchor="t"/>
+          <a:lstStyle/>
+          <a:p>
+            <a:pPr algn="ctr" indent="0" marL="0">
+              <a:buNone/>
+            </a:pPr>
+            <a:r>
+              <a:rPr lang="en-US" sz="850" dirty="0">
+                <a:solidFill>
+                  <a:srgbClr val="475569"/>
+                </a:solidFill>
+                <a:latin typeface="Calibri" pitchFamily="34" charset="0"/>
+                <a:ea typeface="Calibri" pitchFamily="34" charset="-122"/>
+                <a:cs typeface="Calibri" pitchFamily="34" charset="-120"/>
+              </a:rPr>
+              <a:t>able to</a:t>
+            </a:r>
+            <a:endParaRPr lang="en-US" sz="850" dirty="0"/>
+          </a:p>
+        </p:txBody>
+      </p:sp>
+      <p:sp>
+        <p:nvSpPr>
+          <p:cNvPr id="25" name="Shape 23"/>
           <p:cNvSpPr/>
           <p:nvPr/>
         </p:nvSpPr>
@@ -13539,7 +14363,7 @@
       </p:sp>
       <p:sp>
         <p:nvSpPr>
-          <p:cNvPr id="23" name="Text 21"/>
+          <p:cNvPr id="26" name="Text 24"/>
           <p:cNvSpPr/>
           <p:nvPr/>
         </p:nvSpPr>
@@ -13578,7 +14402,7 @@
       </p:sp>
       <p:sp>
         <p:nvSpPr>
-          <p:cNvPr id="24" name="Shape 22"/>
+          <p:cNvPr id="27" name="Shape 25"/>
           <p:cNvSpPr/>
           <p:nvPr/>
         </p:nvSpPr>
@@ -13605,14 +14429,14 @@
       </p:sp>
       <p:sp>
         <p:nvSpPr>
-          <p:cNvPr id="25" name="Shape 23"/>
-          <p:cNvSpPr/>
-          <p:nvPr/>
-        </p:nvSpPr>
-        <p:spPr>
-          <a:xfrm>
-            <a:off x="2313432" y="3364992"/>
-            <a:ext cx="1645920" cy="475488"/>
+          <p:cNvPr id="28" name="Shape 26"/>
+          <p:cNvSpPr/>
+          <p:nvPr/>
+        </p:nvSpPr>
+        <p:spPr>
+          <a:xfrm>
+            <a:off x="1978152" y="3364992"/>
+            <a:ext cx="1225296" cy="475488"/>
           </a:xfrm>
           <a:prstGeom prst="rect">
             <a:avLst>
@@ -13632,14 +14456,14 @@
       </p:sp>
       <p:sp>
         <p:nvSpPr>
-          <p:cNvPr id="26" name="Text 24"/>
-          <p:cNvSpPr/>
-          <p:nvPr/>
-        </p:nvSpPr>
-        <p:spPr>
-          <a:xfrm>
-            <a:off x="2313432" y="3364992"/>
-            <a:ext cx="1645920" cy="475488"/>
+          <p:cNvPr id="29" name="Text 27"/>
+          <p:cNvSpPr/>
+          <p:nvPr/>
+        </p:nvSpPr>
+        <p:spPr>
+          <a:xfrm>
+            <a:off x="1978152" y="3364992"/>
+            <a:ext cx="1225296" cy="475488"/>
           </a:xfrm>
           <a:prstGeom prst="rect">
             <a:avLst/>
@@ -13663,7 +14487,7 @@
                 <a:ea typeface="Trebuchet MS" pitchFamily="34" charset="-122"/>
                 <a:cs typeface="Trebuchet MS" pitchFamily="34" charset="-120"/>
               </a:rPr>
-              <a:t>em</a:t>
+              <a:t>un</a:t>
             </a:r>
             <a:endParaRPr lang="en-US" sz="1400" dirty="0"/>
           </a:p>
@@ -13671,14 +14495,14 @@
       </p:sp>
       <p:sp>
         <p:nvSpPr>
-          <p:cNvPr id="27" name="Text 25"/>
-          <p:cNvSpPr/>
-          <p:nvPr/>
-        </p:nvSpPr>
-        <p:spPr>
-          <a:xfrm>
-            <a:off x="3959352" y="3364992"/>
-            <a:ext cx="411480" cy="475488"/>
+          <p:cNvPr id="30" name="Text 28"/>
+          <p:cNvSpPr/>
+          <p:nvPr/>
+        </p:nvSpPr>
+        <p:spPr>
+          <a:xfrm>
+            <a:off x="3203448" y="3364992"/>
+            <a:ext cx="76200" cy="475488"/>
           </a:xfrm>
           <a:prstGeom prst="rect">
             <a:avLst/>
@@ -13710,14 +14534,14 @@
       </p:sp>
       <p:sp>
         <p:nvSpPr>
-          <p:cNvPr id="28" name="Shape 26"/>
-          <p:cNvSpPr/>
-          <p:nvPr/>
-        </p:nvSpPr>
-        <p:spPr>
-          <a:xfrm>
-            <a:off x="4370832" y="3364992"/>
-            <a:ext cx="1645920" cy="475488"/>
+          <p:cNvPr id="31" name="Shape 29"/>
+          <p:cNvSpPr/>
+          <p:nvPr/>
+        </p:nvSpPr>
+        <p:spPr>
+          <a:xfrm>
+            <a:off x="3279648" y="3364992"/>
+            <a:ext cx="1225296" cy="475488"/>
           </a:xfrm>
           <a:prstGeom prst="rect">
             <a:avLst>
@@ -13737,14 +14561,14 @@
       </p:sp>
       <p:sp>
         <p:nvSpPr>
-          <p:cNvPr id="29" name="Text 27"/>
-          <p:cNvSpPr/>
-          <p:nvPr/>
-        </p:nvSpPr>
-        <p:spPr>
-          <a:xfrm>
-            <a:off x="4370832" y="3364992"/>
-            <a:ext cx="1645920" cy="475488"/>
+          <p:cNvPr id="32" name="Text 30"/>
+          <p:cNvSpPr/>
+          <p:nvPr/>
+        </p:nvSpPr>
+        <p:spPr>
+          <a:xfrm>
+            <a:off x="3279648" y="3364992"/>
+            <a:ext cx="1225296" cy="475488"/>
           </a:xfrm>
           <a:prstGeom prst="rect">
             <a:avLst/>
@@ -13768,7 +14592,7 @@
                 <a:ea typeface="Trebuchet MS" pitchFamily="34" charset="-122"/>
                 <a:cs typeface="Trebuchet MS" pitchFamily="34" charset="-120"/>
               </a:rPr>
-              <a:t>ploy</a:t>
+              <a:t>em</a:t>
             </a:r>
             <a:endParaRPr lang="en-US" sz="1400" dirty="0"/>
           </a:p>
@@ -13776,14 +14600,14 @@
       </p:sp>
       <p:sp>
         <p:nvSpPr>
-          <p:cNvPr id="30" name="Text 28"/>
-          <p:cNvSpPr/>
-          <p:nvPr/>
-        </p:nvSpPr>
-        <p:spPr>
-          <a:xfrm>
-            <a:off x="6016752" y="3364992"/>
-            <a:ext cx="411480" cy="475488"/>
+          <p:cNvPr id="33" name="Text 31"/>
+          <p:cNvSpPr/>
+          <p:nvPr/>
+        </p:nvSpPr>
+        <p:spPr>
+          <a:xfrm>
+            <a:off x="4504944" y="3364992"/>
+            <a:ext cx="76200" cy="475488"/>
           </a:xfrm>
           <a:prstGeom prst="rect">
             <a:avLst/>
@@ -13815,14 +14639,14 @@
       </p:sp>
       <p:sp>
         <p:nvSpPr>
-          <p:cNvPr id="31" name="Shape 29"/>
-          <p:cNvSpPr/>
-          <p:nvPr/>
-        </p:nvSpPr>
-        <p:spPr>
-          <a:xfrm>
-            <a:off x="6428232" y="3364992"/>
-            <a:ext cx="1645920" cy="475488"/>
+          <p:cNvPr id="34" name="Shape 32"/>
+          <p:cNvSpPr/>
+          <p:nvPr/>
+        </p:nvSpPr>
+        <p:spPr>
+          <a:xfrm>
+            <a:off x="4581144" y="3364992"/>
+            <a:ext cx="1225296" cy="475488"/>
           </a:xfrm>
           <a:prstGeom prst="rect">
             <a:avLst>
@@ -13842,14 +14666,14 @@
       </p:sp>
       <p:sp>
         <p:nvSpPr>
-          <p:cNvPr id="32" name="Text 30"/>
-          <p:cNvSpPr/>
-          <p:nvPr/>
-        </p:nvSpPr>
-        <p:spPr>
-          <a:xfrm>
-            <a:off x="6428232" y="3364992"/>
-            <a:ext cx="1645920" cy="475488"/>
+          <p:cNvPr id="35" name="Text 33"/>
+          <p:cNvSpPr/>
+          <p:nvPr/>
+        </p:nvSpPr>
+        <p:spPr>
+          <a:xfrm>
+            <a:off x="4581144" y="3364992"/>
+            <a:ext cx="1225296" cy="475488"/>
           </a:xfrm>
           <a:prstGeom prst="rect">
             <a:avLst/>
@@ -13873,7 +14697,7 @@
                 <a:ea typeface="Trebuchet MS" pitchFamily="34" charset="-122"/>
                 <a:cs typeface="Trebuchet MS" pitchFamily="34" charset="-120"/>
               </a:rPr>
-              <a:t>ee</a:t>
+              <a:t>ploy</a:t>
             </a:r>
             <a:endParaRPr lang="en-US" sz="1400" dirty="0"/>
           </a:p>
@@ -13881,7 +14705,217 @@
       </p:sp>
       <p:sp>
         <p:nvSpPr>
-          <p:cNvPr id="33" name="Shape 31"/>
+          <p:cNvPr id="36" name="Text 34"/>
+          <p:cNvSpPr/>
+          <p:nvPr/>
+        </p:nvSpPr>
+        <p:spPr>
+          <a:xfrm>
+            <a:off x="5806440" y="3364992"/>
+            <a:ext cx="76200" cy="475488"/>
+          </a:xfrm>
+          <a:prstGeom prst="rect">
+            <a:avLst/>
+          </a:prstGeom>
+          <a:noFill/>
+          <a:ln/>
+        </p:spPr>
+        <p:txBody>
+          <a:bodyPr wrap="square" lIns="0" tIns="0" rIns="0" bIns="0" rtlCol="0" anchor="ctr"/>
+          <a:lstStyle/>
+          <a:p>
+            <a:pPr algn="ctr" indent="0" marL="0">
+              <a:buNone/>
+            </a:pPr>
+            <a:r>
+              <a:rPr lang="en-US" sz="1600" b="1" dirty="0">
+                <a:solidFill>
+                  <a:srgbClr val="0D9488"/>
+                </a:solidFill>
+                <a:latin typeface="Trebuchet MS" pitchFamily="34" charset="0"/>
+                <a:ea typeface="Trebuchet MS" pitchFamily="34" charset="-122"/>
+                <a:cs typeface="Trebuchet MS" pitchFamily="34" charset="-120"/>
+              </a:rPr>
+              <a:t>·</a:t>
+            </a:r>
+            <a:endParaRPr lang="en-US" sz="1600" dirty="0"/>
+          </a:p>
+        </p:txBody>
+      </p:sp>
+      <p:sp>
+        <p:nvSpPr>
+          <p:cNvPr id="37" name="Shape 35"/>
+          <p:cNvSpPr/>
+          <p:nvPr/>
+        </p:nvSpPr>
+        <p:spPr>
+          <a:xfrm>
+            <a:off x="5882640" y="3364992"/>
+            <a:ext cx="1225296" cy="475488"/>
+          </a:xfrm>
+          <a:prstGeom prst="rect">
+            <a:avLst>
+              <a:gd name="adj" fmla="val 9615"/>
+            </a:avLst>
+          </a:prstGeom>
+          <a:solidFill>
+            <a:srgbClr val="FFFFFF"/>
+          </a:solidFill>
+          <a:ln w="12700">
+            <a:solidFill>
+              <a:srgbClr val="0D9488"/>
+            </a:solidFill>
+            <a:prstDash val="solid"/>
+          </a:ln>
+        </p:spPr>
+      </p:sp>
+      <p:sp>
+        <p:nvSpPr>
+          <p:cNvPr id="38" name="Text 36"/>
+          <p:cNvSpPr/>
+          <p:nvPr/>
+        </p:nvSpPr>
+        <p:spPr>
+          <a:xfrm>
+            <a:off x="5882640" y="3364992"/>
+            <a:ext cx="1225296" cy="475488"/>
+          </a:xfrm>
+          <a:prstGeom prst="rect">
+            <a:avLst/>
+          </a:prstGeom>
+          <a:noFill/>
+          <a:ln/>
+        </p:spPr>
+        <p:txBody>
+          <a:bodyPr wrap="square" lIns="0" tIns="0" rIns="0" bIns="0" rtlCol="0" anchor="ctr"/>
+          <a:lstStyle/>
+          <a:p>
+            <a:pPr algn="ctr" indent="0" marL="0">
+              <a:buNone/>
+            </a:pPr>
+            <a:r>
+              <a:rPr lang="en-US" sz="1400" b="1" dirty="0">
+                <a:solidFill>
+                  <a:srgbClr val="0D9488"/>
+                </a:solidFill>
+                <a:latin typeface="Trebuchet MS" pitchFamily="34" charset="0"/>
+                <a:ea typeface="Trebuchet MS" pitchFamily="34" charset="-122"/>
+                <a:cs typeface="Trebuchet MS" pitchFamily="34" charset="-120"/>
+              </a:rPr>
+              <a:t>a</a:t>
+            </a:r>
+            <a:endParaRPr lang="en-US" sz="1400" dirty="0"/>
+          </a:p>
+        </p:txBody>
+      </p:sp>
+      <p:sp>
+        <p:nvSpPr>
+          <p:cNvPr id="39" name="Text 37"/>
+          <p:cNvSpPr/>
+          <p:nvPr/>
+        </p:nvSpPr>
+        <p:spPr>
+          <a:xfrm>
+            <a:off x="7107936" y="3364992"/>
+            <a:ext cx="76200" cy="475488"/>
+          </a:xfrm>
+          <a:prstGeom prst="rect">
+            <a:avLst/>
+          </a:prstGeom>
+          <a:noFill/>
+          <a:ln/>
+        </p:spPr>
+        <p:txBody>
+          <a:bodyPr wrap="square" lIns="0" tIns="0" rIns="0" bIns="0" rtlCol="0" anchor="ctr"/>
+          <a:lstStyle/>
+          <a:p>
+            <a:pPr algn="ctr" indent="0" marL="0">
+              <a:buNone/>
+            </a:pPr>
+            <a:r>
+              <a:rPr lang="en-US" sz="1600" b="1" dirty="0">
+                <a:solidFill>
+                  <a:srgbClr val="0D9488"/>
+                </a:solidFill>
+                <a:latin typeface="Trebuchet MS" pitchFamily="34" charset="0"/>
+                <a:ea typeface="Trebuchet MS" pitchFamily="34" charset="-122"/>
+                <a:cs typeface="Trebuchet MS" pitchFamily="34" charset="-120"/>
+              </a:rPr>
+              <a:t>·</a:t>
+            </a:r>
+            <a:endParaRPr lang="en-US" sz="1600" dirty="0"/>
+          </a:p>
+        </p:txBody>
+      </p:sp>
+      <p:sp>
+        <p:nvSpPr>
+          <p:cNvPr id="40" name="Shape 38"/>
+          <p:cNvSpPr/>
+          <p:nvPr/>
+        </p:nvSpPr>
+        <p:spPr>
+          <a:xfrm>
+            <a:off x="7184136" y="3364992"/>
+            <a:ext cx="1225296" cy="475488"/>
+          </a:xfrm>
+          <a:prstGeom prst="rect">
+            <a:avLst>
+              <a:gd name="adj" fmla="val 9615"/>
+            </a:avLst>
+          </a:prstGeom>
+          <a:solidFill>
+            <a:srgbClr val="FFFFFF"/>
+          </a:solidFill>
+          <a:ln w="12700">
+            <a:solidFill>
+              <a:srgbClr val="0D9488"/>
+            </a:solidFill>
+            <a:prstDash val="solid"/>
+          </a:ln>
+        </p:spPr>
+      </p:sp>
+      <p:sp>
+        <p:nvSpPr>
+          <p:cNvPr id="41" name="Text 39"/>
+          <p:cNvSpPr/>
+          <p:nvPr/>
+        </p:nvSpPr>
+        <p:spPr>
+          <a:xfrm>
+            <a:off x="7184136" y="3364992"/>
+            <a:ext cx="1225296" cy="475488"/>
+          </a:xfrm>
+          <a:prstGeom prst="rect">
+            <a:avLst/>
+          </a:prstGeom>
+          <a:noFill/>
+          <a:ln/>
+        </p:spPr>
+        <p:txBody>
+          <a:bodyPr wrap="square" lIns="0" tIns="0" rIns="0" bIns="0" rtlCol="0" anchor="ctr"/>
+          <a:lstStyle/>
+          <a:p>
+            <a:pPr algn="ctr" indent="0" marL="0">
+              <a:buNone/>
+            </a:pPr>
+            <a:r>
+              <a:rPr lang="en-US" sz="1400" b="1" dirty="0">
+                <a:solidFill>
+                  <a:srgbClr val="0D9488"/>
+                </a:solidFill>
+                <a:latin typeface="Trebuchet MS" pitchFamily="34" charset="0"/>
+                <a:ea typeface="Trebuchet MS" pitchFamily="34" charset="-122"/>
+                <a:cs typeface="Trebuchet MS" pitchFamily="34" charset="-120"/>
+              </a:rPr>
+              <a:t>ble</a:t>
+            </a:r>
+            <a:endParaRPr lang="en-US" sz="1400" dirty="0"/>
+          </a:p>
+        </p:txBody>
+      </p:sp>
+      <p:sp>
+        <p:nvSpPr>
+          <p:cNvPr id="42" name="Shape 40"/>
           <p:cNvSpPr/>
           <p:nvPr/>
         </p:nvSpPr>
@@ -13908,7 +14942,7 @@
       </p:sp>
       <p:sp>
         <p:nvSpPr>
-          <p:cNvPr id="34" name="Text 32"/>
+          <p:cNvPr id="43" name="Text 41"/>
           <p:cNvSpPr/>
           <p:nvPr/>
         </p:nvSpPr>
@@ -13947,7 +14981,7 @@
       </p:sp>
       <p:sp>
         <p:nvSpPr>
-          <p:cNvPr id="35" name="Shape 33"/>
+          <p:cNvPr id="44" name="Shape 42"/>
           <p:cNvSpPr/>
           <p:nvPr/>
         </p:nvSpPr>
@@ -13974,7 +15008,7 @@
       </p:sp>
       <p:sp>
         <p:nvSpPr>
-          <p:cNvPr id="36" name="Text 34"/>
+          <p:cNvPr id="45" name="Text 43"/>
           <p:cNvSpPr/>
           <p:nvPr/>
         </p:nvSpPr>
@@ -14206,7 +15240,7 @@
                 <a:ea typeface="Calibri" pitchFamily="34" charset="-122"/>
                 <a:cs typeface="Calibri" pitchFamily="34" charset="-120"/>
               </a:rPr>
-              <a:t>Root 'employ' — to use or give work</a:t>
+              <a:t>Root 'employ' — give work to; use</a:t>
             </a:r>
             <a:endParaRPr lang="en-US" sz="1600" dirty="0"/>
           </a:p>
@@ -14562,7 +15596,7 @@
                 <a:ea typeface="Calibri" pitchFamily="34" charset="-122"/>
                 <a:cs typeface="Calibri" pitchFamily="34" charset="-120"/>
               </a:rPr>
-              <a:t>Word Labs  •  wordlabs.app  •  Root: 'employ' = to use or give work</a:t>
+              <a:t>Word Labs  •  wordlabs.app  •  Root: 'employ' = give work to; use</a:t>
             </a:r>
             <a:endParaRPr lang="en-US" sz="800" dirty="0"/>
           </a:p>
@@ -14701,7 +15735,7 @@
                 <a:ea typeface="Trebuchet MS" pitchFamily="34" charset="-122"/>
                 <a:cs typeface="Trebuchet MS" pitchFamily="34" charset="-120"/>
               </a:rPr>
-              <a:t>employee</a:t>
+              <a:t>unemployable</a:t>
             </a:r>
             <a:endParaRPr lang="en-US" sz="2800" dirty="0"/>
           </a:p>
@@ -14781,7 +15815,7 @@
         </p:nvSpPr>
         <p:spPr>
           <a:xfrm>
-            <a:off x="2938272" y="2258568"/>
+            <a:off x="2221992" y="2258568"/>
             <a:ext cx="1828800" cy="292608"/>
           </a:xfrm>
           <a:prstGeom prst="rect">
@@ -14790,11 +15824,11 @@
             </a:avLst>
           </a:prstGeom>
           <a:solidFill>
-            <a:srgbClr val="CCFBF1"/>
+            <a:srgbClr val="DDD6FE"/>
           </a:solidFill>
           <a:ln w="19050">
             <a:solidFill>
-              <a:srgbClr val="0D9488"/>
+              <a:srgbClr val="7C3AED"/>
             </a:solidFill>
             <a:prstDash val="solid"/>
           </a:ln>
@@ -14815,7 +15849,7 @@
         </p:nvSpPr>
         <p:spPr>
           <a:xfrm>
-            <a:off x="2938272" y="2258568"/>
+            <a:off x="2221992" y="2258568"/>
             <a:ext cx="1828800" cy="292608"/>
           </a:xfrm>
           <a:prstGeom prst="rect">
@@ -14834,13 +15868,13 @@
             <a:r>
               <a:rPr lang="en-US" sz="1300" b="1" dirty="0">
                 <a:solidFill>
-                  <a:srgbClr val="0F766E"/>
+                  <a:srgbClr val="4C1D95"/>
                 </a:solidFill>
                 <a:latin typeface="Trebuchet MS" pitchFamily="34" charset="0"/>
                 <a:ea typeface="Trebuchet MS" pitchFamily="34" charset="-122"/>
                 <a:cs typeface="Trebuchet MS" pitchFamily="34" charset="-120"/>
               </a:rPr>
-              <a:t>employ</a:t>
+              <a:t>un</a:t>
             </a:r>
             <a:endParaRPr lang="en-US" sz="1300" dirty="0"/>
           </a:p>
@@ -14854,7 +15888,7 @@
         </p:nvSpPr>
         <p:spPr>
           <a:xfrm>
-            <a:off x="2938272" y="2569464"/>
+            <a:off x="2221992" y="2569464"/>
             <a:ext cx="1828800" cy="201168"/>
           </a:xfrm>
           <a:prstGeom prst="rect">
@@ -14879,7 +15913,7 @@
                 <a:ea typeface="Calibri" pitchFamily="34" charset="-122"/>
                 <a:cs typeface="Calibri" pitchFamily="34" charset="-120"/>
               </a:rPr>
-              <a:t>to give work or use</a:t>
+              <a:t>not</a:t>
             </a:r>
             <a:endParaRPr lang="en-US" sz="850" dirty="0"/>
           </a:p>
@@ -14893,7 +15927,7 @@
         </p:nvSpPr>
         <p:spPr>
           <a:xfrm>
-            <a:off x="5803392" y="2258568"/>
+            <a:off x="4370832" y="2258568"/>
             <a:ext cx="1828800" cy="292608"/>
           </a:xfrm>
           <a:prstGeom prst="rect">
@@ -14902,11 +15936,11 @@
             </a:avLst>
           </a:prstGeom>
           <a:solidFill>
-            <a:srgbClr val="FCE7F3"/>
+            <a:srgbClr val="CCFBF1"/>
           </a:solidFill>
           <a:ln w="19050">
             <a:solidFill>
-              <a:srgbClr val="DB2777"/>
+              <a:srgbClr val="0D9488"/>
             </a:solidFill>
             <a:prstDash val="solid"/>
           </a:ln>
@@ -14927,7 +15961,7 @@
         </p:nvSpPr>
         <p:spPr>
           <a:xfrm>
-            <a:off x="5803392" y="2258568"/>
+            <a:off x="4370832" y="2258568"/>
             <a:ext cx="1828800" cy="292608"/>
           </a:xfrm>
           <a:prstGeom prst="rect">
@@ -14946,13 +15980,13 @@
             <a:r>
               <a:rPr lang="en-US" sz="1300" b="1" dirty="0">
                 <a:solidFill>
-                  <a:srgbClr val="9D174D"/>
+                  <a:srgbClr val="0F766E"/>
                 </a:solidFill>
                 <a:latin typeface="Trebuchet MS" pitchFamily="34" charset="0"/>
                 <a:ea typeface="Trebuchet MS" pitchFamily="34" charset="-122"/>
                 <a:cs typeface="Trebuchet MS" pitchFamily="34" charset="-120"/>
               </a:rPr>
-              <a:t>ee</a:t>
+              <a:t>employ</a:t>
             </a:r>
             <a:endParaRPr lang="en-US" sz="1300" dirty="0"/>
           </a:p>
@@ -14966,7 +16000,7 @@
         </p:nvSpPr>
         <p:spPr>
           <a:xfrm>
-            <a:off x="5803392" y="2569464"/>
+            <a:off x="4370832" y="2569464"/>
             <a:ext cx="1828800" cy="201168"/>
           </a:xfrm>
           <a:prstGeom prst="rect">
@@ -14991,7 +16025,7 @@
                 <a:ea typeface="Calibri" pitchFamily="34" charset="-122"/>
                 <a:cs typeface="Calibri" pitchFamily="34" charset="-120"/>
               </a:rPr>
-              <a:t>one who receives the action</a:t>
+              <a:t>give work to; use</a:t>
             </a:r>
             <a:endParaRPr lang="en-US" sz="850" dirty="0"/>
           </a:p>
@@ -15000,6 +16034,118 @@
       <p:sp>
         <p:nvSpPr>
           <p:cNvPr id="22" name="Shape 20"/>
+          <p:cNvSpPr/>
+          <p:nvPr/>
+        </p:nvSpPr>
+        <p:spPr>
+          <a:xfrm>
+            <a:off x="6519672" y="2258568"/>
+            <a:ext cx="1828800" cy="292608"/>
+          </a:xfrm>
+          <a:prstGeom prst="rect">
+            <a:avLst>
+              <a:gd name="adj" fmla="val 25000"/>
+            </a:avLst>
+          </a:prstGeom>
+          <a:solidFill>
+            <a:srgbClr val="FCE7F3"/>
+          </a:solidFill>
+          <a:ln w="19050">
+            <a:solidFill>
+              <a:srgbClr val="DB2777"/>
+            </a:solidFill>
+            <a:prstDash val="solid"/>
+          </a:ln>
+          <a:effectLst>
+            <a:outerShdw sx="100000" sy="100000" kx="0" ky="0" algn="bl" rotWithShape="0" blurRad="101600" dist="38100" dir="8100000">
+              <a:srgbClr val="000000">
+                <a:alpha val="12000"/>
+              </a:srgbClr>
+            </a:outerShdw>
+          </a:effectLst>
+        </p:spPr>
+      </p:sp>
+      <p:sp>
+        <p:nvSpPr>
+          <p:cNvPr id="23" name="Text 21"/>
+          <p:cNvSpPr/>
+          <p:nvPr/>
+        </p:nvSpPr>
+        <p:spPr>
+          <a:xfrm>
+            <a:off x="6519672" y="2258568"/>
+            <a:ext cx="1828800" cy="292608"/>
+          </a:xfrm>
+          <a:prstGeom prst="rect">
+            <a:avLst/>
+          </a:prstGeom>
+          <a:noFill/>
+          <a:ln/>
+        </p:spPr>
+        <p:txBody>
+          <a:bodyPr wrap="square" lIns="0" tIns="0" rIns="0" bIns="0" rtlCol="0" anchor="ctr"/>
+          <a:lstStyle/>
+          <a:p>
+            <a:pPr algn="ctr" indent="0" marL="0">
+              <a:buNone/>
+            </a:pPr>
+            <a:r>
+              <a:rPr lang="en-US" sz="1300" b="1" dirty="0">
+                <a:solidFill>
+                  <a:srgbClr val="9D174D"/>
+                </a:solidFill>
+                <a:latin typeface="Trebuchet MS" pitchFamily="34" charset="0"/>
+                <a:ea typeface="Trebuchet MS" pitchFamily="34" charset="-122"/>
+                <a:cs typeface="Trebuchet MS" pitchFamily="34" charset="-120"/>
+              </a:rPr>
+              <a:t>able</a:t>
+            </a:r>
+            <a:endParaRPr lang="en-US" sz="1300" dirty="0"/>
+          </a:p>
+        </p:txBody>
+      </p:sp>
+      <p:sp>
+        <p:nvSpPr>
+          <p:cNvPr id="24" name="Text 22"/>
+          <p:cNvSpPr/>
+          <p:nvPr/>
+        </p:nvSpPr>
+        <p:spPr>
+          <a:xfrm>
+            <a:off x="6519672" y="2569464"/>
+            <a:ext cx="1828800" cy="201168"/>
+          </a:xfrm>
+          <a:prstGeom prst="rect">
+            <a:avLst/>
+          </a:prstGeom>
+          <a:noFill/>
+          <a:ln/>
+        </p:spPr>
+        <p:txBody>
+          <a:bodyPr wrap="square" lIns="0" tIns="0" rIns="0" bIns="0" rtlCol="0" anchor="t"/>
+          <a:lstStyle/>
+          <a:p>
+            <a:pPr algn="ctr" indent="0" marL="0">
+              <a:buNone/>
+            </a:pPr>
+            <a:r>
+              <a:rPr lang="en-US" sz="850" dirty="0">
+                <a:solidFill>
+                  <a:srgbClr val="475569"/>
+                </a:solidFill>
+                <a:latin typeface="Calibri" pitchFamily="34" charset="0"/>
+                <a:ea typeface="Calibri" pitchFamily="34" charset="-122"/>
+                <a:cs typeface="Calibri" pitchFamily="34" charset="-120"/>
+              </a:rPr>
+              <a:t>able to</a:t>
+            </a:r>
+            <a:endParaRPr lang="en-US" sz="850" dirty="0"/>
+          </a:p>
+        </p:txBody>
+      </p:sp>
+      <p:sp>
+        <p:nvSpPr>
+          <p:cNvPr id="25" name="Shape 23"/>
           <p:cNvSpPr/>
           <p:nvPr/>
         </p:nvSpPr>
@@ -15026,7 +16172,7 @@
       </p:sp>
       <p:sp>
         <p:nvSpPr>
-          <p:cNvPr id="23" name="Text 21"/>
+          <p:cNvPr id="26" name="Text 24"/>
           <p:cNvSpPr/>
           <p:nvPr/>
         </p:nvSpPr>
@@ -15065,7 +16211,7 @@
       </p:sp>
       <p:sp>
         <p:nvSpPr>
-          <p:cNvPr id="24" name="Shape 22"/>
+          <p:cNvPr id="27" name="Shape 25"/>
           <p:cNvSpPr/>
           <p:nvPr/>
         </p:nvSpPr>
@@ -15092,14 +16238,14 @@
       </p:sp>
       <p:sp>
         <p:nvSpPr>
-          <p:cNvPr id="25" name="Shape 23"/>
-          <p:cNvSpPr/>
-          <p:nvPr/>
-        </p:nvSpPr>
-        <p:spPr>
-          <a:xfrm>
-            <a:off x="2313432" y="3364992"/>
-            <a:ext cx="1645920" cy="475488"/>
+          <p:cNvPr id="28" name="Shape 26"/>
+          <p:cNvSpPr/>
+          <p:nvPr/>
+        </p:nvSpPr>
+        <p:spPr>
+          <a:xfrm>
+            <a:off x="1978152" y="3364992"/>
+            <a:ext cx="1225296" cy="475488"/>
           </a:xfrm>
           <a:prstGeom prst="rect">
             <a:avLst>
@@ -15119,14 +16265,14 @@
       </p:sp>
       <p:sp>
         <p:nvSpPr>
-          <p:cNvPr id="26" name="Text 24"/>
-          <p:cNvSpPr/>
-          <p:nvPr/>
-        </p:nvSpPr>
-        <p:spPr>
-          <a:xfrm>
-            <a:off x="2313432" y="3364992"/>
-            <a:ext cx="1645920" cy="475488"/>
+          <p:cNvPr id="29" name="Text 27"/>
+          <p:cNvSpPr/>
+          <p:nvPr/>
+        </p:nvSpPr>
+        <p:spPr>
+          <a:xfrm>
+            <a:off x="1978152" y="3364992"/>
+            <a:ext cx="1225296" cy="475488"/>
           </a:xfrm>
           <a:prstGeom prst="rect">
             <a:avLst/>
@@ -15150,7 +16296,7 @@
                 <a:ea typeface="Trebuchet MS" pitchFamily="34" charset="-122"/>
                 <a:cs typeface="Trebuchet MS" pitchFamily="34" charset="-120"/>
               </a:rPr>
-              <a:t>em</a:t>
+              <a:t>un</a:t>
             </a:r>
             <a:endParaRPr lang="en-US" sz="1400" dirty="0"/>
           </a:p>
@@ -15158,14 +16304,14 @@
       </p:sp>
       <p:sp>
         <p:nvSpPr>
-          <p:cNvPr id="27" name="Text 25"/>
-          <p:cNvSpPr/>
-          <p:nvPr/>
-        </p:nvSpPr>
-        <p:spPr>
-          <a:xfrm>
-            <a:off x="3959352" y="3364992"/>
-            <a:ext cx="411480" cy="475488"/>
+          <p:cNvPr id="30" name="Text 28"/>
+          <p:cNvSpPr/>
+          <p:nvPr/>
+        </p:nvSpPr>
+        <p:spPr>
+          <a:xfrm>
+            <a:off x="3203448" y="3364992"/>
+            <a:ext cx="76200" cy="475488"/>
           </a:xfrm>
           <a:prstGeom prst="rect">
             <a:avLst/>
@@ -15197,14 +16343,14 @@
       </p:sp>
       <p:sp>
         <p:nvSpPr>
-          <p:cNvPr id="28" name="Shape 26"/>
-          <p:cNvSpPr/>
-          <p:nvPr/>
-        </p:nvSpPr>
-        <p:spPr>
-          <a:xfrm>
-            <a:off x="4370832" y="3364992"/>
-            <a:ext cx="1645920" cy="475488"/>
+          <p:cNvPr id="31" name="Shape 29"/>
+          <p:cNvSpPr/>
+          <p:nvPr/>
+        </p:nvSpPr>
+        <p:spPr>
+          <a:xfrm>
+            <a:off x="3279648" y="3364992"/>
+            <a:ext cx="1225296" cy="475488"/>
           </a:xfrm>
           <a:prstGeom prst="rect">
             <a:avLst>
@@ -15224,14 +16370,14 @@
       </p:sp>
       <p:sp>
         <p:nvSpPr>
-          <p:cNvPr id="29" name="Text 27"/>
-          <p:cNvSpPr/>
-          <p:nvPr/>
-        </p:nvSpPr>
-        <p:spPr>
-          <a:xfrm>
-            <a:off x="4370832" y="3364992"/>
-            <a:ext cx="1645920" cy="475488"/>
+          <p:cNvPr id="32" name="Text 30"/>
+          <p:cNvSpPr/>
+          <p:nvPr/>
+        </p:nvSpPr>
+        <p:spPr>
+          <a:xfrm>
+            <a:off x="3279648" y="3364992"/>
+            <a:ext cx="1225296" cy="475488"/>
           </a:xfrm>
           <a:prstGeom prst="rect">
             <a:avLst/>
@@ -15255,7 +16401,7 @@
                 <a:ea typeface="Trebuchet MS" pitchFamily="34" charset="-122"/>
                 <a:cs typeface="Trebuchet MS" pitchFamily="34" charset="-120"/>
               </a:rPr>
-              <a:t>ploy</a:t>
+              <a:t>em</a:t>
             </a:r>
             <a:endParaRPr lang="en-US" sz="1400" dirty="0"/>
           </a:p>
@@ -15263,14 +16409,14 @@
       </p:sp>
       <p:sp>
         <p:nvSpPr>
-          <p:cNvPr id="30" name="Text 28"/>
-          <p:cNvSpPr/>
-          <p:nvPr/>
-        </p:nvSpPr>
-        <p:spPr>
-          <a:xfrm>
-            <a:off x="6016752" y="3364992"/>
-            <a:ext cx="411480" cy="475488"/>
+          <p:cNvPr id="33" name="Text 31"/>
+          <p:cNvSpPr/>
+          <p:nvPr/>
+        </p:nvSpPr>
+        <p:spPr>
+          <a:xfrm>
+            <a:off x="4504944" y="3364992"/>
+            <a:ext cx="76200" cy="475488"/>
           </a:xfrm>
           <a:prstGeom prst="rect">
             <a:avLst/>
@@ -15302,14 +16448,14 @@
       </p:sp>
       <p:sp>
         <p:nvSpPr>
-          <p:cNvPr id="31" name="Shape 29"/>
-          <p:cNvSpPr/>
-          <p:nvPr/>
-        </p:nvSpPr>
-        <p:spPr>
-          <a:xfrm>
-            <a:off x="6428232" y="3364992"/>
-            <a:ext cx="1645920" cy="475488"/>
+          <p:cNvPr id="34" name="Shape 32"/>
+          <p:cNvSpPr/>
+          <p:nvPr/>
+        </p:nvSpPr>
+        <p:spPr>
+          <a:xfrm>
+            <a:off x="4581144" y="3364992"/>
+            <a:ext cx="1225296" cy="475488"/>
           </a:xfrm>
           <a:prstGeom prst="rect">
             <a:avLst>
@@ -15329,14 +16475,14 @@
       </p:sp>
       <p:sp>
         <p:nvSpPr>
-          <p:cNvPr id="32" name="Text 30"/>
-          <p:cNvSpPr/>
-          <p:nvPr/>
-        </p:nvSpPr>
-        <p:spPr>
-          <a:xfrm>
-            <a:off x="6428232" y="3364992"/>
-            <a:ext cx="1645920" cy="475488"/>
+          <p:cNvPr id="35" name="Text 33"/>
+          <p:cNvSpPr/>
+          <p:nvPr/>
+        </p:nvSpPr>
+        <p:spPr>
+          <a:xfrm>
+            <a:off x="4581144" y="3364992"/>
+            <a:ext cx="1225296" cy="475488"/>
           </a:xfrm>
           <a:prstGeom prst="rect">
             <a:avLst/>
@@ -15360,7 +16506,7 @@
                 <a:ea typeface="Trebuchet MS" pitchFamily="34" charset="-122"/>
                 <a:cs typeface="Trebuchet MS" pitchFamily="34" charset="-120"/>
               </a:rPr>
-              <a:t>ee</a:t>
+              <a:t>ploy</a:t>
             </a:r>
             <a:endParaRPr lang="en-US" sz="1400" dirty="0"/>
           </a:p>
@@ -15368,7 +16514,217 @@
       </p:sp>
       <p:sp>
         <p:nvSpPr>
-          <p:cNvPr id="33" name="Shape 31"/>
+          <p:cNvPr id="36" name="Text 34"/>
+          <p:cNvSpPr/>
+          <p:nvPr/>
+        </p:nvSpPr>
+        <p:spPr>
+          <a:xfrm>
+            <a:off x="5806440" y="3364992"/>
+            <a:ext cx="76200" cy="475488"/>
+          </a:xfrm>
+          <a:prstGeom prst="rect">
+            <a:avLst/>
+          </a:prstGeom>
+          <a:noFill/>
+          <a:ln/>
+        </p:spPr>
+        <p:txBody>
+          <a:bodyPr wrap="square" lIns="0" tIns="0" rIns="0" bIns="0" rtlCol="0" anchor="ctr"/>
+          <a:lstStyle/>
+          <a:p>
+            <a:pPr algn="ctr" indent="0" marL="0">
+              <a:buNone/>
+            </a:pPr>
+            <a:r>
+              <a:rPr lang="en-US" sz="1600" b="1" dirty="0">
+                <a:solidFill>
+                  <a:srgbClr val="0D9488"/>
+                </a:solidFill>
+                <a:latin typeface="Trebuchet MS" pitchFamily="34" charset="0"/>
+                <a:ea typeface="Trebuchet MS" pitchFamily="34" charset="-122"/>
+                <a:cs typeface="Trebuchet MS" pitchFamily="34" charset="-120"/>
+              </a:rPr>
+              <a:t>·</a:t>
+            </a:r>
+            <a:endParaRPr lang="en-US" sz="1600" dirty="0"/>
+          </a:p>
+        </p:txBody>
+      </p:sp>
+      <p:sp>
+        <p:nvSpPr>
+          <p:cNvPr id="37" name="Shape 35"/>
+          <p:cNvSpPr/>
+          <p:nvPr/>
+        </p:nvSpPr>
+        <p:spPr>
+          <a:xfrm>
+            <a:off x="5882640" y="3364992"/>
+            <a:ext cx="1225296" cy="475488"/>
+          </a:xfrm>
+          <a:prstGeom prst="rect">
+            <a:avLst>
+              <a:gd name="adj" fmla="val 9615"/>
+            </a:avLst>
+          </a:prstGeom>
+          <a:solidFill>
+            <a:srgbClr val="FFFFFF"/>
+          </a:solidFill>
+          <a:ln w="12700">
+            <a:solidFill>
+              <a:srgbClr val="0D9488"/>
+            </a:solidFill>
+            <a:prstDash val="solid"/>
+          </a:ln>
+        </p:spPr>
+      </p:sp>
+      <p:sp>
+        <p:nvSpPr>
+          <p:cNvPr id="38" name="Text 36"/>
+          <p:cNvSpPr/>
+          <p:nvPr/>
+        </p:nvSpPr>
+        <p:spPr>
+          <a:xfrm>
+            <a:off x="5882640" y="3364992"/>
+            <a:ext cx="1225296" cy="475488"/>
+          </a:xfrm>
+          <a:prstGeom prst="rect">
+            <a:avLst/>
+          </a:prstGeom>
+          <a:noFill/>
+          <a:ln/>
+        </p:spPr>
+        <p:txBody>
+          <a:bodyPr wrap="square" lIns="0" tIns="0" rIns="0" bIns="0" rtlCol="0" anchor="ctr"/>
+          <a:lstStyle/>
+          <a:p>
+            <a:pPr algn="ctr" indent="0" marL="0">
+              <a:buNone/>
+            </a:pPr>
+            <a:r>
+              <a:rPr lang="en-US" sz="1400" b="1" dirty="0">
+                <a:solidFill>
+                  <a:srgbClr val="0D9488"/>
+                </a:solidFill>
+                <a:latin typeface="Trebuchet MS" pitchFamily="34" charset="0"/>
+                <a:ea typeface="Trebuchet MS" pitchFamily="34" charset="-122"/>
+                <a:cs typeface="Trebuchet MS" pitchFamily="34" charset="-120"/>
+              </a:rPr>
+              <a:t>a</a:t>
+            </a:r>
+            <a:endParaRPr lang="en-US" sz="1400" dirty="0"/>
+          </a:p>
+        </p:txBody>
+      </p:sp>
+      <p:sp>
+        <p:nvSpPr>
+          <p:cNvPr id="39" name="Text 37"/>
+          <p:cNvSpPr/>
+          <p:nvPr/>
+        </p:nvSpPr>
+        <p:spPr>
+          <a:xfrm>
+            <a:off x="7107936" y="3364992"/>
+            <a:ext cx="76200" cy="475488"/>
+          </a:xfrm>
+          <a:prstGeom prst="rect">
+            <a:avLst/>
+          </a:prstGeom>
+          <a:noFill/>
+          <a:ln/>
+        </p:spPr>
+        <p:txBody>
+          <a:bodyPr wrap="square" lIns="0" tIns="0" rIns="0" bIns="0" rtlCol="0" anchor="ctr"/>
+          <a:lstStyle/>
+          <a:p>
+            <a:pPr algn="ctr" indent="0" marL="0">
+              <a:buNone/>
+            </a:pPr>
+            <a:r>
+              <a:rPr lang="en-US" sz="1600" b="1" dirty="0">
+                <a:solidFill>
+                  <a:srgbClr val="0D9488"/>
+                </a:solidFill>
+                <a:latin typeface="Trebuchet MS" pitchFamily="34" charset="0"/>
+                <a:ea typeface="Trebuchet MS" pitchFamily="34" charset="-122"/>
+                <a:cs typeface="Trebuchet MS" pitchFamily="34" charset="-120"/>
+              </a:rPr>
+              <a:t>·</a:t>
+            </a:r>
+            <a:endParaRPr lang="en-US" sz="1600" dirty="0"/>
+          </a:p>
+        </p:txBody>
+      </p:sp>
+      <p:sp>
+        <p:nvSpPr>
+          <p:cNvPr id="40" name="Shape 38"/>
+          <p:cNvSpPr/>
+          <p:nvPr/>
+        </p:nvSpPr>
+        <p:spPr>
+          <a:xfrm>
+            <a:off x="7184136" y="3364992"/>
+            <a:ext cx="1225296" cy="475488"/>
+          </a:xfrm>
+          <a:prstGeom prst="rect">
+            <a:avLst>
+              <a:gd name="adj" fmla="val 9615"/>
+            </a:avLst>
+          </a:prstGeom>
+          <a:solidFill>
+            <a:srgbClr val="FFFFFF"/>
+          </a:solidFill>
+          <a:ln w="12700">
+            <a:solidFill>
+              <a:srgbClr val="0D9488"/>
+            </a:solidFill>
+            <a:prstDash val="solid"/>
+          </a:ln>
+        </p:spPr>
+      </p:sp>
+      <p:sp>
+        <p:nvSpPr>
+          <p:cNvPr id="41" name="Text 39"/>
+          <p:cNvSpPr/>
+          <p:nvPr/>
+        </p:nvSpPr>
+        <p:spPr>
+          <a:xfrm>
+            <a:off x="7184136" y="3364992"/>
+            <a:ext cx="1225296" cy="475488"/>
+          </a:xfrm>
+          <a:prstGeom prst="rect">
+            <a:avLst/>
+          </a:prstGeom>
+          <a:noFill/>
+          <a:ln/>
+        </p:spPr>
+        <p:txBody>
+          <a:bodyPr wrap="square" lIns="0" tIns="0" rIns="0" bIns="0" rtlCol="0" anchor="ctr"/>
+          <a:lstStyle/>
+          <a:p>
+            <a:pPr algn="ctr" indent="0" marL="0">
+              <a:buNone/>
+            </a:pPr>
+            <a:r>
+              <a:rPr lang="en-US" sz="1400" b="1" dirty="0">
+                <a:solidFill>
+                  <a:srgbClr val="0D9488"/>
+                </a:solidFill>
+                <a:latin typeface="Trebuchet MS" pitchFamily="34" charset="0"/>
+                <a:ea typeface="Trebuchet MS" pitchFamily="34" charset="-122"/>
+                <a:cs typeface="Trebuchet MS" pitchFamily="34" charset="-120"/>
+              </a:rPr>
+              <a:t>ble</a:t>
+            </a:r>
+            <a:endParaRPr lang="en-US" sz="1400" dirty="0"/>
+          </a:p>
+        </p:txBody>
+      </p:sp>
+      <p:sp>
+        <p:nvSpPr>
+          <p:cNvPr id="42" name="Shape 40"/>
           <p:cNvSpPr/>
           <p:nvPr/>
         </p:nvSpPr>
@@ -15395,7 +16751,7 @@
       </p:sp>
       <p:sp>
         <p:nvSpPr>
-          <p:cNvPr id="34" name="Text 32"/>
+          <p:cNvPr id="43" name="Text 41"/>
           <p:cNvSpPr/>
           <p:nvPr/>
         </p:nvSpPr>
@@ -15434,7 +16790,7 @@
       </p:sp>
       <p:sp>
         <p:nvSpPr>
-          <p:cNvPr id="35" name="Shape 33"/>
+          <p:cNvPr id="44" name="Shape 42"/>
           <p:cNvSpPr/>
           <p:nvPr/>
         </p:nvSpPr>
@@ -15461,14 +16817,14 @@
       </p:sp>
       <p:sp>
         <p:nvSpPr>
-          <p:cNvPr id="36" name="Shape 34"/>
-          <p:cNvSpPr/>
-          <p:nvPr/>
-        </p:nvSpPr>
-        <p:spPr>
-          <a:xfrm>
-            <a:off x="2427732" y="4169664"/>
-            <a:ext cx="685800" cy="475488"/>
+          <p:cNvPr id="45" name="Shape 43"/>
+          <p:cNvSpPr/>
+          <p:nvPr/>
+        </p:nvSpPr>
+        <p:spPr>
+          <a:xfrm>
+            <a:off x="1951828" y="4169664"/>
+            <a:ext cx="603504" cy="475488"/>
           </a:xfrm>
           <a:prstGeom prst="rect">
             <a:avLst>
@@ -15488,14 +16844,14 @@
       </p:sp>
       <p:sp>
         <p:nvSpPr>
-          <p:cNvPr id="37" name="Text 35"/>
-          <p:cNvSpPr/>
-          <p:nvPr/>
-        </p:nvSpPr>
-        <p:spPr>
-          <a:xfrm>
-            <a:off x="2427732" y="4169664"/>
-            <a:ext cx="685800" cy="475488"/>
+          <p:cNvPr id="46" name="Text 44"/>
+          <p:cNvSpPr/>
+          <p:nvPr/>
+        </p:nvSpPr>
+        <p:spPr>
+          <a:xfrm>
+            <a:off x="1951828" y="4169664"/>
+            <a:ext cx="603504" cy="475488"/>
           </a:xfrm>
           <a:prstGeom prst="rect">
             <a:avLst/>
@@ -15519,7 +16875,7 @@
                 <a:ea typeface="Trebuchet MS" pitchFamily="34" charset="-122"/>
                 <a:cs typeface="Trebuchet MS" pitchFamily="34" charset="-120"/>
               </a:rPr>
-              <a:t>e</a:t>
+              <a:t>u</a:t>
             </a:r>
             <a:endParaRPr lang="en-US" sz="900" dirty="0"/>
           </a:p>
@@ -15527,14 +16883,14 @@
       </p:sp>
       <p:sp>
         <p:nvSpPr>
-          <p:cNvPr id="38" name="Shape 36"/>
-          <p:cNvSpPr/>
-          <p:nvPr/>
-        </p:nvSpPr>
-        <p:spPr>
-          <a:xfrm>
-            <a:off x="3639312" y="4169664"/>
-            <a:ext cx="685800" cy="475488"/>
+          <p:cNvPr id="47" name="Shape 45"/>
+          <p:cNvSpPr/>
+          <p:nvPr/>
+        </p:nvSpPr>
+        <p:spPr>
+          <a:xfrm>
+            <a:off x="2605209" y="4169664"/>
+            <a:ext cx="603504" cy="475488"/>
           </a:xfrm>
           <a:prstGeom prst="rect">
             <a:avLst>
@@ -15554,14 +16910,14 @@
       </p:sp>
       <p:sp>
         <p:nvSpPr>
-          <p:cNvPr id="39" name="Text 37"/>
-          <p:cNvSpPr/>
-          <p:nvPr/>
-        </p:nvSpPr>
-        <p:spPr>
-          <a:xfrm>
-            <a:off x="3639312" y="4169664"/>
-            <a:ext cx="685800" cy="475488"/>
+          <p:cNvPr id="48" name="Text 46"/>
+          <p:cNvSpPr/>
+          <p:nvPr/>
+        </p:nvSpPr>
+        <p:spPr>
+          <a:xfrm>
+            <a:off x="2605209" y="4169664"/>
+            <a:ext cx="603504" cy="475488"/>
           </a:xfrm>
           <a:prstGeom prst="rect">
             <a:avLst/>
@@ -15585,7 +16941,7 @@
                 <a:ea typeface="Trebuchet MS" pitchFamily="34" charset="-122"/>
                 <a:cs typeface="Trebuchet MS" pitchFamily="34" charset="-120"/>
               </a:rPr>
-              <a:t>m</a:t>
+              <a:t>n</a:t>
             </a:r>
             <a:endParaRPr lang="en-US" sz="900" dirty="0"/>
           </a:p>
@@ -15593,14 +16949,14 @@
       </p:sp>
       <p:sp>
         <p:nvSpPr>
-          <p:cNvPr id="40" name="Shape 38"/>
-          <p:cNvSpPr/>
-          <p:nvPr/>
-        </p:nvSpPr>
-        <p:spPr>
-          <a:xfrm>
-            <a:off x="4850892" y="4169664"/>
-            <a:ext cx="685800" cy="475488"/>
+          <p:cNvPr id="49" name="Shape 47"/>
+          <p:cNvSpPr/>
+          <p:nvPr/>
+        </p:nvSpPr>
+        <p:spPr>
+          <a:xfrm>
+            <a:off x="3258589" y="4169664"/>
+            <a:ext cx="603504" cy="475488"/>
           </a:xfrm>
           <a:prstGeom prst="rect">
             <a:avLst>
@@ -15620,14 +16976,14 @@
       </p:sp>
       <p:sp>
         <p:nvSpPr>
-          <p:cNvPr id="41" name="Text 39"/>
-          <p:cNvSpPr/>
-          <p:nvPr/>
-        </p:nvSpPr>
-        <p:spPr>
-          <a:xfrm>
-            <a:off x="4850892" y="4169664"/>
-            <a:ext cx="685800" cy="475488"/>
+          <p:cNvPr id="50" name="Text 48"/>
+          <p:cNvSpPr/>
+          <p:nvPr/>
+        </p:nvSpPr>
+        <p:spPr>
+          <a:xfrm>
+            <a:off x="3258589" y="4169664"/>
+            <a:ext cx="603504" cy="475488"/>
           </a:xfrm>
           <a:prstGeom prst="rect">
             <a:avLst/>
@@ -15651,7 +17007,7 @@
                 <a:ea typeface="Trebuchet MS" pitchFamily="34" charset="-122"/>
                 <a:cs typeface="Trebuchet MS" pitchFamily="34" charset="-120"/>
               </a:rPr>
-              <a:t>pl</a:t>
+              <a:t>e</a:t>
             </a:r>
             <a:endParaRPr lang="en-US" sz="900" dirty="0"/>
           </a:p>
@@ -15659,14 +17015,14 @@
       </p:sp>
       <p:sp>
         <p:nvSpPr>
-          <p:cNvPr id="42" name="Shape 40"/>
-          <p:cNvSpPr/>
-          <p:nvPr/>
-        </p:nvSpPr>
-        <p:spPr>
-          <a:xfrm>
-            <a:off x="6062472" y="4169664"/>
-            <a:ext cx="685800" cy="475488"/>
+          <p:cNvPr id="51" name="Shape 49"/>
+          <p:cNvSpPr/>
+          <p:nvPr/>
+        </p:nvSpPr>
+        <p:spPr>
+          <a:xfrm>
+            <a:off x="3911969" y="4169664"/>
+            <a:ext cx="603504" cy="475488"/>
           </a:xfrm>
           <a:prstGeom prst="rect">
             <a:avLst>
@@ -15686,14 +17042,14 @@
       </p:sp>
       <p:sp>
         <p:nvSpPr>
-          <p:cNvPr id="43" name="Text 41"/>
-          <p:cNvSpPr/>
-          <p:nvPr/>
-        </p:nvSpPr>
-        <p:spPr>
-          <a:xfrm>
-            <a:off x="6062472" y="4169664"/>
-            <a:ext cx="685800" cy="475488"/>
+          <p:cNvPr id="52" name="Text 50"/>
+          <p:cNvSpPr/>
+          <p:nvPr/>
+        </p:nvSpPr>
+        <p:spPr>
+          <a:xfrm>
+            <a:off x="3911969" y="4169664"/>
+            <a:ext cx="603504" cy="475488"/>
           </a:xfrm>
           <a:prstGeom prst="rect">
             <a:avLst/>
@@ -15717,7 +17073,7 @@
                 <a:ea typeface="Trebuchet MS" pitchFamily="34" charset="-122"/>
                 <a:cs typeface="Trebuchet MS" pitchFamily="34" charset="-120"/>
               </a:rPr>
-              <a:t>oy</a:t>
+              <a:t>m</a:t>
             </a:r>
             <a:endParaRPr lang="en-US" sz="900" dirty="0"/>
           </a:p>
@@ -15725,14 +17081,14 @@
       </p:sp>
       <p:sp>
         <p:nvSpPr>
-          <p:cNvPr id="44" name="Shape 42"/>
-          <p:cNvSpPr/>
-          <p:nvPr/>
-        </p:nvSpPr>
-        <p:spPr>
-          <a:xfrm>
-            <a:off x="7274052" y="4169664"/>
-            <a:ext cx="685800" cy="475488"/>
+          <p:cNvPr id="53" name="Shape 51"/>
+          <p:cNvSpPr/>
+          <p:nvPr/>
+        </p:nvSpPr>
+        <p:spPr>
+          <a:xfrm>
+            <a:off x="4565350" y="4169664"/>
+            <a:ext cx="603504" cy="475488"/>
           </a:xfrm>
           <a:prstGeom prst="rect">
             <a:avLst>
@@ -15752,14 +17108,14 @@
       </p:sp>
       <p:sp>
         <p:nvSpPr>
-          <p:cNvPr id="45" name="Text 43"/>
-          <p:cNvSpPr/>
-          <p:nvPr/>
-        </p:nvSpPr>
-        <p:spPr>
-          <a:xfrm>
-            <a:off x="7274052" y="4169664"/>
-            <a:ext cx="685800" cy="475488"/>
+          <p:cNvPr id="54" name="Text 52"/>
+          <p:cNvSpPr/>
+          <p:nvPr/>
+        </p:nvSpPr>
+        <p:spPr>
+          <a:xfrm>
+            <a:off x="4565350" y="4169664"/>
+            <a:ext cx="603504" cy="475488"/>
           </a:xfrm>
           <a:prstGeom prst="rect">
             <a:avLst/>
@@ -15783,7 +17139,337 @@
                 <a:ea typeface="Trebuchet MS" pitchFamily="34" charset="-122"/>
                 <a:cs typeface="Trebuchet MS" pitchFamily="34" charset="-120"/>
               </a:rPr>
-              <a:t>ee</a:t>
+              <a:t>p</a:t>
+            </a:r>
+            <a:endParaRPr lang="en-US" sz="900" dirty="0"/>
+          </a:p>
+        </p:txBody>
+      </p:sp>
+      <p:sp>
+        <p:nvSpPr>
+          <p:cNvPr id="55" name="Shape 53"/>
+          <p:cNvSpPr/>
+          <p:nvPr/>
+        </p:nvSpPr>
+        <p:spPr>
+          <a:xfrm>
+            <a:off x="5218730" y="4169664"/>
+            <a:ext cx="603504" cy="475488"/>
+          </a:xfrm>
+          <a:prstGeom prst="rect">
+            <a:avLst>
+              <a:gd name="adj" fmla="val 7692"/>
+            </a:avLst>
+          </a:prstGeom>
+          <a:solidFill>
+            <a:srgbClr val="FFFFFF"/>
+          </a:solidFill>
+          <a:ln w="12700">
+            <a:solidFill>
+              <a:srgbClr val="DB2777"/>
+            </a:solidFill>
+            <a:prstDash val="solid"/>
+          </a:ln>
+        </p:spPr>
+      </p:sp>
+      <p:sp>
+        <p:nvSpPr>
+          <p:cNvPr id="56" name="Text 54"/>
+          <p:cNvSpPr/>
+          <p:nvPr/>
+        </p:nvSpPr>
+        <p:spPr>
+          <a:xfrm>
+            <a:off x="5218730" y="4169664"/>
+            <a:ext cx="603504" cy="475488"/>
+          </a:xfrm>
+          <a:prstGeom prst="rect">
+            <a:avLst/>
+          </a:prstGeom>
+          <a:noFill/>
+          <a:ln/>
+        </p:spPr>
+        <p:txBody>
+          <a:bodyPr wrap="square" lIns="0" tIns="0" rIns="0" bIns="0" rtlCol="0" anchor="ctr"/>
+          <a:lstStyle/>
+          <a:p>
+            <a:pPr algn="ctr" indent="0" marL="0">
+              <a:buNone/>
+            </a:pPr>
+            <a:r>
+              <a:rPr lang="en-US" sz="900" b="1" dirty="0">
+                <a:solidFill>
+                  <a:srgbClr val="9D174D"/>
+                </a:solidFill>
+                <a:latin typeface="Trebuchet MS" pitchFamily="34" charset="0"/>
+                <a:ea typeface="Trebuchet MS" pitchFamily="34" charset="-122"/>
+                <a:cs typeface="Trebuchet MS" pitchFamily="34" charset="-120"/>
+              </a:rPr>
+              <a:t>l</a:t>
+            </a:r>
+            <a:endParaRPr lang="en-US" sz="900" dirty="0"/>
+          </a:p>
+        </p:txBody>
+      </p:sp>
+      <p:sp>
+        <p:nvSpPr>
+          <p:cNvPr id="57" name="Shape 55"/>
+          <p:cNvSpPr/>
+          <p:nvPr/>
+        </p:nvSpPr>
+        <p:spPr>
+          <a:xfrm>
+            <a:off x="5872111" y="4169664"/>
+            <a:ext cx="603504" cy="475488"/>
+          </a:xfrm>
+          <a:prstGeom prst="rect">
+            <a:avLst>
+              <a:gd name="adj" fmla="val 7692"/>
+            </a:avLst>
+          </a:prstGeom>
+          <a:solidFill>
+            <a:srgbClr val="FFFFFF"/>
+          </a:solidFill>
+          <a:ln w="12700">
+            <a:solidFill>
+              <a:srgbClr val="DB2777"/>
+            </a:solidFill>
+            <a:prstDash val="solid"/>
+          </a:ln>
+        </p:spPr>
+      </p:sp>
+      <p:sp>
+        <p:nvSpPr>
+          <p:cNvPr id="58" name="Text 56"/>
+          <p:cNvSpPr/>
+          <p:nvPr/>
+        </p:nvSpPr>
+        <p:spPr>
+          <a:xfrm>
+            <a:off x="5872111" y="4169664"/>
+            <a:ext cx="603504" cy="475488"/>
+          </a:xfrm>
+          <a:prstGeom prst="rect">
+            <a:avLst/>
+          </a:prstGeom>
+          <a:noFill/>
+          <a:ln/>
+        </p:spPr>
+        <p:txBody>
+          <a:bodyPr wrap="square" lIns="0" tIns="0" rIns="0" bIns="0" rtlCol="0" anchor="ctr"/>
+          <a:lstStyle/>
+          <a:p>
+            <a:pPr algn="ctr" indent="0" marL="0">
+              <a:buNone/>
+            </a:pPr>
+            <a:r>
+              <a:rPr lang="en-US" sz="900" b="1" dirty="0">
+                <a:solidFill>
+                  <a:srgbClr val="9D174D"/>
+                </a:solidFill>
+                <a:latin typeface="Trebuchet MS" pitchFamily="34" charset="0"/>
+                <a:ea typeface="Trebuchet MS" pitchFamily="34" charset="-122"/>
+                <a:cs typeface="Trebuchet MS" pitchFamily="34" charset="-120"/>
+              </a:rPr>
+              <a:t>oy</a:t>
+            </a:r>
+            <a:endParaRPr lang="en-US" sz="900" dirty="0"/>
+          </a:p>
+        </p:txBody>
+      </p:sp>
+      <p:sp>
+        <p:nvSpPr>
+          <p:cNvPr id="59" name="Shape 57"/>
+          <p:cNvSpPr/>
+          <p:nvPr/>
+        </p:nvSpPr>
+        <p:spPr>
+          <a:xfrm>
+            <a:off x="6525491" y="4169664"/>
+            <a:ext cx="603504" cy="475488"/>
+          </a:xfrm>
+          <a:prstGeom prst="rect">
+            <a:avLst>
+              <a:gd name="adj" fmla="val 7692"/>
+            </a:avLst>
+          </a:prstGeom>
+          <a:solidFill>
+            <a:srgbClr val="FFFFFF"/>
+          </a:solidFill>
+          <a:ln w="12700">
+            <a:solidFill>
+              <a:srgbClr val="DB2777"/>
+            </a:solidFill>
+            <a:prstDash val="solid"/>
+          </a:ln>
+        </p:spPr>
+      </p:sp>
+      <p:sp>
+        <p:nvSpPr>
+          <p:cNvPr id="60" name="Text 58"/>
+          <p:cNvSpPr/>
+          <p:nvPr/>
+        </p:nvSpPr>
+        <p:spPr>
+          <a:xfrm>
+            <a:off x="6525491" y="4169664"/>
+            <a:ext cx="603504" cy="475488"/>
+          </a:xfrm>
+          <a:prstGeom prst="rect">
+            <a:avLst/>
+          </a:prstGeom>
+          <a:noFill/>
+          <a:ln/>
+        </p:spPr>
+        <p:txBody>
+          <a:bodyPr wrap="square" lIns="0" tIns="0" rIns="0" bIns="0" rtlCol="0" anchor="ctr"/>
+          <a:lstStyle/>
+          <a:p>
+            <a:pPr algn="ctr" indent="0" marL="0">
+              <a:buNone/>
+            </a:pPr>
+            <a:r>
+              <a:rPr lang="en-US" sz="900" b="1" dirty="0">
+                <a:solidFill>
+                  <a:srgbClr val="9D174D"/>
+                </a:solidFill>
+                <a:latin typeface="Trebuchet MS" pitchFamily="34" charset="0"/>
+                <a:ea typeface="Trebuchet MS" pitchFamily="34" charset="-122"/>
+                <a:cs typeface="Trebuchet MS" pitchFamily="34" charset="-120"/>
+              </a:rPr>
+              <a:t>a</a:t>
+            </a:r>
+            <a:endParaRPr lang="en-US" sz="900" dirty="0"/>
+          </a:p>
+        </p:txBody>
+      </p:sp>
+      <p:sp>
+        <p:nvSpPr>
+          <p:cNvPr id="61" name="Shape 59"/>
+          <p:cNvSpPr/>
+          <p:nvPr/>
+        </p:nvSpPr>
+        <p:spPr>
+          <a:xfrm>
+            <a:off x="7178871" y="4169664"/>
+            <a:ext cx="603504" cy="475488"/>
+          </a:xfrm>
+          <a:prstGeom prst="rect">
+            <a:avLst>
+              <a:gd name="adj" fmla="val 7692"/>
+            </a:avLst>
+          </a:prstGeom>
+          <a:solidFill>
+            <a:srgbClr val="FFFFFF"/>
+          </a:solidFill>
+          <a:ln w="12700">
+            <a:solidFill>
+              <a:srgbClr val="DB2777"/>
+            </a:solidFill>
+            <a:prstDash val="solid"/>
+          </a:ln>
+        </p:spPr>
+      </p:sp>
+      <p:sp>
+        <p:nvSpPr>
+          <p:cNvPr id="62" name="Text 60"/>
+          <p:cNvSpPr/>
+          <p:nvPr/>
+        </p:nvSpPr>
+        <p:spPr>
+          <a:xfrm>
+            <a:off x="7178871" y="4169664"/>
+            <a:ext cx="603504" cy="475488"/>
+          </a:xfrm>
+          <a:prstGeom prst="rect">
+            <a:avLst/>
+          </a:prstGeom>
+          <a:noFill/>
+          <a:ln/>
+        </p:spPr>
+        <p:txBody>
+          <a:bodyPr wrap="square" lIns="0" tIns="0" rIns="0" bIns="0" rtlCol="0" anchor="ctr"/>
+          <a:lstStyle/>
+          <a:p>
+            <a:pPr algn="ctr" indent="0" marL="0">
+              <a:buNone/>
+            </a:pPr>
+            <a:r>
+              <a:rPr lang="en-US" sz="900" b="1" dirty="0">
+                <a:solidFill>
+                  <a:srgbClr val="9D174D"/>
+                </a:solidFill>
+                <a:latin typeface="Trebuchet MS" pitchFamily="34" charset="0"/>
+                <a:ea typeface="Trebuchet MS" pitchFamily="34" charset="-122"/>
+                <a:cs typeface="Trebuchet MS" pitchFamily="34" charset="-120"/>
+              </a:rPr>
+              <a:t>b</a:t>
+            </a:r>
+            <a:endParaRPr lang="en-US" sz="900" dirty="0"/>
+          </a:p>
+        </p:txBody>
+      </p:sp>
+      <p:sp>
+        <p:nvSpPr>
+          <p:cNvPr id="63" name="Shape 61"/>
+          <p:cNvSpPr/>
+          <p:nvPr/>
+        </p:nvSpPr>
+        <p:spPr>
+          <a:xfrm>
+            <a:off x="7832252" y="4169664"/>
+            <a:ext cx="603504" cy="475488"/>
+          </a:xfrm>
+          <a:prstGeom prst="rect">
+            <a:avLst>
+              <a:gd name="adj" fmla="val 7692"/>
+            </a:avLst>
+          </a:prstGeom>
+          <a:solidFill>
+            <a:srgbClr val="FFFFFF"/>
+          </a:solidFill>
+          <a:ln w="12700">
+            <a:solidFill>
+              <a:srgbClr val="DB2777"/>
+            </a:solidFill>
+            <a:prstDash val="solid"/>
+          </a:ln>
+        </p:spPr>
+      </p:sp>
+      <p:sp>
+        <p:nvSpPr>
+          <p:cNvPr id="64" name="Text 62"/>
+          <p:cNvSpPr/>
+          <p:nvPr/>
+        </p:nvSpPr>
+        <p:spPr>
+          <a:xfrm>
+            <a:off x="7832252" y="4169664"/>
+            <a:ext cx="603504" cy="475488"/>
+          </a:xfrm>
+          <a:prstGeom prst="rect">
+            <a:avLst/>
+          </a:prstGeom>
+          <a:noFill/>
+          <a:ln/>
+        </p:spPr>
+        <p:txBody>
+          <a:bodyPr wrap="square" lIns="0" tIns="0" rIns="0" bIns="0" rtlCol="0" anchor="ctr"/>
+          <a:lstStyle/>
+          <a:p>
+            <a:pPr algn="ctr" indent="0" marL="0">
+              <a:buNone/>
+            </a:pPr>
+            <a:r>
+              <a:rPr lang="en-US" sz="900" b="1" dirty="0">
+                <a:solidFill>
+                  <a:srgbClr val="9D174D"/>
+                </a:solidFill>
+                <a:latin typeface="Trebuchet MS" pitchFamily="34" charset="0"/>
+                <a:ea typeface="Trebuchet MS" pitchFamily="34" charset="-122"/>
+                <a:cs typeface="Trebuchet MS" pitchFamily="34" charset="-120"/>
+              </a:rPr>
+              <a:t>le</a:t>
             </a:r>
             <a:endParaRPr lang="en-US" sz="900" dirty="0"/>
           </a:p>
@@ -16357,7 +18043,7 @@
                 <a:ea typeface="Calibri" pitchFamily="34" charset="-122"/>
                 <a:cs typeface="Calibri" pitchFamily="34" charset="-120"/>
               </a:rPr>
-              <a:t>Word Labs  •  wordlabs.app  •  Root: 'employ' = to use or give work</a:t>
+              <a:t>Word Labs  •  wordlabs.app  •  Root: 'employ' = give work to; use</a:t>
             </a:r>
             <a:endParaRPr lang="en-US" sz="800" dirty="0"/>
           </a:p>
@@ -16691,7 +18377,7 @@
                 <a:ea typeface="Trebuchet MS" pitchFamily="34" charset="-122"/>
                 <a:cs typeface="Trebuchet MS" pitchFamily="34" charset="-120"/>
               </a:rPr>
-              <a:t>2</a:t>
+              <a:t>0</a:t>
             </a:r>
             <a:pPr algn="ctr" indent="0" marL="0">
               <a:buNone/>
@@ -16705,7 +18391,7 @@
                 <a:ea typeface="Trebuchet MS" pitchFamily="34" charset="-122"/>
                 <a:cs typeface="Trebuchet MS" pitchFamily="34" charset="-120"/>
               </a:rPr>
-              <a:t>  punctuation marks</a:t>
+              <a:t>  punctuation mark</a:t>
             </a:r>
             <a:endParaRPr lang="en-US" sz="2800" dirty="0"/>
           </a:p>
@@ -16997,7 +18683,7 @@
                 <a:ea typeface="Calibri" pitchFamily="34" charset="-122"/>
                 <a:cs typeface="Calibri" pitchFamily="34" charset="-120"/>
               </a:rPr>
-              <a:t>Word Labs  •  wordlabs.app  •  Root: 'employ' = to use or give work</a:t>
+              <a:t>Word Labs  •  wordlabs.app  •  Root: 'employ' = give work to; use</a:t>
             </a:r>
             <a:endParaRPr lang="en-US" sz="800" dirty="0"/>
           </a:p>
@@ -17101,20 +18787,6 @@
               <a:buNone/>
             </a:pPr>
             <a:r>
-              <a:rPr lang="en-US" sz="1800" dirty="0">
-                <a:solidFill>
-                  <a:srgbClr val="0F172A"/>
-                </a:solidFill>
-                <a:latin typeface="Calibri" pitchFamily="34" charset="0"/>
-                <a:ea typeface="Calibri" pitchFamily="34" charset="-122"/>
-                <a:cs typeface="Calibri" pitchFamily="34" charset="-120"/>
-              </a:rPr>
-              <a:t>Due to rising </a:t>
-            </a:r>
-            <a:pPr algn="l" indent="0" marL="0">
-              <a:buNone/>
-            </a:pPr>
-            <a:r>
               <a:rPr lang="en-US" sz="1800" b="1" dirty="0">
                 <a:solidFill>
                   <a:srgbClr val="0D9488"/>
@@ -17126,7 +18798,7 @@
                 <a:ea typeface="Calibri" pitchFamily="34" charset="-122"/>
                 <a:cs typeface="Calibri" pitchFamily="34" charset="-120"/>
               </a:rPr>
-              <a:t>unemployment</a:t>
+              <a:t>Unemployment</a:t>
             </a:r>
             <a:pPr algn="l" indent="0" marL="0">
               <a:buNone/>
@@ -17140,7 +18812,7 @@
                 <a:ea typeface="Calibri" pitchFamily="34" charset="-122"/>
                 <a:cs typeface="Calibri" pitchFamily="34" charset="-120"/>
               </a:rPr>
-              <a:t>, the government introduced new </a:t>
+              <a:t> rose sharply after the factory shut down. Every </a:t>
             </a:r>
             <a:pPr algn="l" indent="0" marL="0">
               <a:buNone/>
@@ -17157,7 +18829,7 @@
                 <a:ea typeface="Calibri" pitchFamily="34" charset="-122"/>
                 <a:cs typeface="Calibri" pitchFamily="34" charset="-120"/>
               </a:rPr>
-              <a:t>employment</a:t>
+              <a:t>employee</a:t>
             </a:r>
             <a:pPr algn="l" indent="0" marL="0">
               <a:buNone/>
@@ -17171,7 +18843,7 @@
                 <a:ea typeface="Calibri" pitchFamily="34" charset="-122"/>
                 <a:cs typeface="Calibri" pitchFamily="34" charset="-120"/>
               </a:rPr>
-              <a:t> schemes; many people hoped to be </a:t>
+              <a:t> received a bonus at the end of the year. The company gave all its </a:t>
             </a:r>
             <a:pPr algn="l" indent="0" marL="0">
               <a:buNone/>
@@ -17188,7 +18860,7 @@
                 <a:ea typeface="Calibri" pitchFamily="34" charset="-122"/>
                 <a:cs typeface="Calibri" pitchFamily="34" charset="-120"/>
               </a:rPr>
-              <a:t>reemployed</a:t>
+              <a:t>employees</a:t>
             </a:r>
             <a:pPr algn="l" indent="0" marL="0">
               <a:buNone/>
@@ -17202,7 +18874,7 @@
                 <a:ea typeface="Calibri" pitchFamily="34" charset="-122"/>
                 <a:cs typeface="Calibri" pitchFamily="34" charset="-120"/>
               </a:rPr>
-              <a:t> quickly.</a:t>
+              <a:t> a day off.</a:t>
             </a:r>
             <a:endParaRPr lang="en-US" sz="1800" dirty="0"/>
           </a:p>
@@ -17485,7 +19157,7 @@
                 <a:ea typeface="Trebuchet MS" pitchFamily="34" charset="-122"/>
                 <a:cs typeface="Trebuchet MS" pitchFamily="34" charset="-120"/>
               </a:rPr>
-              <a:t>employment</a:t>
+              <a:t>employee</a:t>
             </a:r>
             <a:endParaRPr lang="en-US" sz="1400" dirty="0"/>
           </a:p>
@@ -17613,7 +19285,7 @@
                 <a:ea typeface="Trebuchet MS" pitchFamily="34" charset="-122"/>
                 <a:cs typeface="Trebuchet MS" pitchFamily="34" charset="-120"/>
               </a:rPr>
-              <a:t>reemployed</a:t>
+              <a:t>employees</a:t>
             </a:r>
             <a:endParaRPr lang="en-US" sz="1400" dirty="0"/>
           </a:p>
@@ -17944,7 +19616,7 @@
                 <a:ea typeface="Calibri" pitchFamily="34" charset="-122"/>
                 <a:cs typeface="Calibri" pitchFamily="34" charset="-120"/>
               </a:rPr>
-              <a:t>Word Labs  •  wordlabs.app  •  Root: 'employ' = to use or give work</a:t>
+              <a:t>Word Labs  •  wordlabs.app  •  Root: 'employ' = give work to; use</a:t>
             </a:r>
             <a:endParaRPr lang="en-US" sz="800" dirty="0"/>
           </a:p>
@@ -18771,7 +20443,7 @@
                 <a:ea typeface="Calibri" pitchFamily="34" charset="-122"/>
                 <a:cs typeface="Calibri" pitchFamily="34" charset="-120"/>
               </a:rPr>
-              <a:t>Word Labs  •  wordlabs.app  •  Root: 'employ' = to use or give work</a:t>
+              <a:t>Word Labs  •  wordlabs.app  •  Root: 'employ' = give work to; use</a:t>
             </a:r>
             <a:endParaRPr lang="en-US" sz="800" dirty="0"/>
           </a:p>
@@ -19200,7 +20872,7 @@
                 <a:ea typeface="Calibri" pitchFamily="34" charset="-122"/>
                 <a:cs typeface="Calibri" pitchFamily="34" charset="-120"/>
               </a:rPr>
-              <a:t>to give work or use</a:t>
+              <a:t>give work to; use</a:t>
             </a:r>
             <a:endParaRPr lang="en-US" sz="850" dirty="0"/>
           </a:p>
@@ -19312,7 +20984,7 @@
                 <a:ea typeface="Calibri" pitchFamily="34" charset="-122"/>
                 <a:cs typeface="Calibri" pitchFamily="34" charset="-120"/>
               </a:rPr>
-              <a:t>state or condition of</a:t>
+              <a:t>result of action</a:t>
             </a:r>
             <a:endParaRPr lang="en-US" sz="850" dirty="0"/>
           </a:p>
@@ -19868,7 +21540,7 @@
                 <a:ea typeface="Calibri" pitchFamily="34" charset="-122"/>
                 <a:cs typeface="Calibri" pitchFamily="34" charset="-120"/>
               </a:rPr>
-              <a:t>Word Labs  •  wordlabs.app  •  Root: 'employ' = to use or give work</a:t>
+              <a:t>Word Labs  •  wordlabs.app  •  Root: 'employ' = give work to; use</a:t>
             </a:r>
             <a:endParaRPr lang="en-US" sz="800" dirty="0"/>
           </a:p>
@@ -20297,7 +21969,7 @@
                 <a:ea typeface="Calibri" pitchFamily="34" charset="-122"/>
                 <a:cs typeface="Calibri" pitchFamily="34" charset="-120"/>
               </a:rPr>
-              <a:t>to give work or use</a:t>
+              <a:t>give work to; use</a:t>
             </a:r>
             <a:endParaRPr lang="en-US" sz="850" dirty="0"/>
           </a:p>
@@ -20409,7 +22081,7 @@
                 <a:ea typeface="Calibri" pitchFamily="34" charset="-122"/>
                 <a:cs typeface="Calibri" pitchFamily="34" charset="-120"/>
               </a:rPr>
-              <a:t>state or condition of</a:t>
+              <a:t>result of action</a:t>
             </a:r>
             <a:endParaRPr lang="en-US" sz="850" dirty="0"/>
           </a:p>
@@ -21307,7 +22979,7 @@
                 <a:ea typeface="Calibri" pitchFamily="34" charset="-122"/>
                 <a:cs typeface="Calibri" pitchFamily="34" charset="-120"/>
               </a:rPr>
-              <a:t>Word Labs  •  wordlabs.app  •  Root: 'employ' = to use or give work</a:t>
+              <a:t>Word Labs  •  wordlabs.app  •  Root: 'employ' = give work to; use</a:t>
             </a:r>
             <a:endParaRPr lang="en-US" sz="800" dirty="0"/>
           </a:p>
@@ -21736,7 +23408,7 @@
                 <a:ea typeface="Calibri" pitchFamily="34" charset="-122"/>
                 <a:cs typeface="Calibri" pitchFamily="34" charset="-120"/>
               </a:rPr>
-              <a:t>to give work or use</a:t>
+              <a:t>give work to; use</a:t>
             </a:r>
             <a:endParaRPr lang="en-US" sz="850" dirty="0"/>
           </a:p>
@@ -21848,7 +23520,7 @@
                 <a:ea typeface="Calibri" pitchFamily="34" charset="-122"/>
                 <a:cs typeface="Calibri" pitchFamily="34" charset="-120"/>
               </a:rPr>
-              <a:t>state or condition of</a:t>
+              <a:t>result of action</a:t>
             </a:r>
             <a:endParaRPr lang="en-US" sz="850" dirty="0"/>
           </a:p>
@@ -22429,8 +24101,8 @@
         </p:nvSpPr>
         <p:spPr>
           <a:xfrm>
-            <a:off x="1951828" y="4169664"/>
-            <a:ext cx="603504" cy="475488"/>
+            <a:off x="1952244" y="4169664"/>
+            <a:ext cx="543652" cy="475488"/>
           </a:xfrm>
           <a:prstGeom prst="rect">
             <a:avLst>
@@ -22456,8 +24128,8 @@
         </p:nvSpPr>
         <p:spPr>
           <a:xfrm>
-            <a:off x="1951828" y="4169664"/>
-            <a:ext cx="603504" cy="475488"/>
+            <a:off x="1952244" y="4169664"/>
+            <a:ext cx="543652" cy="475488"/>
           </a:xfrm>
           <a:prstGeom prst="rect">
             <a:avLst/>
@@ -22495,8 +24167,8 @@
         </p:nvSpPr>
         <p:spPr>
           <a:xfrm>
-            <a:off x="2605209" y="4169664"/>
-            <a:ext cx="603504" cy="475488"/>
+            <a:off x="2546188" y="4169664"/>
+            <a:ext cx="543652" cy="475488"/>
           </a:xfrm>
           <a:prstGeom prst="rect">
             <a:avLst>
@@ -22522,8 +24194,8 @@
         </p:nvSpPr>
         <p:spPr>
           <a:xfrm>
-            <a:off x="2605209" y="4169664"/>
-            <a:ext cx="603504" cy="475488"/>
+            <a:off x="2546188" y="4169664"/>
+            <a:ext cx="543652" cy="475488"/>
           </a:xfrm>
           <a:prstGeom prst="rect">
             <a:avLst/>
@@ -22561,8 +24233,8 @@
         </p:nvSpPr>
         <p:spPr>
           <a:xfrm>
-            <a:off x="3258589" y="4169664"/>
-            <a:ext cx="603504" cy="475488"/>
+            <a:off x="3140133" y="4169664"/>
+            <a:ext cx="543652" cy="475488"/>
           </a:xfrm>
           <a:prstGeom prst="rect">
             <a:avLst>
@@ -22588,8 +24260,8 @@
         </p:nvSpPr>
         <p:spPr>
           <a:xfrm>
-            <a:off x="3258589" y="4169664"/>
-            <a:ext cx="603504" cy="475488"/>
+            <a:off x="3140133" y="4169664"/>
+            <a:ext cx="543652" cy="475488"/>
           </a:xfrm>
           <a:prstGeom prst="rect">
             <a:avLst/>
@@ -22627,8 +24299,8 @@
         </p:nvSpPr>
         <p:spPr>
           <a:xfrm>
-            <a:off x="3911969" y="4169664"/>
-            <a:ext cx="603504" cy="475488"/>
+            <a:off x="3734077" y="4169664"/>
+            <a:ext cx="543652" cy="475488"/>
           </a:xfrm>
           <a:prstGeom prst="rect">
             <a:avLst>
@@ -22654,8 +24326,8 @@
         </p:nvSpPr>
         <p:spPr>
           <a:xfrm>
-            <a:off x="3911969" y="4169664"/>
-            <a:ext cx="603504" cy="475488"/>
+            <a:off x="3734077" y="4169664"/>
+            <a:ext cx="543652" cy="475488"/>
           </a:xfrm>
           <a:prstGeom prst="rect">
             <a:avLst/>
@@ -22693,8 +24365,8 @@
         </p:nvSpPr>
         <p:spPr>
           <a:xfrm>
-            <a:off x="4565350" y="4169664"/>
-            <a:ext cx="603504" cy="475488"/>
+            <a:off x="4328021" y="4169664"/>
+            <a:ext cx="543652" cy="475488"/>
           </a:xfrm>
           <a:prstGeom prst="rect">
             <a:avLst>
@@ -22720,8 +24392,8 @@
         </p:nvSpPr>
         <p:spPr>
           <a:xfrm>
-            <a:off x="4565350" y="4169664"/>
-            <a:ext cx="603504" cy="475488"/>
+            <a:off x="4328021" y="4169664"/>
+            <a:ext cx="543652" cy="475488"/>
           </a:xfrm>
           <a:prstGeom prst="rect">
             <a:avLst/>
@@ -22745,7 +24417,7 @@
                 <a:ea typeface="Trebuchet MS" pitchFamily="34" charset="-122"/>
                 <a:cs typeface="Trebuchet MS" pitchFamily="34" charset="-120"/>
               </a:rPr>
-              <a:t>pl</a:t>
+              <a:t>p</a:t>
             </a:r>
             <a:endParaRPr lang="en-US" sz="900" dirty="0"/>
           </a:p>
@@ -22759,8 +24431,8 @@
         </p:nvSpPr>
         <p:spPr>
           <a:xfrm>
-            <a:off x="5218730" y="4169664"/>
-            <a:ext cx="603504" cy="475488"/>
+            <a:off x="4921966" y="4169664"/>
+            <a:ext cx="543652" cy="475488"/>
           </a:xfrm>
           <a:prstGeom prst="rect">
             <a:avLst>
@@ -22786,8 +24458,8 @@
         </p:nvSpPr>
         <p:spPr>
           <a:xfrm>
-            <a:off x="5218730" y="4169664"/>
-            <a:ext cx="603504" cy="475488"/>
+            <a:off x="4921966" y="4169664"/>
+            <a:ext cx="543652" cy="475488"/>
           </a:xfrm>
           <a:prstGeom prst="rect">
             <a:avLst/>
@@ -22811,7 +24483,7 @@
                 <a:ea typeface="Trebuchet MS" pitchFamily="34" charset="-122"/>
                 <a:cs typeface="Trebuchet MS" pitchFamily="34" charset="-120"/>
               </a:rPr>
-              <a:t>oy</a:t>
+              <a:t>l</a:t>
             </a:r>
             <a:endParaRPr lang="en-US" sz="900" dirty="0"/>
           </a:p>
@@ -22825,8 +24497,8 @@
         </p:nvSpPr>
         <p:spPr>
           <a:xfrm>
-            <a:off x="5872111" y="4169664"/>
-            <a:ext cx="603504" cy="475488"/>
+            <a:off x="5515910" y="4169664"/>
+            <a:ext cx="543652" cy="475488"/>
           </a:xfrm>
           <a:prstGeom prst="rect">
             <a:avLst>
@@ -22852,8 +24524,8 @@
         </p:nvSpPr>
         <p:spPr>
           <a:xfrm>
-            <a:off x="5872111" y="4169664"/>
-            <a:ext cx="603504" cy="475488"/>
+            <a:off x="5515910" y="4169664"/>
+            <a:ext cx="543652" cy="475488"/>
           </a:xfrm>
           <a:prstGeom prst="rect">
             <a:avLst/>
@@ -22877,7 +24549,7 @@
                 <a:ea typeface="Trebuchet MS" pitchFamily="34" charset="-122"/>
                 <a:cs typeface="Trebuchet MS" pitchFamily="34" charset="-120"/>
               </a:rPr>
-              <a:t>m</a:t>
+              <a:t>oy</a:t>
             </a:r>
             <a:endParaRPr lang="en-US" sz="900" dirty="0"/>
           </a:p>
@@ -22891,8 +24563,8 @@
         </p:nvSpPr>
         <p:spPr>
           <a:xfrm>
-            <a:off x="6525491" y="4169664"/>
-            <a:ext cx="603504" cy="475488"/>
+            <a:off x="6109855" y="4169664"/>
+            <a:ext cx="543652" cy="475488"/>
           </a:xfrm>
           <a:prstGeom prst="rect">
             <a:avLst>
@@ -22918,8 +24590,8 @@
         </p:nvSpPr>
         <p:spPr>
           <a:xfrm>
-            <a:off x="6525491" y="4169664"/>
-            <a:ext cx="603504" cy="475488"/>
+            <a:off x="6109855" y="4169664"/>
+            <a:ext cx="543652" cy="475488"/>
           </a:xfrm>
           <a:prstGeom prst="rect">
             <a:avLst/>
@@ -22943,7 +24615,7 @@
                 <a:ea typeface="Trebuchet MS" pitchFamily="34" charset="-122"/>
                 <a:cs typeface="Trebuchet MS" pitchFamily="34" charset="-120"/>
               </a:rPr>
-              <a:t>e</a:t>
+              <a:t>m</a:t>
             </a:r>
             <a:endParaRPr lang="en-US" sz="900" dirty="0"/>
           </a:p>
@@ -22957,8 +24629,8 @@
         </p:nvSpPr>
         <p:spPr>
           <a:xfrm>
-            <a:off x="7178871" y="4169664"/>
-            <a:ext cx="603504" cy="475488"/>
+            <a:off x="6703799" y="4169664"/>
+            <a:ext cx="543652" cy="475488"/>
           </a:xfrm>
           <a:prstGeom prst="rect">
             <a:avLst>
@@ -22984,8 +24656,8 @@
         </p:nvSpPr>
         <p:spPr>
           <a:xfrm>
-            <a:off x="7178871" y="4169664"/>
-            <a:ext cx="603504" cy="475488"/>
+            <a:off x="6703799" y="4169664"/>
+            <a:ext cx="543652" cy="475488"/>
           </a:xfrm>
           <a:prstGeom prst="rect">
             <a:avLst/>
@@ -23009,7 +24681,7 @@
                 <a:ea typeface="Trebuchet MS" pitchFamily="34" charset="-122"/>
                 <a:cs typeface="Trebuchet MS" pitchFamily="34" charset="-120"/>
               </a:rPr>
-              <a:t>n</a:t>
+              <a:t>e</a:t>
             </a:r>
             <a:endParaRPr lang="en-US" sz="900" dirty="0"/>
           </a:p>
@@ -23023,8 +24695,8 @@
         </p:nvSpPr>
         <p:spPr>
           <a:xfrm>
-            <a:off x="7832252" y="4169664"/>
-            <a:ext cx="603504" cy="475488"/>
+            <a:off x="7297743" y="4169664"/>
+            <a:ext cx="543652" cy="475488"/>
           </a:xfrm>
           <a:prstGeom prst="rect">
             <a:avLst>
@@ -23050,8 +24722,74 @@
         </p:nvSpPr>
         <p:spPr>
           <a:xfrm>
-            <a:off x="7832252" y="4169664"/>
-            <a:ext cx="603504" cy="475488"/>
+            <a:off x="7297743" y="4169664"/>
+            <a:ext cx="543652" cy="475488"/>
+          </a:xfrm>
+          <a:prstGeom prst="rect">
+            <a:avLst/>
+          </a:prstGeom>
+          <a:noFill/>
+          <a:ln/>
+        </p:spPr>
+        <p:txBody>
+          <a:bodyPr wrap="square" lIns="0" tIns="0" rIns="0" bIns="0" rtlCol="0" anchor="ctr"/>
+          <a:lstStyle/>
+          <a:p>
+            <a:pPr algn="ctr" indent="0" marL="0">
+              <a:buNone/>
+            </a:pPr>
+            <a:r>
+              <a:rPr lang="en-US" sz="900" b="1" dirty="0">
+                <a:solidFill>
+                  <a:srgbClr val="9D174D"/>
+                </a:solidFill>
+                <a:latin typeface="Trebuchet MS" pitchFamily="34" charset="0"/>
+                <a:ea typeface="Trebuchet MS" pitchFamily="34" charset="-122"/>
+                <a:cs typeface="Trebuchet MS" pitchFamily="34" charset="-120"/>
+              </a:rPr>
+              <a:t>n</a:t>
+            </a:r>
+            <a:endParaRPr lang="en-US" sz="900" dirty="0"/>
+          </a:p>
+        </p:txBody>
+      </p:sp>
+      <p:sp>
+        <p:nvSpPr>
+          <p:cNvPr id="62" name="Shape 60"/>
+          <p:cNvSpPr/>
+          <p:nvPr/>
+        </p:nvSpPr>
+        <p:spPr>
+          <a:xfrm>
+            <a:off x="7891688" y="4169664"/>
+            <a:ext cx="543652" cy="475488"/>
+          </a:xfrm>
+          <a:prstGeom prst="rect">
+            <a:avLst>
+              <a:gd name="adj" fmla="val 7692"/>
+            </a:avLst>
+          </a:prstGeom>
+          <a:solidFill>
+            <a:srgbClr val="FFFFFF"/>
+          </a:solidFill>
+          <a:ln w="12700">
+            <a:solidFill>
+              <a:srgbClr val="DB2777"/>
+            </a:solidFill>
+            <a:prstDash val="solid"/>
+          </a:ln>
+        </p:spPr>
+      </p:sp>
+      <p:sp>
+        <p:nvSpPr>
+          <p:cNvPr id="63" name="Text 61"/>
+          <p:cNvSpPr/>
+          <p:nvPr/>
+        </p:nvSpPr>
+        <p:spPr>
+          <a:xfrm>
+            <a:off x="7891688" y="4169664"/>
+            <a:ext cx="543652" cy="475488"/>
           </a:xfrm>
           <a:prstGeom prst="rect">
             <a:avLst/>
@@ -23367,7 +25105,7 @@
                 <a:ea typeface="Calibri" pitchFamily="34" charset="-122"/>
                 <a:cs typeface="Calibri" pitchFamily="34" charset="-120"/>
               </a:rPr>
-              <a:t>Word Labs  •  wordlabs.app  •  Root: 'employ' = to use or give work</a:t>
+              <a:t>Word Labs  •  wordlabs.app  •  Root: 'employ' = give work to; use</a:t>
             </a:r>
             <a:endParaRPr lang="en-US" sz="800" dirty="0"/>
           </a:p>
@@ -23506,7 +25244,7 @@
                 <a:ea typeface="Trebuchet MS" pitchFamily="34" charset="-122"/>
                 <a:cs typeface="Trebuchet MS" pitchFamily="34" charset="-120"/>
               </a:rPr>
-              <a:t>employment</a:t>
+              <a:t>employee</a:t>
             </a:r>
             <a:endParaRPr lang="en-US" sz="2800" dirty="0"/>
           </a:p>
@@ -24194,7 +25932,7 @@
                 <a:ea typeface="Calibri" pitchFamily="34" charset="-122"/>
                 <a:cs typeface="Calibri" pitchFamily="34" charset="-120"/>
               </a:rPr>
-              <a:t>Word Labs  •  wordlabs.app  •  Root: 'employ' = to use or give work</a:t>
+              <a:t>Word Labs  •  wordlabs.app  •  Root: 'employ' = give work to; use</a:t>
             </a:r>
             <a:endParaRPr lang="en-US" sz="800" dirty="0"/>
           </a:p>
@@ -24333,7 +26071,7 @@
                 <a:ea typeface="Trebuchet MS" pitchFamily="34" charset="-122"/>
                 <a:cs typeface="Trebuchet MS" pitchFamily="34" charset="-120"/>
               </a:rPr>
-              <a:t>employment</a:t>
+              <a:t>employee</a:t>
             </a:r>
             <a:endParaRPr lang="en-US" sz="2800" dirty="0"/>
           </a:p>
@@ -24511,7 +26249,7 @@
                 <a:ea typeface="Calibri" pitchFamily="34" charset="-122"/>
                 <a:cs typeface="Calibri" pitchFamily="34" charset="-120"/>
               </a:rPr>
-              <a:t>to give work or use</a:t>
+              <a:t>give work to; use</a:t>
             </a:r>
             <a:endParaRPr lang="en-US" sz="850" dirty="0"/>
           </a:p>
@@ -24584,7 +26322,7 @@
                 <a:ea typeface="Trebuchet MS" pitchFamily="34" charset="-122"/>
                 <a:cs typeface="Trebuchet MS" pitchFamily="34" charset="-120"/>
               </a:rPr>
-              <a:t>ment</a:t>
+              <a:t>ee</a:t>
             </a:r>
             <a:endParaRPr lang="en-US" sz="1300" dirty="0"/>
           </a:p>
@@ -24623,7 +26361,7 @@
                 <a:ea typeface="Calibri" pitchFamily="34" charset="-122"/>
                 <a:cs typeface="Calibri" pitchFamily="34" charset="-120"/>
               </a:rPr>
-              <a:t>state or condition of</a:t>
+              <a:t>person who receives</a:t>
             </a:r>
             <a:endParaRPr lang="en-US" sz="850" dirty="0"/>
           </a:p>
@@ -25179,7 +26917,7 @@
                 <a:ea typeface="Calibri" pitchFamily="34" charset="-122"/>
                 <a:cs typeface="Calibri" pitchFamily="34" charset="-120"/>
               </a:rPr>
-              <a:t>Word Labs  •  wordlabs.app  •  Root: 'employ' = to use or give work</a:t>
+              <a:t>Word Labs  •  wordlabs.app  •  Root: 'employ' = give work to; use</a:t>
             </a:r>
             <a:endParaRPr lang="en-US" sz="800" dirty="0"/>
           </a:p>
@@ -25252,7 +26990,7 @@
                 <a:ea typeface="Trebuchet MS" pitchFamily="34" charset="-122"/>
                 <a:cs typeface="Trebuchet MS" pitchFamily="34" charset="-120"/>
               </a:rPr>
-              <a:t>We are learning that the root 'employ' means 'to use or give work'.</a:t>
+              <a:t>We are learning that the root 'employ' means 'give work to; use'.</a:t>
             </a:r>
             <a:endParaRPr lang="en-US" sz="2000" dirty="0"/>
           </a:p>
@@ -25898,7 +27636,7 @@
                 <a:ea typeface="Calibri" pitchFamily="34" charset="-122"/>
                 <a:cs typeface="Calibri" pitchFamily="34" charset="-120"/>
               </a:rPr>
-              <a:t>Word Labs  •  wordlabs.app  •  Root: 'employ' = to use or give work</a:t>
+              <a:t>Word Labs  •  wordlabs.app  •  Root: 'employ' = give work to; use</a:t>
             </a:r>
             <a:endParaRPr lang="en-US" sz="800" dirty="0"/>
           </a:p>
@@ -26037,7 +27775,7 @@
                 <a:ea typeface="Trebuchet MS" pitchFamily="34" charset="-122"/>
                 <a:cs typeface="Trebuchet MS" pitchFamily="34" charset="-120"/>
               </a:rPr>
-              <a:t>employment</a:t>
+              <a:t>employee</a:t>
             </a:r>
             <a:endParaRPr lang="en-US" sz="2800" dirty="0"/>
           </a:p>
@@ -26215,7 +27953,7 @@
                 <a:ea typeface="Calibri" pitchFamily="34" charset="-122"/>
                 <a:cs typeface="Calibri" pitchFamily="34" charset="-120"/>
               </a:rPr>
-              <a:t>to give work or use</a:t>
+              <a:t>give work to; use</a:t>
             </a:r>
             <a:endParaRPr lang="en-US" sz="850" dirty="0"/>
           </a:p>
@@ -26288,7 +28026,7 @@
                 <a:ea typeface="Trebuchet MS" pitchFamily="34" charset="-122"/>
                 <a:cs typeface="Trebuchet MS" pitchFamily="34" charset="-120"/>
               </a:rPr>
-              <a:t>ment</a:t>
+              <a:t>ee</a:t>
             </a:r>
             <a:endParaRPr lang="en-US" sz="1300" dirty="0"/>
           </a:p>
@@ -26327,7 +28065,7 @@
                 <a:ea typeface="Calibri" pitchFamily="34" charset="-122"/>
                 <a:cs typeface="Calibri" pitchFamily="34" charset="-120"/>
               </a:rPr>
-              <a:t>state or condition of</a:t>
+              <a:t>person who receives</a:t>
             </a:r>
             <a:endParaRPr lang="en-US" sz="850" dirty="0"/>
           </a:p>
@@ -26696,7 +28434,7 @@
                 <a:ea typeface="Trebuchet MS" pitchFamily="34" charset="-122"/>
                 <a:cs typeface="Trebuchet MS" pitchFamily="34" charset="-120"/>
               </a:rPr>
-              <a:t>ment</a:t>
+              <a:t>ee</a:t>
             </a:r>
             <a:endParaRPr lang="en-US" sz="1400" dirty="0"/>
           </a:p>
@@ -27120,7 +28858,7 @@
                 <a:ea typeface="Calibri" pitchFamily="34" charset="-122"/>
                 <a:cs typeface="Calibri" pitchFamily="34" charset="-120"/>
               </a:rPr>
-              <a:t>Word Labs  •  wordlabs.app  •  Root: 'employ' = to use or give work</a:t>
+              <a:t>Word Labs  •  wordlabs.app  •  Root: 'employ' = give work to; use</a:t>
             </a:r>
             <a:endParaRPr lang="en-US" sz="800" dirty="0"/>
           </a:p>
@@ -27259,7 +28997,7 @@
                 <a:ea typeface="Trebuchet MS" pitchFamily="34" charset="-122"/>
                 <a:cs typeface="Trebuchet MS" pitchFamily="34" charset="-120"/>
               </a:rPr>
-              <a:t>employment</a:t>
+              <a:t>employee</a:t>
             </a:r>
             <a:endParaRPr lang="en-US" sz="2800" dirty="0"/>
           </a:p>
@@ -27437,7 +29175,7 @@
                 <a:ea typeface="Calibri" pitchFamily="34" charset="-122"/>
                 <a:cs typeface="Calibri" pitchFamily="34" charset="-120"/>
               </a:rPr>
-              <a:t>to give work or use</a:t>
+              <a:t>give work to; use</a:t>
             </a:r>
             <a:endParaRPr lang="en-US" sz="850" dirty="0"/>
           </a:p>
@@ -27510,7 +29248,7 @@
                 <a:ea typeface="Trebuchet MS" pitchFamily="34" charset="-122"/>
                 <a:cs typeface="Trebuchet MS" pitchFamily="34" charset="-120"/>
               </a:rPr>
-              <a:t>ment</a:t>
+              <a:t>ee</a:t>
             </a:r>
             <a:endParaRPr lang="en-US" sz="1300" dirty="0"/>
           </a:p>
@@ -27549,7 +29287,7 @@
                 <a:ea typeface="Calibri" pitchFamily="34" charset="-122"/>
                 <a:cs typeface="Calibri" pitchFamily="34" charset="-120"/>
               </a:rPr>
-              <a:t>state or condition of</a:t>
+              <a:t>person who receives</a:t>
             </a:r>
             <a:endParaRPr lang="en-US" sz="850" dirty="0"/>
           </a:p>
@@ -27918,7 +29656,7 @@
                 <a:ea typeface="Trebuchet MS" pitchFamily="34" charset="-122"/>
                 <a:cs typeface="Trebuchet MS" pitchFamily="34" charset="-120"/>
               </a:rPr>
-              <a:t>ment</a:t>
+              <a:t>ee</a:t>
             </a:r>
             <a:endParaRPr lang="en-US" sz="1400" dirty="0"/>
           </a:p>
@@ -28025,7 +29763,7 @@
         </p:nvSpPr>
         <p:spPr>
           <a:xfrm>
-            <a:off x="2023872" y="4169664"/>
+            <a:off x="2254649" y="4169664"/>
             <a:ext cx="685800" cy="475488"/>
           </a:xfrm>
           <a:prstGeom prst="rect">
@@ -28052,7 +29790,7 @@
         </p:nvSpPr>
         <p:spPr>
           <a:xfrm>
-            <a:off x="2023872" y="4169664"/>
+            <a:off x="2254649" y="4169664"/>
             <a:ext cx="685800" cy="475488"/>
           </a:xfrm>
           <a:prstGeom prst="rect">
@@ -28091,7 +29829,7 @@
         </p:nvSpPr>
         <p:spPr>
           <a:xfrm>
-            <a:off x="2831592" y="4169664"/>
+            <a:off x="3293146" y="4169664"/>
             <a:ext cx="685800" cy="475488"/>
           </a:xfrm>
           <a:prstGeom prst="rect">
@@ -28118,7 +29856,7 @@
         </p:nvSpPr>
         <p:spPr>
           <a:xfrm>
-            <a:off x="2831592" y="4169664"/>
+            <a:off x="3293146" y="4169664"/>
             <a:ext cx="685800" cy="475488"/>
           </a:xfrm>
           <a:prstGeom prst="rect">
@@ -28157,7 +29895,7 @@
         </p:nvSpPr>
         <p:spPr>
           <a:xfrm>
-            <a:off x="3639312" y="4169664"/>
+            <a:off x="4331643" y="4169664"/>
             <a:ext cx="685800" cy="475488"/>
           </a:xfrm>
           <a:prstGeom prst="rect">
@@ -28184,7 +29922,7 @@
         </p:nvSpPr>
         <p:spPr>
           <a:xfrm>
-            <a:off x="3639312" y="4169664"/>
+            <a:off x="4331643" y="4169664"/>
             <a:ext cx="685800" cy="475488"/>
           </a:xfrm>
           <a:prstGeom prst="rect">
@@ -28209,7 +29947,7 @@
                 <a:ea typeface="Trebuchet MS" pitchFamily="34" charset="-122"/>
                 <a:cs typeface="Trebuchet MS" pitchFamily="34" charset="-120"/>
               </a:rPr>
-              <a:t>pl</a:t>
+              <a:t>p</a:t>
             </a:r>
             <a:endParaRPr lang="en-US" sz="900" dirty="0"/>
           </a:p>
@@ -28223,7 +29961,7 @@
         </p:nvSpPr>
         <p:spPr>
           <a:xfrm>
-            <a:off x="4447032" y="4169664"/>
+            <a:off x="5370141" y="4169664"/>
             <a:ext cx="685800" cy="475488"/>
           </a:xfrm>
           <a:prstGeom prst="rect">
@@ -28250,7 +29988,7 @@
         </p:nvSpPr>
         <p:spPr>
           <a:xfrm>
-            <a:off x="4447032" y="4169664"/>
+            <a:off x="5370141" y="4169664"/>
             <a:ext cx="685800" cy="475488"/>
           </a:xfrm>
           <a:prstGeom prst="rect">
@@ -28275,7 +30013,7 @@
                 <a:ea typeface="Trebuchet MS" pitchFamily="34" charset="-122"/>
                 <a:cs typeface="Trebuchet MS" pitchFamily="34" charset="-120"/>
               </a:rPr>
-              <a:t>oy</a:t>
+              <a:t>l</a:t>
             </a:r>
             <a:endParaRPr lang="en-US" sz="900" dirty="0"/>
           </a:p>
@@ -28289,7 +30027,7 @@
         </p:nvSpPr>
         <p:spPr>
           <a:xfrm>
-            <a:off x="5254752" y="4169664"/>
+            <a:off x="6408638" y="4169664"/>
             <a:ext cx="685800" cy="475488"/>
           </a:xfrm>
           <a:prstGeom prst="rect">
@@ -28316,7 +30054,7 @@
         </p:nvSpPr>
         <p:spPr>
           <a:xfrm>
-            <a:off x="5254752" y="4169664"/>
+            <a:off x="6408638" y="4169664"/>
             <a:ext cx="685800" cy="475488"/>
           </a:xfrm>
           <a:prstGeom prst="rect">
@@ -28341,7 +30079,7 @@
                 <a:ea typeface="Trebuchet MS" pitchFamily="34" charset="-122"/>
                 <a:cs typeface="Trebuchet MS" pitchFamily="34" charset="-120"/>
               </a:rPr>
-              <a:t>m</a:t>
+              <a:t>oy</a:t>
             </a:r>
             <a:endParaRPr lang="en-US" sz="900" dirty="0"/>
           </a:p>
@@ -28355,7 +30093,7 @@
         </p:nvSpPr>
         <p:spPr>
           <a:xfrm>
-            <a:off x="6062472" y="4169664"/>
+            <a:off x="7447135" y="4169664"/>
             <a:ext cx="685800" cy="475488"/>
           </a:xfrm>
           <a:prstGeom prst="rect">
@@ -28382,7 +30120,7 @@
         </p:nvSpPr>
         <p:spPr>
           <a:xfrm>
-            <a:off x="6062472" y="4169664"/>
+            <a:off x="7447135" y="4169664"/>
             <a:ext cx="685800" cy="475488"/>
           </a:xfrm>
           <a:prstGeom prst="rect">
@@ -28407,139 +30145,7 @@
                 <a:ea typeface="Trebuchet MS" pitchFamily="34" charset="-122"/>
                 <a:cs typeface="Trebuchet MS" pitchFamily="34" charset="-120"/>
               </a:rPr>
-              <a:t>e</a:t>
-            </a:r>
-            <a:endParaRPr lang="en-US" sz="900" dirty="0"/>
-          </a:p>
-        </p:txBody>
-      </p:sp>
-      <p:sp>
-        <p:nvSpPr>
-          <p:cNvPr id="48" name="Shape 46"/>
-          <p:cNvSpPr/>
-          <p:nvPr/>
-        </p:nvSpPr>
-        <p:spPr>
-          <a:xfrm>
-            <a:off x="6870192" y="4169664"/>
-            <a:ext cx="685800" cy="475488"/>
-          </a:xfrm>
-          <a:prstGeom prst="rect">
-            <a:avLst>
-              <a:gd name="adj" fmla="val 7692"/>
-            </a:avLst>
-          </a:prstGeom>
-          <a:solidFill>
-            <a:srgbClr val="FFFFFF"/>
-          </a:solidFill>
-          <a:ln w="12700">
-            <a:solidFill>
-              <a:srgbClr val="DB2777"/>
-            </a:solidFill>
-            <a:prstDash val="solid"/>
-          </a:ln>
-        </p:spPr>
-      </p:sp>
-      <p:sp>
-        <p:nvSpPr>
-          <p:cNvPr id="49" name="Text 47"/>
-          <p:cNvSpPr/>
-          <p:nvPr/>
-        </p:nvSpPr>
-        <p:spPr>
-          <a:xfrm>
-            <a:off x="6870192" y="4169664"/>
-            <a:ext cx="685800" cy="475488"/>
-          </a:xfrm>
-          <a:prstGeom prst="rect">
-            <a:avLst/>
-          </a:prstGeom>
-          <a:noFill/>
-          <a:ln/>
-        </p:spPr>
-        <p:txBody>
-          <a:bodyPr wrap="square" lIns="0" tIns="0" rIns="0" bIns="0" rtlCol="0" anchor="ctr"/>
-          <a:lstStyle/>
-          <a:p>
-            <a:pPr algn="ctr" indent="0" marL="0">
-              <a:buNone/>
-            </a:pPr>
-            <a:r>
-              <a:rPr lang="en-US" sz="900" b="1" dirty="0">
-                <a:solidFill>
-                  <a:srgbClr val="9D174D"/>
-                </a:solidFill>
-                <a:latin typeface="Trebuchet MS" pitchFamily="34" charset="0"/>
-                <a:ea typeface="Trebuchet MS" pitchFamily="34" charset="-122"/>
-                <a:cs typeface="Trebuchet MS" pitchFamily="34" charset="-120"/>
-              </a:rPr>
-              <a:t>n</a:t>
-            </a:r>
-            <a:endParaRPr lang="en-US" sz="900" dirty="0"/>
-          </a:p>
-        </p:txBody>
-      </p:sp>
-      <p:sp>
-        <p:nvSpPr>
-          <p:cNvPr id="50" name="Shape 48"/>
-          <p:cNvSpPr/>
-          <p:nvPr/>
-        </p:nvSpPr>
-        <p:spPr>
-          <a:xfrm>
-            <a:off x="7677912" y="4169664"/>
-            <a:ext cx="685800" cy="475488"/>
-          </a:xfrm>
-          <a:prstGeom prst="rect">
-            <a:avLst>
-              <a:gd name="adj" fmla="val 7692"/>
-            </a:avLst>
-          </a:prstGeom>
-          <a:solidFill>
-            <a:srgbClr val="FFFFFF"/>
-          </a:solidFill>
-          <a:ln w="12700">
-            <a:solidFill>
-              <a:srgbClr val="DB2777"/>
-            </a:solidFill>
-            <a:prstDash val="solid"/>
-          </a:ln>
-        </p:spPr>
-      </p:sp>
-      <p:sp>
-        <p:nvSpPr>
-          <p:cNvPr id="51" name="Text 49"/>
-          <p:cNvSpPr/>
-          <p:nvPr/>
-        </p:nvSpPr>
-        <p:spPr>
-          <a:xfrm>
-            <a:off x="7677912" y="4169664"/>
-            <a:ext cx="685800" cy="475488"/>
-          </a:xfrm>
-          <a:prstGeom prst="rect">
-            <a:avLst/>
-          </a:prstGeom>
-          <a:noFill/>
-          <a:ln/>
-        </p:spPr>
-        <p:txBody>
-          <a:bodyPr wrap="square" lIns="0" tIns="0" rIns="0" bIns="0" rtlCol="0" anchor="ctr"/>
-          <a:lstStyle/>
-          <a:p>
-            <a:pPr algn="ctr" indent="0" marL="0">
-              <a:buNone/>
-            </a:pPr>
-            <a:r>
-              <a:rPr lang="en-US" sz="900" b="1" dirty="0">
-                <a:solidFill>
-                  <a:srgbClr val="9D174D"/>
-                </a:solidFill>
-                <a:latin typeface="Trebuchet MS" pitchFamily="34" charset="0"/>
-                <a:ea typeface="Trebuchet MS" pitchFamily="34" charset="-122"/>
-                <a:cs typeface="Trebuchet MS" pitchFamily="34" charset="-120"/>
-              </a:rPr>
-              <a:t>t</a:t>
+              <a:t>ee</a:t>
             </a:r>
             <a:endParaRPr lang="en-US" sz="900" dirty="0"/>
           </a:p>
@@ -28831,7 +30437,7 @@
                 <a:ea typeface="Calibri" pitchFamily="34" charset="-122"/>
                 <a:cs typeface="Calibri" pitchFamily="34" charset="-120"/>
               </a:rPr>
-              <a:t>Word Labs  •  wordlabs.app  •  Root: 'employ' = to use or give work</a:t>
+              <a:t>Word Labs  •  wordlabs.app  •  Root: 'employ' = give work to; use</a:t>
             </a:r>
             <a:endParaRPr lang="en-US" sz="800" dirty="0"/>
           </a:p>
@@ -28970,7 +30576,7 @@
                 <a:ea typeface="Trebuchet MS" pitchFamily="34" charset="-122"/>
                 <a:cs typeface="Trebuchet MS" pitchFamily="34" charset="-120"/>
               </a:rPr>
-              <a:t>reemployed</a:t>
+              <a:t>employees</a:t>
             </a:r>
             <a:endParaRPr lang="en-US" sz="2800" dirty="0"/>
           </a:p>
@@ -29658,7 +31264,7 @@
                 <a:ea typeface="Calibri" pitchFamily="34" charset="-122"/>
                 <a:cs typeface="Calibri" pitchFamily="34" charset="-120"/>
               </a:rPr>
-              <a:t>Word Labs  •  wordlabs.app  •  Root: 'employ' = to use or give work</a:t>
+              <a:t>Word Labs  •  wordlabs.app  •  Root: 'employ' = give work to; use</a:t>
             </a:r>
             <a:endParaRPr lang="en-US" sz="800" dirty="0"/>
           </a:p>
@@ -29797,7 +31403,7 @@
                 <a:ea typeface="Trebuchet MS" pitchFamily="34" charset="-122"/>
                 <a:cs typeface="Trebuchet MS" pitchFamily="34" charset="-120"/>
               </a:rPr>
-              <a:t>reemployed</a:t>
+              <a:t>employees</a:t>
             </a:r>
             <a:endParaRPr lang="en-US" sz="2800" dirty="0"/>
           </a:p>
@@ -29886,11 +31492,11 @@
             </a:avLst>
           </a:prstGeom>
           <a:solidFill>
-            <a:srgbClr val="DDD6FE"/>
+            <a:srgbClr val="CCFBF1"/>
           </a:solidFill>
           <a:ln w="19050">
             <a:solidFill>
-              <a:srgbClr val="7C3AED"/>
+              <a:srgbClr val="0D9488"/>
             </a:solidFill>
             <a:prstDash val="solid"/>
           </a:ln>
@@ -29930,13 +31536,13 @@
             <a:r>
               <a:rPr lang="en-US" sz="1300" b="1" dirty="0">
                 <a:solidFill>
-                  <a:srgbClr val="4C1D95"/>
+                  <a:srgbClr val="0F766E"/>
                 </a:solidFill>
                 <a:latin typeface="Trebuchet MS" pitchFamily="34" charset="0"/>
                 <a:ea typeface="Trebuchet MS" pitchFamily="34" charset="-122"/>
                 <a:cs typeface="Trebuchet MS" pitchFamily="34" charset="-120"/>
               </a:rPr>
-              <a:t>re</a:t>
+              <a:t>employ</a:t>
             </a:r>
             <a:endParaRPr lang="en-US" sz="1300" dirty="0"/>
           </a:p>
@@ -29975,7 +31581,7 @@
                 <a:ea typeface="Calibri" pitchFamily="34" charset="-122"/>
                 <a:cs typeface="Calibri" pitchFamily="34" charset="-120"/>
               </a:rPr>
-              <a:t>again</a:t>
+              <a:t>give work to; use</a:t>
             </a:r>
             <a:endParaRPr lang="en-US" sz="850" dirty="0"/>
           </a:p>
@@ -29998,11 +31604,11 @@
             </a:avLst>
           </a:prstGeom>
           <a:solidFill>
-            <a:srgbClr val="CCFBF1"/>
+            <a:srgbClr val="FCE7F3"/>
           </a:solidFill>
           <a:ln w="19050">
             <a:solidFill>
-              <a:srgbClr val="0D9488"/>
+              <a:srgbClr val="DB2777"/>
             </a:solidFill>
             <a:prstDash val="solid"/>
           </a:ln>
@@ -30042,13 +31648,13 @@
             <a:r>
               <a:rPr lang="en-US" sz="1300" b="1" dirty="0">
                 <a:solidFill>
-                  <a:srgbClr val="0F766E"/>
+                  <a:srgbClr val="9D174D"/>
                 </a:solidFill>
                 <a:latin typeface="Trebuchet MS" pitchFamily="34" charset="0"/>
                 <a:ea typeface="Trebuchet MS" pitchFamily="34" charset="-122"/>
                 <a:cs typeface="Trebuchet MS" pitchFamily="34" charset="-120"/>
               </a:rPr>
-              <a:t>employ</a:t>
+              <a:t>ee</a:t>
             </a:r>
             <a:endParaRPr lang="en-US" sz="1300" dirty="0"/>
           </a:p>
@@ -30087,7 +31693,7 @@
                 <a:ea typeface="Calibri" pitchFamily="34" charset="-122"/>
                 <a:cs typeface="Calibri" pitchFamily="34" charset="-120"/>
               </a:rPr>
-              <a:t>to give work or use</a:t>
+              <a:t>person who receives</a:t>
             </a:r>
             <a:endParaRPr lang="en-US" sz="850" dirty="0"/>
           </a:p>
@@ -30160,7 +31766,7 @@
                 <a:ea typeface="Trebuchet MS" pitchFamily="34" charset="-122"/>
                 <a:cs typeface="Trebuchet MS" pitchFamily="34" charset="-120"/>
               </a:rPr>
-              <a:t>ed</a:t>
+              <a:t>s</a:t>
             </a:r>
             <a:endParaRPr lang="en-US" sz="1300" dirty="0"/>
           </a:p>
@@ -30199,7 +31805,7 @@
                 <a:ea typeface="Calibri" pitchFamily="34" charset="-122"/>
                 <a:cs typeface="Calibri" pitchFamily="34" charset="-120"/>
               </a:rPr>
-              <a:t>past tense</a:t>
+              <a:t>plural or present tense</a:t>
             </a:r>
             <a:endParaRPr lang="en-US" sz="850" dirty="0"/>
           </a:p>
@@ -30755,7 +32361,7 @@
                 <a:ea typeface="Calibri" pitchFamily="34" charset="-122"/>
                 <a:cs typeface="Calibri" pitchFamily="34" charset="-120"/>
               </a:rPr>
-              <a:t>Word Labs  •  wordlabs.app  •  Root: 'employ' = to use or give work</a:t>
+              <a:t>Word Labs  •  wordlabs.app  •  Root: 'employ' = give work to; use</a:t>
             </a:r>
             <a:endParaRPr lang="en-US" sz="800" dirty="0"/>
           </a:p>
@@ -30894,7 +32500,7 @@
                 <a:ea typeface="Trebuchet MS" pitchFamily="34" charset="-122"/>
                 <a:cs typeface="Trebuchet MS" pitchFamily="34" charset="-120"/>
               </a:rPr>
-              <a:t>reemployed</a:t>
+              <a:t>employees</a:t>
             </a:r>
             <a:endParaRPr lang="en-US" sz="2800" dirty="0"/>
           </a:p>
@@ -30983,11 +32589,11 @@
             </a:avLst>
           </a:prstGeom>
           <a:solidFill>
-            <a:srgbClr val="DDD6FE"/>
+            <a:srgbClr val="CCFBF1"/>
           </a:solidFill>
           <a:ln w="19050">
             <a:solidFill>
-              <a:srgbClr val="7C3AED"/>
+              <a:srgbClr val="0D9488"/>
             </a:solidFill>
             <a:prstDash val="solid"/>
           </a:ln>
@@ -31027,13 +32633,13 @@
             <a:r>
               <a:rPr lang="en-US" sz="1300" b="1" dirty="0">
                 <a:solidFill>
-                  <a:srgbClr val="4C1D95"/>
+                  <a:srgbClr val="0F766E"/>
                 </a:solidFill>
                 <a:latin typeface="Trebuchet MS" pitchFamily="34" charset="0"/>
                 <a:ea typeface="Trebuchet MS" pitchFamily="34" charset="-122"/>
                 <a:cs typeface="Trebuchet MS" pitchFamily="34" charset="-120"/>
               </a:rPr>
-              <a:t>re</a:t>
+              <a:t>employ</a:t>
             </a:r>
             <a:endParaRPr lang="en-US" sz="1300" dirty="0"/>
           </a:p>
@@ -31072,7 +32678,7 @@
                 <a:ea typeface="Calibri" pitchFamily="34" charset="-122"/>
                 <a:cs typeface="Calibri" pitchFamily="34" charset="-120"/>
               </a:rPr>
-              <a:t>again</a:t>
+              <a:t>give work to; use</a:t>
             </a:r>
             <a:endParaRPr lang="en-US" sz="850" dirty="0"/>
           </a:p>
@@ -31095,11 +32701,11 @@
             </a:avLst>
           </a:prstGeom>
           <a:solidFill>
-            <a:srgbClr val="CCFBF1"/>
+            <a:srgbClr val="FCE7F3"/>
           </a:solidFill>
           <a:ln w="19050">
             <a:solidFill>
-              <a:srgbClr val="0D9488"/>
+              <a:srgbClr val="DB2777"/>
             </a:solidFill>
             <a:prstDash val="solid"/>
           </a:ln>
@@ -31139,13 +32745,13 @@
             <a:r>
               <a:rPr lang="en-US" sz="1300" b="1" dirty="0">
                 <a:solidFill>
-                  <a:srgbClr val="0F766E"/>
+                  <a:srgbClr val="9D174D"/>
                 </a:solidFill>
                 <a:latin typeface="Trebuchet MS" pitchFamily="34" charset="0"/>
                 <a:ea typeface="Trebuchet MS" pitchFamily="34" charset="-122"/>
                 <a:cs typeface="Trebuchet MS" pitchFamily="34" charset="-120"/>
               </a:rPr>
-              <a:t>employ</a:t>
+              <a:t>ee</a:t>
             </a:r>
             <a:endParaRPr lang="en-US" sz="1300" dirty="0"/>
           </a:p>
@@ -31184,7 +32790,7 @@
                 <a:ea typeface="Calibri" pitchFamily="34" charset="-122"/>
                 <a:cs typeface="Calibri" pitchFamily="34" charset="-120"/>
               </a:rPr>
-              <a:t>to give work or use</a:t>
+              <a:t>person who receives</a:t>
             </a:r>
             <a:endParaRPr lang="en-US" sz="850" dirty="0"/>
           </a:p>
@@ -31257,7 +32863,7 @@
                 <a:ea typeface="Trebuchet MS" pitchFamily="34" charset="-122"/>
                 <a:cs typeface="Trebuchet MS" pitchFamily="34" charset="-120"/>
               </a:rPr>
-              <a:t>ed</a:t>
+              <a:t>s</a:t>
             </a:r>
             <a:endParaRPr lang="en-US" sz="1300" dirty="0"/>
           </a:p>
@@ -31296,7 +32902,7 @@
                 <a:ea typeface="Calibri" pitchFamily="34" charset="-122"/>
                 <a:cs typeface="Calibri" pitchFamily="34" charset="-120"/>
               </a:rPr>
-              <a:t>past tense</a:t>
+              <a:t>plural or present tense</a:t>
             </a:r>
             <a:endParaRPr lang="en-US" sz="850" dirty="0"/>
           </a:p>
@@ -31455,7 +33061,7 @@
                 <a:ea typeface="Trebuchet MS" pitchFamily="34" charset="-122"/>
                 <a:cs typeface="Trebuchet MS" pitchFamily="34" charset="-120"/>
               </a:rPr>
-              <a:t>re</a:t>
+              <a:t>em</a:t>
             </a:r>
             <a:endParaRPr lang="en-US" sz="1400" dirty="0"/>
           </a:p>
@@ -31560,7 +33166,7 @@
                 <a:ea typeface="Trebuchet MS" pitchFamily="34" charset="-122"/>
                 <a:cs typeface="Trebuchet MS" pitchFamily="34" charset="-120"/>
               </a:rPr>
-              <a:t>em</a:t>
+              <a:t>ploy</a:t>
             </a:r>
             <a:endParaRPr lang="en-US" sz="1400" dirty="0"/>
           </a:p>
@@ -31665,7 +33271,7 @@
                 <a:ea typeface="Trebuchet MS" pitchFamily="34" charset="-122"/>
                 <a:cs typeface="Trebuchet MS" pitchFamily="34" charset="-120"/>
               </a:rPr>
-              <a:t>ployed</a:t>
+              <a:t>ees</a:t>
             </a:r>
             <a:endParaRPr lang="en-US" sz="1400" dirty="0"/>
           </a:p>
@@ -32089,7 +33695,7 @@
                 <a:ea typeface="Calibri" pitchFamily="34" charset="-122"/>
                 <a:cs typeface="Calibri" pitchFamily="34" charset="-120"/>
               </a:rPr>
-              <a:t>Word Labs  •  wordlabs.app  •  Root: 'employ' = to use or give work</a:t>
+              <a:t>Word Labs  •  wordlabs.app  •  Root: 'employ' = give work to; use</a:t>
             </a:r>
             <a:endParaRPr lang="en-US" sz="800" dirty="0"/>
           </a:p>
@@ -32228,7 +33834,7 @@
                 <a:ea typeface="Trebuchet MS" pitchFamily="34" charset="-122"/>
                 <a:cs typeface="Trebuchet MS" pitchFamily="34" charset="-120"/>
               </a:rPr>
-              <a:t>reemployed</a:t>
+              <a:t>employees</a:t>
             </a:r>
             <a:endParaRPr lang="en-US" sz="2800" dirty="0"/>
           </a:p>
@@ -32317,11 +33923,11 @@
             </a:avLst>
           </a:prstGeom>
           <a:solidFill>
-            <a:srgbClr val="DDD6FE"/>
+            <a:srgbClr val="CCFBF1"/>
           </a:solidFill>
           <a:ln w="19050">
             <a:solidFill>
-              <a:srgbClr val="7C3AED"/>
+              <a:srgbClr val="0D9488"/>
             </a:solidFill>
             <a:prstDash val="solid"/>
           </a:ln>
@@ -32361,13 +33967,13 @@
             <a:r>
               <a:rPr lang="en-US" sz="1300" b="1" dirty="0">
                 <a:solidFill>
-                  <a:srgbClr val="4C1D95"/>
+                  <a:srgbClr val="0F766E"/>
                 </a:solidFill>
                 <a:latin typeface="Trebuchet MS" pitchFamily="34" charset="0"/>
                 <a:ea typeface="Trebuchet MS" pitchFamily="34" charset="-122"/>
                 <a:cs typeface="Trebuchet MS" pitchFamily="34" charset="-120"/>
               </a:rPr>
-              <a:t>re</a:t>
+              <a:t>employ</a:t>
             </a:r>
             <a:endParaRPr lang="en-US" sz="1300" dirty="0"/>
           </a:p>
@@ -32406,7 +34012,7 @@
                 <a:ea typeface="Calibri" pitchFamily="34" charset="-122"/>
                 <a:cs typeface="Calibri" pitchFamily="34" charset="-120"/>
               </a:rPr>
-              <a:t>again</a:t>
+              <a:t>give work to; use</a:t>
             </a:r>
             <a:endParaRPr lang="en-US" sz="850" dirty="0"/>
           </a:p>
@@ -32429,11 +34035,11 @@
             </a:avLst>
           </a:prstGeom>
           <a:solidFill>
-            <a:srgbClr val="CCFBF1"/>
+            <a:srgbClr val="FCE7F3"/>
           </a:solidFill>
           <a:ln w="19050">
             <a:solidFill>
-              <a:srgbClr val="0D9488"/>
+              <a:srgbClr val="DB2777"/>
             </a:solidFill>
             <a:prstDash val="solid"/>
           </a:ln>
@@ -32473,13 +34079,13 @@
             <a:r>
               <a:rPr lang="en-US" sz="1300" b="1" dirty="0">
                 <a:solidFill>
-                  <a:srgbClr val="0F766E"/>
+                  <a:srgbClr val="9D174D"/>
                 </a:solidFill>
                 <a:latin typeface="Trebuchet MS" pitchFamily="34" charset="0"/>
                 <a:ea typeface="Trebuchet MS" pitchFamily="34" charset="-122"/>
                 <a:cs typeface="Trebuchet MS" pitchFamily="34" charset="-120"/>
               </a:rPr>
-              <a:t>employ</a:t>
+              <a:t>ee</a:t>
             </a:r>
             <a:endParaRPr lang="en-US" sz="1300" dirty="0"/>
           </a:p>
@@ -32518,7 +34124,7 @@
                 <a:ea typeface="Calibri" pitchFamily="34" charset="-122"/>
                 <a:cs typeface="Calibri" pitchFamily="34" charset="-120"/>
               </a:rPr>
-              <a:t>to give work or use</a:t>
+              <a:t>person who receives</a:t>
             </a:r>
             <a:endParaRPr lang="en-US" sz="850" dirty="0"/>
           </a:p>
@@ -32591,7 +34197,7 @@
                 <a:ea typeface="Trebuchet MS" pitchFamily="34" charset="-122"/>
                 <a:cs typeface="Trebuchet MS" pitchFamily="34" charset="-120"/>
               </a:rPr>
-              <a:t>ed</a:t>
+              <a:t>s</a:t>
             </a:r>
             <a:endParaRPr lang="en-US" sz="1300" dirty="0"/>
           </a:p>
@@ -32630,7 +34236,7 @@
                 <a:ea typeface="Calibri" pitchFamily="34" charset="-122"/>
                 <a:cs typeface="Calibri" pitchFamily="34" charset="-120"/>
               </a:rPr>
-              <a:t>past tense</a:t>
+              <a:t>plural or present tense</a:t>
             </a:r>
             <a:endParaRPr lang="en-US" sz="850" dirty="0"/>
           </a:p>
@@ -32789,7 +34395,7 @@
                 <a:ea typeface="Trebuchet MS" pitchFamily="34" charset="-122"/>
                 <a:cs typeface="Trebuchet MS" pitchFamily="34" charset="-120"/>
               </a:rPr>
-              <a:t>re</a:t>
+              <a:t>em</a:t>
             </a:r>
             <a:endParaRPr lang="en-US" sz="1400" dirty="0"/>
           </a:p>
@@ -32894,7 +34500,7 @@
                 <a:ea typeface="Trebuchet MS" pitchFamily="34" charset="-122"/>
                 <a:cs typeface="Trebuchet MS" pitchFamily="34" charset="-120"/>
               </a:rPr>
-              <a:t>em</a:t>
+              <a:t>ploy</a:t>
             </a:r>
             <a:endParaRPr lang="en-US" sz="1400" dirty="0"/>
           </a:p>
@@ -32999,7 +34605,7 @@
                 <a:ea typeface="Trebuchet MS" pitchFamily="34" charset="-122"/>
                 <a:cs typeface="Trebuchet MS" pitchFamily="34" charset="-120"/>
               </a:rPr>
-              <a:t>ployed</a:t>
+              <a:t>ees</a:t>
             </a:r>
             <a:endParaRPr lang="en-US" sz="1400" dirty="0"/>
           </a:p>
@@ -33158,7 +34764,7 @@
                 <a:ea typeface="Trebuchet MS" pitchFamily="34" charset="-122"/>
                 <a:cs typeface="Trebuchet MS" pitchFamily="34" charset="-120"/>
               </a:rPr>
-              <a:t>r</a:t>
+              <a:t>e</a:t>
             </a:r>
             <a:endParaRPr lang="en-US" sz="900" dirty="0"/>
           </a:p>
@@ -33224,7 +34830,7 @@
                 <a:ea typeface="Trebuchet MS" pitchFamily="34" charset="-122"/>
                 <a:cs typeface="Trebuchet MS" pitchFamily="34" charset="-120"/>
               </a:rPr>
-              <a:t>e</a:t>
+              <a:t>m</a:t>
             </a:r>
             <a:endParaRPr lang="en-US" sz="900" dirty="0"/>
           </a:p>
@@ -33290,7 +34896,7 @@
                 <a:ea typeface="Trebuchet MS" pitchFamily="34" charset="-122"/>
                 <a:cs typeface="Trebuchet MS" pitchFamily="34" charset="-120"/>
               </a:rPr>
-              <a:t>e</a:t>
+              <a:t>p</a:t>
             </a:r>
             <a:endParaRPr lang="en-US" sz="900" dirty="0"/>
           </a:p>
@@ -33356,7 +34962,7 @@
                 <a:ea typeface="Trebuchet MS" pitchFamily="34" charset="-122"/>
                 <a:cs typeface="Trebuchet MS" pitchFamily="34" charset="-120"/>
               </a:rPr>
-              <a:t>m</a:t>
+              <a:t>l</a:t>
             </a:r>
             <a:endParaRPr lang="en-US" sz="900" dirty="0"/>
           </a:p>
@@ -33422,7 +35028,7 @@
                 <a:ea typeface="Trebuchet MS" pitchFamily="34" charset="-122"/>
                 <a:cs typeface="Trebuchet MS" pitchFamily="34" charset="-120"/>
               </a:rPr>
-              <a:t>pl</a:t>
+              <a:t>oy</a:t>
             </a:r>
             <a:endParaRPr lang="en-US" sz="900" dirty="0"/>
           </a:p>
@@ -33488,7 +35094,7 @@
                 <a:ea typeface="Trebuchet MS" pitchFamily="34" charset="-122"/>
                 <a:cs typeface="Trebuchet MS" pitchFamily="34" charset="-120"/>
               </a:rPr>
-              <a:t>oy</a:t>
+              <a:t>ee</a:t>
             </a:r>
             <a:endParaRPr lang="en-US" sz="900" dirty="0"/>
           </a:p>
@@ -33554,7 +35160,7 @@
                 <a:ea typeface="Trebuchet MS" pitchFamily="34" charset="-122"/>
                 <a:cs typeface="Trebuchet MS" pitchFamily="34" charset="-120"/>
               </a:rPr>
-              <a:t>ed</a:t>
+              <a:t>s</a:t>
             </a:r>
             <a:endParaRPr lang="en-US" sz="900" dirty="0"/>
           </a:p>
@@ -33846,7 +35452,7 @@
                 <a:ea typeface="Calibri" pitchFamily="34" charset="-122"/>
                 <a:cs typeface="Calibri" pitchFamily="34" charset="-120"/>
               </a:rPr>
-              <a:t>Word Labs  •  wordlabs.app  •  Root: 'employ' = to use or give work</a:t>
+              <a:t>Word Labs  •  wordlabs.app  •  Root: 'employ' = give work to; use</a:t>
             </a:r>
             <a:endParaRPr lang="en-US" sz="800" dirty="0"/>
           </a:p>
@@ -35015,7 +36621,7 @@
                 <a:ea typeface="Calibri" pitchFamily="34" charset="-122"/>
                 <a:cs typeface="Calibri" pitchFamily="34" charset="-120"/>
               </a:rPr>
-              <a:t>Word Labs  •  wordlabs.app  •  Root: 'employ' = to use or give work</a:t>
+              <a:t>Word Labs  •  wordlabs.app  •  Root: 'employ' = give work to; use</a:t>
             </a:r>
             <a:endParaRPr lang="en-US" sz="800" dirty="0"/>
           </a:p>
@@ -35316,7 +36922,7 @@
                 <a:ea typeface="Trebuchet MS" pitchFamily="34" charset="-122"/>
                 <a:cs typeface="Trebuchet MS" pitchFamily="34" charset="-120"/>
               </a:rPr>
-              <a:t>un-</a:t>
+              <a:t>re-</a:t>
             </a:r>
             <a:endParaRPr lang="en-US" sz="1300" dirty="0"/>
           </a:p>
@@ -35444,7 +37050,7 @@
                 <a:ea typeface="Trebuchet MS" pitchFamily="34" charset="-122"/>
                 <a:cs typeface="Trebuchet MS" pitchFamily="34" charset="-120"/>
               </a:rPr>
-              <a:t>-ed</a:t>
+              <a:t>-able</a:t>
             </a:r>
             <a:endParaRPr lang="en-US" sz="1300" dirty="0"/>
           </a:p>
@@ -35508,7 +37114,7 @@
                 <a:ea typeface="Trebuchet MS" pitchFamily="34" charset="-122"/>
                 <a:cs typeface="Trebuchet MS" pitchFamily="34" charset="-120"/>
               </a:rPr>
-              <a:t>re-</a:t>
+              <a:t>un-</a:t>
             </a:r>
             <a:endParaRPr lang="en-US" sz="1300" dirty="0"/>
           </a:p>
@@ -35597,7 +37203,7 @@
                 <a:ea typeface="Trebuchet MS" pitchFamily="34" charset="-122"/>
                 <a:cs typeface="Trebuchet MS" pitchFamily="34" charset="-120"/>
               </a:rPr>
-              <a:t>-er</a:t>
+              <a:t>-ed</a:t>
             </a:r>
             <a:endParaRPr lang="en-US" sz="1300" dirty="0"/>
           </a:p>
@@ -35618,7 +37224,7 @@
             <a:avLst/>
           </a:prstGeom>
           <a:solidFill>
-            <a:srgbClr val="DDD6FE"/>
+            <a:srgbClr val="F8FAFC"/>
           </a:solidFill>
           <a:ln w="12700">
             <a:solidFill>
@@ -35630,14 +37236,64 @@
       </p:sp>
       <p:sp>
         <p:nvSpPr>
-          <p:cNvPr id="29" name="Text 27"/>
-          <p:cNvSpPr/>
-          <p:nvPr/>
-        </p:nvSpPr>
-        <p:spPr>
-          <a:xfrm>
-            <a:off x="365760" y="2404872"/>
-            <a:ext cx="2468880" cy="402336"/>
+          <p:cNvPr id="29" name="Shape 27"/>
+          <p:cNvSpPr/>
+          <p:nvPr/>
+        </p:nvSpPr>
+        <p:spPr>
+          <a:xfrm>
+            <a:off x="2971800" y="2404872"/>
+            <a:ext cx="2834640" cy="402336"/>
+          </a:xfrm>
+          <a:prstGeom prst="rect">
+            <a:avLst/>
+          </a:prstGeom>
+          <a:solidFill>
+            <a:srgbClr val="F8FAFC"/>
+          </a:solidFill>
+          <a:ln w="12700">
+            <a:solidFill>
+              <a:srgbClr val="E2E8F0"/>
+            </a:solidFill>
+            <a:prstDash val="solid"/>
+          </a:ln>
+        </p:spPr>
+      </p:sp>
+      <p:sp>
+        <p:nvSpPr>
+          <p:cNvPr id="30" name="Shape 28"/>
+          <p:cNvSpPr/>
+          <p:nvPr/>
+        </p:nvSpPr>
+        <p:spPr>
+          <a:xfrm>
+            <a:off x="5943600" y="2404872"/>
+            <a:ext cx="2834640" cy="402336"/>
+          </a:xfrm>
+          <a:prstGeom prst="rect">
+            <a:avLst/>
+          </a:prstGeom>
+          <a:solidFill>
+            <a:srgbClr val="FCE7F3"/>
+          </a:solidFill>
+          <a:ln w="12700">
+            <a:solidFill>
+              <a:srgbClr val="E2E8F0"/>
+            </a:solidFill>
+            <a:prstDash val="solid"/>
+          </a:ln>
+        </p:spPr>
+      </p:sp>
+      <p:sp>
+        <p:nvSpPr>
+          <p:cNvPr id="31" name="Text 29"/>
+          <p:cNvSpPr/>
+          <p:nvPr/>
+        </p:nvSpPr>
+        <p:spPr>
+          <a:xfrm>
+            <a:off x="5943600" y="2404872"/>
+            <a:ext cx="2834640" cy="402336"/>
           </a:xfrm>
           <a:prstGeom prst="rect">
             <a:avLst/>
@@ -35655,13 +37311,13 @@
             <a:r>
               <a:rPr lang="en-US" sz="1300" b="1" dirty="0">
                 <a:solidFill>
-                  <a:srgbClr val="4C1D95"/>
+                  <a:srgbClr val="9D174D"/>
                 </a:solidFill>
                 <a:latin typeface="Trebuchet MS" pitchFamily="34" charset="0"/>
                 <a:ea typeface="Trebuchet MS" pitchFamily="34" charset="-122"/>
                 <a:cs typeface="Trebuchet MS" pitchFamily="34" charset="-120"/>
               </a:rPr>
-              <a:t>self-</a:t>
+              <a:t>-ee</a:t>
             </a:r>
             <a:endParaRPr lang="en-US" sz="1300" dirty="0"/>
           </a:p>
@@ -35669,20 +37325,45 @@
       </p:sp>
       <p:sp>
         <p:nvSpPr>
-          <p:cNvPr id="30" name="Shape 28"/>
-          <p:cNvSpPr/>
-          <p:nvPr/>
-        </p:nvSpPr>
-        <p:spPr>
-          <a:xfrm>
-            <a:off x="2971800" y="2404872"/>
+          <p:cNvPr id="32" name="Shape 30"/>
+          <p:cNvSpPr/>
+          <p:nvPr/>
+        </p:nvSpPr>
+        <p:spPr>
+          <a:xfrm>
+            <a:off x="365760" y="2825496"/>
+            <a:ext cx="2468880" cy="402336"/>
+          </a:xfrm>
+          <a:prstGeom prst="rect">
+            <a:avLst/>
+          </a:prstGeom>
+          <a:solidFill>
+            <a:srgbClr val="F1F5F9"/>
+          </a:solidFill>
+          <a:ln w="12700">
+            <a:solidFill>
+              <a:srgbClr val="E2E8F0"/>
+            </a:solidFill>
+            <a:prstDash val="solid"/>
+          </a:ln>
+        </p:spPr>
+      </p:sp>
+      <p:sp>
+        <p:nvSpPr>
+          <p:cNvPr id="33" name="Shape 31"/>
+          <p:cNvSpPr/>
+          <p:nvPr/>
+        </p:nvSpPr>
+        <p:spPr>
+          <a:xfrm>
+            <a:off x="2971800" y="2825496"/>
             <a:ext cx="2834640" cy="402336"/>
           </a:xfrm>
           <a:prstGeom prst="rect">
             <a:avLst/>
           </a:prstGeom>
           <a:solidFill>
-            <a:srgbClr val="F8FAFC"/>
+            <a:srgbClr val="F1F5F9"/>
           </a:solidFill>
           <a:ln w="12700">
             <a:solidFill>
@@ -35694,13 +37375,13 @@
       </p:sp>
       <p:sp>
         <p:nvSpPr>
-          <p:cNvPr id="31" name="Shape 29"/>
-          <p:cNvSpPr/>
-          <p:nvPr/>
-        </p:nvSpPr>
-        <p:spPr>
-          <a:xfrm>
-            <a:off x="5943600" y="2404872"/>
+          <p:cNvPr id="34" name="Shape 32"/>
+          <p:cNvSpPr/>
+          <p:nvPr/>
+        </p:nvSpPr>
+        <p:spPr>
+          <a:xfrm>
+            <a:off x="5943600" y="2825496"/>
             <a:ext cx="2834640" cy="402336"/>
           </a:xfrm>
           <a:prstGeom prst="rect">
@@ -35719,13 +37400,13 @@
       </p:sp>
       <p:sp>
         <p:nvSpPr>
-          <p:cNvPr id="32" name="Text 30"/>
-          <p:cNvSpPr/>
-          <p:nvPr/>
-        </p:nvSpPr>
-        <p:spPr>
-          <a:xfrm>
-            <a:off x="5943600" y="2404872"/>
+          <p:cNvPr id="35" name="Text 33"/>
+          <p:cNvSpPr/>
+          <p:nvPr/>
+        </p:nvSpPr>
+        <p:spPr>
+          <a:xfrm>
+            <a:off x="5943600" y="2825496"/>
             <a:ext cx="2834640" cy="402336"/>
           </a:xfrm>
           <a:prstGeom prst="rect">
@@ -35750,7 +37431,7 @@
                 <a:ea typeface="Trebuchet MS" pitchFamily="34" charset="-122"/>
                 <a:cs typeface="Trebuchet MS" pitchFamily="34" charset="-120"/>
               </a:rPr>
-              <a:t>-ees</a:t>
+              <a:t>-er</a:t>
             </a:r>
             <a:endParaRPr lang="en-US" sz="1300" dirty="0"/>
           </a:p>
@@ -35758,20 +37439,20 @@
       </p:sp>
       <p:sp>
         <p:nvSpPr>
-          <p:cNvPr id="33" name="Shape 31"/>
-          <p:cNvSpPr/>
-          <p:nvPr/>
-        </p:nvSpPr>
-        <p:spPr>
-          <a:xfrm>
-            <a:off x="365760" y="2825496"/>
+          <p:cNvPr id="36" name="Shape 34"/>
+          <p:cNvSpPr/>
+          <p:nvPr/>
+        </p:nvSpPr>
+        <p:spPr>
+          <a:xfrm>
+            <a:off x="365760" y="3246120"/>
             <a:ext cx="2468880" cy="402336"/>
           </a:xfrm>
           <a:prstGeom prst="rect">
             <a:avLst/>
           </a:prstGeom>
           <a:solidFill>
-            <a:srgbClr val="DDD6FE"/>
+            <a:srgbClr val="F8FAFC"/>
           </a:solidFill>
           <a:ln w="12700">
             <a:solidFill>
@@ -35783,14 +37464,64 @@
       </p:sp>
       <p:sp>
         <p:nvSpPr>
-          <p:cNvPr id="34" name="Text 32"/>
-          <p:cNvSpPr/>
-          <p:nvPr/>
-        </p:nvSpPr>
-        <p:spPr>
-          <a:xfrm>
-            <a:off x="365760" y="2825496"/>
-            <a:ext cx="2468880" cy="402336"/>
+          <p:cNvPr id="37" name="Shape 35"/>
+          <p:cNvSpPr/>
+          <p:nvPr/>
+        </p:nvSpPr>
+        <p:spPr>
+          <a:xfrm>
+            <a:off x="2971800" y="3246120"/>
+            <a:ext cx="2834640" cy="402336"/>
+          </a:xfrm>
+          <a:prstGeom prst="rect">
+            <a:avLst/>
+          </a:prstGeom>
+          <a:solidFill>
+            <a:srgbClr val="F8FAFC"/>
+          </a:solidFill>
+          <a:ln w="12700">
+            <a:solidFill>
+              <a:srgbClr val="E2E8F0"/>
+            </a:solidFill>
+            <a:prstDash val="solid"/>
+          </a:ln>
+        </p:spPr>
+      </p:sp>
+      <p:sp>
+        <p:nvSpPr>
+          <p:cNvPr id="38" name="Shape 36"/>
+          <p:cNvSpPr/>
+          <p:nvPr/>
+        </p:nvSpPr>
+        <p:spPr>
+          <a:xfrm>
+            <a:off x="5943600" y="3246120"/>
+            <a:ext cx="2834640" cy="402336"/>
+          </a:xfrm>
+          <a:prstGeom prst="rect">
+            <a:avLst/>
+          </a:prstGeom>
+          <a:solidFill>
+            <a:srgbClr val="FCE7F3"/>
+          </a:solidFill>
+          <a:ln w="12700">
+            <a:solidFill>
+              <a:srgbClr val="E2E8F0"/>
+            </a:solidFill>
+            <a:prstDash val="solid"/>
+          </a:ln>
+        </p:spPr>
+      </p:sp>
+      <p:sp>
+        <p:nvSpPr>
+          <p:cNvPr id="39" name="Text 37"/>
+          <p:cNvSpPr/>
+          <p:nvPr/>
+        </p:nvSpPr>
+        <p:spPr>
+          <a:xfrm>
+            <a:off x="5943600" y="3246120"/>
+            <a:ext cx="2834640" cy="402336"/>
           </a:xfrm>
           <a:prstGeom prst="rect">
             <a:avLst/>
@@ -35808,13 +37539,13 @@
             <a:r>
               <a:rPr lang="en-US" sz="1300" b="1" dirty="0">
                 <a:solidFill>
-                  <a:srgbClr val="4C1D95"/>
+                  <a:srgbClr val="9D174D"/>
                 </a:solidFill>
                 <a:latin typeface="Trebuchet MS" pitchFamily="34" charset="0"/>
                 <a:ea typeface="Trebuchet MS" pitchFamily="34" charset="-122"/>
                 <a:cs typeface="Trebuchet MS" pitchFamily="34" charset="-120"/>
               </a:rPr>
-              <a:t>over-</a:t>
+              <a:t>-ing</a:t>
             </a:r>
             <a:endParaRPr lang="en-US" sz="1300" dirty="0"/>
           </a:p>
@@ -35822,13 +37553,38 @@
       </p:sp>
       <p:sp>
         <p:nvSpPr>
-          <p:cNvPr id="35" name="Shape 33"/>
-          <p:cNvSpPr/>
-          <p:nvPr/>
-        </p:nvSpPr>
-        <p:spPr>
-          <a:xfrm>
-            <a:off x="2971800" y="2825496"/>
+          <p:cNvPr id="40" name="Shape 38"/>
+          <p:cNvSpPr/>
+          <p:nvPr/>
+        </p:nvSpPr>
+        <p:spPr>
+          <a:xfrm>
+            <a:off x="365760" y="3666744"/>
+            <a:ext cx="2468880" cy="402336"/>
+          </a:xfrm>
+          <a:prstGeom prst="rect">
+            <a:avLst/>
+          </a:prstGeom>
+          <a:solidFill>
+            <a:srgbClr val="F1F5F9"/>
+          </a:solidFill>
+          <a:ln w="12700">
+            <a:solidFill>
+              <a:srgbClr val="E2E8F0"/>
+            </a:solidFill>
+            <a:prstDash val="solid"/>
+          </a:ln>
+        </p:spPr>
+      </p:sp>
+      <p:sp>
+        <p:nvSpPr>
+          <p:cNvPr id="41" name="Shape 39"/>
+          <p:cNvSpPr/>
+          <p:nvPr/>
+        </p:nvSpPr>
+        <p:spPr>
+          <a:xfrm>
+            <a:off x="2971800" y="3666744"/>
             <a:ext cx="2834640" cy="402336"/>
           </a:xfrm>
           <a:prstGeom prst="rect">
@@ -35847,13 +37603,13 @@
       </p:sp>
       <p:sp>
         <p:nvSpPr>
-          <p:cNvPr id="36" name="Shape 34"/>
-          <p:cNvSpPr/>
-          <p:nvPr/>
-        </p:nvSpPr>
-        <p:spPr>
-          <a:xfrm>
-            <a:off x="5943600" y="2825496"/>
+          <p:cNvPr id="42" name="Shape 40"/>
+          <p:cNvSpPr/>
+          <p:nvPr/>
+        </p:nvSpPr>
+        <p:spPr>
+          <a:xfrm>
+            <a:off x="5943600" y="3666744"/>
             <a:ext cx="2834640" cy="402336"/>
           </a:xfrm>
           <a:prstGeom prst="rect">
@@ -35872,13 +37628,13 @@
       </p:sp>
       <p:sp>
         <p:nvSpPr>
-          <p:cNvPr id="37" name="Text 35"/>
-          <p:cNvSpPr/>
-          <p:nvPr/>
-        </p:nvSpPr>
-        <p:spPr>
-          <a:xfrm>
-            <a:off x="5943600" y="2825496"/>
+          <p:cNvPr id="43" name="Text 41"/>
+          <p:cNvSpPr/>
+          <p:nvPr/>
+        </p:nvSpPr>
+        <p:spPr>
+          <a:xfrm>
+            <a:off x="5943600" y="3666744"/>
             <a:ext cx="2834640" cy="402336"/>
           </a:xfrm>
           <a:prstGeom prst="rect">
@@ -35911,191 +37667,170 @@
       </p:sp>
       <p:sp>
         <p:nvSpPr>
-          <p:cNvPr id="38" name="Shape 36"/>
-          <p:cNvSpPr/>
-          <p:nvPr/>
-        </p:nvSpPr>
-        <p:spPr>
-          <a:xfrm>
-            <a:off x="365760" y="3246120"/>
-            <a:ext cx="2468880" cy="402336"/>
-          </a:xfrm>
-          <a:prstGeom prst="rect">
-            <a:avLst/>
-          </a:prstGeom>
-          <a:solidFill>
-            <a:srgbClr val="DDD6FE"/>
-          </a:solidFill>
-          <a:ln w="12700">
-            <a:solidFill>
-              <a:srgbClr val="E2E8F0"/>
-            </a:solidFill>
-            <a:prstDash val="solid"/>
-          </a:ln>
-        </p:spPr>
-      </p:sp>
-      <p:sp>
-        <p:nvSpPr>
-          <p:cNvPr id="39" name="Text 37"/>
-          <p:cNvSpPr/>
-          <p:nvPr/>
-        </p:nvSpPr>
-        <p:spPr>
-          <a:xfrm>
-            <a:off x="365760" y="3246120"/>
-            <a:ext cx="2468880" cy="402336"/>
-          </a:xfrm>
-          <a:prstGeom prst="rect">
-            <a:avLst/>
-          </a:prstGeom>
-          <a:noFill/>
-          <a:ln/>
-        </p:spPr>
-        <p:txBody>
-          <a:bodyPr wrap="square" lIns="0" tIns="0" rIns="0" bIns="0" rtlCol="0" anchor="ctr"/>
-          <a:lstStyle/>
-          <a:p>
-            <a:pPr algn="ctr" indent="0" marL="0">
-              <a:buNone/>
-            </a:pPr>
-            <a:r>
-              <a:rPr lang="en-US" sz="1300" b="1" dirty="0">
-                <a:solidFill>
-                  <a:srgbClr val="4C1D95"/>
+          <p:cNvPr id="44" name="Text 42"/>
+          <p:cNvSpPr/>
+          <p:nvPr/>
+        </p:nvSpPr>
+        <p:spPr>
+          <a:xfrm>
+            <a:off x="365760" y="3611880"/>
+            <a:ext cx="1828800" cy="347472"/>
+          </a:xfrm>
+          <a:prstGeom prst="rect">
+            <a:avLst/>
+          </a:prstGeom>
+          <a:noFill/>
+          <a:ln/>
+        </p:spPr>
+        <p:txBody>
+          <a:bodyPr wrap="square" lIns="0" tIns="0" rIns="0" bIns="0" rtlCol="0" anchor="ctr"/>
+          <a:lstStyle/>
+          <a:p>
+            <a:pPr algn="l" indent="0" marL="0">
+              <a:buNone/>
+            </a:pPr>
+            <a:r>
+              <a:rPr lang="en-US" sz="1200" b="1" dirty="0">
+                <a:solidFill>
+                  <a:srgbClr val="0F172A"/>
                 </a:solidFill>
                 <a:latin typeface="Trebuchet MS" pitchFamily="34" charset="0"/>
                 <a:ea typeface="Trebuchet MS" pitchFamily="34" charset="-122"/>
                 <a:cs typeface="Trebuchet MS" pitchFamily="34" charset="-120"/>
               </a:rPr>
-              <a:t>under-</a:t>
-            </a:r>
-            <a:endParaRPr lang="en-US" sz="1300" dirty="0"/>
-          </a:p>
-        </p:txBody>
-      </p:sp>
-      <p:sp>
-        <p:nvSpPr>
-          <p:cNvPr id="40" name="Shape 38"/>
-          <p:cNvSpPr/>
-          <p:nvPr/>
-        </p:nvSpPr>
-        <p:spPr>
-          <a:xfrm>
-            <a:off x="2971800" y="3246120"/>
-            <a:ext cx="2834640" cy="402336"/>
-          </a:xfrm>
-          <a:prstGeom prst="rect">
-            <a:avLst/>
-          </a:prstGeom>
-          <a:solidFill>
-            <a:srgbClr val="F8FAFC"/>
-          </a:solidFill>
-          <a:ln w="12700">
-            <a:solidFill>
-              <a:srgbClr val="E2E8F0"/>
-            </a:solidFill>
-            <a:prstDash val="solid"/>
-          </a:ln>
-        </p:spPr>
-      </p:sp>
-      <p:sp>
-        <p:nvSpPr>
-          <p:cNvPr id="41" name="Shape 39"/>
-          <p:cNvSpPr/>
-          <p:nvPr/>
-        </p:nvSpPr>
-        <p:spPr>
-          <a:xfrm>
-            <a:off x="5943600" y="3246120"/>
-            <a:ext cx="2834640" cy="402336"/>
-          </a:xfrm>
-          <a:prstGeom prst="rect">
-            <a:avLst/>
-          </a:prstGeom>
-          <a:solidFill>
-            <a:srgbClr val="FCE7F3"/>
-          </a:solidFill>
-          <a:ln w="12700">
-            <a:solidFill>
-              <a:srgbClr val="E2E8F0"/>
-            </a:solidFill>
-            <a:prstDash val="solid"/>
-          </a:ln>
-        </p:spPr>
-      </p:sp>
-      <p:sp>
-        <p:nvSpPr>
-          <p:cNvPr id="42" name="Text 40"/>
-          <p:cNvSpPr/>
-          <p:nvPr/>
-        </p:nvSpPr>
-        <p:spPr>
-          <a:xfrm>
-            <a:off x="5943600" y="3246120"/>
-            <a:ext cx="2834640" cy="402336"/>
-          </a:xfrm>
-          <a:prstGeom prst="rect">
-            <a:avLst/>
-          </a:prstGeom>
-          <a:noFill/>
-          <a:ln/>
-        </p:spPr>
-        <p:txBody>
-          <a:bodyPr wrap="square" lIns="0" tIns="0" rIns="0" bIns="0" rtlCol="0" anchor="ctr"/>
-          <a:lstStyle/>
-          <a:p>
-            <a:pPr algn="ctr" indent="0" marL="0">
-              <a:buNone/>
-            </a:pPr>
-            <a:r>
-              <a:rPr lang="en-US" sz="1300" b="1" dirty="0">
-                <a:solidFill>
-                  <a:srgbClr val="9D174D"/>
+              <a:t>Sample words:</a:t>
+            </a:r>
+            <a:endParaRPr lang="en-US" sz="1200" dirty="0"/>
+          </a:p>
+        </p:txBody>
+      </p:sp>
+      <p:sp>
+        <p:nvSpPr>
+          <p:cNvPr id="45" name="Shape 43"/>
+          <p:cNvSpPr/>
+          <p:nvPr/>
+        </p:nvSpPr>
+        <p:spPr>
+          <a:xfrm>
+            <a:off x="365760" y="4023360"/>
+            <a:ext cx="2011680" cy="402336"/>
+          </a:xfrm>
+          <a:prstGeom prst="rect">
+            <a:avLst>
+              <a:gd name="adj" fmla="val 13636"/>
+            </a:avLst>
+          </a:prstGeom>
+          <a:solidFill>
+            <a:srgbClr val="EEF2FF"/>
+          </a:solidFill>
+          <a:ln w="12700">
+            <a:solidFill>
+              <a:srgbClr val="6366F1"/>
+            </a:solidFill>
+            <a:prstDash val="solid"/>
+          </a:ln>
+        </p:spPr>
+      </p:sp>
+      <p:sp>
+        <p:nvSpPr>
+          <p:cNvPr id="46" name="Text 44"/>
+          <p:cNvSpPr/>
+          <p:nvPr/>
+        </p:nvSpPr>
+        <p:spPr>
+          <a:xfrm>
+            <a:off x="365760" y="4023360"/>
+            <a:ext cx="2011680" cy="402336"/>
+          </a:xfrm>
+          <a:prstGeom prst="rect">
+            <a:avLst/>
+          </a:prstGeom>
+          <a:noFill/>
+          <a:ln/>
+        </p:spPr>
+        <p:txBody>
+          <a:bodyPr wrap="square" lIns="0" tIns="0" rIns="0" bIns="0" rtlCol="0" anchor="ctr"/>
+          <a:lstStyle/>
+          <a:p>
+            <a:pPr algn="ctr" indent="0" marL="0">
+              <a:buNone/>
+            </a:pPr>
+            <a:r>
+              <a:rPr lang="en-US" sz="1200" b="1" dirty="0">
+                <a:solidFill>
+                  <a:srgbClr val="4338CA"/>
                 </a:solidFill>
                 <a:latin typeface="Trebuchet MS" pitchFamily="34" charset="0"/>
                 <a:ea typeface="Trebuchet MS" pitchFamily="34" charset="-122"/>
                 <a:cs typeface="Trebuchet MS" pitchFamily="34" charset="-120"/>
               </a:rPr>
-              <a:t>-ing</a:t>
-            </a:r>
-            <a:endParaRPr lang="en-US" sz="1300" dirty="0"/>
-          </a:p>
-        </p:txBody>
-      </p:sp>
-      <p:sp>
-        <p:nvSpPr>
-          <p:cNvPr id="43" name="Text 41"/>
-          <p:cNvSpPr/>
-          <p:nvPr/>
-        </p:nvSpPr>
-        <p:spPr>
-          <a:xfrm>
-            <a:off x="365760" y="3611880"/>
-            <a:ext cx="1828800" cy="347472"/>
-          </a:xfrm>
-          <a:prstGeom prst="rect">
-            <a:avLst/>
-          </a:prstGeom>
-          <a:noFill/>
-          <a:ln/>
-        </p:spPr>
-        <p:txBody>
-          <a:bodyPr wrap="square" lIns="0" tIns="0" rIns="0" bIns="0" rtlCol="0" anchor="ctr"/>
-          <a:lstStyle/>
-          <a:p>
-            <a:pPr algn="l" indent="0" marL="0">
+              <a:t>employ</a:t>
+            </a:r>
+            <a:endParaRPr lang="en-US" sz="1200" dirty="0"/>
+          </a:p>
+        </p:txBody>
+      </p:sp>
+      <p:sp>
+        <p:nvSpPr>
+          <p:cNvPr id="47" name="Shape 45"/>
+          <p:cNvSpPr/>
+          <p:nvPr/>
+        </p:nvSpPr>
+        <p:spPr>
+          <a:xfrm>
+            <a:off x="2542032" y="4023360"/>
+            <a:ext cx="2011680" cy="402336"/>
+          </a:xfrm>
+          <a:prstGeom prst="rect">
+            <a:avLst>
+              <a:gd name="adj" fmla="val 13636"/>
+            </a:avLst>
+          </a:prstGeom>
+          <a:solidFill>
+            <a:srgbClr val="EEF2FF"/>
+          </a:solidFill>
+          <a:ln w="12700">
+            <a:solidFill>
+              <a:srgbClr val="6366F1"/>
+            </a:solidFill>
+            <a:prstDash val="solid"/>
+          </a:ln>
+        </p:spPr>
+      </p:sp>
+      <p:sp>
+        <p:nvSpPr>
+          <p:cNvPr id="48" name="Text 46"/>
+          <p:cNvSpPr/>
+          <p:nvPr/>
+        </p:nvSpPr>
+        <p:spPr>
+          <a:xfrm>
+            <a:off x="2542032" y="4023360"/>
+            <a:ext cx="2011680" cy="402336"/>
+          </a:xfrm>
+          <a:prstGeom prst="rect">
+            <a:avLst/>
+          </a:prstGeom>
+          <a:noFill/>
+          <a:ln/>
+        </p:spPr>
+        <p:txBody>
+          <a:bodyPr wrap="square" lIns="0" tIns="0" rIns="0" bIns="0" rtlCol="0" anchor="ctr"/>
+          <a:lstStyle/>
+          <a:p>
+            <a:pPr algn="ctr" indent="0" marL="0">
               <a:buNone/>
             </a:pPr>
             <a:r>
               <a:rPr lang="en-US" sz="1200" b="1" dirty="0">
                 <a:solidFill>
-                  <a:srgbClr val="0F172A"/>
+                  <a:srgbClr val="4338CA"/>
                 </a:solidFill>
                 <a:latin typeface="Trebuchet MS" pitchFamily="34" charset="0"/>
                 <a:ea typeface="Trebuchet MS" pitchFamily="34" charset="-122"/>
                 <a:cs typeface="Trebuchet MS" pitchFamily="34" charset="-120"/>
               </a:rPr>
-              <a:t>Sample words:</a:t>
+              <a:t>employs</a:t>
             </a:r>
             <a:endParaRPr lang="en-US" sz="1200" dirty="0"/>
           </a:p>
@@ -36103,13 +37838,13 @@
       </p:sp>
       <p:sp>
         <p:nvSpPr>
-          <p:cNvPr id="44" name="Shape 42"/>
-          <p:cNvSpPr/>
-          <p:nvPr/>
-        </p:nvSpPr>
-        <p:spPr>
-          <a:xfrm>
-            <a:off x="365760" y="4023360"/>
+          <p:cNvPr id="49" name="Shape 47"/>
+          <p:cNvSpPr/>
+          <p:nvPr/>
+        </p:nvSpPr>
+        <p:spPr>
+          <a:xfrm>
+            <a:off x="4718304" y="4023360"/>
             <a:ext cx="2011680" cy="402336"/>
           </a:xfrm>
           <a:prstGeom prst="rect">
@@ -36130,13 +37865,13 @@
       </p:sp>
       <p:sp>
         <p:nvSpPr>
-          <p:cNvPr id="45" name="Text 43"/>
-          <p:cNvSpPr/>
-          <p:nvPr/>
-        </p:nvSpPr>
-        <p:spPr>
-          <a:xfrm>
-            <a:off x="365760" y="4023360"/>
+          <p:cNvPr id="50" name="Text 48"/>
+          <p:cNvSpPr/>
+          <p:nvPr/>
+        </p:nvSpPr>
+        <p:spPr>
+          <a:xfrm>
+            <a:off x="4718304" y="4023360"/>
             <a:ext cx="2011680" cy="402336"/>
           </a:xfrm>
           <a:prstGeom prst="rect">
@@ -36161,7 +37896,7 @@
                 <a:ea typeface="Trebuchet MS" pitchFamily="34" charset="-122"/>
                 <a:cs typeface="Trebuchet MS" pitchFamily="34" charset="-120"/>
               </a:rPr>
-              <a:t>employ</a:t>
+              <a:t>employed</a:t>
             </a:r>
             <a:endParaRPr lang="en-US" sz="1200" dirty="0"/>
           </a:p>
@@ -36169,13 +37904,13 @@
       </p:sp>
       <p:sp>
         <p:nvSpPr>
-          <p:cNvPr id="46" name="Shape 44"/>
-          <p:cNvSpPr/>
-          <p:nvPr/>
-        </p:nvSpPr>
-        <p:spPr>
-          <a:xfrm>
-            <a:off x="2542032" y="4023360"/>
+          <p:cNvPr id="51" name="Shape 49"/>
+          <p:cNvSpPr/>
+          <p:nvPr/>
+        </p:nvSpPr>
+        <p:spPr>
+          <a:xfrm>
+            <a:off x="6894576" y="4023360"/>
             <a:ext cx="2011680" cy="402336"/>
           </a:xfrm>
           <a:prstGeom prst="rect">
@@ -36196,13 +37931,13 @@
       </p:sp>
       <p:sp>
         <p:nvSpPr>
-          <p:cNvPr id="47" name="Text 45"/>
-          <p:cNvSpPr/>
-          <p:nvPr/>
-        </p:nvSpPr>
-        <p:spPr>
-          <a:xfrm>
-            <a:off x="2542032" y="4023360"/>
+          <p:cNvPr id="52" name="Text 50"/>
+          <p:cNvSpPr/>
+          <p:nvPr/>
+        </p:nvSpPr>
+        <p:spPr>
+          <a:xfrm>
+            <a:off x="6894576" y="4023360"/>
             <a:ext cx="2011680" cy="402336"/>
           </a:xfrm>
           <a:prstGeom prst="rect">
@@ -36227,7 +37962,7 @@
                 <a:ea typeface="Trebuchet MS" pitchFamily="34" charset="-122"/>
                 <a:cs typeface="Trebuchet MS" pitchFamily="34" charset="-120"/>
               </a:rPr>
-              <a:t>employed</a:t>
+              <a:t>employer</a:t>
             </a:r>
             <a:endParaRPr lang="en-US" sz="1200" dirty="0"/>
           </a:p>
@@ -36235,13 +37970,13 @@
       </p:sp>
       <p:sp>
         <p:nvSpPr>
-          <p:cNvPr id="48" name="Shape 46"/>
-          <p:cNvSpPr/>
-          <p:nvPr/>
-        </p:nvSpPr>
-        <p:spPr>
-          <a:xfrm>
-            <a:off x="4718304" y="4023360"/>
+          <p:cNvPr id="53" name="Shape 51"/>
+          <p:cNvSpPr/>
+          <p:nvPr/>
+        </p:nvSpPr>
+        <p:spPr>
+          <a:xfrm>
+            <a:off x="365760" y="4498848"/>
             <a:ext cx="2011680" cy="402336"/>
           </a:xfrm>
           <a:prstGeom prst="rect">
@@ -36262,13 +37997,13 @@
       </p:sp>
       <p:sp>
         <p:nvSpPr>
-          <p:cNvPr id="49" name="Text 47"/>
-          <p:cNvSpPr/>
-          <p:nvPr/>
-        </p:nvSpPr>
-        <p:spPr>
-          <a:xfrm>
-            <a:off x="4718304" y="4023360"/>
+          <p:cNvPr id="54" name="Text 52"/>
+          <p:cNvSpPr/>
+          <p:nvPr/>
+        </p:nvSpPr>
+        <p:spPr>
+          <a:xfrm>
+            <a:off x="365760" y="4498848"/>
             <a:ext cx="2011680" cy="402336"/>
           </a:xfrm>
           <a:prstGeom prst="rect">
@@ -36293,7 +38028,7 @@
                 <a:ea typeface="Trebuchet MS" pitchFamily="34" charset="-122"/>
                 <a:cs typeface="Trebuchet MS" pitchFamily="34" charset="-120"/>
               </a:rPr>
-              <a:t>employer</a:t>
+              <a:t>reemploy</a:t>
             </a:r>
             <a:endParaRPr lang="en-US" sz="1200" dirty="0"/>
           </a:p>
@@ -36301,13 +38036,13 @@
       </p:sp>
       <p:sp>
         <p:nvSpPr>
-          <p:cNvPr id="50" name="Shape 48"/>
-          <p:cNvSpPr/>
-          <p:nvPr/>
-        </p:nvSpPr>
-        <p:spPr>
-          <a:xfrm>
-            <a:off x="6894576" y="4023360"/>
+          <p:cNvPr id="55" name="Shape 53"/>
+          <p:cNvSpPr/>
+          <p:nvPr/>
+        </p:nvSpPr>
+        <p:spPr>
+          <a:xfrm>
+            <a:off x="2542032" y="4498848"/>
             <a:ext cx="2011680" cy="402336"/>
           </a:xfrm>
           <a:prstGeom prst="rect">
@@ -36328,13 +38063,13 @@
       </p:sp>
       <p:sp>
         <p:nvSpPr>
-          <p:cNvPr id="51" name="Text 49"/>
-          <p:cNvSpPr/>
-          <p:nvPr/>
-        </p:nvSpPr>
-        <p:spPr>
-          <a:xfrm>
-            <a:off x="6894576" y="4023360"/>
+          <p:cNvPr id="56" name="Text 54"/>
+          <p:cNvSpPr/>
+          <p:nvPr/>
+        </p:nvSpPr>
+        <p:spPr>
+          <a:xfrm>
+            <a:off x="2542032" y="4498848"/>
             <a:ext cx="2011680" cy="402336"/>
           </a:xfrm>
           <a:prstGeom prst="rect">
@@ -36359,7 +38094,7 @@
                 <a:ea typeface="Trebuchet MS" pitchFamily="34" charset="-122"/>
                 <a:cs typeface="Trebuchet MS" pitchFamily="34" charset="-120"/>
               </a:rPr>
-              <a:t>employee</a:t>
+              <a:t>employers</a:t>
             </a:r>
             <a:endParaRPr lang="en-US" sz="1200" dirty="0"/>
           </a:p>
@@ -36367,13 +38102,13 @@
       </p:sp>
       <p:sp>
         <p:nvSpPr>
-          <p:cNvPr id="52" name="Shape 50"/>
-          <p:cNvSpPr/>
-          <p:nvPr/>
-        </p:nvSpPr>
-        <p:spPr>
-          <a:xfrm>
-            <a:off x="365760" y="4498848"/>
+          <p:cNvPr id="57" name="Shape 55"/>
+          <p:cNvSpPr/>
+          <p:nvPr/>
+        </p:nvSpPr>
+        <p:spPr>
+          <a:xfrm>
+            <a:off x="4718304" y="4498848"/>
             <a:ext cx="2011680" cy="402336"/>
           </a:xfrm>
           <a:prstGeom prst="rect">
@@ -36394,13 +38129,13 @@
       </p:sp>
       <p:sp>
         <p:nvSpPr>
-          <p:cNvPr id="53" name="Text 51"/>
-          <p:cNvSpPr/>
-          <p:nvPr/>
-        </p:nvSpPr>
-        <p:spPr>
-          <a:xfrm>
-            <a:off x="365760" y="4498848"/>
+          <p:cNvPr id="58" name="Text 56"/>
+          <p:cNvSpPr/>
+          <p:nvPr/>
+        </p:nvSpPr>
+        <p:spPr>
+          <a:xfrm>
+            <a:off x="4718304" y="4498848"/>
             <a:ext cx="2011680" cy="402336"/>
           </a:xfrm>
           <a:prstGeom prst="rect">
@@ -36425,205 +38160,7 @@
                 <a:ea typeface="Trebuchet MS" pitchFamily="34" charset="-122"/>
                 <a:cs typeface="Trebuchet MS" pitchFamily="34" charset="-120"/>
               </a:rPr>
-              <a:t>employment</a:t>
-            </a:r>
-            <a:endParaRPr lang="en-US" sz="1200" dirty="0"/>
-          </a:p>
-        </p:txBody>
-      </p:sp>
-      <p:sp>
-        <p:nvSpPr>
-          <p:cNvPr id="54" name="Shape 52"/>
-          <p:cNvSpPr/>
-          <p:nvPr/>
-        </p:nvSpPr>
-        <p:spPr>
-          <a:xfrm>
-            <a:off x="2542032" y="4498848"/>
-            <a:ext cx="2011680" cy="402336"/>
-          </a:xfrm>
-          <a:prstGeom prst="rect">
-            <a:avLst>
-              <a:gd name="adj" fmla="val 13636"/>
-            </a:avLst>
-          </a:prstGeom>
-          <a:solidFill>
-            <a:srgbClr val="EEF2FF"/>
-          </a:solidFill>
-          <a:ln w="12700">
-            <a:solidFill>
-              <a:srgbClr val="6366F1"/>
-            </a:solidFill>
-            <a:prstDash val="solid"/>
-          </a:ln>
-        </p:spPr>
-      </p:sp>
-      <p:sp>
-        <p:nvSpPr>
-          <p:cNvPr id="55" name="Text 53"/>
-          <p:cNvSpPr/>
-          <p:nvPr/>
-        </p:nvSpPr>
-        <p:spPr>
-          <a:xfrm>
-            <a:off x="2542032" y="4498848"/>
-            <a:ext cx="2011680" cy="402336"/>
-          </a:xfrm>
-          <a:prstGeom prst="rect">
-            <a:avLst/>
-          </a:prstGeom>
-          <a:noFill/>
-          <a:ln/>
-        </p:spPr>
-        <p:txBody>
-          <a:bodyPr wrap="square" lIns="0" tIns="0" rIns="0" bIns="0" rtlCol="0" anchor="ctr"/>
-          <a:lstStyle/>
-          <a:p>
-            <a:pPr algn="ctr" indent="0" marL="0">
-              <a:buNone/>
-            </a:pPr>
-            <a:r>
-              <a:rPr lang="en-US" sz="1200" b="1" dirty="0">
-                <a:solidFill>
-                  <a:srgbClr val="4338CA"/>
-                </a:solidFill>
-                <a:latin typeface="Trebuchet MS" pitchFamily="34" charset="0"/>
-                <a:ea typeface="Trebuchet MS" pitchFamily="34" charset="-122"/>
-                <a:cs typeface="Trebuchet MS" pitchFamily="34" charset="-120"/>
-              </a:rPr>
-              <a:t>unemployed</a:t>
-            </a:r>
-            <a:endParaRPr lang="en-US" sz="1200" dirty="0"/>
-          </a:p>
-        </p:txBody>
-      </p:sp>
-      <p:sp>
-        <p:nvSpPr>
-          <p:cNvPr id="56" name="Shape 54"/>
-          <p:cNvSpPr/>
-          <p:nvPr/>
-        </p:nvSpPr>
-        <p:spPr>
-          <a:xfrm>
-            <a:off x="4718304" y="4498848"/>
-            <a:ext cx="2011680" cy="402336"/>
-          </a:xfrm>
-          <a:prstGeom prst="rect">
-            <a:avLst>
-              <a:gd name="adj" fmla="val 13636"/>
-            </a:avLst>
-          </a:prstGeom>
-          <a:solidFill>
-            <a:srgbClr val="EEF2FF"/>
-          </a:solidFill>
-          <a:ln w="12700">
-            <a:solidFill>
-              <a:srgbClr val="6366F1"/>
-            </a:solidFill>
-            <a:prstDash val="solid"/>
-          </a:ln>
-        </p:spPr>
-      </p:sp>
-      <p:sp>
-        <p:nvSpPr>
-          <p:cNvPr id="57" name="Text 55"/>
-          <p:cNvSpPr/>
-          <p:nvPr/>
-        </p:nvSpPr>
-        <p:spPr>
-          <a:xfrm>
-            <a:off x="4718304" y="4498848"/>
-            <a:ext cx="2011680" cy="402336"/>
-          </a:xfrm>
-          <a:prstGeom prst="rect">
-            <a:avLst/>
-          </a:prstGeom>
-          <a:noFill/>
-          <a:ln/>
-        </p:spPr>
-        <p:txBody>
-          <a:bodyPr wrap="square" lIns="0" tIns="0" rIns="0" bIns="0" rtlCol="0" anchor="ctr"/>
-          <a:lstStyle/>
-          <a:p>
-            <a:pPr algn="ctr" indent="0" marL="0">
-              <a:buNone/>
-            </a:pPr>
-            <a:r>
-              <a:rPr lang="en-US" sz="1200" b="1" dirty="0">
-                <a:solidFill>
-                  <a:srgbClr val="4338CA"/>
-                </a:solidFill>
-                <a:latin typeface="Trebuchet MS" pitchFamily="34" charset="0"/>
-                <a:ea typeface="Trebuchet MS" pitchFamily="34" charset="-122"/>
-                <a:cs typeface="Trebuchet MS" pitchFamily="34" charset="-120"/>
-              </a:rPr>
-              <a:t>unemployment</a:t>
-            </a:r>
-            <a:endParaRPr lang="en-US" sz="1200" dirty="0"/>
-          </a:p>
-        </p:txBody>
-      </p:sp>
-      <p:sp>
-        <p:nvSpPr>
-          <p:cNvPr id="58" name="Shape 56"/>
-          <p:cNvSpPr/>
-          <p:nvPr/>
-        </p:nvSpPr>
-        <p:spPr>
-          <a:xfrm>
-            <a:off x="6894576" y="4498848"/>
-            <a:ext cx="2011680" cy="402336"/>
-          </a:xfrm>
-          <a:prstGeom prst="rect">
-            <a:avLst>
-              <a:gd name="adj" fmla="val 13636"/>
-            </a:avLst>
-          </a:prstGeom>
-          <a:solidFill>
-            <a:srgbClr val="EEF2FF"/>
-          </a:solidFill>
-          <a:ln w="12700">
-            <a:solidFill>
-              <a:srgbClr val="6366F1"/>
-            </a:solidFill>
-            <a:prstDash val="solid"/>
-          </a:ln>
-        </p:spPr>
-      </p:sp>
-      <p:sp>
-        <p:nvSpPr>
-          <p:cNvPr id="59" name="Text 57"/>
-          <p:cNvSpPr/>
-          <p:nvPr/>
-        </p:nvSpPr>
-        <p:spPr>
-          <a:xfrm>
-            <a:off x="6894576" y="4498848"/>
-            <a:ext cx="2011680" cy="402336"/>
-          </a:xfrm>
-          <a:prstGeom prst="rect">
-            <a:avLst/>
-          </a:prstGeom>
-          <a:noFill/>
-          <a:ln/>
-        </p:spPr>
-        <p:txBody>
-          <a:bodyPr wrap="square" lIns="0" tIns="0" rIns="0" bIns="0" rtlCol="0" anchor="ctr"/>
-          <a:lstStyle/>
-          <a:p>
-            <a:pPr algn="ctr" indent="0" marL="0">
-              <a:buNone/>
-            </a:pPr>
-            <a:r>
-              <a:rPr lang="en-US" sz="1200" b="1" dirty="0">
-                <a:solidFill>
-                  <a:srgbClr val="4338CA"/>
-                </a:solidFill>
-                <a:latin typeface="Trebuchet MS" pitchFamily="34" charset="0"/>
-                <a:ea typeface="Trebuchet MS" pitchFamily="34" charset="-122"/>
-                <a:cs typeface="Trebuchet MS" pitchFamily="34" charset="-120"/>
-              </a:rPr>
-              <a:t>reemployed</a:t>
+              <a:t>employing</a:t>
             </a:r>
             <a:endParaRPr lang="en-US" sz="1200" dirty="0"/>
           </a:p>
@@ -36915,7 +38452,7 @@
                 <a:ea typeface="Calibri" pitchFamily="34" charset="-122"/>
                 <a:cs typeface="Calibri" pitchFamily="34" charset="-120"/>
               </a:rPr>
-              <a:t>Word Labs  •  wordlabs.app  •  Root: 'employ' = to use or give work</a:t>
+              <a:t>Word Labs  •  wordlabs.app  •  Root: 'employ' = give work to; use</a:t>
             </a:r>
             <a:endParaRPr lang="en-US" sz="800" dirty="0"/>
           </a:p>
@@ -37079,7 +38616,7 @@
                 <a:ea typeface="Calibri" pitchFamily="34" charset="-122"/>
                 <a:cs typeface="Calibri" pitchFamily="34" charset="-120"/>
               </a:rPr>
-              <a:t>The core part of a word carrying its basic meaning. For example, 'employ' means 'to use or give work'.</a:t>
+              <a:t>The core part of a word carrying its basic meaning. For example, 'employ' means 'give work to; use'.</a:t>
             </a:r>
             <a:endParaRPr lang="en-US" sz="1350" dirty="0"/>
           </a:p>
@@ -37699,7 +39236,7 @@
                 <a:ea typeface="Calibri" pitchFamily="34" charset="-122"/>
                 <a:cs typeface="Calibri" pitchFamily="34" charset="-120"/>
               </a:rPr>
-              <a:t>Word Labs  •  wordlabs.app  •  Root: 'employ' = to use or give work</a:t>
+              <a:t>Word Labs  •  wordlabs.app  •  Root: 'employ' = give work to; use</a:t>
             </a:r>
             <a:endParaRPr lang="en-US" sz="800" dirty="0"/>
           </a:p>
@@ -37811,7 +39348,7 @@
                 <a:ea typeface="Calibri" pitchFamily="34" charset="-122"/>
                 <a:cs typeface="Calibri" pitchFamily="34" charset="-120"/>
               </a:rPr>
-              <a:t>1.  An employer is someone who gives other people jobs.</a:t>
+              <a:t>1.  'employs' means 'gives someone a paid job; uses something for a purpose'.</a:t>
             </a:r>
             <a:endParaRPr lang="en-US" sz="1300" dirty="0"/>
           </a:p>
@@ -37950,7 +39487,7 @@
                 <a:ea typeface="Calibri" pitchFamily="34" charset="-122"/>
                 <a:cs typeface="Calibri" pitchFamily="34" charset="-120"/>
               </a:rPr>
-              <a:t>2.  'Employment' means having or providing paid work.</a:t>
+              <a:t>2.  'employ' means 'give work to; use'.</a:t>
             </a:r>
             <a:endParaRPr lang="en-US" sz="1300" dirty="0"/>
           </a:p>
@@ -38089,7 +39626,7 @@
                 <a:ea typeface="Calibri" pitchFamily="34" charset="-122"/>
                 <a:cs typeface="Calibri" pitchFamily="34" charset="-120"/>
               </a:rPr>
-              <a:t>3.  The prefix 'un' in 'unemployed' means 'again'.</a:t>
+              <a:t>3.  'employ' means 'to punish someone for a mistake'.</a:t>
             </a:r>
             <a:endParaRPr lang="en-US" sz="1300" dirty="0"/>
           </a:p>
@@ -38228,7 +39765,7 @@
                 <a:ea typeface="Calibri" pitchFamily="34" charset="-122"/>
                 <a:cs typeface="Calibri" pitchFamily="34" charset="-120"/>
               </a:rPr>
-              <a:t>4.  The word 'employee' contains the root 'employ'.</a:t>
+              <a:t>4.  'employ' means 'to give someone a paid job, or to use something for a purpose'.</a:t>
             </a:r>
             <a:endParaRPr lang="en-US" sz="1300" dirty="0"/>
           </a:p>
@@ -38367,7 +39904,7 @@
                 <a:ea typeface="Calibri" pitchFamily="34" charset="-122"/>
                 <a:cs typeface="Calibri" pitchFamily="34" charset="-120"/>
               </a:rPr>
-              <a:t>5.  The root 'employ' comes from ancient Greek.</a:t>
+              <a:t>5.  'employs' means 'cooks food quickly in a pan'.</a:t>
             </a:r>
             <a:endParaRPr lang="en-US" sz="1300" dirty="0"/>
           </a:p>
@@ -38725,7 +40262,7 @@
                 <a:ea typeface="Calibri" pitchFamily="34" charset="-122"/>
                 <a:cs typeface="Calibri" pitchFamily="34" charset="-120"/>
               </a:rPr>
-              <a:t>Word Labs  •  wordlabs.app  •  Root: 'employ' = to use or give work</a:t>
+              <a:t>Word Labs  •  wordlabs.app  •  Root: 'employ' = give work to; use</a:t>
             </a:r>
             <a:endParaRPr lang="en-US" sz="800" dirty="0"/>
           </a:p>
@@ -38862,7 +40399,7 @@
                 <a:ea typeface="Trebuchet MS" pitchFamily="34" charset="-122"/>
                 <a:cs typeface="Trebuchet MS" pitchFamily="34" charset="-120"/>
               </a:rPr>
-              <a:t>to use or give work</a:t>
+              <a:t>give work to; use</a:t>
             </a:r>
             <a:endParaRPr lang="en-US" sz="2000" dirty="0"/>
           </a:p>
@@ -38901,7 +40438,7 @@
                 <a:ea typeface="Calibri" pitchFamily="34" charset="-122"/>
                 <a:cs typeface="Calibri" pitchFamily="34" charset="-120"/>
               </a:rPr>
-              <a:t>Origin: Latin: implicare</a:t>
+              <a:t>Origin: Core English root</a:t>
             </a:r>
             <a:endParaRPr lang="en-US" sz="1100" dirty="0"/>
           </a:p>
@@ -39072,7 +40609,7 @@
                 <a:ea typeface="Trebuchet MS" pitchFamily="34" charset="-122"/>
                 <a:cs typeface="Trebuchet MS" pitchFamily="34" charset="-120"/>
               </a:rPr>
-              <a:t>employed</a:t>
+              <a:t>employs</a:t>
             </a:r>
             <a:endParaRPr lang="en-US" sz="1300" dirty="0"/>
           </a:p>
@@ -39138,7 +40675,7 @@
                 <a:ea typeface="Trebuchet MS" pitchFamily="34" charset="-122"/>
                 <a:cs typeface="Trebuchet MS" pitchFamily="34" charset="-120"/>
               </a:rPr>
-              <a:t>employer</a:t>
+              <a:t>employed</a:t>
             </a:r>
             <a:endParaRPr lang="en-US" sz="1300" dirty="0"/>
           </a:p>
@@ -39204,7 +40741,7 @@
                 <a:ea typeface="Trebuchet MS" pitchFamily="34" charset="-122"/>
                 <a:cs typeface="Trebuchet MS" pitchFamily="34" charset="-120"/>
               </a:rPr>
-              <a:t>employee</a:t>
+              <a:t>employer</a:t>
             </a:r>
             <a:endParaRPr lang="en-US" sz="1300" dirty="0"/>
           </a:p>
@@ -39270,7 +40807,7 @@
                 <a:ea typeface="Trebuchet MS" pitchFamily="34" charset="-122"/>
                 <a:cs typeface="Trebuchet MS" pitchFamily="34" charset="-120"/>
               </a:rPr>
-              <a:t>employment</a:t>
+              <a:t>reemploy</a:t>
             </a:r>
             <a:endParaRPr lang="en-US" sz="1300" dirty="0"/>
           </a:p>
@@ -39336,7 +40873,7 @@
                 <a:ea typeface="Trebuchet MS" pitchFamily="34" charset="-122"/>
                 <a:cs typeface="Trebuchet MS" pitchFamily="34" charset="-120"/>
               </a:rPr>
-              <a:t>unemployed</a:t>
+              <a:t>employers</a:t>
             </a:r>
             <a:endParaRPr lang="en-US" sz="1300" dirty="0"/>
           </a:p>
@@ -39402,7 +40939,7 @@
                 <a:ea typeface="Trebuchet MS" pitchFamily="34" charset="-122"/>
                 <a:cs typeface="Trebuchet MS" pitchFamily="34" charset="-120"/>
               </a:rPr>
-              <a:t>unemployment</a:t>
+              <a:t>employing</a:t>
             </a:r>
             <a:endParaRPr lang="en-US" sz="1300" dirty="0"/>
           </a:p>
@@ -39694,7 +41231,7 @@
                 <a:ea typeface="Calibri" pitchFamily="34" charset="-122"/>
                 <a:cs typeface="Calibri" pitchFamily="34" charset="-120"/>
               </a:rPr>
-              <a:t>Word Labs  •  wordlabs.app  •  Root: 'employ' = to use or give work</a:t>
+              <a:t>Word Labs  •  wordlabs.app  •  Root: 'employ' = give work to; use</a:t>
             </a:r>
             <a:endParaRPr lang="en-US" sz="800" dirty="0"/>
           </a:p>
@@ -39995,7 +41532,7 @@
                 <a:ea typeface="Trebuchet MS" pitchFamily="34" charset="-122"/>
                 <a:cs typeface="Trebuchet MS" pitchFamily="34" charset="-120"/>
               </a:rPr>
-              <a:t>un-</a:t>
+              <a:t>re-</a:t>
             </a:r>
             <a:endParaRPr lang="en-US" sz="1300" dirty="0"/>
           </a:p>
@@ -40123,7 +41660,7 @@
                 <a:ea typeface="Trebuchet MS" pitchFamily="34" charset="-122"/>
                 <a:cs typeface="Trebuchet MS" pitchFamily="34" charset="-120"/>
               </a:rPr>
-              <a:t>-ed</a:t>
+              <a:t>-able</a:t>
             </a:r>
             <a:endParaRPr lang="en-US" sz="1300" dirty="0"/>
           </a:p>
@@ -40187,7 +41724,7 @@
                 <a:ea typeface="Trebuchet MS" pitchFamily="34" charset="-122"/>
                 <a:cs typeface="Trebuchet MS" pitchFamily="34" charset="-120"/>
               </a:rPr>
-              <a:t>re-</a:t>
+              <a:t>un-</a:t>
             </a:r>
             <a:endParaRPr lang="en-US" sz="1300" dirty="0"/>
           </a:p>
@@ -40276,7 +41813,7 @@
                 <a:ea typeface="Trebuchet MS" pitchFamily="34" charset="-122"/>
                 <a:cs typeface="Trebuchet MS" pitchFamily="34" charset="-120"/>
               </a:rPr>
-              <a:t>-er</a:t>
+              <a:t>-ed</a:t>
             </a:r>
             <a:endParaRPr lang="en-US" sz="1300" dirty="0"/>
           </a:p>
@@ -40297,7 +41834,7 @@
             <a:avLst/>
           </a:prstGeom>
           <a:solidFill>
-            <a:srgbClr val="DDD6FE"/>
+            <a:srgbClr val="F8FAFC"/>
           </a:solidFill>
           <a:ln w="12700">
             <a:solidFill>
@@ -40309,18 +41846,68 @@
       </p:sp>
       <p:sp>
         <p:nvSpPr>
-          <p:cNvPr id="29" name="Text 27"/>
-          <p:cNvSpPr/>
-          <p:nvPr/>
-        </p:nvSpPr>
-        <p:spPr>
-          <a:xfrm>
-            <a:off x="640080" y="2670048"/>
+          <p:cNvPr id="29" name="Shape 27"/>
+          <p:cNvSpPr/>
+          <p:nvPr/>
+        </p:nvSpPr>
+        <p:spPr>
+          <a:xfrm>
+            <a:off x="3291840" y="2670048"/>
+            <a:ext cx="1645920" cy="420624"/>
+          </a:xfrm>
+          <a:prstGeom prst="rect">
+            <a:avLst/>
+          </a:prstGeom>
+          <a:solidFill>
+            <a:srgbClr val="F8FAFC"/>
+          </a:solidFill>
+          <a:ln w="12700">
+            <a:solidFill>
+              <a:srgbClr val="E5E7EB"/>
+            </a:solidFill>
+            <a:prstDash val="solid"/>
+          </a:ln>
+        </p:spPr>
+      </p:sp>
+      <p:sp>
+        <p:nvSpPr>
+          <p:cNvPr id="30" name="Shape 28"/>
+          <p:cNvSpPr/>
+          <p:nvPr/>
+        </p:nvSpPr>
+        <p:spPr>
+          <a:xfrm>
+            <a:off x="5943600" y="2670048"/>
             <a:ext cx="1463040" cy="420624"/>
           </a:xfrm>
           <a:prstGeom prst="rect">
             <a:avLst/>
           </a:prstGeom>
+          <a:solidFill>
+            <a:srgbClr val="FCE7F3"/>
+          </a:solidFill>
+          <a:ln w="12700">
+            <a:solidFill>
+              <a:srgbClr val="E5E7EB"/>
+            </a:solidFill>
+            <a:prstDash val="solid"/>
+          </a:ln>
+        </p:spPr>
+      </p:sp>
+      <p:sp>
+        <p:nvSpPr>
+          <p:cNvPr id="31" name="Text 29"/>
+          <p:cNvSpPr/>
+          <p:nvPr/>
+        </p:nvSpPr>
+        <p:spPr>
+          <a:xfrm>
+            <a:off x="5943600" y="2670048"/>
+            <a:ext cx="1463040" cy="420624"/>
+          </a:xfrm>
+          <a:prstGeom prst="rect">
+            <a:avLst/>
+          </a:prstGeom>
           <a:noFill/>
           <a:ln/>
         </p:spPr>
@@ -40334,13 +41921,13 @@
             <a:r>
               <a:rPr lang="en-US" sz="1300" b="1" dirty="0">
                 <a:solidFill>
-                  <a:srgbClr val="4C1D95"/>
+                  <a:srgbClr val="9D174D"/>
                 </a:solidFill>
                 <a:latin typeface="Trebuchet MS" pitchFamily="34" charset="0"/>
                 <a:ea typeface="Trebuchet MS" pitchFamily="34" charset="-122"/>
                 <a:cs typeface="Trebuchet MS" pitchFamily="34" charset="-120"/>
               </a:rPr>
-              <a:t>self-</a:t>
+              <a:t>-ee</a:t>
             </a:r>
             <a:endParaRPr lang="en-US" sz="1300" dirty="0"/>
           </a:p>
@@ -40348,20 +41935,45 @@
       </p:sp>
       <p:sp>
         <p:nvSpPr>
-          <p:cNvPr id="30" name="Shape 28"/>
-          <p:cNvSpPr/>
-          <p:nvPr/>
-        </p:nvSpPr>
-        <p:spPr>
-          <a:xfrm>
-            <a:off x="3291840" y="2670048"/>
+          <p:cNvPr id="32" name="Shape 30"/>
+          <p:cNvSpPr/>
+          <p:nvPr/>
+        </p:nvSpPr>
+        <p:spPr>
+          <a:xfrm>
+            <a:off x="640080" y="3127248"/>
+            <a:ext cx="1463040" cy="420624"/>
+          </a:xfrm>
+          <a:prstGeom prst="rect">
+            <a:avLst/>
+          </a:prstGeom>
+          <a:solidFill>
+            <a:srgbClr val="F1F5F9"/>
+          </a:solidFill>
+          <a:ln w="12700">
+            <a:solidFill>
+              <a:srgbClr val="E5E7EB"/>
+            </a:solidFill>
+            <a:prstDash val="solid"/>
+          </a:ln>
+        </p:spPr>
+      </p:sp>
+      <p:sp>
+        <p:nvSpPr>
+          <p:cNvPr id="33" name="Shape 31"/>
+          <p:cNvSpPr/>
+          <p:nvPr/>
+        </p:nvSpPr>
+        <p:spPr>
+          <a:xfrm>
+            <a:off x="3291840" y="3127248"/>
             <a:ext cx="1645920" cy="420624"/>
           </a:xfrm>
           <a:prstGeom prst="rect">
             <a:avLst/>
           </a:prstGeom>
           <a:solidFill>
-            <a:srgbClr val="F8FAFC"/>
+            <a:srgbClr val="F1F5F9"/>
           </a:solidFill>
           <a:ln w="12700">
             <a:solidFill>
@@ -40373,13 +41985,13 @@
       </p:sp>
       <p:sp>
         <p:nvSpPr>
-          <p:cNvPr id="31" name="Shape 29"/>
-          <p:cNvSpPr/>
-          <p:nvPr/>
-        </p:nvSpPr>
-        <p:spPr>
-          <a:xfrm>
-            <a:off x="5943600" y="2670048"/>
+          <p:cNvPr id="34" name="Shape 32"/>
+          <p:cNvSpPr/>
+          <p:nvPr/>
+        </p:nvSpPr>
+        <p:spPr>
+          <a:xfrm>
+            <a:off x="5943600" y="3127248"/>
             <a:ext cx="1463040" cy="420624"/>
           </a:xfrm>
           <a:prstGeom prst="rect">
@@ -40398,13 +42010,13 @@
       </p:sp>
       <p:sp>
         <p:nvSpPr>
-          <p:cNvPr id="32" name="Text 30"/>
-          <p:cNvSpPr/>
-          <p:nvPr/>
-        </p:nvSpPr>
-        <p:spPr>
-          <a:xfrm>
-            <a:off x="5943600" y="2670048"/>
+          <p:cNvPr id="35" name="Text 33"/>
+          <p:cNvSpPr/>
+          <p:nvPr/>
+        </p:nvSpPr>
+        <p:spPr>
+          <a:xfrm>
+            <a:off x="5943600" y="3127248"/>
             <a:ext cx="1463040" cy="420624"/>
           </a:xfrm>
           <a:prstGeom prst="rect">
@@ -40429,7 +42041,7 @@
                 <a:ea typeface="Trebuchet MS" pitchFamily="34" charset="-122"/>
                 <a:cs typeface="Trebuchet MS" pitchFamily="34" charset="-120"/>
               </a:rPr>
-              <a:t>-ees</a:t>
+              <a:t>-er</a:t>
             </a:r>
             <a:endParaRPr lang="en-US" sz="1300" dirty="0"/>
           </a:p>
@@ -40437,20 +42049,20 @@
       </p:sp>
       <p:sp>
         <p:nvSpPr>
-          <p:cNvPr id="33" name="Shape 31"/>
-          <p:cNvSpPr/>
-          <p:nvPr/>
-        </p:nvSpPr>
-        <p:spPr>
-          <a:xfrm>
-            <a:off x="640080" y="3127248"/>
+          <p:cNvPr id="36" name="Shape 34"/>
+          <p:cNvSpPr/>
+          <p:nvPr/>
+        </p:nvSpPr>
+        <p:spPr>
+          <a:xfrm>
+            <a:off x="640080" y="3584448"/>
             <a:ext cx="1463040" cy="420624"/>
           </a:xfrm>
           <a:prstGeom prst="rect">
             <a:avLst/>
           </a:prstGeom>
           <a:solidFill>
-            <a:srgbClr val="DDD6FE"/>
+            <a:srgbClr val="F8FAFC"/>
           </a:solidFill>
           <a:ln w="12700">
             <a:solidFill>
@@ -40462,18 +42074,68 @@
       </p:sp>
       <p:sp>
         <p:nvSpPr>
-          <p:cNvPr id="34" name="Text 32"/>
-          <p:cNvSpPr/>
-          <p:nvPr/>
-        </p:nvSpPr>
-        <p:spPr>
-          <a:xfrm>
-            <a:off x="640080" y="3127248"/>
+          <p:cNvPr id="37" name="Shape 35"/>
+          <p:cNvSpPr/>
+          <p:nvPr/>
+        </p:nvSpPr>
+        <p:spPr>
+          <a:xfrm>
+            <a:off x="3291840" y="3584448"/>
+            <a:ext cx="1645920" cy="420624"/>
+          </a:xfrm>
+          <a:prstGeom prst="rect">
+            <a:avLst/>
+          </a:prstGeom>
+          <a:solidFill>
+            <a:srgbClr val="F8FAFC"/>
+          </a:solidFill>
+          <a:ln w="12700">
+            <a:solidFill>
+              <a:srgbClr val="E5E7EB"/>
+            </a:solidFill>
+            <a:prstDash val="solid"/>
+          </a:ln>
+        </p:spPr>
+      </p:sp>
+      <p:sp>
+        <p:nvSpPr>
+          <p:cNvPr id="38" name="Shape 36"/>
+          <p:cNvSpPr/>
+          <p:nvPr/>
+        </p:nvSpPr>
+        <p:spPr>
+          <a:xfrm>
+            <a:off x="5943600" y="3584448"/>
             <a:ext cx="1463040" cy="420624"/>
           </a:xfrm>
           <a:prstGeom prst="rect">
             <a:avLst/>
           </a:prstGeom>
+          <a:solidFill>
+            <a:srgbClr val="FCE7F3"/>
+          </a:solidFill>
+          <a:ln w="12700">
+            <a:solidFill>
+              <a:srgbClr val="E5E7EB"/>
+            </a:solidFill>
+            <a:prstDash val="solid"/>
+          </a:ln>
+        </p:spPr>
+      </p:sp>
+      <p:sp>
+        <p:nvSpPr>
+          <p:cNvPr id="39" name="Text 37"/>
+          <p:cNvSpPr/>
+          <p:nvPr/>
+        </p:nvSpPr>
+        <p:spPr>
+          <a:xfrm>
+            <a:off x="5943600" y="3584448"/>
+            <a:ext cx="1463040" cy="420624"/>
+          </a:xfrm>
+          <a:prstGeom prst="rect">
+            <a:avLst/>
+          </a:prstGeom>
           <a:noFill/>
           <a:ln/>
         </p:spPr>
@@ -40487,13 +42149,13 @@
             <a:r>
               <a:rPr lang="en-US" sz="1300" b="1" dirty="0">
                 <a:solidFill>
-                  <a:srgbClr val="4C1D95"/>
+                  <a:srgbClr val="9D174D"/>
                 </a:solidFill>
                 <a:latin typeface="Trebuchet MS" pitchFamily="34" charset="0"/>
                 <a:ea typeface="Trebuchet MS" pitchFamily="34" charset="-122"/>
                 <a:cs typeface="Trebuchet MS" pitchFamily="34" charset="-120"/>
               </a:rPr>
-              <a:t>over-</a:t>
+              <a:t>-ing</a:t>
             </a:r>
             <a:endParaRPr lang="en-US" sz="1300" dirty="0"/>
           </a:p>
@@ -40501,13 +42163,38 @@
       </p:sp>
       <p:sp>
         <p:nvSpPr>
-          <p:cNvPr id="35" name="Shape 33"/>
-          <p:cNvSpPr/>
-          <p:nvPr/>
-        </p:nvSpPr>
-        <p:spPr>
-          <a:xfrm>
-            <a:off x="3291840" y="3127248"/>
+          <p:cNvPr id="40" name="Shape 38"/>
+          <p:cNvSpPr/>
+          <p:nvPr/>
+        </p:nvSpPr>
+        <p:spPr>
+          <a:xfrm>
+            <a:off x="640080" y="4041648"/>
+            <a:ext cx="1463040" cy="420624"/>
+          </a:xfrm>
+          <a:prstGeom prst="rect">
+            <a:avLst/>
+          </a:prstGeom>
+          <a:solidFill>
+            <a:srgbClr val="F1F5F9"/>
+          </a:solidFill>
+          <a:ln w="12700">
+            <a:solidFill>
+              <a:srgbClr val="E5E7EB"/>
+            </a:solidFill>
+            <a:prstDash val="solid"/>
+          </a:ln>
+        </p:spPr>
+      </p:sp>
+      <p:sp>
+        <p:nvSpPr>
+          <p:cNvPr id="41" name="Shape 39"/>
+          <p:cNvSpPr/>
+          <p:nvPr/>
+        </p:nvSpPr>
+        <p:spPr>
+          <a:xfrm>
+            <a:off x="3291840" y="4041648"/>
             <a:ext cx="1645920" cy="420624"/>
           </a:xfrm>
           <a:prstGeom prst="rect">
@@ -40526,13 +42213,13 @@
       </p:sp>
       <p:sp>
         <p:nvSpPr>
-          <p:cNvPr id="36" name="Shape 34"/>
-          <p:cNvSpPr/>
-          <p:nvPr/>
-        </p:nvSpPr>
-        <p:spPr>
-          <a:xfrm>
-            <a:off x="5943600" y="3127248"/>
+          <p:cNvPr id="42" name="Shape 40"/>
+          <p:cNvSpPr/>
+          <p:nvPr/>
+        </p:nvSpPr>
+        <p:spPr>
+          <a:xfrm>
+            <a:off x="5943600" y="4041648"/>
             <a:ext cx="1463040" cy="420624"/>
           </a:xfrm>
           <a:prstGeom prst="rect">
@@ -40551,13 +42238,13 @@
       </p:sp>
       <p:sp>
         <p:nvSpPr>
-          <p:cNvPr id="37" name="Text 35"/>
-          <p:cNvSpPr/>
-          <p:nvPr/>
-        </p:nvSpPr>
-        <p:spPr>
-          <a:xfrm>
-            <a:off x="5943600" y="3127248"/>
+          <p:cNvPr id="43" name="Text 41"/>
+          <p:cNvSpPr/>
+          <p:nvPr/>
+        </p:nvSpPr>
+        <p:spPr>
+          <a:xfrm>
+            <a:off x="5943600" y="4041648"/>
             <a:ext cx="1463040" cy="420624"/>
           </a:xfrm>
           <a:prstGeom prst="rect">
@@ -40590,166 +42277,13 @@
       </p:sp>
       <p:sp>
         <p:nvSpPr>
-          <p:cNvPr id="38" name="Shape 36"/>
-          <p:cNvSpPr/>
-          <p:nvPr/>
-        </p:nvSpPr>
-        <p:spPr>
-          <a:xfrm>
-            <a:off x="640080" y="3584448"/>
-            <a:ext cx="1463040" cy="420624"/>
-          </a:xfrm>
-          <a:prstGeom prst="rect">
-            <a:avLst/>
-          </a:prstGeom>
-          <a:solidFill>
-            <a:srgbClr val="DDD6FE"/>
-          </a:solidFill>
-          <a:ln w="12700">
-            <a:solidFill>
-              <a:srgbClr val="E5E7EB"/>
-            </a:solidFill>
-            <a:prstDash val="solid"/>
-          </a:ln>
-        </p:spPr>
-      </p:sp>
-      <p:sp>
-        <p:nvSpPr>
-          <p:cNvPr id="39" name="Text 37"/>
-          <p:cNvSpPr/>
-          <p:nvPr/>
-        </p:nvSpPr>
-        <p:spPr>
-          <a:xfrm>
-            <a:off x="640080" y="3584448"/>
-            <a:ext cx="1463040" cy="420624"/>
-          </a:xfrm>
-          <a:prstGeom prst="rect">
-            <a:avLst/>
-          </a:prstGeom>
-          <a:noFill/>
-          <a:ln/>
-        </p:spPr>
-        <p:txBody>
-          <a:bodyPr wrap="square" lIns="0" tIns="0" rIns="0" bIns="0" rtlCol="0" anchor="ctr"/>
-          <a:lstStyle/>
-          <a:p>
-            <a:pPr algn="ctr" indent="0" marL="0">
-              <a:buNone/>
-            </a:pPr>
-            <a:r>
-              <a:rPr lang="en-US" sz="1300" b="1" dirty="0">
-                <a:solidFill>
-                  <a:srgbClr val="4C1D95"/>
-                </a:solidFill>
-                <a:latin typeface="Trebuchet MS" pitchFamily="34" charset="0"/>
-                <a:ea typeface="Trebuchet MS" pitchFamily="34" charset="-122"/>
-                <a:cs typeface="Trebuchet MS" pitchFamily="34" charset="-120"/>
-              </a:rPr>
-              <a:t>under-</a:t>
-            </a:r>
-            <a:endParaRPr lang="en-US" sz="1300" dirty="0"/>
-          </a:p>
-        </p:txBody>
-      </p:sp>
-      <p:sp>
-        <p:nvSpPr>
-          <p:cNvPr id="40" name="Shape 38"/>
-          <p:cNvSpPr/>
-          <p:nvPr/>
-        </p:nvSpPr>
-        <p:spPr>
-          <a:xfrm>
-            <a:off x="3291840" y="3584448"/>
-            <a:ext cx="1645920" cy="420624"/>
-          </a:xfrm>
-          <a:prstGeom prst="rect">
-            <a:avLst/>
-          </a:prstGeom>
-          <a:solidFill>
-            <a:srgbClr val="F8FAFC"/>
-          </a:solidFill>
-          <a:ln w="12700">
-            <a:solidFill>
-              <a:srgbClr val="E5E7EB"/>
-            </a:solidFill>
-            <a:prstDash val="solid"/>
-          </a:ln>
-        </p:spPr>
-      </p:sp>
-      <p:sp>
-        <p:nvSpPr>
-          <p:cNvPr id="41" name="Shape 39"/>
-          <p:cNvSpPr/>
-          <p:nvPr/>
-        </p:nvSpPr>
-        <p:spPr>
-          <a:xfrm>
-            <a:off x="5943600" y="3584448"/>
-            <a:ext cx="1463040" cy="420624"/>
-          </a:xfrm>
-          <a:prstGeom prst="rect">
-            <a:avLst/>
-          </a:prstGeom>
-          <a:solidFill>
-            <a:srgbClr val="FCE7F3"/>
-          </a:solidFill>
-          <a:ln w="12700">
-            <a:solidFill>
-              <a:srgbClr val="E5E7EB"/>
-            </a:solidFill>
-            <a:prstDash val="solid"/>
-          </a:ln>
-        </p:spPr>
-      </p:sp>
-      <p:sp>
-        <p:nvSpPr>
-          <p:cNvPr id="42" name="Text 40"/>
-          <p:cNvSpPr/>
-          <p:nvPr/>
-        </p:nvSpPr>
-        <p:spPr>
-          <a:xfrm>
-            <a:off x="5943600" y="3584448"/>
-            <a:ext cx="1463040" cy="420624"/>
-          </a:xfrm>
-          <a:prstGeom prst="rect">
-            <a:avLst/>
-          </a:prstGeom>
-          <a:noFill/>
-          <a:ln/>
-        </p:spPr>
-        <p:txBody>
-          <a:bodyPr wrap="square" lIns="0" tIns="0" rIns="0" bIns="0" rtlCol="0" anchor="ctr"/>
-          <a:lstStyle/>
-          <a:p>
-            <a:pPr algn="ctr" indent="0" marL="0">
-              <a:buNone/>
-            </a:pPr>
-            <a:r>
-              <a:rPr lang="en-US" sz="1300" b="1" dirty="0">
-                <a:solidFill>
-                  <a:srgbClr val="9D174D"/>
-                </a:solidFill>
-                <a:latin typeface="Trebuchet MS" pitchFamily="34" charset="0"/>
-                <a:ea typeface="Trebuchet MS" pitchFamily="34" charset="-122"/>
-                <a:cs typeface="Trebuchet MS" pitchFamily="34" charset="-120"/>
-              </a:rPr>
-              <a:t>-ing</a:t>
-            </a:r>
-            <a:endParaRPr lang="en-US" sz="1300" dirty="0"/>
-          </a:p>
-        </p:txBody>
-      </p:sp>
-      <p:sp>
-        <p:nvSpPr>
-          <p:cNvPr id="43" name="Text 41"/>
-          <p:cNvSpPr/>
-          <p:nvPr/>
-        </p:nvSpPr>
-        <p:spPr>
-          <a:xfrm>
-            <a:off x="365760" y="4178808"/>
+          <p:cNvPr id="44" name="Text 42"/>
+          <p:cNvSpPr/>
+          <p:nvPr/>
+        </p:nvSpPr>
+        <p:spPr>
+          <a:xfrm>
+            <a:off x="365760" y="4636008"/>
             <a:ext cx="1097280" cy="420624"/>
           </a:xfrm>
           <a:prstGeom prst="rect">
@@ -40782,13 +42316,13 @@
       </p:sp>
       <p:sp>
         <p:nvSpPr>
-          <p:cNvPr id="44" name="Shape 42"/>
-          <p:cNvSpPr/>
-          <p:nvPr/>
-        </p:nvSpPr>
-        <p:spPr>
-          <a:xfrm>
-            <a:off x="1508760" y="4178808"/>
+          <p:cNvPr id="45" name="Shape 43"/>
+          <p:cNvSpPr/>
+          <p:nvPr/>
+        </p:nvSpPr>
+        <p:spPr>
+          <a:xfrm>
+            <a:off x="1508760" y="4636008"/>
             <a:ext cx="822960" cy="420624"/>
           </a:xfrm>
           <a:prstGeom prst="rect">
@@ -40816,13 +42350,13 @@
       </p:sp>
       <p:sp>
         <p:nvSpPr>
-          <p:cNvPr id="45" name="Text 43"/>
-          <p:cNvSpPr/>
-          <p:nvPr/>
-        </p:nvSpPr>
-        <p:spPr>
-          <a:xfrm>
-            <a:off x="1508760" y="4178808"/>
+          <p:cNvPr id="46" name="Text 44"/>
+          <p:cNvSpPr/>
+          <p:nvPr/>
+        </p:nvSpPr>
+        <p:spPr>
+          <a:xfrm>
+            <a:off x="1508760" y="4636008"/>
             <a:ext cx="822960" cy="420624"/>
           </a:xfrm>
           <a:prstGeom prst="rect">
@@ -40847,7 +42381,7 @@
                 <a:ea typeface="Trebuchet MS" pitchFamily="34" charset="-122"/>
                 <a:cs typeface="Trebuchet MS" pitchFamily="34" charset="-120"/>
               </a:rPr>
-              <a:t>un-</a:t>
+              <a:t>re-</a:t>
             </a:r>
             <a:endParaRPr lang="en-US" sz="1300" dirty="0"/>
           </a:p>
@@ -40855,13 +42389,13 @@
       </p:sp>
       <p:sp>
         <p:nvSpPr>
-          <p:cNvPr id="46" name="Text 44"/>
-          <p:cNvSpPr/>
-          <p:nvPr/>
-        </p:nvSpPr>
-        <p:spPr>
-          <a:xfrm>
-            <a:off x="2359152" y="4178808"/>
+          <p:cNvPr id="47" name="Text 45"/>
+          <p:cNvSpPr/>
+          <p:nvPr/>
+        </p:nvSpPr>
+        <p:spPr>
+          <a:xfrm>
+            <a:off x="2359152" y="4636008"/>
             <a:ext cx="320040" cy="420624"/>
           </a:xfrm>
           <a:prstGeom prst="rect">
@@ -40894,13 +42428,13 @@
       </p:sp>
       <p:sp>
         <p:nvSpPr>
-          <p:cNvPr id="47" name="Shape 45"/>
-          <p:cNvSpPr/>
-          <p:nvPr/>
-        </p:nvSpPr>
-        <p:spPr>
-          <a:xfrm>
-            <a:off x="2706624" y="4178808"/>
+          <p:cNvPr id="48" name="Shape 46"/>
+          <p:cNvSpPr/>
+          <p:nvPr/>
+        </p:nvSpPr>
+        <p:spPr>
+          <a:xfrm>
+            <a:off x="2706624" y="4636008"/>
             <a:ext cx="1536192" cy="420624"/>
           </a:xfrm>
           <a:prstGeom prst="rect">
@@ -40928,13 +42462,13 @@
       </p:sp>
       <p:sp>
         <p:nvSpPr>
-          <p:cNvPr id="48" name="Text 46"/>
-          <p:cNvSpPr/>
-          <p:nvPr/>
-        </p:nvSpPr>
-        <p:spPr>
-          <a:xfrm>
-            <a:off x="2706624" y="4178808"/>
+          <p:cNvPr id="49" name="Text 47"/>
+          <p:cNvSpPr/>
+          <p:nvPr/>
+        </p:nvSpPr>
+        <p:spPr>
+          <a:xfrm>
+            <a:off x="2706624" y="4636008"/>
             <a:ext cx="1536192" cy="420624"/>
           </a:xfrm>
           <a:prstGeom prst="rect">
@@ -40967,13 +42501,13 @@
       </p:sp>
       <p:sp>
         <p:nvSpPr>
-          <p:cNvPr id="49" name="Text 47"/>
-          <p:cNvSpPr/>
-          <p:nvPr/>
-        </p:nvSpPr>
-        <p:spPr>
-          <a:xfrm>
-            <a:off x="4270248" y="4178808"/>
+          <p:cNvPr id="50" name="Text 48"/>
+          <p:cNvSpPr/>
+          <p:nvPr/>
+        </p:nvSpPr>
+        <p:spPr>
+          <a:xfrm>
+            <a:off x="4270248" y="4636008"/>
             <a:ext cx="320040" cy="420624"/>
           </a:xfrm>
           <a:prstGeom prst="rect">
@@ -41006,14 +42540,14 @@
       </p:sp>
       <p:sp>
         <p:nvSpPr>
-          <p:cNvPr id="50" name="Shape 48"/>
-          <p:cNvSpPr/>
-          <p:nvPr/>
-        </p:nvSpPr>
-        <p:spPr>
-          <a:xfrm>
-            <a:off x="4617720" y="4178808"/>
-            <a:ext cx="822960" cy="420624"/>
+          <p:cNvPr id="51" name="Shape 49"/>
+          <p:cNvSpPr/>
+          <p:nvPr/>
+        </p:nvSpPr>
+        <p:spPr>
+          <a:xfrm>
+            <a:off x="4617720" y="4636008"/>
+            <a:ext cx="1097280" cy="420624"/>
           </a:xfrm>
           <a:prstGeom prst="rect">
             <a:avLst>
@@ -41040,14 +42574,14 @@
       </p:sp>
       <p:sp>
         <p:nvSpPr>
-          <p:cNvPr id="51" name="Text 49"/>
-          <p:cNvSpPr/>
-          <p:nvPr/>
-        </p:nvSpPr>
-        <p:spPr>
-          <a:xfrm>
-            <a:off x="4617720" y="4178808"/>
-            <a:ext cx="822960" cy="420624"/>
+          <p:cNvPr id="52" name="Text 50"/>
+          <p:cNvSpPr/>
+          <p:nvPr/>
+        </p:nvSpPr>
+        <p:spPr>
+          <a:xfrm>
+            <a:off x="4617720" y="4636008"/>
+            <a:ext cx="1097280" cy="420624"/>
           </a:xfrm>
           <a:prstGeom prst="rect">
             <a:avLst/>
@@ -41071,7 +42605,7 @@
                 <a:ea typeface="Trebuchet MS" pitchFamily="34" charset="-122"/>
                 <a:cs typeface="Trebuchet MS" pitchFamily="34" charset="-120"/>
               </a:rPr>
-              <a:t>-ed</a:t>
+              <a:t>-able</a:t>
             </a:r>
             <a:endParaRPr lang="en-US" sz="1300" dirty="0"/>
           </a:p>
@@ -41079,13 +42613,13 @@
       </p:sp>
       <p:sp>
         <p:nvSpPr>
-          <p:cNvPr id="52" name="Text 50"/>
-          <p:cNvSpPr/>
-          <p:nvPr/>
-        </p:nvSpPr>
-        <p:spPr>
-          <a:xfrm>
-            <a:off x="5513832" y="4178808"/>
+          <p:cNvPr id="53" name="Text 51"/>
+          <p:cNvSpPr/>
+          <p:nvPr/>
+        </p:nvSpPr>
+        <p:spPr>
+          <a:xfrm>
+            <a:off x="5788152" y="4636008"/>
             <a:ext cx="365760" cy="420624"/>
           </a:xfrm>
           <a:prstGeom prst="rect">
@@ -41118,13 +42652,13 @@
       </p:sp>
       <p:sp>
         <p:nvSpPr>
-          <p:cNvPr id="53" name="Shape 51"/>
-          <p:cNvSpPr/>
-          <p:nvPr/>
-        </p:nvSpPr>
-        <p:spPr>
-          <a:xfrm>
-            <a:off x="5925312" y="4178808"/>
+          <p:cNvPr id="54" name="Shape 52"/>
+          <p:cNvSpPr/>
+          <p:nvPr/>
+        </p:nvSpPr>
+        <p:spPr>
+          <a:xfrm>
+            <a:off x="6199632" y="4636008"/>
             <a:ext cx="2194560" cy="420624"/>
           </a:xfrm>
           <a:prstGeom prst="rect">
@@ -41145,13 +42679,13 @@
       </p:sp>
       <p:sp>
         <p:nvSpPr>
-          <p:cNvPr id="54" name="Text 52"/>
-          <p:cNvSpPr/>
-          <p:nvPr/>
-        </p:nvSpPr>
-        <p:spPr>
-          <a:xfrm>
-            <a:off x="5925312" y="4178808"/>
+          <p:cNvPr id="55" name="Text 53"/>
+          <p:cNvSpPr/>
+          <p:nvPr/>
+        </p:nvSpPr>
+        <p:spPr>
+          <a:xfrm>
+            <a:off x="6199632" y="4636008"/>
             <a:ext cx="2194560" cy="420624"/>
           </a:xfrm>
           <a:prstGeom prst="rect">
@@ -41468,7 +43002,7 @@
                 <a:ea typeface="Calibri" pitchFamily="34" charset="-122"/>
                 <a:cs typeface="Calibri" pitchFamily="34" charset="-120"/>
               </a:rPr>
-              <a:t>Word Labs  •  wordlabs.app  •  Root: 'employ' = to use or give work</a:t>
+              <a:t>Word Labs  •  wordlabs.app  •  Root: 'employ' = give work to; use</a:t>
             </a:r>
             <a:endParaRPr lang="en-US" sz="800" dirty="0"/>
           </a:p>
@@ -41646,7 +43180,7 @@
                 <a:ea typeface="Calibri" pitchFamily="34" charset="-122"/>
                 <a:cs typeface="Calibri" pitchFamily="34" charset="-120"/>
               </a:rPr>
-              <a:t>A person who works for someone else and gets paid.</a:t>
+              <a:t>a person or company that pays others to work for them</a:t>
             </a:r>
             <a:endParaRPr lang="en-US" sz="1200" dirty="0"/>
           </a:p>
@@ -41719,7 +43253,7 @@
                 <a:ea typeface="Trebuchet MS" pitchFamily="34" charset="-122"/>
                 <a:cs typeface="Trebuchet MS" pitchFamily="34" charset="-120"/>
               </a:rPr>
-              <a:t>employed</a:t>
+              <a:t>employs</a:t>
             </a:r>
             <a:endParaRPr lang="en-US" sz="1200" dirty="0"/>
           </a:p>
@@ -41785,7 +43319,7 @@
                 <a:ea typeface="Calibri" pitchFamily="34" charset="-122"/>
                 <a:cs typeface="Calibri" pitchFamily="34" charset="-120"/>
               </a:rPr>
-              <a:t>To give someone a job or to use something for a purpose.</a:t>
+              <a:t>to give someone a paid job, or to use something for a purpose</a:t>
             </a:r>
             <a:endParaRPr lang="en-US" sz="1200" dirty="0"/>
           </a:p>
@@ -41858,7 +43392,7 @@
                 <a:ea typeface="Trebuchet MS" pitchFamily="34" charset="-122"/>
                 <a:cs typeface="Trebuchet MS" pitchFamily="34" charset="-120"/>
               </a:rPr>
-              <a:t>employer</a:t>
+              <a:t>employed</a:t>
             </a:r>
             <a:endParaRPr lang="en-US" sz="1200" dirty="0"/>
           </a:p>
@@ -41924,7 +43458,7 @@
                 <a:ea typeface="Calibri" pitchFamily="34" charset="-122"/>
                 <a:cs typeface="Calibri" pitchFamily="34" charset="-120"/>
               </a:rPr>
-              <a:t>The situation of people not having jobs.</a:t>
+              <a:t>giving someone a paid job; using something for a purpose</a:t>
             </a:r>
             <a:endParaRPr lang="en-US" sz="1200" dirty="0"/>
           </a:p>
@@ -41997,7 +43531,7 @@
                 <a:ea typeface="Trebuchet MS" pitchFamily="34" charset="-122"/>
                 <a:cs typeface="Trebuchet MS" pitchFamily="34" charset="-120"/>
               </a:rPr>
-              <a:t>employee</a:t>
+              <a:t>employer</a:t>
             </a:r>
             <a:endParaRPr lang="en-US" sz="1200" dirty="0"/>
           </a:p>
@@ -42063,7 +43597,7 @@
                 <a:ea typeface="Calibri" pitchFamily="34" charset="-122"/>
                 <a:cs typeface="Calibri" pitchFamily="34" charset="-120"/>
               </a:rPr>
-              <a:t>A person or company that gives other people jobs.</a:t>
+              <a:t>having a paid job</a:t>
             </a:r>
             <a:endParaRPr lang="en-US" sz="1200" dirty="0"/>
           </a:p>
@@ -42136,7 +43670,7 @@
                 <a:ea typeface="Trebuchet MS" pitchFamily="34" charset="-122"/>
                 <a:cs typeface="Trebuchet MS" pitchFamily="34" charset="-120"/>
               </a:rPr>
-              <a:t>employment</a:t>
+              <a:t>reemploy</a:t>
             </a:r>
             <a:endParaRPr lang="en-US" sz="1200" dirty="0"/>
           </a:p>
@@ -42202,7 +43736,7 @@
                 <a:ea typeface="Calibri" pitchFamily="34" charset="-122"/>
                 <a:cs typeface="Calibri" pitchFamily="34" charset="-120"/>
               </a:rPr>
-              <a:t>Not having a job when you want one.</a:t>
+              <a:t>people or companies that pay others to work for them</a:t>
             </a:r>
             <a:endParaRPr lang="en-US" sz="1200" dirty="0"/>
           </a:p>
@@ -42275,7 +43809,7 @@
                 <a:ea typeface="Trebuchet MS" pitchFamily="34" charset="-122"/>
                 <a:cs typeface="Trebuchet MS" pitchFamily="34" charset="-120"/>
               </a:rPr>
-              <a:t>unemployed</a:t>
+              <a:t>employers</a:t>
             </a:r>
             <a:endParaRPr lang="en-US" sz="1200" dirty="0"/>
           </a:p>
@@ -42341,7 +43875,7 @@
                 <a:ea typeface="Calibri" pitchFamily="34" charset="-122"/>
                 <a:cs typeface="Calibri" pitchFamily="34" charset="-120"/>
               </a:rPr>
-              <a:t>The state of having a job or paid work.</a:t>
+              <a:t>to give someone a job again after they had stopped working</a:t>
             </a:r>
             <a:endParaRPr lang="en-US" sz="1200" dirty="0"/>
           </a:p>
@@ -42414,7 +43948,7 @@
                 <a:ea typeface="Trebuchet MS" pitchFamily="34" charset="-122"/>
                 <a:cs typeface="Trebuchet MS" pitchFamily="34" charset="-120"/>
               </a:rPr>
-              <a:t>unemployment</a:t>
+              <a:t>employing</a:t>
             </a:r>
             <a:endParaRPr lang="en-US" sz="1200" dirty="0"/>
           </a:p>
@@ -42480,7 +44014,7 @@
                 <a:ea typeface="Calibri" pitchFamily="34" charset="-122"/>
                 <a:cs typeface="Calibri" pitchFamily="34" charset="-120"/>
               </a:rPr>
-              <a:t>Having a job or being used for a task.</a:t>
+              <a:t>gives someone a paid job; uses something for a purpose</a:t>
             </a:r>
             <a:endParaRPr lang="en-US" sz="1200" dirty="0"/>
           </a:p>
@@ -42772,7 +44306,7 @@
                 <a:ea typeface="Calibri" pitchFamily="34" charset="-122"/>
                 <a:cs typeface="Calibri" pitchFamily="34" charset="-120"/>
               </a:rPr>
-              <a:t>Word Labs  •  wordlabs.app  •  Root: 'employ' = to use or give work</a:t>
+              <a:t>Word Labs  •  wordlabs.app  •  Root: 'employ' = give work to; use</a:t>
             </a:r>
             <a:endParaRPr lang="en-US" sz="800" dirty="0"/>
           </a:p>
@@ -42975,7 +44509,7 @@
                 <a:ea typeface="Calibri" pitchFamily="34" charset="-122"/>
                 <a:cs typeface="Calibri" pitchFamily="34" charset="-120"/>
               </a:rPr>
-              <a:t>The factory decided to employ twenty new workers before the busy season began.</a:t>
+              <a:t>The factory decided to employ ten new workers.</a:t>
             </a:r>
             <a:endParaRPr lang="en-US" sz="1500" dirty="0"/>
           </a:p>
@@ -43139,7 +44673,7 @@
                 <a:ea typeface="Calibri" pitchFamily="34" charset="-122"/>
                 <a:cs typeface="Calibri" pitchFamily="34" charset="-120"/>
               </a:rPr>
-              <a:t>After months of searching, she was thrilled to finally find employment at the local bakery.</a:t>
+              <a:t>The school employs three librarians.</a:t>
             </a:r>
             <a:endParaRPr lang="en-US" sz="1500" dirty="0"/>
           </a:p>
@@ -43303,7 +44837,7 @@
                 <a:ea typeface="Calibri" pitchFamily="34" charset="-122"/>
                 <a:cs typeface="Calibri" pitchFamily="34" charset="-120"/>
               </a:rPr>
-              <a:t>The number of unemployed people in the town dropped when the new shopping centre opened.</a:t>
+              <a:t>Her father is employed as a firefighter.</a:t>
             </a:r>
             <a:endParaRPr lang="en-US" sz="1500" dirty="0"/>
           </a:p>
